--- a/PTP_LAN8651.pptx
+++ b/PTP_LAN8651.pptx
@@ -41,6 +41,7 @@
     <p:sldId id="283" r:id="rId39"/>
     <p:sldId id="284" r:id="rId40"/>
     <p:sldId id="285" r:id="rId41"/>
+    <p:sldId id="286" r:id="rId42"/>
   </p:sldIdLst>
   <p:sldSz cx="12188825" cy="6858000"/>
   <p:notesSz cx="6858000" cy="9144000"/>
@@ -4582,7 +4583,7 @@
           <a:lstStyle/>
           <a:p>
             <a:r>
-              <a:t>PTP — Hardware Timestamping</a:t>
+              <a:t>Agenda</a:t>
             </a:r>
           </a:p>
         </p:txBody>
@@ -4605,70 +4606,91 @@
             <a:pPr/>
             <a:r>
               <a:rPr sz="1800"/>
-              <a:t>Where the timestamp is taken dictates the achievable accuracy</a:t>
+              <a:t>Part 0 — Overview &amp; standalone button-LED demo</a:t>
             </a:r>
           </a:p>
           <a:p>
             <a:pPr/>
             <a:r>
               <a:rPr sz="1800"/>
-              <a:t>Software timestamping (at socket layer):</a:t>
+              <a:t>Part 1 — Reproduce the demo on your own machine</a:t>
+            </a:r>
+          </a:p>
+          <a:p>
+            <a:pPr/>
+            <a:r>
+              <a:rPr sz="1800"/>
+              <a:t>Part 2 — PTP theory (IEEE 1588)</a:t>
             </a:r>
           </a:p>
           <a:p>
             <a:pPr lvl="1"/>
             <a:r>
               <a:rPr sz="1600"/>
-              <a:t>Jitter from kernel scheduling, stack queues, cache effects</a:t>
+              <a:t>Clock model, message exchange, timestamp accuracy, error sources</a:t>
+            </a:r>
+          </a:p>
+          <a:p>
+            <a:pPr/>
+            <a:r>
+              <a:rPr sz="1800"/>
+              <a:t>Part 3 — 10BASE-T1S context</a:t>
             </a:r>
           </a:p>
           <a:p>
             <a:pPr lvl="1"/>
             <a:r>
               <a:rPr sz="1600"/>
-              <a:t>Typical accuracy: tens of microseconds to low milliseconds</a:t>
+              <a:t>Single-pair multidrop PHY, PLCA, implications for PTP</a:t>
             </a:r>
           </a:p>
           <a:p>
             <a:pPr/>
             <a:r>
               <a:rPr sz="1800"/>
-              <a:t>Hardware timestamping (at PHY/MAC Start-of-Frame):</a:t>
+              <a:t>Part 4 — LAN8651 specifics</a:t>
             </a:r>
           </a:p>
           <a:p>
             <a:pPr lvl="1"/>
             <a:r>
               <a:rPr sz="1600"/>
-              <a:t>Timestamp latched on the SFD bit — ideal reference point</a:t>
+              <a:t>SPI MAC-PHY, timestamp engine, SFD-to-IRQ latency</a:t>
+            </a:r>
+          </a:p>
+          <a:p>
+            <a:pPr/>
+            <a:r>
+              <a:rPr sz="1800"/>
+              <a:t>Part 5 — Cyclic Fire application</a:t>
             </a:r>
           </a:p>
           <a:p>
             <a:pPr lvl="1"/>
             <a:r>
               <a:rPr sz="1600"/>
-              <a:t>Removes OS/driver jitter from the measurement</a:t>
+              <a:t>Concept, use cases, API and patterns</a:t>
+            </a:r>
+          </a:p>
+          <a:p>
+            <a:pPr/>
+            <a:r>
+              <a:rPr sz="1800"/>
+              <a:t>Part 6 — PTP_CLOCK for firmware event logging</a:t>
             </a:r>
           </a:p>
           <a:p>
             <a:pPr lvl="1"/>
             <a:r>
               <a:rPr sz="1600"/>
-              <a:t>Typical accuracy: tens of nanoseconds, limited by counter resolution</a:t>
+              <a:t>API, usage pattern, cross-board correlation</a:t>
             </a:r>
           </a:p>
           <a:p>
             <a:pPr/>
             <a:r>
               <a:rPr sz="1800"/>
-              <a:t>IEEE 1588 assumes path symmetry — PTP cannot measure asymmetry directly</a:t>
-            </a:r>
-          </a:p>
-          <a:p>
-            <a:pPr lvl="1"/>
-            <a:r>
-              <a:rPr sz="1600"/>
-              <a:t>Any TX/RX pipeline asymmetry becomes a constant offset → must be calibrated</a:t>
+              <a:t>Part 7 — Measurement results, open issues &amp; outlook</a:t>
             </a:r>
           </a:p>
         </p:txBody>
@@ -4707,7 +4729,7 @@
           <a:lstStyle/>
           <a:p>
             <a:r>
-              <a:t>PTP — Error Sources</a:t>
+              <a:t>PTP — Purpose &amp; Clock Model</a:t>
             </a:r>
           </a:p>
         </p:txBody>
@@ -4730,63 +4752,70 @@
             <a:pPr/>
             <a:r>
               <a:rPr sz="1800"/>
-              <a:t>Oscillator rate offset and wander (short- and long-term)</a:t>
+              <a:t>Goal: distribute a common notion of time across networked nodes</a:t>
+            </a:r>
+          </a:p>
+          <a:p>
+            <a:pPr lvl="1"/>
+            <a:r>
+              <a:rPr sz="1600"/>
+              <a:t>Target accuracy: sub-microsecond on a LAN — not reachable with NTP</a:t>
             </a:r>
           </a:p>
           <a:p>
             <a:pPr/>
             <a:r>
               <a:rPr sz="1800"/>
-              <a:t>Quantisation of hardware timestamps (timestamp counter tick period)</a:t>
+              <a:t>Roles within a PTP domain:</a:t>
+            </a:r>
+          </a:p>
+          <a:p>
+            <a:pPr lvl="1"/>
+            <a:r>
+              <a:rPr sz="1600"/>
+              <a:t>Grandmaster (GM) — reference clock, source of truth</a:t>
+            </a:r>
+          </a:p>
+          <a:p>
+            <a:pPr lvl="1"/>
+            <a:r>
+              <a:rPr sz="1600"/>
+              <a:t>Ordinary / Boundary clock — follower, steers local clock to GM</a:t>
+            </a:r>
+          </a:p>
+          <a:p>
+            <a:pPr lvl="1"/>
+            <a:r>
+              <a:rPr sz="1600"/>
+              <a:t>Transparent clock — forwards and corrects for residence time</a:t>
             </a:r>
           </a:p>
           <a:p>
             <a:pPr/>
             <a:r>
               <a:rPr sz="1800"/>
-              <a:t>Asymmetric TX vs RX datapath latency — not observable by PTP math</a:t>
+              <a:t>Best Master Clock Algorithm (BMCA) elects the GM automatically</a:t>
             </a:r>
           </a:p>
           <a:p>
             <a:pPr/>
             <a:r>
               <a:rPr sz="1800"/>
-              <a:t>Link-layer residence time variance (queuing, media access)</a:t>
+              <a:t>Local clock corrected in two dimensions:</a:t>
             </a:r>
           </a:p>
           <a:p>
             <a:pPr lvl="1"/>
             <a:r>
               <a:rPr sz="1600"/>
-              <a:t>Especially relevant on shared media such as 10BASE-T1S PLCA</a:t>
-            </a:r>
-          </a:p>
-          <a:p>
-            <a:pPr/>
-            <a:r>
-              <a:rPr sz="1800"/>
-              <a:t>Temperature drift of crystals → rate changes slowly over minutes/hours</a:t>
-            </a:r>
-          </a:p>
-          <a:p>
-            <a:pPr/>
-            <a:r>
-              <a:rPr sz="1800"/>
-              <a:t>Servo dynamics:</a:t>
+              <a:t>Phase — absolute offset to GM (ns)</a:t>
             </a:r>
           </a:p>
           <a:p>
             <a:pPr lvl="1"/>
             <a:r>
               <a:rPr sz="1600"/>
-              <a:t>Fast servo → tracks wander, amplifies measurement noise</a:t>
-            </a:r>
-          </a:p>
-          <a:p>
-            <a:pPr lvl="1"/>
-            <a:r>
-              <a:rPr sz="1600"/>
-              <a:t>Slow servo → quiet but sluggish against temperature transients</a:t>
+              <a:t>Rate — frequency ratio between local and GM oscillator (ppb)</a:t>
             </a:r>
           </a:p>
         </p:txBody>
@@ -4825,86 +4854,820 @@
           <a:lstStyle/>
           <a:p>
             <a:r>
-              <a:t>10BASE-T1S — PHY Overview</a:t>
-            </a:r>
-          </a:p>
-        </p:txBody>
-      </p:sp>
-      <p:sp>
-        <p:nvSpPr>
-          <p:cNvPr id="3" name="Content Placeholder 2"/>
-          <p:cNvSpPr>
-            <a:spLocks noGrp="1"/>
-          </p:cNvSpPr>
-          <p:nvPr>
-            <p:ph idx="13" sz="quarter"/>
-          </p:nvPr>
-        </p:nvSpPr>
-        <p:spPr/>
-        <p:txBody>
-          <a:bodyPr/>
-          <a:lstStyle/>
-          <a:p>
-            <a:pPr/>
-            <a:r>
-              <a:rPr sz="1800"/>
-              <a:t>10 Mbit/s full-duplex-equivalent over a single unshielded twisted pair</a:t>
-            </a:r>
-          </a:p>
-          <a:p>
-            <a:pPr/>
-            <a:r>
-              <a:rPr sz="1800"/>
-              <a:t>Two physical topologies supported:</a:t>
-            </a:r>
-          </a:p>
-          <a:p>
-            <a:pPr lvl="1"/>
-            <a:r>
-              <a:rPr sz="1600"/>
-              <a:t>Point-to-point — two nodes sharing one pair</a:t>
-            </a:r>
-          </a:p>
-          <a:p>
-            <a:pPr lvl="1"/>
-            <a:r>
-              <a:rPr sz="1600"/>
-              <a:t>Multidrop — many nodes on one shared segment (up to 8+ specified)</a:t>
-            </a:r>
-          </a:p>
-          <a:p>
-            <a:pPr/>
-            <a:r>
-              <a:rPr sz="1800"/>
-              <a:t>Targets automotive in-vehicle networking and industrial sensor aggregation</a:t>
-            </a:r>
-          </a:p>
-          <a:p>
-            <a:pPr/>
-            <a:r>
-              <a:rPr sz="1800"/>
-              <a:t>Cable reach up to ~25 m on a shared segment, low EMI, low cost wiring</a:t>
-            </a:r>
-          </a:p>
-          <a:p>
-            <a:pPr/>
-            <a:r>
-              <a:rPr sz="1800"/>
-              <a:t>Media access arbitration via PLCA (Physical Layer Collision Avoidance):</a:t>
-            </a:r>
-          </a:p>
-          <a:p>
-            <a:pPr lvl="1"/>
-            <a:r>
-              <a:rPr sz="1600"/>
-              <a:t>Time-slotted, deterministic round-robin transmit opportunities</a:t>
-            </a:r>
-          </a:p>
-          <a:p>
-            <a:pPr lvl="1"/>
-            <a:r>
-              <a:rPr sz="1600"/>
-              <a:t>No CSMA/CD backoff → bounded worst-case access latency</a:t>
+              <a:t>PTP — Message Exchange</a:t>
+            </a:r>
+          </a:p>
+        </p:txBody>
+      </p:sp>
+      <p:cxnSp>
+        <p:nvCxnSpPr>
+          <p:cNvPr id="3" name="Connector 2"/>
+          <p:cNvCxnSpPr/>
+          <p:nvPr/>
+        </p:nvCxnSpPr>
+        <p:spPr>
+          <a:xfrm>
+            <a:off x="2103120" y="1828800"/>
+            <a:ext cx="0" cy="3566160"/>
+          </a:xfrm>
+          <a:prstGeom prst="line">
+            <a:avLst/>
+          </a:prstGeom>
+          <a:ln w="38100">
+            <a:solidFill>
+              <a:srgbClr val="0B2E4F"/>
+            </a:solidFill>
+          </a:ln>
+        </p:spPr>
+        <p:style>
+          <a:lnRef idx="2">
+            <a:schemeClr val="accent1"/>
+          </a:lnRef>
+          <a:fillRef idx="0">
+            <a:schemeClr val="accent1"/>
+          </a:fillRef>
+          <a:effectRef idx="1">
+            <a:schemeClr val="accent1"/>
+          </a:effectRef>
+          <a:fontRef idx="minor">
+            <a:schemeClr val="tx1"/>
+          </a:fontRef>
+        </p:style>
+      </p:cxnSp>
+      <p:cxnSp>
+        <p:nvCxnSpPr>
+          <p:cNvPr id="4" name="Connector 3"/>
+          <p:cNvCxnSpPr/>
+          <p:nvPr/>
+        </p:nvCxnSpPr>
+        <p:spPr>
+          <a:xfrm>
+            <a:off x="9601200" y="1828800"/>
+            <a:ext cx="0" cy="3566160"/>
+          </a:xfrm>
+          <a:prstGeom prst="line">
+            <a:avLst/>
+          </a:prstGeom>
+          <a:ln w="38100">
+            <a:solidFill>
+              <a:srgbClr val="0B2E4F"/>
+            </a:solidFill>
+          </a:ln>
+        </p:spPr>
+        <p:style>
+          <a:lnRef idx="2">
+            <a:schemeClr val="accent1"/>
+          </a:lnRef>
+          <a:fillRef idx="0">
+            <a:schemeClr val="accent1"/>
+          </a:fillRef>
+          <a:effectRef idx="1">
+            <a:schemeClr val="accent1"/>
+          </a:effectRef>
+          <a:fontRef idx="minor">
+            <a:schemeClr val="tx1"/>
+          </a:fontRef>
+        </p:style>
+      </p:cxnSp>
+      <p:sp>
+        <p:nvSpPr>
+          <p:cNvPr id="5" name="Rounded Rectangle 4"/>
+          <p:cNvSpPr/>
+          <p:nvPr/>
+        </p:nvSpPr>
+        <p:spPr>
+          <a:xfrm>
+            <a:off x="1097279" y="1417320"/>
+            <a:ext cx="2011680" cy="365760"/>
+          </a:xfrm>
+          <a:prstGeom prst="roundRect">
+            <a:avLst/>
+          </a:prstGeom>
+          <a:solidFill>
+            <a:srgbClr val="0B2E4F"/>
+          </a:solidFill>
+          <a:ln>
+            <a:solidFill>
+              <a:srgbClr val="0B2E4F"/>
+            </a:solidFill>
+          </a:ln>
+        </p:spPr>
+        <p:style>
+          <a:lnRef idx="1">
+            <a:schemeClr val="accent1"/>
+          </a:lnRef>
+          <a:fillRef idx="3">
+            <a:schemeClr val="accent1"/>
+          </a:fillRef>
+          <a:effectRef idx="2">
+            <a:schemeClr val="accent1"/>
+          </a:effectRef>
+          <a:fontRef idx="minor">
+            <a:schemeClr val="lt1"/>
+          </a:fontRef>
+        </p:style>
+        <p:txBody>
+          <a:bodyPr rtlCol="0" anchor="ctr" wrap="square"/>
+          <a:lstStyle/>
+          <a:p>
+            <a:pPr algn="l"/>
+            <a:r>
+              <a:rPr sz="1400" b="1" i="0">
+                <a:solidFill>
+                  <a:srgbClr val="FFFFFF"/>
+                </a:solidFill>
+              </a:rPr>
+              <a:t>Grandmaster</a:t>
+            </a:r>
+          </a:p>
+        </p:txBody>
+      </p:sp>
+      <p:sp>
+        <p:nvSpPr>
+          <p:cNvPr id="6" name="Rounded Rectangle 5"/>
+          <p:cNvSpPr/>
+          <p:nvPr/>
+        </p:nvSpPr>
+        <p:spPr>
+          <a:xfrm>
+            <a:off x="8595360" y="1417320"/>
+            <a:ext cx="2011680" cy="365760"/>
+          </a:xfrm>
+          <a:prstGeom prst="roundRect">
+            <a:avLst/>
+          </a:prstGeom>
+          <a:solidFill>
+            <a:srgbClr val="0B2E4F"/>
+          </a:solidFill>
+          <a:ln>
+            <a:solidFill>
+              <a:srgbClr val="0B2E4F"/>
+            </a:solidFill>
+          </a:ln>
+        </p:spPr>
+        <p:style>
+          <a:lnRef idx="1">
+            <a:schemeClr val="accent1"/>
+          </a:lnRef>
+          <a:fillRef idx="3">
+            <a:schemeClr val="accent1"/>
+          </a:fillRef>
+          <a:effectRef idx="2">
+            <a:schemeClr val="accent1"/>
+          </a:effectRef>
+          <a:fontRef idx="minor">
+            <a:schemeClr val="lt1"/>
+          </a:fontRef>
+        </p:style>
+        <p:txBody>
+          <a:bodyPr rtlCol="0" anchor="ctr" wrap="square"/>
+          <a:lstStyle/>
+          <a:p>
+            <a:pPr algn="l"/>
+            <a:r>
+              <a:rPr sz="1400" b="1" i="0">
+                <a:solidFill>
+                  <a:srgbClr val="FFFFFF"/>
+                </a:solidFill>
+              </a:rPr>
+              <a:t>Follower</a:t>
+            </a:r>
+          </a:p>
+        </p:txBody>
+      </p:sp>
+      <p:cxnSp>
+        <p:nvCxnSpPr>
+          <p:cNvPr id="7" name="Connector 6"/>
+          <p:cNvCxnSpPr/>
+          <p:nvPr/>
+        </p:nvCxnSpPr>
+        <p:spPr>
+          <a:xfrm>
+            <a:off x="2103120" y="2194560"/>
+            <a:ext cx="7498080" cy="457200"/>
+          </a:xfrm>
+          <a:prstGeom prst="bentConnector3">
+            <a:avLst/>
+          </a:prstGeom>
+          <a:ln w="25400">
+            <a:solidFill>
+              <a:srgbClr val="1F77B4"/>
+            </a:solidFill>
+          </a:ln>
+        </p:spPr>
+        <p:style>
+          <a:lnRef idx="2">
+            <a:schemeClr val="accent1"/>
+          </a:lnRef>
+          <a:fillRef idx="0">
+            <a:schemeClr val="accent1"/>
+          </a:fillRef>
+          <a:effectRef idx="1">
+            <a:schemeClr val="accent1"/>
+          </a:effectRef>
+          <a:fontRef idx="minor">
+            <a:schemeClr val="tx1"/>
+          </a:fontRef>
+        </p:style>
+      </p:cxnSp>
+      <p:sp>
+        <p:nvSpPr>
+          <p:cNvPr id="8" name="TextBox 7"/>
+          <p:cNvSpPr txBox="1"/>
+          <p:nvPr/>
+        </p:nvSpPr>
+        <p:spPr>
+          <a:xfrm>
+            <a:off x="3657600" y="2148840"/>
+            <a:ext cx="4572000" cy="320040"/>
+          </a:xfrm>
+          <a:prstGeom prst="rect">
+            <a:avLst/>
+          </a:prstGeom>
+          <a:noFill/>
+        </p:spPr>
+        <p:txBody>
+          <a:bodyPr wrap="none">
+            <a:spAutoFit/>
+          </a:bodyPr>
+          <a:lstStyle/>
+          <a:p>
+            <a:r>
+              <a:rPr sz="1200" b="1" i="0">
+                <a:solidFill>
+                  <a:srgbClr val="1F77B4"/>
+                </a:solidFill>
+              </a:rPr>
+              <a:t>Sync   (t1 on TX, t2 on RX)</a:t>
+            </a:r>
+          </a:p>
+        </p:txBody>
+      </p:sp>
+      <p:cxnSp>
+        <p:nvCxnSpPr>
+          <p:cNvPr id="9" name="Connector 8"/>
+          <p:cNvCxnSpPr/>
+          <p:nvPr/>
+        </p:nvCxnSpPr>
+        <p:spPr>
+          <a:xfrm>
+            <a:off x="2103120" y="2926080"/>
+            <a:ext cx="7498080" cy="182880"/>
+          </a:xfrm>
+          <a:prstGeom prst="bentConnector3">
+            <a:avLst/>
+          </a:prstGeom>
+          <a:ln w="25400">
+            <a:solidFill>
+              <a:srgbClr val="1F77B4"/>
+            </a:solidFill>
+          </a:ln>
+        </p:spPr>
+        <p:style>
+          <a:lnRef idx="2">
+            <a:schemeClr val="accent1"/>
+          </a:lnRef>
+          <a:fillRef idx="0">
+            <a:schemeClr val="accent1"/>
+          </a:fillRef>
+          <a:effectRef idx="1">
+            <a:schemeClr val="accent1"/>
+          </a:effectRef>
+          <a:fontRef idx="minor">
+            <a:schemeClr val="tx1"/>
+          </a:fontRef>
+        </p:style>
+      </p:cxnSp>
+      <p:sp>
+        <p:nvSpPr>
+          <p:cNvPr id="10" name="TextBox 9"/>
+          <p:cNvSpPr txBox="1"/>
+          <p:nvPr/>
+        </p:nvSpPr>
+        <p:spPr>
+          <a:xfrm>
+            <a:off x="3657600" y="2788920"/>
+            <a:ext cx="4572000" cy="320040"/>
+          </a:xfrm>
+          <a:prstGeom prst="rect">
+            <a:avLst/>
+          </a:prstGeom>
+          <a:noFill/>
+        </p:spPr>
+        <p:txBody>
+          <a:bodyPr wrap="none">
+            <a:spAutoFit/>
+          </a:bodyPr>
+          <a:lstStyle/>
+          <a:p>
+            <a:r>
+              <a:rPr sz="1200" b="1" i="0">
+                <a:solidFill>
+                  <a:srgbClr val="1F77B4"/>
+                </a:solidFill>
+              </a:rPr>
+              <a:t>Follow_Up  (carries t1)</a:t>
+            </a:r>
+          </a:p>
+        </p:txBody>
+      </p:sp>
+      <p:cxnSp>
+        <p:nvCxnSpPr>
+          <p:cNvPr id="11" name="Connector 10"/>
+          <p:cNvCxnSpPr/>
+          <p:nvPr/>
+        </p:nvCxnSpPr>
+        <p:spPr>
+          <a:xfrm flipH="1">
+            <a:off x="2103120" y="3566160"/>
+            <a:ext cx="7498080" cy="365760"/>
+          </a:xfrm>
+          <a:prstGeom prst="bentConnector3">
+            <a:avLst/>
+          </a:prstGeom>
+          <a:ln w="25400">
+            <a:solidFill>
+              <a:srgbClr val="1F77B4"/>
+            </a:solidFill>
+          </a:ln>
+        </p:spPr>
+        <p:style>
+          <a:lnRef idx="2">
+            <a:schemeClr val="accent1"/>
+          </a:lnRef>
+          <a:fillRef idx="0">
+            <a:schemeClr val="accent1"/>
+          </a:fillRef>
+          <a:effectRef idx="1">
+            <a:schemeClr val="accent1"/>
+          </a:effectRef>
+          <a:fontRef idx="minor">
+            <a:schemeClr val="tx1"/>
+          </a:fontRef>
+        </p:style>
+      </p:cxnSp>
+      <p:sp>
+        <p:nvSpPr>
+          <p:cNvPr id="12" name="TextBox 11"/>
+          <p:cNvSpPr txBox="1"/>
+          <p:nvPr/>
+        </p:nvSpPr>
+        <p:spPr>
+          <a:xfrm>
+            <a:off x="3657600" y="3703320"/>
+            <a:ext cx="4572000" cy="320040"/>
+          </a:xfrm>
+          <a:prstGeom prst="rect">
+            <a:avLst/>
+          </a:prstGeom>
+          <a:noFill/>
+        </p:spPr>
+        <p:txBody>
+          <a:bodyPr wrap="none">
+            <a:spAutoFit/>
+          </a:bodyPr>
+          <a:lstStyle/>
+          <a:p>
+            <a:r>
+              <a:rPr sz="1200" b="1" i="0">
+                <a:solidFill>
+                  <a:srgbClr val="1F77B4"/>
+                </a:solidFill>
+              </a:rPr>
+              <a:t>Delay_Req   (t3 on TX, t4 on RX)</a:t>
+            </a:r>
+          </a:p>
+        </p:txBody>
+      </p:sp>
+      <p:cxnSp>
+        <p:nvCxnSpPr>
+          <p:cNvPr id="13" name="Connector 12"/>
+          <p:cNvCxnSpPr/>
+          <p:nvPr/>
+        </p:nvCxnSpPr>
+        <p:spPr>
+          <a:xfrm>
+            <a:off x="2103120" y="4297680"/>
+            <a:ext cx="7498080" cy="274320"/>
+          </a:xfrm>
+          <a:prstGeom prst="bentConnector3">
+            <a:avLst/>
+          </a:prstGeom>
+          <a:ln w="25400">
+            <a:solidFill>
+              <a:srgbClr val="1F77B4"/>
+            </a:solidFill>
+          </a:ln>
+        </p:spPr>
+        <p:style>
+          <a:lnRef idx="2">
+            <a:schemeClr val="accent1"/>
+          </a:lnRef>
+          <a:fillRef idx="0">
+            <a:schemeClr val="accent1"/>
+          </a:fillRef>
+          <a:effectRef idx="1">
+            <a:schemeClr val="accent1"/>
+          </a:effectRef>
+          <a:fontRef idx="minor">
+            <a:schemeClr val="tx1"/>
+          </a:fontRef>
+        </p:style>
+      </p:cxnSp>
+      <p:sp>
+        <p:nvSpPr>
+          <p:cNvPr id="14" name="TextBox 13"/>
+          <p:cNvSpPr txBox="1"/>
+          <p:nvPr/>
+        </p:nvSpPr>
+        <p:spPr>
+          <a:xfrm>
+            <a:off x="3657600" y="4160520"/>
+            <a:ext cx="4572000" cy="320040"/>
+          </a:xfrm>
+          <a:prstGeom prst="rect">
+            <a:avLst/>
+          </a:prstGeom>
+          <a:noFill/>
+        </p:spPr>
+        <p:txBody>
+          <a:bodyPr wrap="none">
+            <a:spAutoFit/>
+          </a:bodyPr>
+          <a:lstStyle/>
+          <a:p>
+            <a:r>
+              <a:rPr sz="1200" b="1" i="0">
+                <a:solidFill>
+                  <a:srgbClr val="1F77B4"/>
+                </a:solidFill>
+              </a:rPr>
+              <a:t>Delay_Resp  (carries t4)</a:t>
+            </a:r>
+          </a:p>
+        </p:txBody>
+      </p:sp>
+      <p:sp>
+        <p:nvSpPr>
+          <p:cNvPr id="15" name="Oval 14"/>
+          <p:cNvSpPr/>
+          <p:nvPr/>
+        </p:nvSpPr>
+        <p:spPr>
+          <a:xfrm>
+            <a:off x="2029967" y="2121408"/>
+            <a:ext cx="146304" cy="146304"/>
+          </a:xfrm>
+          <a:prstGeom prst="ellipse">
+            <a:avLst/>
+          </a:prstGeom>
+          <a:solidFill>
+            <a:srgbClr val="D62728"/>
+          </a:solidFill>
+          <a:ln>
+            <a:solidFill>
+              <a:srgbClr val="D62728"/>
+            </a:solidFill>
+          </a:ln>
+        </p:spPr>
+        <p:style>
+          <a:lnRef idx="1">
+            <a:schemeClr val="accent1"/>
+          </a:lnRef>
+          <a:fillRef idx="3">
+            <a:schemeClr val="accent1"/>
+          </a:fillRef>
+          <a:effectRef idx="2">
+            <a:schemeClr val="accent1"/>
+          </a:effectRef>
+          <a:fontRef idx="minor">
+            <a:schemeClr val="lt1"/>
+          </a:fontRef>
+        </p:style>
+        <p:txBody>
+          <a:bodyPr rtlCol="0" anchor="ctr"/>
+          <a:lstStyle/>
+          <a:p>
+            <a:pPr algn="ctr"/>
+          </a:p>
+        </p:txBody>
+      </p:sp>
+      <p:sp>
+        <p:nvSpPr>
+          <p:cNvPr id="16" name="TextBox 15"/>
+          <p:cNvSpPr txBox="1"/>
+          <p:nvPr/>
+        </p:nvSpPr>
+        <p:spPr>
+          <a:xfrm>
+            <a:off x="2240279" y="2029967"/>
+            <a:ext cx="548640" cy="274320"/>
+          </a:xfrm>
+          <a:prstGeom prst="rect">
+            <a:avLst/>
+          </a:prstGeom>
+          <a:noFill/>
+        </p:spPr>
+        <p:txBody>
+          <a:bodyPr wrap="none">
+            <a:spAutoFit/>
+          </a:bodyPr>
+          <a:lstStyle/>
+          <a:p>
+            <a:r>
+              <a:rPr sz="1200" b="1" i="0">
+                <a:solidFill>
+                  <a:srgbClr val="D62728"/>
+                </a:solidFill>
+              </a:rPr>
+              <a:t>t1</a:t>
+            </a:r>
+          </a:p>
+        </p:txBody>
+      </p:sp>
+      <p:sp>
+        <p:nvSpPr>
+          <p:cNvPr id="17" name="Oval 16"/>
+          <p:cNvSpPr/>
+          <p:nvPr/>
+        </p:nvSpPr>
+        <p:spPr>
+          <a:xfrm>
+            <a:off x="9528048" y="2578608"/>
+            <a:ext cx="146304" cy="146304"/>
+          </a:xfrm>
+          <a:prstGeom prst="ellipse">
+            <a:avLst/>
+          </a:prstGeom>
+          <a:solidFill>
+            <a:srgbClr val="D62728"/>
+          </a:solidFill>
+          <a:ln>
+            <a:solidFill>
+              <a:srgbClr val="D62728"/>
+            </a:solidFill>
+          </a:ln>
+        </p:spPr>
+        <p:style>
+          <a:lnRef idx="1">
+            <a:schemeClr val="accent1"/>
+          </a:lnRef>
+          <a:fillRef idx="3">
+            <a:schemeClr val="accent1"/>
+          </a:fillRef>
+          <a:effectRef idx="2">
+            <a:schemeClr val="accent1"/>
+          </a:effectRef>
+          <a:fontRef idx="minor">
+            <a:schemeClr val="lt1"/>
+          </a:fontRef>
+        </p:style>
+        <p:txBody>
+          <a:bodyPr rtlCol="0" anchor="ctr"/>
+          <a:lstStyle/>
+          <a:p>
+            <a:pPr algn="ctr"/>
+          </a:p>
+        </p:txBody>
+      </p:sp>
+      <p:sp>
+        <p:nvSpPr>
+          <p:cNvPr id="18" name="TextBox 17"/>
+          <p:cNvSpPr txBox="1"/>
+          <p:nvPr/>
+        </p:nvSpPr>
+        <p:spPr>
+          <a:xfrm>
+            <a:off x="9738360" y="2487168"/>
+            <a:ext cx="548640" cy="274320"/>
+          </a:xfrm>
+          <a:prstGeom prst="rect">
+            <a:avLst/>
+          </a:prstGeom>
+          <a:noFill/>
+        </p:spPr>
+        <p:txBody>
+          <a:bodyPr wrap="none">
+            <a:spAutoFit/>
+          </a:bodyPr>
+          <a:lstStyle/>
+          <a:p>
+            <a:r>
+              <a:rPr sz="1200" b="1" i="0">
+                <a:solidFill>
+                  <a:srgbClr val="D62728"/>
+                </a:solidFill>
+              </a:rPr>
+              <a:t>t2</a:t>
+            </a:r>
+          </a:p>
+        </p:txBody>
+      </p:sp>
+      <p:sp>
+        <p:nvSpPr>
+          <p:cNvPr id="19" name="Oval 18"/>
+          <p:cNvSpPr/>
+          <p:nvPr/>
+        </p:nvSpPr>
+        <p:spPr>
+          <a:xfrm>
+            <a:off x="9528048" y="3493008"/>
+            <a:ext cx="146304" cy="146304"/>
+          </a:xfrm>
+          <a:prstGeom prst="ellipse">
+            <a:avLst/>
+          </a:prstGeom>
+          <a:solidFill>
+            <a:srgbClr val="D62728"/>
+          </a:solidFill>
+          <a:ln>
+            <a:solidFill>
+              <a:srgbClr val="D62728"/>
+            </a:solidFill>
+          </a:ln>
+        </p:spPr>
+        <p:style>
+          <a:lnRef idx="1">
+            <a:schemeClr val="accent1"/>
+          </a:lnRef>
+          <a:fillRef idx="3">
+            <a:schemeClr val="accent1"/>
+          </a:fillRef>
+          <a:effectRef idx="2">
+            <a:schemeClr val="accent1"/>
+          </a:effectRef>
+          <a:fontRef idx="minor">
+            <a:schemeClr val="lt1"/>
+          </a:fontRef>
+        </p:style>
+        <p:txBody>
+          <a:bodyPr rtlCol="0" anchor="ctr"/>
+          <a:lstStyle/>
+          <a:p>
+            <a:pPr algn="ctr"/>
+          </a:p>
+        </p:txBody>
+      </p:sp>
+      <p:sp>
+        <p:nvSpPr>
+          <p:cNvPr id="20" name="TextBox 19"/>
+          <p:cNvSpPr txBox="1"/>
+          <p:nvPr/>
+        </p:nvSpPr>
+        <p:spPr>
+          <a:xfrm>
+            <a:off x="9738360" y="3401568"/>
+            <a:ext cx="548640" cy="274320"/>
+          </a:xfrm>
+          <a:prstGeom prst="rect">
+            <a:avLst/>
+          </a:prstGeom>
+          <a:noFill/>
+        </p:spPr>
+        <p:txBody>
+          <a:bodyPr wrap="none">
+            <a:spAutoFit/>
+          </a:bodyPr>
+          <a:lstStyle/>
+          <a:p>
+            <a:r>
+              <a:rPr sz="1200" b="1" i="0">
+                <a:solidFill>
+                  <a:srgbClr val="D62728"/>
+                </a:solidFill>
+              </a:rPr>
+              <a:t>t3</a:t>
+            </a:r>
+          </a:p>
+        </p:txBody>
+      </p:sp>
+      <p:sp>
+        <p:nvSpPr>
+          <p:cNvPr id="21" name="Oval 20"/>
+          <p:cNvSpPr/>
+          <p:nvPr/>
+        </p:nvSpPr>
+        <p:spPr>
+          <a:xfrm>
+            <a:off x="2029967" y="3858768"/>
+            <a:ext cx="146304" cy="146304"/>
+          </a:xfrm>
+          <a:prstGeom prst="ellipse">
+            <a:avLst/>
+          </a:prstGeom>
+          <a:solidFill>
+            <a:srgbClr val="D62728"/>
+          </a:solidFill>
+          <a:ln>
+            <a:solidFill>
+              <a:srgbClr val="D62728"/>
+            </a:solidFill>
+          </a:ln>
+        </p:spPr>
+        <p:style>
+          <a:lnRef idx="1">
+            <a:schemeClr val="accent1"/>
+          </a:lnRef>
+          <a:fillRef idx="3">
+            <a:schemeClr val="accent1"/>
+          </a:fillRef>
+          <a:effectRef idx="2">
+            <a:schemeClr val="accent1"/>
+          </a:effectRef>
+          <a:fontRef idx="minor">
+            <a:schemeClr val="lt1"/>
+          </a:fontRef>
+        </p:style>
+        <p:txBody>
+          <a:bodyPr rtlCol="0" anchor="ctr"/>
+          <a:lstStyle/>
+          <a:p>
+            <a:pPr algn="ctr"/>
+          </a:p>
+        </p:txBody>
+      </p:sp>
+      <p:sp>
+        <p:nvSpPr>
+          <p:cNvPr id="22" name="TextBox 21"/>
+          <p:cNvSpPr txBox="1"/>
+          <p:nvPr/>
+        </p:nvSpPr>
+        <p:spPr>
+          <a:xfrm>
+            <a:off x="2240279" y="3767328"/>
+            <a:ext cx="548640" cy="274320"/>
+          </a:xfrm>
+          <a:prstGeom prst="rect">
+            <a:avLst/>
+          </a:prstGeom>
+          <a:noFill/>
+        </p:spPr>
+        <p:txBody>
+          <a:bodyPr wrap="none">
+            <a:spAutoFit/>
+          </a:bodyPr>
+          <a:lstStyle/>
+          <a:p>
+            <a:r>
+              <a:rPr sz="1200" b="1" i="0">
+                <a:solidFill>
+                  <a:srgbClr val="D62728"/>
+                </a:solidFill>
+              </a:rPr>
+              <a:t>t4</a:t>
+            </a:r>
+          </a:p>
+        </p:txBody>
+      </p:sp>
+      <p:sp>
+        <p:nvSpPr>
+          <p:cNvPr id="23" name="Rounded Rectangle 22"/>
+          <p:cNvSpPr/>
+          <p:nvPr/>
+        </p:nvSpPr>
+        <p:spPr>
+          <a:xfrm>
+            <a:off x="548640" y="5486400"/>
+            <a:ext cx="10972800" cy="502920"/>
+          </a:xfrm>
+          <a:prstGeom prst="roundRect">
+            <a:avLst/>
+          </a:prstGeom>
+          <a:solidFill>
+            <a:srgbClr val="E8EEF5"/>
+          </a:solidFill>
+          <a:ln>
+            <a:solidFill>
+              <a:srgbClr val="E8EEF5"/>
+            </a:solidFill>
+          </a:ln>
+        </p:spPr>
+        <p:style>
+          <a:lnRef idx="1">
+            <a:schemeClr val="accent1"/>
+          </a:lnRef>
+          <a:fillRef idx="3">
+            <a:schemeClr val="accent1"/>
+          </a:fillRef>
+          <a:effectRef idx="2">
+            <a:schemeClr val="accent1"/>
+          </a:effectRef>
+          <a:fontRef idx="minor">
+            <a:schemeClr val="lt1"/>
+          </a:fontRef>
+        </p:style>
+        <p:txBody>
+          <a:bodyPr rtlCol="0" anchor="ctr" wrap="square"/>
+          <a:lstStyle/>
+          <a:p>
+            <a:pPr algn="l"/>
+            <a:r>
+              <a:rPr sz="1300" b="1" i="0">
+                <a:solidFill>
+                  <a:srgbClr val="0B2E4F"/>
+                </a:solidFill>
+              </a:rPr>
+              <a:t>mean_path_delay = ((t2 − t1) + (t4 − t3)) / 2       offset_from_master = (t2 − t1) − mean_path_delay</a:t>
             </a:r>
           </a:p>
         </p:txBody>
@@ -4943,7 +5706,7 @@
           <a:lstStyle/>
           <a:p>
             <a:r>
-              <a:t>10BASE-T1S — PTP Implications</a:t>
+              <a:t>PTP — Hardware Timestamping</a:t>
             </a:r>
           </a:p>
         </p:txBody>
@@ -4966,63 +5729,70 @@
             <a:pPr/>
             <a:r>
               <a:rPr sz="1800"/>
-              <a:t>PTP works over 10BASE-T1S the same way as over ordinary Ethernet</a:t>
+              <a:t>Where the timestamp is taken dictates the achievable accuracy</a:t>
             </a:r>
           </a:p>
           <a:p>
             <a:pPr/>
             <a:r>
               <a:rPr sz="1800"/>
-              <a:t>Favourable properties:</a:t>
+              <a:t>Software timestamping (at socket layer):</a:t>
             </a:r>
           </a:p>
           <a:p>
             <a:pPr lvl="1"/>
             <a:r>
               <a:rPr sz="1600"/>
-              <a:t>PLCA bounds media-access jitter — residence time is predictable</a:t>
+              <a:t>Jitter from kernel scheduling, stack queues, cache effects</a:t>
             </a:r>
           </a:p>
           <a:p>
             <a:pPr lvl="1"/>
             <a:r>
               <a:rPr sz="1600"/>
-              <a:t>Physical medium is symmetric by construction (same pair, same direction)</a:t>
+              <a:t>Typical accuracy: tens of microseconds to low milliseconds</a:t>
             </a:r>
           </a:p>
           <a:p>
             <a:pPr/>
             <a:r>
               <a:rPr sz="1800"/>
-              <a:t>Challenges:</a:t>
+              <a:t>Hardware timestamping (at PHY/MAC Start-of-Frame):</a:t>
             </a:r>
           </a:p>
           <a:p>
             <a:pPr lvl="1"/>
             <a:r>
               <a:rPr sz="1600"/>
-              <a:t>10 Mbit/s → one byte takes 800 ns, lower timestamp resolution than 1 GbE</a:t>
+              <a:t>Timestamp latched on the SFD bit — ideal reference point</a:t>
             </a:r>
           </a:p>
           <a:p>
             <a:pPr lvl="1"/>
             <a:r>
               <a:rPr sz="1600"/>
-              <a:t>PLCA slot wait adds variable queuing before TX</a:t>
-            </a:r>
-          </a:p>
-          <a:p>
-            <a:pPr lvl="2"/>
-            <a:r>
-              <a:rPr sz="1400"/>
-              <a:t>→ hardware SFD timestamping removes this from the PTP measurement</a:t>
+              <a:t>Removes OS/driver jitter from the measurement</a:t>
             </a:r>
           </a:p>
           <a:p>
             <a:pPr lvl="1"/>
             <a:r>
               <a:rPr sz="1600"/>
-              <a:t>MAC-PHY vendor implementations vary — must characterise the specific chip</a:t>
+              <a:t>Typical accuracy: tens of nanoseconds, limited by counter resolution</a:t>
+            </a:r>
+          </a:p>
+          <a:p>
+            <a:pPr/>
+            <a:r>
+              <a:rPr sz="1800"/>
+              <a:t>IEEE 1588 assumes path symmetry — PTP cannot measure asymmetry directly</a:t>
+            </a:r>
+          </a:p>
+          <a:p>
+            <a:pPr lvl="1"/>
+            <a:r>
+              <a:rPr sz="1600"/>
+              <a:t>Any TX/RX pipeline asymmetry becomes a constant offset → must be calibrated</a:t>
             </a:r>
           </a:p>
         </p:txBody>
@@ -5061,7 +5831,7 @@
           <a:lstStyle/>
           <a:p>
             <a:r>
-              <a:t>LAN8651 — Device Overview</a:t>
+              <a:t>PTP — Error Sources</a:t>
             </a:r>
           </a:p>
         </p:txBody>
@@ -5084,63 +5854,63 @@
             <a:pPr/>
             <a:r>
               <a:rPr sz="1800"/>
-              <a:t>Microchip 10BASE-T1S MAC-PHY with SPI host interface</a:t>
+              <a:t>Oscillator rate offset and wander (short- and long-term)</a:t>
             </a:r>
           </a:p>
           <a:p>
             <a:pPr/>
             <a:r>
               <a:rPr sz="1800"/>
-              <a:t>Integrated MAC + PHY in a single package</a:t>
+              <a:t>Quantisation of hardware timestamps (timestamp counter tick period)</a:t>
+            </a:r>
+          </a:p>
+          <a:p>
+            <a:pPr/>
+            <a:r>
+              <a:rPr sz="1800"/>
+              <a:t>Asymmetric TX vs RX datapath latency — not observable by PTP math</a:t>
+            </a:r>
+          </a:p>
+          <a:p>
+            <a:pPr/>
+            <a:r>
+              <a:rPr sz="1800"/>
+              <a:t>Link-layer residence time variance (queuing, media access)</a:t>
             </a:r>
           </a:p>
           <a:p>
             <a:pPr lvl="1"/>
             <a:r>
               <a:rPr sz="1600"/>
-              <a:t>MCU needs no on-chip Ethernet MAC</a:t>
+              <a:t>Especially relevant on shared media such as 10BASE-T1S PLCA</a:t>
+            </a:r>
+          </a:p>
+          <a:p>
+            <a:pPr/>
+            <a:r>
+              <a:rPr sz="1800"/>
+              <a:t>Temperature drift of crystals → rate changes slowly over minutes/hours</a:t>
+            </a:r>
+          </a:p>
+          <a:p>
+            <a:pPr/>
+            <a:r>
+              <a:rPr sz="1800"/>
+              <a:t>Servo dynamics:</a:t>
             </a:r>
           </a:p>
           <a:p>
             <a:pPr lvl="1"/>
             <a:r>
               <a:rPr sz="1600"/>
-              <a:t>OPEN Alliance TC6 SPI protocol — data chunks over SPI</a:t>
-            </a:r>
-          </a:p>
-          <a:p>
-            <a:pPr/>
-            <a:r>
-              <a:rPr sz="1800"/>
-              <a:t>Supports PLCA for multidrop topologies</a:t>
-            </a:r>
-          </a:p>
-          <a:p>
-            <a:pPr/>
-            <a:r>
-              <a:rPr sz="1800"/>
-              <a:t>Hardware timestamp engine latches TX-SFD and RX-SFD events</a:t>
+              <a:t>Fast servo → tracks wander, amplifies measurement noise</a:t>
             </a:r>
           </a:p>
           <a:p>
             <a:pPr lvl="1"/>
             <a:r>
               <a:rPr sz="1600"/>
-              <a:t>Raw material for PTP — accuracy depends on SFD latch point</a:t>
-            </a:r>
-          </a:p>
-          <a:p>
-            <a:pPr/>
-            <a:r>
-              <a:rPr sz="1800"/>
-              <a:t>Interrupt-driven host signalling via nIRQ</a:t>
-            </a:r>
-          </a:p>
-          <a:p>
-            <a:pPr/>
-            <a:r>
-              <a:rPr sz="1800"/>
-              <a:t>Pin-count and BOM optimised for automotive and industrial edge nodes</a:t>
+              <a:t>Slow servo → quiet but sluggish against temperature transients</a:t>
             </a:r>
           </a:p>
         </p:txBody>
@@ -5179,490 +5949,86 @@
           <a:lstStyle/>
           <a:p>
             <a:r>
-              <a:t>LAN8651 — Timestamping Signal Path</a:t>
-            </a:r>
-          </a:p>
-        </p:txBody>
-      </p:sp>
-      <p:sp>
-        <p:nvSpPr>
-          <p:cNvPr id="3" name="Rounded Rectangle 2"/>
-          <p:cNvSpPr/>
-          <p:nvPr/>
-        </p:nvSpPr>
-        <p:spPr>
-          <a:xfrm>
-            <a:off x="548640" y="1920240"/>
-            <a:ext cx="1920240" cy="914400"/>
-          </a:xfrm>
-          <a:prstGeom prst="roundRect">
-            <a:avLst/>
-          </a:prstGeom>
-          <a:solidFill>
-            <a:srgbClr val="2CA02C"/>
-          </a:solidFill>
-          <a:ln>
-            <a:solidFill>
-              <a:srgbClr val="2CA02C"/>
-            </a:solidFill>
-          </a:ln>
-        </p:spPr>
-        <p:style>
-          <a:lnRef idx="1">
-            <a:schemeClr val="accent1"/>
-          </a:lnRef>
-          <a:fillRef idx="3">
-            <a:schemeClr val="accent1"/>
-          </a:fillRef>
-          <a:effectRef idx="2">
-            <a:schemeClr val="accent1"/>
-          </a:effectRef>
-          <a:fontRef idx="minor">
-            <a:schemeClr val="lt1"/>
-          </a:fontRef>
-        </p:style>
-        <p:txBody>
-          <a:bodyPr rtlCol="0" anchor="ctr" wrap="square"/>
-          <a:lstStyle/>
-          <a:p>
-            <a:pPr algn="l"/>
-            <a:r>
-              <a:rPr sz="1300" b="1" i="0">
-                <a:solidFill>
-                  <a:srgbClr val="FFFFFF"/>
-                </a:solidFill>
-              </a:rPr>
-              <a:t>T1S wire
-SFD bit</a:t>
-            </a:r>
-          </a:p>
-        </p:txBody>
-      </p:sp>
-      <p:sp>
-        <p:nvSpPr>
-          <p:cNvPr id="4" name="Rounded Rectangle 3"/>
-          <p:cNvSpPr/>
-          <p:nvPr/>
-        </p:nvSpPr>
-        <p:spPr>
-          <a:xfrm>
-            <a:off x="2743200" y="1920240"/>
-            <a:ext cx="1920240" cy="914400"/>
-          </a:xfrm>
-          <a:prstGeom prst="roundRect">
-            <a:avLst/>
-          </a:prstGeom>
-          <a:solidFill>
-            <a:srgbClr val="1F77B4"/>
-          </a:solidFill>
-          <a:ln>
-            <a:solidFill>
-              <a:srgbClr val="1F77B4"/>
-            </a:solidFill>
-          </a:ln>
-        </p:spPr>
-        <p:style>
-          <a:lnRef idx="1">
-            <a:schemeClr val="accent1"/>
-          </a:lnRef>
-          <a:fillRef idx="3">
-            <a:schemeClr val="accent1"/>
-          </a:fillRef>
-          <a:effectRef idx="2">
-            <a:schemeClr val="accent1"/>
-          </a:effectRef>
-          <a:fontRef idx="minor">
-            <a:schemeClr val="lt1"/>
-          </a:fontRef>
-        </p:style>
-        <p:txBody>
-          <a:bodyPr rtlCol="0" anchor="ctr" wrap="square"/>
-          <a:lstStyle/>
-          <a:p>
-            <a:pPr algn="l"/>
-            <a:r>
-              <a:rPr sz="1300" b="1" i="0">
-                <a:solidFill>
-                  <a:srgbClr val="FFFFFF"/>
-                </a:solidFill>
-              </a:rPr>
-              <a:t>LAN8651 PHY
-SFD detect</a:t>
-            </a:r>
-          </a:p>
-        </p:txBody>
-      </p:sp>
-      <p:sp>
-        <p:nvSpPr>
-          <p:cNvPr id="5" name="Rounded Rectangle 4"/>
-          <p:cNvSpPr/>
-          <p:nvPr/>
-        </p:nvSpPr>
-        <p:spPr>
-          <a:xfrm>
-            <a:off x="4937760" y="1920240"/>
-            <a:ext cx="1920240" cy="914400"/>
-          </a:xfrm>
-          <a:prstGeom prst="roundRect">
-            <a:avLst/>
-          </a:prstGeom>
-          <a:solidFill>
-            <a:srgbClr val="1F77B4"/>
-          </a:solidFill>
-          <a:ln>
-            <a:solidFill>
-              <a:srgbClr val="1F77B4"/>
-            </a:solidFill>
-          </a:ln>
-        </p:spPr>
-        <p:style>
-          <a:lnRef idx="1">
-            <a:schemeClr val="accent1"/>
-          </a:lnRef>
-          <a:fillRef idx="3">
-            <a:schemeClr val="accent1"/>
-          </a:fillRef>
-          <a:effectRef idx="2">
-            <a:schemeClr val="accent1"/>
-          </a:effectRef>
-          <a:fontRef idx="minor">
-            <a:schemeClr val="lt1"/>
-          </a:fontRef>
-        </p:style>
-        <p:txBody>
-          <a:bodyPr rtlCol="0" anchor="ctr" wrap="square"/>
-          <a:lstStyle/>
-          <a:p>
-            <a:pPr algn="l"/>
-            <a:r>
-              <a:rPr sz="1300" b="1" i="0">
-                <a:solidFill>
-                  <a:srgbClr val="FFFFFF"/>
-                </a:solidFill>
-              </a:rPr>
-              <a:t>LAN8651 MAC
-timestamp latch</a:t>
-            </a:r>
-          </a:p>
-        </p:txBody>
-      </p:sp>
-      <p:sp>
-        <p:nvSpPr>
-          <p:cNvPr id="6" name="Rounded Rectangle 5"/>
-          <p:cNvSpPr/>
-          <p:nvPr/>
-        </p:nvSpPr>
-        <p:spPr>
-          <a:xfrm>
-            <a:off x="7132320" y="1920240"/>
-            <a:ext cx="1920240" cy="914400"/>
-          </a:xfrm>
-          <a:prstGeom prst="roundRect">
-            <a:avLst/>
-          </a:prstGeom>
-          <a:solidFill>
-            <a:srgbClr val="0B2E4F"/>
-          </a:solidFill>
-          <a:ln>
-            <a:solidFill>
-              <a:srgbClr val="0B2E4F"/>
-            </a:solidFill>
-          </a:ln>
-        </p:spPr>
-        <p:style>
-          <a:lnRef idx="1">
-            <a:schemeClr val="accent1"/>
-          </a:lnRef>
-          <a:fillRef idx="3">
-            <a:schemeClr val="accent1"/>
-          </a:fillRef>
-          <a:effectRef idx="2">
-            <a:schemeClr val="accent1"/>
-          </a:effectRef>
-          <a:fontRef idx="minor">
-            <a:schemeClr val="lt1"/>
-          </a:fontRef>
-        </p:style>
-        <p:txBody>
-          <a:bodyPr rtlCol="0" anchor="ctr" wrap="square"/>
-          <a:lstStyle/>
-          <a:p>
-            <a:pPr algn="l"/>
-            <a:r>
-              <a:rPr sz="1300" b="1" i="0">
-                <a:solidFill>
-                  <a:srgbClr val="FFFFFF"/>
-                </a:solidFill>
-              </a:rPr>
-              <a:t>SPI readout
-to MCU</a:t>
-            </a:r>
-          </a:p>
-        </p:txBody>
-      </p:sp>
-      <p:sp>
-        <p:nvSpPr>
-          <p:cNvPr id="7" name="Rounded Rectangle 6"/>
-          <p:cNvSpPr/>
-          <p:nvPr/>
-        </p:nvSpPr>
-        <p:spPr>
-          <a:xfrm>
-            <a:off x="9326880" y="1920240"/>
-            <a:ext cx="1920240" cy="914400"/>
-          </a:xfrm>
-          <a:prstGeom prst="roundRect">
-            <a:avLst/>
-          </a:prstGeom>
-          <a:solidFill>
-            <a:srgbClr val="D62728"/>
-          </a:solidFill>
-          <a:ln>
-            <a:solidFill>
-              <a:srgbClr val="D62728"/>
-            </a:solidFill>
-          </a:ln>
-        </p:spPr>
-        <p:style>
-          <a:lnRef idx="1">
-            <a:schemeClr val="accent1"/>
-          </a:lnRef>
-          <a:fillRef idx="3">
-            <a:schemeClr val="accent1"/>
-          </a:fillRef>
-          <a:effectRef idx="2">
-            <a:schemeClr val="accent1"/>
-          </a:effectRef>
-          <a:fontRef idx="minor">
-            <a:schemeClr val="lt1"/>
-          </a:fontRef>
-        </p:style>
-        <p:txBody>
-          <a:bodyPr rtlCol="0" anchor="ctr" wrap="square"/>
-          <a:lstStyle/>
-          <a:p>
-            <a:pPr algn="l"/>
-            <a:r>
-              <a:rPr sz="1300" b="1" i="0">
-                <a:solidFill>
-                  <a:srgbClr val="FFFFFF"/>
-                </a:solidFill>
-              </a:rPr>
-              <a:t>nIRQ
-to MCU</a:t>
-            </a:r>
-          </a:p>
-        </p:txBody>
-      </p:sp>
-      <p:cxnSp>
-        <p:nvCxnSpPr>
-          <p:cNvPr id="8" name="Connector 7"/>
-          <p:cNvCxnSpPr/>
-          <p:nvPr/>
-        </p:nvCxnSpPr>
-        <p:spPr>
-          <a:xfrm>
-            <a:off x="2468880" y="2377440"/>
-            <a:ext cx="274320" cy="0"/>
-          </a:xfrm>
-          <a:prstGeom prst="bentConnector3">
-            <a:avLst/>
-          </a:prstGeom>
-          <a:ln w="25400">
-            <a:solidFill>
-              <a:srgbClr val="555555"/>
-            </a:solidFill>
-          </a:ln>
-        </p:spPr>
-        <p:style>
-          <a:lnRef idx="2">
-            <a:schemeClr val="accent1"/>
-          </a:lnRef>
-          <a:fillRef idx="0">
-            <a:schemeClr val="accent1"/>
-          </a:fillRef>
-          <a:effectRef idx="1">
-            <a:schemeClr val="accent1"/>
-          </a:effectRef>
-          <a:fontRef idx="minor">
-            <a:schemeClr val="tx1"/>
-          </a:fontRef>
-        </p:style>
-      </p:cxnSp>
-      <p:cxnSp>
-        <p:nvCxnSpPr>
-          <p:cNvPr id="9" name="Connector 8"/>
-          <p:cNvCxnSpPr/>
-          <p:nvPr/>
-        </p:nvCxnSpPr>
-        <p:spPr>
-          <a:xfrm>
-            <a:off x="4663440" y="2377440"/>
-            <a:ext cx="274319" cy="0"/>
-          </a:xfrm>
-          <a:prstGeom prst="bentConnector3">
-            <a:avLst/>
-          </a:prstGeom>
-          <a:ln w="25400">
-            <a:solidFill>
-              <a:srgbClr val="555555"/>
-            </a:solidFill>
-          </a:ln>
-        </p:spPr>
-        <p:style>
-          <a:lnRef idx="2">
-            <a:schemeClr val="accent1"/>
-          </a:lnRef>
-          <a:fillRef idx="0">
-            <a:schemeClr val="accent1"/>
-          </a:fillRef>
-          <a:effectRef idx="1">
-            <a:schemeClr val="accent1"/>
-          </a:effectRef>
-          <a:fontRef idx="minor">
-            <a:schemeClr val="tx1"/>
-          </a:fontRef>
-        </p:style>
-      </p:cxnSp>
-      <p:cxnSp>
-        <p:nvCxnSpPr>
-          <p:cNvPr id="10" name="Connector 9"/>
-          <p:cNvCxnSpPr/>
-          <p:nvPr/>
-        </p:nvCxnSpPr>
-        <p:spPr>
-          <a:xfrm>
-            <a:off x="6858000" y="2377440"/>
-            <a:ext cx="274320" cy="0"/>
-          </a:xfrm>
-          <a:prstGeom prst="bentConnector3">
-            <a:avLst/>
-          </a:prstGeom>
-          <a:ln w="25400">
-            <a:solidFill>
-              <a:srgbClr val="555555"/>
-            </a:solidFill>
-          </a:ln>
-        </p:spPr>
-        <p:style>
-          <a:lnRef idx="2">
-            <a:schemeClr val="accent1"/>
-          </a:lnRef>
-          <a:fillRef idx="0">
-            <a:schemeClr val="accent1"/>
-          </a:fillRef>
-          <a:effectRef idx="1">
-            <a:schemeClr val="accent1"/>
-          </a:effectRef>
-          <a:fontRef idx="minor">
-            <a:schemeClr val="tx1"/>
-          </a:fontRef>
-        </p:style>
-      </p:cxnSp>
-      <p:cxnSp>
-        <p:nvCxnSpPr>
-          <p:cNvPr id="11" name="Connector 10"/>
-          <p:cNvCxnSpPr/>
-          <p:nvPr/>
-        </p:nvCxnSpPr>
-        <p:spPr>
-          <a:xfrm>
-            <a:off x="9052560" y="2377440"/>
-            <a:ext cx="274320" cy="0"/>
-          </a:xfrm>
-          <a:prstGeom prst="bentConnector3">
-            <a:avLst/>
-          </a:prstGeom>
-          <a:ln w="25400">
-            <a:solidFill>
-              <a:srgbClr val="555555"/>
-            </a:solidFill>
-          </a:ln>
-        </p:spPr>
-        <p:style>
-          <a:lnRef idx="2">
-            <a:schemeClr val="accent1"/>
-          </a:lnRef>
-          <a:fillRef idx="0">
-            <a:schemeClr val="accent1"/>
-          </a:fillRef>
-          <a:effectRef idx="1">
-            <a:schemeClr val="accent1"/>
-          </a:effectRef>
-          <a:fontRef idx="minor">
-            <a:schemeClr val="tx1"/>
-          </a:fontRef>
-        </p:style>
-      </p:cxnSp>
-      <p:sp>
-        <p:nvSpPr>
-          <p:cNvPr id="12" name="TextBox 11"/>
-          <p:cNvSpPr txBox="1"/>
-          <p:nvPr/>
-        </p:nvSpPr>
-        <p:spPr>
-          <a:xfrm>
-            <a:off x="548640" y="3108960"/>
-            <a:ext cx="10972800" cy="3200400"/>
-          </a:xfrm>
-          <a:prstGeom prst="rect">
-            <a:avLst/>
-          </a:prstGeom>
-          <a:noFill/>
-        </p:spPr>
-        <p:txBody>
-          <a:bodyPr wrap="square">
-            <a:spAutoFit/>
-          </a:bodyPr>
-          <a:lstStyle/>
-          <a:p>
-            <a:r>
-              <a:rPr sz="1600">
-                <a:solidFill>
-                  <a:srgbClr val="0B2E4F"/>
-                </a:solidFill>
-              </a:rPr>
-              <a:t>• TX path: MCU writes frame over SPI → MAC transmits → SFD on wire = t1 latched</a:t>
-            </a:r>
-          </a:p>
-          <a:p>
-            <a:r>
-              <a:rPr sz="1600">
-                <a:solidFill>
-                  <a:srgbClr val="0B2E4F"/>
-                </a:solidFill>
-              </a:rPr>
-              <a:t>• RX path: SFD on wire = t2 latched → MAC stores timestamp → nIRQ → MCU reads over SPI</a:t>
-            </a:r>
-          </a:p>
-          <a:p>
-            <a:r>
-              <a:rPr sz="1600">
-                <a:solidFill>
-                  <a:srgbClr val="0B2E4F"/>
-                </a:solidFill>
-              </a:rPr>
-              <a:t>• TX: ~800 µs from SFD-on-wire to the TX-timestamp-available nIRQ  (pipeline + SPI)</a:t>
-            </a:r>
-          </a:p>
-          <a:p>
-            <a:r>
-              <a:rPr sz="1600">
-                <a:solidFill>
-                  <a:srgbClr val="0B2E4F"/>
-                </a:solidFill>
-              </a:rPr>
-              <a:t>• RX: ~10 ms from SFD-on-wire to the RX-nIRQ   (LAN8651 behaviour)</a:t>
-            </a:r>
-          </a:p>
-          <a:p>
-            <a:r>
-              <a:rPr sz="1600">
-                <a:solidFill>
-                  <a:srgbClr val="0B2E4F"/>
-                </a:solidFill>
-              </a:rPr>
-              <a:t>• Both biases must be compensated outside PTP — protocol cannot see them</a:t>
+              <a:t>10BASE-T1S — PHY Overview</a:t>
+            </a:r>
+          </a:p>
+        </p:txBody>
+      </p:sp>
+      <p:sp>
+        <p:nvSpPr>
+          <p:cNvPr id="3" name="Content Placeholder 2"/>
+          <p:cNvSpPr>
+            <a:spLocks noGrp="1"/>
+          </p:cNvSpPr>
+          <p:nvPr>
+            <p:ph idx="13" sz="quarter"/>
+          </p:nvPr>
+        </p:nvSpPr>
+        <p:spPr/>
+        <p:txBody>
+          <a:bodyPr/>
+          <a:lstStyle/>
+          <a:p>
+            <a:pPr/>
+            <a:r>
+              <a:rPr sz="1800"/>
+              <a:t>10 Mbit/s full-duplex-equivalent over a single unshielded twisted pair</a:t>
+            </a:r>
+          </a:p>
+          <a:p>
+            <a:pPr/>
+            <a:r>
+              <a:rPr sz="1800"/>
+              <a:t>Two physical topologies supported:</a:t>
+            </a:r>
+          </a:p>
+          <a:p>
+            <a:pPr lvl="1"/>
+            <a:r>
+              <a:rPr sz="1600"/>
+              <a:t>Point-to-point — two nodes sharing one pair</a:t>
+            </a:r>
+          </a:p>
+          <a:p>
+            <a:pPr lvl="1"/>
+            <a:r>
+              <a:rPr sz="1600"/>
+              <a:t>Multidrop — many nodes on one shared segment (up to 8+ specified)</a:t>
+            </a:r>
+          </a:p>
+          <a:p>
+            <a:pPr/>
+            <a:r>
+              <a:rPr sz="1800"/>
+              <a:t>Targets automotive in-vehicle networking and industrial sensor aggregation</a:t>
+            </a:r>
+          </a:p>
+          <a:p>
+            <a:pPr/>
+            <a:r>
+              <a:rPr sz="1800"/>
+              <a:t>Cable reach up to ~25 m on a shared segment, low EMI, low cost wiring</a:t>
+            </a:r>
+          </a:p>
+          <a:p>
+            <a:pPr/>
+            <a:r>
+              <a:rPr sz="1800"/>
+              <a:t>Media access arbitration via PLCA (Physical Layer Collision Avoidance):</a:t>
+            </a:r>
+          </a:p>
+          <a:p>
+            <a:pPr lvl="1"/>
+            <a:r>
+              <a:rPr sz="1600"/>
+              <a:t>Time-slotted, deterministic round-robin transmit opportunities</a:t>
+            </a:r>
+          </a:p>
+          <a:p>
+            <a:pPr lvl="1"/>
+            <a:r>
+              <a:rPr sz="1600"/>
+              <a:t>No CSMA/CD backoff → bounded worst-case access latency</a:t>
             </a:r>
           </a:p>
         </p:txBody>
@@ -5701,7 +6067,7 @@
           <a:lstStyle/>
           <a:p>
             <a:r>
-              <a:t>LAN8651 — Calibrating the Biases</a:t>
+              <a:t>10BASE-T1S — PTP Implications</a:t>
             </a:r>
           </a:p>
         </p:txBody>
@@ -5724,63 +6090,63 @@
             <a:pPr/>
             <a:r>
               <a:rPr sz="1800"/>
-              <a:t>Project design: ISR-captured anchor pair  (wall-clock_ns, TC0_tick)</a:t>
+              <a:t>PTP works over 10BASE-T1S the same way as over ordinary Ethernet</a:t>
             </a:r>
           </a:p>
           <a:p>
             <a:pPr/>
             <a:r>
               <a:rPr sz="1800"/>
-              <a:t>Anchor offsets shift the wall-clock timestamp forward to the ISR moment:</a:t>
+              <a:t>Favourable properties:</a:t>
             </a:r>
           </a:p>
           <a:p>
             <a:pPr lvl="1"/>
             <a:r>
               <a:rPr sz="1600"/>
-              <a:t>PTP_GM_ANCHOR_OFFSET_NS  = 800 000 ns     (TX pipeline)</a:t>
+              <a:t>PLCA bounds media-access jitter — residence time is predictable</a:t>
             </a:r>
           </a:p>
           <a:p>
             <a:pPr lvl="1"/>
             <a:r>
               <a:rPr sz="1600"/>
-              <a:t>PTP_FOL_ANCHOR_OFFSET_NS = 10 000 000 ns  (RX pipeline)</a:t>
+              <a:t>Physical medium is symmetric by construction (same pair, same direction)</a:t>
             </a:r>
           </a:p>
           <a:p>
             <a:pPr/>
             <a:r>
               <a:rPr sz="1800"/>
-              <a:t>Calibration is empirical:</a:t>
+              <a:t>Challenges:</a:t>
             </a:r>
           </a:p>
           <a:p>
             <a:pPr lvl="1"/>
             <a:r>
               <a:rPr sz="1600"/>
-              <a:t>Measure cross-board edge delta D with cyclic_fire_hw_test.py</a:t>
+              <a:t>10 Mbit/s → one byte takes 800 ns, lower timestamp resolution than 1 GbE</a:t>
             </a:r>
           </a:p>
           <a:p>
             <a:pPr lvl="1"/>
             <a:r>
               <a:rPr sz="1600"/>
-              <a:t>new_offset = old_offset + D    (positive D means FOL lags GM)</a:t>
-            </a:r>
-          </a:p>
-          <a:p>
-            <a:pPr/>
-            <a:r>
-              <a:rPr sz="1800"/>
-              <a:t>Effect of the 10 ms compensation (commit deb2773):</a:t>
+              <a:t>PLCA slot wait adds variable queuing before TX</a:t>
+            </a:r>
+          </a:p>
+          <a:p>
+            <a:pPr lvl="2"/>
+            <a:r>
+              <a:rPr sz="1400"/>
+              <a:t>→ hardware SFD timestamping removes this from the PTP measurement</a:t>
             </a:r>
           </a:p>
           <a:p>
             <a:pPr lvl="1"/>
             <a:r>
               <a:rPr sz="1600"/>
-              <a:t>Cross-board median delta:  +10 005 µs  →  +10 µs</a:t>
+              <a:t>MAC-PHY vendor implementations vary — must characterise the specific chip</a:t>
             </a:r>
           </a:p>
         </p:txBody>
@@ -5819,361 +6185,86 @@
           <a:lstStyle/>
           <a:p>
             <a:r>
-              <a:t>Project Integration — Firmware Map</a:t>
-            </a:r>
-          </a:p>
-        </p:txBody>
-      </p:sp>
-      <p:sp>
-        <p:nvSpPr>
-          <p:cNvPr id="3" name="Rounded Rectangle 2"/>
-          <p:cNvSpPr/>
-          <p:nvPr/>
-        </p:nvSpPr>
-        <p:spPr>
-          <a:xfrm>
-            <a:off x="548640" y="1554480"/>
-            <a:ext cx="3474720" cy="1051560"/>
-          </a:xfrm>
-          <a:prstGeom prst="roundRect">
-            <a:avLst/>
-          </a:prstGeom>
-          <a:solidFill>
-            <a:srgbClr val="0B2E4F"/>
-          </a:solidFill>
-          <a:ln>
-            <a:solidFill>
-              <a:srgbClr val="0B2E4F"/>
-            </a:solidFill>
-          </a:ln>
-        </p:spPr>
-        <p:style>
-          <a:lnRef idx="1">
-            <a:schemeClr val="accent1"/>
-          </a:lnRef>
-          <a:fillRef idx="3">
-            <a:schemeClr val="accent1"/>
-          </a:fillRef>
-          <a:effectRef idx="2">
-            <a:schemeClr val="accent1"/>
-          </a:effectRef>
-          <a:fontRef idx="minor">
-            <a:schemeClr val="lt1"/>
-          </a:fontRef>
-        </p:style>
-        <p:txBody>
-          <a:bodyPr rtlCol="0" anchor="ctr" wrap="square"/>
-          <a:lstStyle/>
-          <a:p>
-            <a:pPr algn="l"/>
-            <a:r>
-              <a:rPr sz="1300" b="1" i="0">
-                <a:solidFill>
-                  <a:srgbClr val="FFFFFF"/>
-                </a:solidFill>
-              </a:rPr>
-              <a:t>ptp_gm_task.c
-Grandmaster state machine</a:t>
-            </a:r>
-          </a:p>
-        </p:txBody>
-      </p:sp>
-      <p:sp>
-        <p:nvSpPr>
-          <p:cNvPr id="4" name="Rounded Rectangle 3"/>
-          <p:cNvSpPr/>
-          <p:nvPr/>
-        </p:nvSpPr>
-        <p:spPr>
-          <a:xfrm>
-            <a:off x="4297680" y="1554480"/>
-            <a:ext cx="3474720" cy="1051560"/>
-          </a:xfrm>
-          <a:prstGeom prst="roundRect">
-            <a:avLst/>
-          </a:prstGeom>
-          <a:solidFill>
-            <a:srgbClr val="0B2E4F"/>
-          </a:solidFill>
-          <a:ln>
-            <a:solidFill>
-              <a:srgbClr val="0B2E4F"/>
-            </a:solidFill>
-          </a:ln>
-        </p:spPr>
-        <p:style>
-          <a:lnRef idx="1">
-            <a:schemeClr val="accent1"/>
-          </a:lnRef>
-          <a:fillRef idx="3">
-            <a:schemeClr val="accent1"/>
-          </a:fillRef>
-          <a:effectRef idx="2">
-            <a:schemeClr val="accent1"/>
-          </a:effectRef>
-          <a:fontRef idx="minor">
-            <a:schemeClr val="lt1"/>
-          </a:fontRef>
-        </p:style>
-        <p:txBody>
-          <a:bodyPr rtlCol="0" anchor="ctr" wrap="square"/>
-          <a:lstStyle/>
-          <a:p>
-            <a:pPr algn="l"/>
-            <a:r>
-              <a:rPr sz="1300" b="1" i="0">
-                <a:solidFill>
-                  <a:srgbClr val="FFFFFF"/>
-                </a:solidFill>
-              </a:rPr>
-              <a:t>ptp_fol_task.c
-Follower PI servo</a:t>
-            </a:r>
-          </a:p>
-        </p:txBody>
-      </p:sp>
-      <p:sp>
-        <p:nvSpPr>
-          <p:cNvPr id="5" name="Rounded Rectangle 4"/>
-          <p:cNvSpPr/>
-          <p:nvPr/>
-        </p:nvSpPr>
-        <p:spPr>
-          <a:xfrm>
-            <a:off x="7863840" y="1554480"/>
-            <a:ext cx="3474720" cy="1051560"/>
-          </a:xfrm>
-          <a:prstGeom prst="roundRect">
-            <a:avLst/>
-          </a:prstGeom>
-          <a:solidFill>
-            <a:srgbClr val="0B2E4F"/>
-          </a:solidFill>
-          <a:ln>
-            <a:solidFill>
-              <a:srgbClr val="0B2E4F"/>
-            </a:solidFill>
-          </a:ln>
-        </p:spPr>
-        <p:style>
-          <a:lnRef idx="1">
-            <a:schemeClr val="accent1"/>
-          </a:lnRef>
-          <a:fillRef idx="3">
-            <a:schemeClr val="accent1"/>
-          </a:fillRef>
-          <a:effectRef idx="2">
-            <a:schemeClr val="accent1"/>
-          </a:effectRef>
-          <a:fontRef idx="minor">
-            <a:schemeClr val="lt1"/>
-          </a:fontRef>
-        </p:style>
-        <p:txBody>
-          <a:bodyPr rtlCol="0" anchor="ctr" wrap="square"/>
-          <a:lstStyle/>
-          <a:p>
-            <a:pPr algn="l"/>
-            <a:r>
-              <a:rPr sz="1300" b="1" i="0">
-                <a:solidFill>
-                  <a:srgbClr val="FFFFFF"/>
-                </a:solidFill>
-              </a:rPr>
-              <a:t>ptp_clock.c
-Nanosecond software clock</a:t>
-            </a:r>
-          </a:p>
-        </p:txBody>
-      </p:sp>
-      <p:sp>
-        <p:nvSpPr>
-          <p:cNvPr id="6" name="Rounded Rectangle 5"/>
-          <p:cNvSpPr/>
-          <p:nvPr/>
-        </p:nvSpPr>
-        <p:spPr>
-          <a:xfrm>
-            <a:off x="548640" y="2743200"/>
-            <a:ext cx="10789920" cy="868680"/>
-          </a:xfrm>
-          <a:prstGeom prst="roundRect">
-            <a:avLst/>
-          </a:prstGeom>
-          <a:solidFill>
-            <a:srgbClr val="1F77B4"/>
-          </a:solidFill>
-          <a:ln>
-            <a:solidFill>
-              <a:srgbClr val="1F77B4"/>
-            </a:solidFill>
-          </a:ln>
-        </p:spPr>
-        <p:style>
-          <a:lnRef idx="1">
-            <a:schemeClr val="accent1"/>
-          </a:lnRef>
-          <a:fillRef idx="3">
-            <a:schemeClr val="accent1"/>
-          </a:fillRef>
-          <a:effectRef idx="2">
-            <a:schemeClr val="accent1"/>
-          </a:effectRef>
-          <a:fontRef idx="minor">
-            <a:schemeClr val="lt1"/>
-          </a:fontRef>
-        </p:style>
-        <p:txBody>
-          <a:bodyPr rtlCol="0" anchor="ctr" wrap="square"/>
-          <a:lstStyle/>
-          <a:p>
-            <a:pPr algn="l"/>
-            <a:r>
-              <a:rPr sz="1300" b="1" i="0">
-                <a:solidFill>
-                  <a:srgbClr val="FFFFFF"/>
-                </a:solidFill>
-              </a:rPr>
-              <a:t>drv_lan865x_api.c — SPI MAC-PHY driver + TX/RX timestamp capture</a:t>
-            </a:r>
-          </a:p>
-        </p:txBody>
-      </p:sp>
-      <p:sp>
-        <p:nvSpPr>
-          <p:cNvPr id="7" name="Rounded Rectangle 6"/>
-          <p:cNvSpPr/>
-          <p:nvPr/>
-        </p:nvSpPr>
-        <p:spPr>
-          <a:xfrm>
-            <a:off x="548640" y="3749039"/>
-            <a:ext cx="10789920" cy="822960"/>
-          </a:xfrm>
-          <a:prstGeom prst="roundRect">
-            <a:avLst/>
-          </a:prstGeom>
-          <a:solidFill>
-            <a:srgbClr val="555555"/>
-          </a:solidFill>
-          <a:ln>
-            <a:solidFill>
-              <a:srgbClr val="555555"/>
-            </a:solidFill>
-          </a:ln>
-        </p:spPr>
-        <p:style>
-          <a:lnRef idx="1">
-            <a:schemeClr val="accent1"/>
-          </a:lnRef>
-          <a:fillRef idx="3">
-            <a:schemeClr val="accent1"/>
-          </a:fillRef>
-          <a:effectRef idx="2">
-            <a:schemeClr val="accent1"/>
-          </a:effectRef>
-          <a:fontRef idx="minor">
-            <a:schemeClr val="lt1"/>
-          </a:fontRef>
-        </p:style>
-        <p:txBody>
-          <a:bodyPr rtlCol="0" anchor="ctr" wrap="square"/>
-          <a:lstStyle/>
-          <a:p>
-            <a:pPr algn="l"/>
-            <a:r>
-              <a:rPr sz="1200" b="1" i="0">
-                <a:solidFill>
-                  <a:srgbClr val="FFFFFF"/>
-                </a:solidFill>
-              </a:rPr>
-              <a:t>Harmony 3 TCP/IP stack  (net_10base_t1s v1.4.3)</a:t>
-            </a:r>
-          </a:p>
-        </p:txBody>
-      </p:sp>
-      <p:sp>
-        <p:nvSpPr>
-          <p:cNvPr id="8" name="Rounded Rectangle 7"/>
-          <p:cNvSpPr/>
-          <p:nvPr/>
-        </p:nvSpPr>
-        <p:spPr>
-          <a:xfrm>
-            <a:off x="548640" y="4663440"/>
-            <a:ext cx="10789920" cy="822960"/>
-          </a:xfrm>
-          <a:prstGeom prst="roundRect">
-            <a:avLst/>
-          </a:prstGeom>
-          <a:solidFill>
-            <a:srgbClr val="555555"/>
-          </a:solidFill>
-          <a:ln>
-            <a:solidFill>
-              <a:srgbClr val="555555"/>
-            </a:solidFill>
-          </a:ln>
-        </p:spPr>
-        <p:style>
-          <a:lnRef idx="1">
-            <a:schemeClr val="accent1"/>
-          </a:lnRef>
-          <a:fillRef idx="3">
-            <a:schemeClr val="accent1"/>
-          </a:fillRef>
-          <a:effectRef idx="2">
-            <a:schemeClr val="accent1"/>
-          </a:effectRef>
-          <a:fontRef idx="minor">
-            <a:schemeClr val="lt1"/>
-          </a:fontRef>
-        </p:style>
-        <p:txBody>
-          <a:bodyPr rtlCol="0" anchor="ctr" wrap="square"/>
-          <a:lstStyle/>
-          <a:p>
-            <a:pPr algn="l"/>
-            <a:r>
-              <a:rPr sz="1200" b="1" i="0">
-                <a:solidFill>
-                  <a:srgbClr val="FFFFFF"/>
-                </a:solidFill>
-              </a:rPr>
-              <a:t>ATSAME54P20A — TC0 @ 60 MHz timestamp counter, SPI master</a:t>
-            </a:r>
-          </a:p>
-        </p:txBody>
-      </p:sp>
-      <p:sp>
-        <p:nvSpPr>
-          <p:cNvPr id="9" name="TextBox 8"/>
-          <p:cNvSpPr txBox="1"/>
-          <p:nvPr/>
-        </p:nvSpPr>
-        <p:spPr>
-          <a:xfrm>
-            <a:off x="548640" y="5577840"/>
-            <a:ext cx="10972800" cy="274320"/>
-          </a:xfrm>
-          <a:prstGeom prst="rect">
-            <a:avLst/>
-          </a:prstGeom>
-          <a:noFill/>
-        </p:spPr>
-        <p:txBody>
-          <a:bodyPr wrap="none">
-            <a:spAutoFit/>
-          </a:bodyPr>
-          <a:lstStyle/>
-          <a:p>
-            <a:r>
-              <a:rPr sz="1400" b="0" i="1">
-                <a:solidFill>
-                  <a:srgbClr val="555555"/>
-                </a:solidFill>
-              </a:rPr>
-              <a:t>Grandmaster and Follower run identical firmware — role is configuration, not code.</a:t>
+              <a:t>LAN8651 — Device Overview</a:t>
+            </a:r>
+          </a:p>
+        </p:txBody>
+      </p:sp>
+      <p:sp>
+        <p:nvSpPr>
+          <p:cNvPr id="3" name="Content Placeholder 2"/>
+          <p:cNvSpPr>
+            <a:spLocks noGrp="1"/>
+          </p:cNvSpPr>
+          <p:nvPr>
+            <p:ph idx="13" sz="quarter"/>
+          </p:nvPr>
+        </p:nvSpPr>
+        <p:spPr/>
+        <p:txBody>
+          <a:bodyPr/>
+          <a:lstStyle/>
+          <a:p>
+            <a:pPr/>
+            <a:r>
+              <a:rPr sz="1800"/>
+              <a:t>Microchip 10BASE-T1S MAC-PHY with SPI host interface</a:t>
+            </a:r>
+          </a:p>
+          <a:p>
+            <a:pPr/>
+            <a:r>
+              <a:rPr sz="1800"/>
+              <a:t>Integrated MAC + PHY in a single package</a:t>
+            </a:r>
+          </a:p>
+          <a:p>
+            <a:pPr lvl="1"/>
+            <a:r>
+              <a:rPr sz="1600"/>
+              <a:t>MCU needs no on-chip Ethernet MAC</a:t>
+            </a:r>
+          </a:p>
+          <a:p>
+            <a:pPr lvl="1"/>
+            <a:r>
+              <a:rPr sz="1600"/>
+              <a:t>OPEN Alliance TC6 SPI protocol — data chunks over SPI</a:t>
+            </a:r>
+          </a:p>
+          <a:p>
+            <a:pPr/>
+            <a:r>
+              <a:rPr sz="1800"/>
+              <a:t>Supports PLCA for multidrop topologies</a:t>
+            </a:r>
+          </a:p>
+          <a:p>
+            <a:pPr/>
+            <a:r>
+              <a:rPr sz="1800"/>
+              <a:t>Hardware timestamp engine latches TX-SFD and RX-SFD events</a:t>
+            </a:r>
+          </a:p>
+          <a:p>
+            <a:pPr lvl="1"/>
+            <a:r>
+              <a:rPr sz="1600"/>
+              <a:t>Raw material for PTP — accuracy depends on SFD latch point</a:t>
+            </a:r>
+          </a:p>
+          <a:p>
+            <a:pPr/>
+            <a:r>
+              <a:rPr sz="1800"/>
+              <a:t>Interrupt-driven host signalling via nIRQ</a:t>
+            </a:r>
+          </a:p>
+          <a:p>
+            <a:pPr/>
+            <a:r>
+              <a:rPr sz="1800"/>
+              <a:t>Pin-count and BOM optimised for automotive and industrial edge nodes</a:t>
             </a:r>
           </a:p>
         </p:txBody>
@@ -6212,93 +6303,490 @@
           <a:lstStyle/>
           <a:p>
             <a:r>
-              <a:t>Cyclic Fire — What Is It?</a:t>
-            </a:r>
-          </a:p>
-        </p:txBody>
-      </p:sp>
-      <p:sp>
-        <p:nvSpPr>
-          <p:cNvPr id="3" name="Content Placeholder 2"/>
-          <p:cNvSpPr>
-            <a:spLocks noGrp="1"/>
-          </p:cNvSpPr>
-          <p:nvPr>
-            <p:ph idx="13" sz="quarter"/>
-          </p:nvPr>
-        </p:nvSpPr>
-        <p:spPr/>
-        <p:txBody>
-          <a:bodyPr/>
-          <a:lstStyle/>
-          <a:p>
-            <a:pPr/>
-            <a:r>
-              <a:rPr sz="1800"/>
-              <a:t>A firmware module that fires a periodic GPIO pulse train on PD10</a:t>
-            </a:r>
-          </a:p>
-          <a:p>
-            <a:pPr lvl="1"/>
-            <a:r>
-              <a:rPr sz="1600"/>
-              <a:t>Pin sits on the EXT1 Xplained-Pro header — directly scope-clippable</a:t>
-            </a:r>
-          </a:p>
-          <a:p>
-            <a:pPr/>
-            <a:r>
-              <a:rPr sz="1800"/>
-              <a:t>Each pulse edge is scheduled against the PTP software clock, not a local timer</a:t>
-            </a:r>
-          </a:p>
-          <a:p>
-            <a:pPr lvl="1"/>
-            <a:r>
-              <a:rPr sz="1600"/>
-              <a:t>Implemented with tfuture — single-shot timer re-armed from its own callback</a:t>
-            </a:r>
-          </a:p>
-          <a:p>
-            <a:pPr/>
-            <a:r>
-              <a:rPr sz="1800"/>
-              <a:t>The scheduling time is given in absolute PTP wall-clock nanoseconds</a:t>
-            </a:r>
-          </a:p>
-          <a:p>
-            <a:pPr lvl="1"/>
-            <a:r>
-              <a:rPr sz="1600"/>
-              <a:t>cyclic_fire_start(period_us, phase_anchor_ns)</a:t>
-            </a:r>
-          </a:p>
-          <a:p>
-            <a:pPr lvl="1"/>
-            <a:r>
-              <a:rPr sz="1600"/>
-              <a:t>phase_anchor_ns = the PTP moment at which the very first edge should fire</a:t>
-            </a:r>
-          </a:p>
-          <a:p>
-            <a:pPr/>
-            <a:r>
-              <a:rPr sz="1800"/>
-              <a:t>Identical firmware, identical API call on both boards</a:t>
-            </a:r>
-          </a:p>
-          <a:p>
-            <a:pPr lvl="1"/>
-            <a:r>
-              <a:rPr sz="1600"/>
-              <a:t>→ a shared anchor_ns produces wire-level coincident edges across boards</a:t>
-            </a:r>
-          </a:p>
-          <a:p>
-            <a:pPr/>
-            <a:r>
-              <a:rPr sz="1800"/>
-              <a:t>A CPU-cheap, direct-from-wire way to observe whether two PTP clocks really agree</a:t>
+              <a:t>LAN8651 — Timestamping Signal Path</a:t>
+            </a:r>
+          </a:p>
+        </p:txBody>
+      </p:sp>
+      <p:sp>
+        <p:nvSpPr>
+          <p:cNvPr id="3" name="Rounded Rectangle 2"/>
+          <p:cNvSpPr/>
+          <p:nvPr/>
+        </p:nvSpPr>
+        <p:spPr>
+          <a:xfrm>
+            <a:off x="548640" y="1920240"/>
+            <a:ext cx="1920240" cy="914400"/>
+          </a:xfrm>
+          <a:prstGeom prst="roundRect">
+            <a:avLst/>
+          </a:prstGeom>
+          <a:solidFill>
+            <a:srgbClr val="2CA02C"/>
+          </a:solidFill>
+          <a:ln>
+            <a:solidFill>
+              <a:srgbClr val="2CA02C"/>
+            </a:solidFill>
+          </a:ln>
+        </p:spPr>
+        <p:style>
+          <a:lnRef idx="1">
+            <a:schemeClr val="accent1"/>
+          </a:lnRef>
+          <a:fillRef idx="3">
+            <a:schemeClr val="accent1"/>
+          </a:fillRef>
+          <a:effectRef idx="2">
+            <a:schemeClr val="accent1"/>
+          </a:effectRef>
+          <a:fontRef idx="minor">
+            <a:schemeClr val="lt1"/>
+          </a:fontRef>
+        </p:style>
+        <p:txBody>
+          <a:bodyPr rtlCol="0" anchor="ctr" wrap="square"/>
+          <a:lstStyle/>
+          <a:p>
+            <a:pPr algn="l"/>
+            <a:r>
+              <a:rPr sz="1300" b="1" i="0">
+                <a:solidFill>
+                  <a:srgbClr val="FFFFFF"/>
+                </a:solidFill>
+              </a:rPr>
+              <a:t>T1S wire
+SFD bit</a:t>
+            </a:r>
+          </a:p>
+        </p:txBody>
+      </p:sp>
+      <p:sp>
+        <p:nvSpPr>
+          <p:cNvPr id="4" name="Rounded Rectangle 3"/>
+          <p:cNvSpPr/>
+          <p:nvPr/>
+        </p:nvSpPr>
+        <p:spPr>
+          <a:xfrm>
+            <a:off x="2743200" y="1920240"/>
+            <a:ext cx="1920240" cy="914400"/>
+          </a:xfrm>
+          <a:prstGeom prst="roundRect">
+            <a:avLst/>
+          </a:prstGeom>
+          <a:solidFill>
+            <a:srgbClr val="1F77B4"/>
+          </a:solidFill>
+          <a:ln>
+            <a:solidFill>
+              <a:srgbClr val="1F77B4"/>
+            </a:solidFill>
+          </a:ln>
+        </p:spPr>
+        <p:style>
+          <a:lnRef idx="1">
+            <a:schemeClr val="accent1"/>
+          </a:lnRef>
+          <a:fillRef idx="3">
+            <a:schemeClr val="accent1"/>
+          </a:fillRef>
+          <a:effectRef idx="2">
+            <a:schemeClr val="accent1"/>
+          </a:effectRef>
+          <a:fontRef idx="minor">
+            <a:schemeClr val="lt1"/>
+          </a:fontRef>
+        </p:style>
+        <p:txBody>
+          <a:bodyPr rtlCol="0" anchor="ctr" wrap="square"/>
+          <a:lstStyle/>
+          <a:p>
+            <a:pPr algn="l"/>
+            <a:r>
+              <a:rPr sz="1300" b="1" i="0">
+                <a:solidFill>
+                  <a:srgbClr val="FFFFFF"/>
+                </a:solidFill>
+              </a:rPr>
+              <a:t>LAN8651 PHY
+SFD detect</a:t>
+            </a:r>
+          </a:p>
+        </p:txBody>
+      </p:sp>
+      <p:sp>
+        <p:nvSpPr>
+          <p:cNvPr id="5" name="Rounded Rectangle 4"/>
+          <p:cNvSpPr/>
+          <p:nvPr/>
+        </p:nvSpPr>
+        <p:spPr>
+          <a:xfrm>
+            <a:off x="4937760" y="1920240"/>
+            <a:ext cx="1920240" cy="914400"/>
+          </a:xfrm>
+          <a:prstGeom prst="roundRect">
+            <a:avLst/>
+          </a:prstGeom>
+          <a:solidFill>
+            <a:srgbClr val="1F77B4"/>
+          </a:solidFill>
+          <a:ln>
+            <a:solidFill>
+              <a:srgbClr val="1F77B4"/>
+            </a:solidFill>
+          </a:ln>
+        </p:spPr>
+        <p:style>
+          <a:lnRef idx="1">
+            <a:schemeClr val="accent1"/>
+          </a:lnRef>
+          <a:fillRef idx="3">
+            <a:schemeClr val="accent1"/>
+          </a:fillRef>
+          <a:effectRef idx="2">
+            <a:schemeClr val="accent1"/>
+          </a:effectRef>
+          <a:fontRef idx="minor">
+            <a:schemeClr val="lt1"/>
+          </a:fontRef>
+        </p:style>
+        <p:txBody>
+          <a:bodyPr rtlCol="0" anchor="ctr" wrap="square"/>
+          <a:lstStyle/>
+          <a:p>
+            <a:pPr algn="l"/>
+            <a:r>
+              <a:rPr sz="1300" b="1" i="0">
+                <a:solidFill>
+                  <a:srgbClr val="FFFFFF"/>
+                </a:solidFill>
+              </a:rPr>
+              <a:t>LAN8651 MAC
+timestamp latch</a:t>
+            </a:r>
+          </a:p>
+        </p:txBody>
+      </p:sp>
+      <p:sp>
+        <p:nvSpPr>
+          <p:cNvPr id="6" name="Rounded Rectangle 5"/>
+          <p:cNvSpPr/>
+          <p:nvPr/>
+        </p:nvSpPr>
+        <p:spPr>
+          <a:xfrm>
+            <a:off x="7132320" y="1920240"/>
+            <a:ext cx="1920240" cy="914400"/>
+          </a:xfrm>
+          <a:prstGeom prst="roundRect">
+            <a:avLst/>
+          </a:prstGeom>
+          <a:solidFill>
+            <a:srgbClr val="0B2E4F"/>
+          </a:solidFill>
+          <a:ln>
+            <a:solidFill>
+              <a:srgbClr val="0B2E4F"/>
+            </a:solidFill>
+          </a:ln>
+        </p:spPr>
+        <p:style>
+          <a:lnRef idx="1">
+            <a:schemeClr val="accent1"/>
+          </a:lnRef>
+          <a:fillRef idx="3">
+            <a:schemeClr val="accent1"/>
+          </a:fillRef>
+          <a:effectRef idx="2">
+            <a:schemeClr val="accent1"/>
+          </a:effectRef>
+          <a:fontRef idx="minor">
+            <a:schemeClr val="lt1"/>
+          </a:fontRef>
+        </p:style>
+        <p:txBody>
+          <a:bodyPr rtlCol="0" anchor="ctr" wrap="square"/>
+          <a:lstStyle/>
+          <a:p>
+            <a:pPr algn="l"/>
+            <a:r>
+              <a:rPr sz="1300" b="1" i="0">
+                <a:solidFill>
+                  <a:srgbClr val="FFFFFF"/>
+                </a:solidFill>
+              </a:rPr>
+              <a:t>SPI readout
+to MCU</a:t>
+            </a:r>
+          </a:p>
+        </p:txBody>
+      </p:sp>
+      <p:sp>
+        <p:nvSpPr>
+          <p:cNvPr id="7" name="Rounded Rectangle 6"/>
+          <p:cNvSpPr/>
+          <p:nvPr/>
+        </p:nvSpPr>
+        <p:spPr>
+          <a:xfrm>
+            <a:off x="9326880" y="1920240"/>
+            <a:ext cx="1920240" cy="914400"/>
+          </a:xfrm>
+          <a:prstGeom prst="roundRect">
+            <a:avLst/>
+          </a:prstGeom>
+          <a:solidFill>
+            <a:srgbClr val="D62728"/>
+          </a:solidFill>
+          <a:ln>
+            <a:solidFill>
+              <a:srgbClr val="D62728"/>
+            </a:solidFill>
+          </a:ln>
+        </p:spPr>
+        <p:style>
+          <a:lnRef idx="1">
+            <a:schemeClr val="accent1"/>
+          </a:lnRef>
+          <a:fillRef idx="3">
+            <a:schemeClr val="accent1"/>
+          </a:fillRef>
+          <a:effectRef idx="2">
+            <a:schemeClr val="accent1"/>
+          </a:effectRef>
+          <a:fontRef idx="minor">
+            <a:schemeClr val="lt1"/>
+          </a:fontRef>
+        </p:style>
+        <p:txBody>
+          <a:bodyPr rtlCol="0" anchor="ctr" wrap="square"/>
+          <a:lstStyle/>
+          <a:p>
+            <a:pPr algn="l"/>
+            <a:r>
+              <a:rPr sz="1300" b="1" i="0">
+                <a:solidFill>
+                  <a:srgbClr val="FFFFFF"/>
+                </a:solidFill>
+              </a:rPr>
+              <a:t>nIRQ
+to MCU</a:t>
+            </a:r>
+          </a:p>
+        </p:txBody>
+      </p:sp>
+      <p:cxnSp>
+        <p:nvCxnSpPr>
+          <p:cNvPr id="8" name="Connector 7"/>
+          <p:cNvCxnSpPr/>
+          <p:nvPr/>
+        </p:nvCxnSpPr>
+        <p:spPr>
+          <a:xfrm>
+            <a:off x="2468880" y="2377440"/>
+            <a:ext cx="274320" cy="0"/>
+          </a:xfrm>
+          <a:prstGeom prst="bentConnector3">
+            <a:avLst/>
+          </a:prstGeom>
+          <a:ln w="25400">
+            <a:solidFill>
+              <a:srgbClr val="555555"/>
+            </a:solidFill>
+          </a:ln>
+        </p:spPr>
+        <p:style>
+          <a:lnRef idx="2">
+            <a:schemeClr val="accent1"/>
+          </a:lnRef>
+          <a:fillRef idx="0">
+            <a:schemeClr val="accent1"/>
+          </a:fillRef>
+          <a:effectRef idx="1">
+            <a:schemeClr val="accent1"/>
+          </a:effectRef>
+          <a:fontRef idx="minor">
+            <a:schemeClr val="tx1"/>
+          </a:fontRef>
+        </p:style>
+      </p:cxnSp>
+      <p:cxnSp>
+        <p:nvCxnSpPr>
+          <p:cNvPr id="9" name="Connector 8"/>
+          <p:cNvCxnSpPr/>
+          <p:nvPr/>
+        </p:nvCxnSpPr>
+        <p:spPr>
+          <a:xfrm>
+            <a:off x="4663440" y="2377440"/>
+            <a:ext cx="274319" cy="0"/>
+          </a:xfrm>
+          <a:prstGeom prst="bentConnector3">
+            <a:avLst/>
+          </a:prstGeom>
+          <a:ln w="25400">
+            <a:solidFill>
+              <a:srgbClr val="555555"/>
+            </a:solidFill>
+          </a:ln>
+        </p:spPr>
+        <p:style>
+          <a:lnRef idx="2">
+            <a:schemeClr val="accent1"/>
+          </a:lnRef>
+          <a:fillRef idx="0">
+            <a:schemeClr val="accent1"/>
+          </a:fillRef>
+          <a:effectRef idx="1">
+            <a:schemeClr val="accent1"/>
+          </a:effectRef>
+          <a:fontRef idx="minor">
+            <a:schemeClr val="tx1"/>
+          </a:fontRef>
+        </p:style>
+      </p:cxnSp>
+      <p:cxnSp>
+        <p:nvCxnSpPr>
+          <p:cNvPr id="10" name="Connector 9"/>
+          <p:cNvCxnSpPr/>
+          <p:nvPr/>
+        </p:nvCxnSpPr>
+        <p:spPr>
+          <a:xfrm>
+            <a:off x="6858000" y="2377440"/>
+            <a:ext cx="274320" cy="0"/>
+          </a:xfrm>
+          <a:prstGeom prst="bentConnector3">
+            <a:avLst/>
+          </a:prstGeom>
+          <a:ln w="25400">
+            <a:solidFill>
+              <a:srgbClr val="555555"/>
+            </a:solidFill>
+          </a:ln>
+        </p:spPr>
+        <p:style>
+          <a:lnRef idx="2">
+            <a:schemeClr val="accent1"/>
+          </a:lnRef>
+          <a:fillRef idx="0">
+            <a:schemeClr val="accent1"/>
+          </a:fillRef>
+          <a:effectRef idx="1">
+            <a:schemeClr val="accent1"/>
+          </a:effectRef>
+          <a:fontRef idx="minor">
+            <a:schemeClr val="tx1"/>
+          </a:fontRef>
+        </p:style>
+      </p:cxnSp>
+      <p:cxnSp>
+        <p:nvCxnSpPr>
+          <p:cNvPr id="11" name="Connector 10"/>
+          <p:cNvCxnSpPr/>
+          <p:nvPr/>
+        </p:nvCxnSpPr>
+        <p:spPr>
+          <a:xfrm>
+            <a:off x="9052560" y="2377440"/>
+            <a:ext cx="274320" cy="0"/>
+          </a:xfrm>
+          <a:prstGeom prst="bentConnector3">
+            <a:avLst/>
+          </a:prstGeom>
+          <a:ln w="25400">
+            <a:solidFill>
+              <a:srgbClr val="555555"/>
+            </a:solidFill>
+          </a:ln>
+        </p:spPr>
+        <p:style>
+          <a:lnRef idx="2">
+            <a:schemeClr val="accent1"/>
+          </a:lnRef>
+          <a:fillRef idx="0">
+            <a:schemeClr val="accent1"/>
+          </a:fillRef>
+          <a:effectRef idx="1">
+            <a:schemeClr val="accent1"/>
+          </a:effectRef>
+          <a:fontRef idx="minor">
+            <a:schemeClr val="tx1"/>
+          </a:fontRef>
+        </p:style>
+      </p:cxnSp>
+      <p:sp>
+        <p:nvSpPr>
+          <p:cNvPr id="12" name="TextBox 11"/>
+          <p:cNvSpPr txBox="1"/>
+          <p:nvPr/>
+        </p:nvSpPr>
+        <p:spPr>
+          <a:xfrm>
+            <a:off x="548640" y="3108960"/>
+            <a:ext cx="10972800" cy="3200400"/>
+          </a:xfrm>
+          <a:prstGeom prst="rect">
+            <a:avLst/>
+          </a:prstGeom>
+          <a:noFill/>
+        </p:spPr>
+        <p:txBody>
+          <a:bodyPr wrap="square">
+            <a:spAutoFit/>
+          </a:bodyPr>
+          <a:lstStyle/>
+          <a:p>
+            <a:r>
+              <a:rPr sz="1600">
+                <a:solidFill>
+                  <a:srgbClr val="0B2E4F"/>
+                </a:solidFill>
+              </a:rPr>
+              <a:t>• TX path: MCU writes frame over SPI → MAC transmits → SFD on wire = t1 latched</a:t>
+            </a:r>
+          </a:p>
+          <a:p>
+            <a:r>
+              <a:rPr sz="1600">
+                <a:solidFill>
+                  <a:srgbClr val="0B2E4F"/>
+                </a:solidFill>
+              </a:rPr>
+              <a:t>• RX path: SFD on wire = t2 latched → MAC stores timestamp → nIRQ → MCU reads over SPI</a:t>
+            </a:r>
+          </a:p>
+          <a:p>
+            <a:r>
+              <a:rPr sz="1600">
+                <a:solidFill>
+                  <a:srgbClr val="0B2E4F"/>
+                </a:solidFill>
+              </a:rPr>
+              <a:t>• TX: ~800 µs from SFD-on-wire to the TX-timestamp-available nIRQ  (pipeline + SPI)</a:t>
+            </a:r>
+          </a:p>
+          <a:p>
+            <a:r>
+              <a:rPr sz="1600">
+                <a:solidFill>
+                  <a:srgbClr val="0B2E4F"/>
+                </a:solidFill>
+              </a:rPr>
+              <a:t>• RX: ~10 ms from SFD-on-wire to the RX-nIRQ   (LAN8651 behaviour)</a:t>
+            </a:r>
+          </a:p>
+          <a:p>
+            <a:r>
+              <a:rPr sz="1600">
+                <a:solidFill>
+                  <a:srgbClr val="0B2E4F"/>
+                </a:solidFill>
+              </a:rPr>
+              <a:t>• Both biases must be compensated outside PTP — protocol cannot see them</a:t>
             </a:r>
           </a:p>
         </p:txBody>
@@ -6337,7 +6825,7 @@
           <a:lstStyle/>
           <a:p>
             <a:r>
-              <a:t>Cyclic Fire — What You Can Achieve</a:t>
+              <a:t>LAN8651 — Calibrating the Biases</a:t>
             </a:r>
           </a:p>
         </p:txBody>
@@ -6360,77 +6848,63 @@
             <a:pPr/>
             <a:r>
               <a:rPr sz="1800"/>
-              <a:t>Sync quality measurement: cross-board rising-edge delta quantifies PTP accuracy</a:t>
+              <a:t>Project design: ISR-captured anchor pair  (wall-clock_ns, TC0_tick)</a:t>
+            </a:r>
+          </a:p>
+          <a:p>
+            <a:pPr/>
+            <a:r>
+              <a:rPr sz="1800"/>
+              <a:t>Anchor offsets shift the wall-clock timestamp forward to the ISR moment:</a:t>
             </a:r>
           </a:p>
           <a:p>
             <a:pPr lvl="1"/>
             <a:r>
               <a:rPr sz="1600"/>
-              <a:t>Median → static bias (calibration target)</a:t>
+              <a:t>PTP_GM_ANCHOR_OFFSET_NS  = 800 000 ns     (TX pipeline)</a:t>
             </a:r>
           </a:p>
           <a:p>
             <a:pPr lvl="1"/>
             <a:r>
               <a:rPr sz="1600"/>
-              <a:t>MAD / extrema → short-term wander, filter behaviour</a:t>
+              <a:t>PTP_FOL_ANCHOR_OFFSET_NS = 10 000 000 ns  (RX pipeline)</a:t>
             </a:r>
           </a:p>
           <a:p>
             <a:pPr/>
             <a:r>
               <a:rPr sz="1800"/>
-              <a:t>Calibration feedback loop: run test → read D → update anchor offset → rerun</a:t>
+              <a:t>Calibration is empirical:</a:t>
+            </a:r>
+          </a:p>
+          <a:p>
+            <a:pPr lvl="1"/>
+            <a:r>
+              <a:rPr sz="1600"/>
+              <a:t>Measure cross-board edge delta D with cyclic_fire_hw_test.py</a:t>
+            </a:r>
+          </a:p>
+          <a:p>
+            <a:pPr lvl="1"/>
+            <a:r>
+              <a:rPr sz="1600"/>
+              <a:t>new_offset = old_offset + D    (positive D means FOL lags GM)</a:t>
             </a:r>
           </a:p>
           <a:p>
             <a:pPr/>
             <a:r>
               <a:rPr sz="1800"/>
-              <a:t>PTP regression test: a single gated CI metric (|median| + MAD ≤ 100 µs)</a:t>
-            </a:r>
-          </a:p>
-          <a:p>
-            <a:pPr/>
-            <a:r>
-              <a:rPr sz="1800"/>
-              <a:t>Sub-µs demonstration target: visible proof that two independent MCUs tick together</a:t>
-            </a:r>
-          </a:p>
-          <a:p>
-            <a:pPr/>
-            <a:r>
-              <a:rPr sz="1800"/>
-              <a:t>Distributed actuation reference: template for real coordinated outputs</a:t>
+              <a:t>Effect of the 10 ms compensation (commit deb2773):</a:t>
             </a:r>
           </a:p>
           <a:p>
             <a:pPr lvl="1"/>
             <a:r>
               <a:rPr sz="1600"/>
-              <a:t>Sensor sampling on N nodes at the same nanosecond</a:t>
-            </a:r>
-          </a:p>
-          <a:p>
-            <a:pPr lvl="1"/>
-            <a:r>
-              <a:rPr sz="1600"/>
-              <a:t>Time-slotted TX windows (TDMA over T1S)</a:t>
-            </a:r>
-          </a:p>
-          <a:p>
-            <a:pPr lvl="1"/>
-            <a:r>
-              <a:rPr sz="1600"/>
-              <a:t>Synchronised ADC trigger / actuator pulse</a:t>
-            </a:r>
-          </a:p>
-          <a:p>
-            <a:pPr/>
-            <a:r>
-              <a:rPr sz="1800"/>
-              <a:t>Failure detection: PLCA starvation, MAC wedge, clock drift all show up as edge drift</a:t>
+              <a:t>Cross-board median delta:  +10 005 µs  →  +10 µs</a:t>
             </a:r>
           </a:p>
         </p:txBody>
@@ -7825,7 +8299,7 @@
           <a:lstStyle/>
           <a:p>
             <a:r>
-              <a:t>Cyclic Fire — API &amp; Output Patterns</a:t>
+              <a:t>Project Integration — Firmware Map</a:t>
             </a:r>
           </a:p>
         </p:txBody>
@@ -7838,8 +8312,8 @@
         </p:nvSpPr>
         <p:spPr>
           <a:xfrm>
-            <a:off x="457200" y="1417320"/>
-            <a:ext cx="11247120" cy="502920"/>
+            <a:off x="548640" y="1554480"/>
+            <a:ext cx="3474720" cy="1051560"/>
           </a:xfrm>
           <a:prstGeom prst="roundRect">
             <a:avLst/>
@@ -7873,12 +8347,13 @@
           <a:p>
             <a:pPr algn="l"/>
             <a:r>
-              <a:rPr sz="1400" b="1" i="0">
+              <a:rPr sz="1300" b="1" i="0">
                 <a:solidFill>
                   <a:srgbClr val="FFFFFF"/>
                 </a:solidFill>
               </a:rPr>
-              <a:t>bool cyclic_fire_start(uint32_t period_us, uint64_t phase_anchor_ns);</a:t>
+              <a:t>ptp_gm_task.c
+Grandmaster state machine</a:t>
             </a:r>
           </a:p>
         </p:txBody>
@@ -7891,8 +8366,8 @@
         </p:nvSpPr>
         <p:spPr>
           <a:xfrm>
-            <a:off x="457200" y="1965960"/>
-            <a:ext cx="11247120" cy="502920"/>
+            <a:off x="4297680" y="1554480"/>
+            <a:ext cx="3474720" cy="1051560"/>
           </a:xfrm>
           <a:prstGeom prst="roundRect">
             <a:avLst/>
@@ -7931,7 +8406,8 @@
                   <a:srgbClr val="FFFFFF"/>
                 </a:solidFill>
               </a:rPr>
-              <a:t>bool cyclic_fire_start_ex(uint32_t period_us, uint64_t phase_anchor_ns, cyclic_fire_pattern_t pattern);</a:t>
+              <a:t>ptp_fol_task.c
+Follower PI servo</a:t>
             </a:r>
           </a:p>
         </p:txBody>
@@ -7944,8 +8420,115 @@
         </p:nvSpPr>
         <p:spPr>
           <a:xfrm>
-            <a:off x="457200" y="2514600"/>
-            <a:ext cx="5486400" cy="502920"/>
+            <a:off x="7863840" y="1554480"/>
+            <a:ext cx="3474720" cy="1051560"/>
+          </a:xfrm>
+          <a:prstGeom prst="roundRect">
+            <a:avLst/>
+          </a:prstGeom>
+          <a:solidFill>
+            <a:srgbClr val="0B2E4F"/>
+          </a:solidFill>
+          <a:ln>
+            <a:solidFill>
+              <a:srgbClr val="0B2E4F"/>
+            </a:solidFill>
+          </a:ln>
+        </p:spPr>
+        <p:style>
+          <a:lnRef idx="1">
+            <a:schemeClr val="accent1"/>
+          </a:lnRef>
+          <a:fillRef idx="3">
+            <a:schemeClr val="accent1"/>
+          </a:fillRef>
+          <a:effectRef idx="2">
+            <a:schemeClr val="accent1"/>
+          </a:effectRef>
+          <a:fontRef idx="minor">
+            <a:schemeClr val="lt1"/>
+          </a:fontRef>
+        </p:style>
+        <p:txBody>
+          <a:bodyPr rtlCol="0" anchor="ctr" wrap="square"/>
+          <a:lstStyle/>
+          <a:p>
+            <a:pPr algn="l"/>
+            <a:r>
+              <a:rPr sz="1300" b="1" i="0">
+                <a:solidFill>
+                  <a:srgbClr val="FFFFFF"/>
+                </a:solidFill>
+              </a:rPr>
+              <a:t>ptp_clock.c
+Nanosecond software clock</a:t>
+            </a:r>
+          </a:p>
+        </p:txBody>
+      </p:sp>
+      <p:sp>
+        <p:nvSpPr>
+          <p:cNvPr id="6" name="Rounded Rectangle 5"/>
+          <p:cNvSpPr/>
+          <p:nvPr/>
+        </p:nvSpPr>
+        <p:spPr>
+          <a:xfrm>
+            <a:off x="548640" y="2743200"/>
+            <a:ext cx="10789920" cy="868680"/>
+          </a:xfrm>
+          <a:prstGeom prst="roundRect">
+            <a:avLst/>
+          </a:prstGeom>
+          <a:solidFill>
+            <a:srgbClr val="1F77B4"/>
+          </a:solidFill>
+          <a:ln>
+            <a:solidFill>
+              <a:srgbClr val="1F77B4"/>
+            </a:solidFill>
+          </a:ln>
+        </p:spPr>
+        <p:style>
+          <a:lnRef idx="1">
+            <a:schemeClr val="accent1"/>
+          </a:lnRef>
+          <a:fillRef idx="3">
+            <a:schemeClr val="accent1"/>
+          </a:fillRef>
+          <a:effectRef idx="2">
+            <a:schemeClr val="accent1"/>
+          </a:effectRef>
+          <a:fontRef idx="minor">
+            <a:schemeClr val="lt1"/>
+          </a:fontRef>
+        </p:style>
+        <p:txBody>
+          <a:bodyPr rtlCol="0" anchor="ctr" wrap="square"/>
+          <a:lstStyle/>
+          <a:p>
+            <a:pPr algn="l"/>
+            <a:r>
+              <a:rPr sz="1300" b="1" i="0">
+                <a:solidFill>
+                  <a:srgbClr val="FFFFFF"/>
+                </a:solidFill>
+              </a:rPr>
+              <a:t>drv_lan865x_api.c — SPI MAC-PHY driver + TX/RX timestamp capture</a:t>
+            </a:r>
+          </a:p>
+        </p:txBody>
+      </p:sp>
+      <p:sp>
+        <p:nvSpPr>
+          <p:cNvPr id="7" name="Rounded Rectangle 6"/>
+          <p:cNvSpPr/>
+          <p:nvPr/>
+        </p:nvSpPr>
+        <p:spPr>
+          <a:xfrm>
+            <a:off x="548640" y="3749039"/>
+            <a:ext cx="10789920" cy="822960"/>
           </a:xfrm>
           <a:prstGeom prst="roundRect">
             <a:avLst/>
@@ -7979,26 +8562,26 @@
           <a:p>
             <a:pPr algn="l"/>
             <a:r>
-              <a:rPr sz="1300" b="1" i="0">
+              <a:rPr sz="1200" b="1" i="0">
                 <a:solidFill>
                   <a:srgbClr val="FFFFFF"/>
                 </a:solidFill>
               </a:rPr>
-              <a:t>void cyclic_fire_stop(void);</a:t>
-            </a:r>
-          </a:p>
-        </p:txBody>
-      </p:sp>
-      <p:sp>
-        <p:nvSpPr>
-          <p:cNvPr id="6" name="Rounded Rectangle 5"/>
+              <a:t>Harmony 3 TCP/IP stack  (net_10base_t1s v1.4.3)</a:t>
+            </a:r>
+          </a:p>
+        </p:txBody>
+      </p:sp>
+      <p:sp>
+        <p:nvSpPr>
+          <p:cNvPr id="8" name="Rounded Rectangle 7"/>
           <p:cNvSpPr/>
           <p:nvPr/>
         </p:nvSpPr>
         <p:spPr>
           <a:xfrm>
-            <a:off x="6217920" y="2514600"/>
-            <a:ext cx="5486400" cy="502920"/>
+            <a:off x="548640" y="4663440"/>
+            <a:ext cx="10789920" cy="822960"/>
           </a:xfrm>
           <a:prstGeom prst="roundRect">
             <a:avLst/>
@@ -8032,238 +8615,26 @@
           <a:p>
             <a:pPr algn="l"/>
             <a:r>
-              <a:rPr sz="1300" b="1" i="0">
+              <a:rPr sz="1200" b="1" i="0">
                 <a:solidFill>
                   <a:srgbClr val="FFFFFF"/>
                 </a:solidFill>
               </a:rPr>
-              <a:t>bool cyclic_fire_is_running(void);</a:t>
-            </a:r>
-          </a:p>
-        </p:txBody>
-      </p:sp>
-      <p:sp>
-        <p:nvSpPr>
-          <p:cNvPr id="7" name="Rounded Rectangle 6"/>
-          <p:cNvSpPr/>
-          <p:nvPr/>
-        </p:nvSpPr>
-        <p:spPr>
-          <a:xfrm>
-            <a:off x="457200" y="3063240"/>
-            <a:ext cx="5486400" cy="502920"/>
-          </a:xfrm>
-          <a:prstGeom prst="roundRect">
-            <a:avLst/>
-          </a:prstGeom>
-          <a:solidFill>
-            <a:srgbClr val="555555"/>
-          </a:solidFill>
-          <a:ln>
-            <a:solidFill>
-              <a:srgbClr val="555555"/>
-            </a:solidFill>
-          </a:ln>
-        </p:spPr>
-        <p:style>
-          <a:lnRef idx="1">
-            <a:schemeClr val="accent1"/>
-          </a:lnRef>
-          <a:fillRef idx="3">
-            <a:schemeClr val="accent1"/>
-          </a:fillRef>
-          <a:effectRef idx="2">
-            <a:schemeClr val="accent1"/>
-          </a:effectRef>
-          <a:fontRef idx="minor">
-            <a:schemeClr val="lt1"/>
-          </a:fontRef>
-        </p:style>
-        <p:txBody>
-          <a:bodyPr rtlCol="0" anchor="ctr" wrap="square"/>
-          <a:lstStyle/>
-          <a:p>
-            <a:pPr algn="l"/>
-            <a:r>
-              <a:rPr sz="1300" b="1" i="0">
-                <a:solidFill>
-                  <a:srgbClr val="FFFFFF"/>
-                </a:solidFill>
-              </a:rPr>
-              <a:t>uint64_t cyclic_fire_get_cycle_count(void);</a:t>
-            </a:r>
-          </a:p>
-        </p:txBody>
-      </p:sp>
-      <p:sp>
-        <p:nvSpPr>
-          <p:cNvPr id="8" name="Rounded Rectangle 7"/>
-          <p:cNvSpPr/>
-          <p:nvPr/>
-        </p:nvSpPr>
-        <p:spPr>
-          <a:xfrm>
-            <a:off x="6217920" y="3063240"/>
-            <a:ext cx="5486400" cy="502920"/>
-          </a:xfrm>
-          <a:prstGeom prst="roundRect">
-            <a:avLst/>
-          </a:prstGeom>
-          <a:solidFill>
-            <a:srgbClr val="555555"/>
-          </a:solidFill>
-          <a:ln>
-            <a:solidFill>
-              <a:srgbClr val="555555"/>
-            </a:solidFill>
-          </a:ln>
-        </p:spPr>
-        <p:style>
-          <a:lnRef idx="1">
-            <a:schemeClr val="accent1"/>
-          </a:lnRef>
-          <a:fillRef idx="3">
-            <a:schemeClr val="accent1"/>
-          </a:fillRef>
-          <a:effectRef idx="2">
-            <a:schemeClr val="accent1"/>
-          </a:effectRef>
-          <a:fontRef idx="minor">
-            <a:schemeClr val="lt1"/>
-          </a:fontRef>
-        </p:style>
-        <p:txBody>
-          <a:bodyPr rtlCol="0" anchor="ctr" wrap="square"/>
-          <a:lstStyle/>
-          <a:p>
-            <a:pPr algn="l"/>
-            <a:r>
-              <a:rPr sz="1300" b="1" i="0">
-                <a:solidFill>
-                  <a:srgbClr val="FFFFFF"/>
-                </a:solidFill>
-              </a:rPr>
-              <a:t>uint64_t cyclic_fire_get_missed_count(void);</a:t>
-            </a:r>
-          </a:p>
-        </p:txBody>
-      </p:sp>
-      <p:sp>
-        <p:nvSpPr>
-          <p:cNvPr id="9" name="Rounded Rectangle 8"/>
-          <p:cNvSpPr/>
-          <p:nvPr/>
-        </p:nvSpPr>
-        <p:spPr>
-          <a:xfrm>
-            <a:off x="457200" y="3794760"/>
-            <a:ext cx="5486400" cy="411480"/>
-          </a:xfrm>
-          <a:prstGeom prst="roundRect">
-            <a:avLst/>
-          </a:prstGeom>
-          <a:solidFill>
-            <a:srgbClr val="1F77B4"/>
-          </a:solidFill>
-          <a:ln>
-            <a:solidFill>
-              <a:srgbClr val="1F77B4"/>
-            </a:solidFill>
-          </a:ln>
-        </p:spPr>
-        <p:style>
-          <a:lnRef idx="1">
-            <a:schemeClr val="accent1"/>
-          </a:lnRef>
-          <a:fillRef idx="3">
-            <a:schemeClr val="accent1"/>
-          </a:fillRef>
-          <a:effectRef idx="2">
-            <a:schemeClr val="accent1"/>
-          </a:effectRef>
-          <a:fontRef idx="minor">
-            <a:schemeClr val="lt1"/>
-          </a:fontRef>
-        </p:style>
-        <p:txBody>
-          <a:bodyPr rtlCol="0" anchor="ctr" wrap="square"/>
-          <a:lstStyle/>
-          <a:p>
-            <a:pPr algn="l"/>
-            <a:r>
-              <a:rPr sz="1300" b="1" i="0">
-                <a:solidFill>
-                  <a:srgbClr val="FFFFFF"/>
-                </a:solidFill>
-              </a:rPr>
-              <a:t>PATTERN_SQUARE  — 50/50 rectangle (default)</a:t>
-            </a:r>
-          </a:p>
-        </p:txBody>
-      </p:sp>
-      <p:sp>
-        <p:nvSpPr>
-          <p:cNvPr id="10" name="Rounded Rectangle 9"/>
-          <p:cNvSpPr/>
-          <p:nvPr/>
-        </p:nvSpPr>
-        <p:spPr>
-          <a:xfrm>
-            <a:off x="6217920" y="3794760"/>
-            <a:ext cx="5486400" cy="411480"/>
-          </a:xfrm>
-          <a:prstGeom prst="roundRect">
-            <a:avLst/>
-          </a:prstGeom>
-          <a:solidFill>
-            <a:srgbClr val="1F77B4"/>
-          </a:solidFill>
-          <a:ln>
-            <a:solidFill>
-              <a:srgbClr val="1F77B4"/>
-            </a:solidFill>
-          </a:ln>
-        </p:spPr>
-        <p:style>
-          <a:lnRef idx="1">
-            <a:schemeClr val="accent1"/>
-          </a:lnRef>
-          <a:fillRef idx="3">
-            <a:schemeClr val="accent1"/>
-          </a:fillRef>
-          <a:effectRef idx="2">
-            <a:schemeClr val="accent1"/>
-          </a:effectRef>
-          <a:fontRef idx="minor">
-            <a:schemeClr val="lt1"/>
-          </a:fontRef>
-        </p:style>
-        <p:txBody>
-          <a:bodyPr rtlCol="0" anchor="ctr" wrap="square"/>
-          <a:lstStyle/>
-          <a:p>
-            <a:pPr algn="l"/>
-            <a:r>
-              <a:rPr sz="1300" b="1" i="0">
-                <a:solidFill>
-                  <a:srgbClr val="FFFFFF"/>
-                </a:solidFill>
-              </a:rPr>
-              <a:t>PATTERN_MARKER  — 1-high + 4-low isolated pulse</a:t>
-            </a:r>
-          </a:p>
-        </p:txBody>
-      </p:sp>
-      <p:sp>
-        <p:nvSpPr>
-          <p:cNvPr id="11" name="TextBox 10"/>
+              <a:t>ATSAME54P20A — TC0 @ 60 MHz timestamp counter, SPI master</a:t>
+            </a:r>
+          </a:p>
+        </p:txBody>
+      </p:sp>
+      <p:sp>
+        <p:nvSpPr>
+          <p:cNvPr id="9" name="TextBox 8"/>
           <p:cNvSpPr txBox="1"/>
           <p:nvPr/>
         </p:nvSpPr>
         <p:spPr>
           <a:xfrm>
-            <a:off x="457200" y="4434840"/>
-            <a:ext cx="11247120" cy="2011680"/>
+            <a:off x="548640" y="5577840"/>
+            <a:ext cx="10972800" cy="274320"/>
           </a:xfrm>
           <a:prstGeom prst="rect">
             <a:avLst/>
@@ -8271,58 +8642,18 @@
           <a:noFill/>
         </p:spPr>
         <p:txBody>
-          <a:bodyPr wrap="square">
+          <a:bodyPr wrap="none">
             <a:spAutoFit/>
           </a:bodyPr>
           <a:lstStyle/>
           <a:p>
             <a:r>
-              <a:rPr sz="1400">
-                <a:solidFill>
-                  <a:srgbClr val="0B2E4F"/>
-                </a:solidFill>
-              </a:rPr>
-              <a:t>• period_us is the FULL rectangle period — callback fires every period_us/2</a:t>
-            </a:r>
-          </a:p>
-          <a:p>
-            <a:r>
-              <a:rPr sz="1400">
-                <a:solidFill>
-                  <a:srgbClr val="0B2E4F"/>
-                </a:solidFill>
-              </a:rPr>
-              <a:t>• Default 1000 µs → 1 kHz square wave</a:t>
-            </a:r>
-          </a:p>
-          <a:p>
-            <a:r>
-              <a:rPr sz="1400">
-                <a:solidFill>
-                  <a:srgbClr val="0B2E4F"/>
-                </a:solidFill>
-              </a:rPr>
-              <a:t>• Periods below ~400 µs not recommended (half-period ≈ tfuture spin threshold)</a:t>
-            </a:r>
-          </a:p>
-          <a:p>
-            <a:r>
-              <a:rPr sz="1400">
-                <a:solidFill>
-                  <a:srgbClr val="0B2E4F"/>
-                </a:solidFill>
-              </a:rPr>
-              <a:t>• MARKER pattern isolates the rising edge — makes 'which board fires first?' unambiguous</a:t>
-            </a:r>
-          </a:p>
-          <a:p>
-            <a:r>
-              <a:rPr sz="1400">
-                <a:solidFill>
-                  <a:srgbClr val="0B2E4F"/>
-                </a:solidFill>
-              </a:rPr>
-              <a:t>• CLI wrappers: cyclic_start, cyclic_start_marker, cyclic_start_free, cyclic_stop, cyclic_status</a:t>
+              <a:rPr sz="1400" b="0" i="1">
+                <a:solidFill>
+                  <a:srgbClr val="555555"/>
+                </a:solidFill>
+              </a:rPr>
+              <a:t>Grandmaster and Follower run identical firmware — role is configuration, not code.</a:t>
             </a:r>
           </a:p>
         </p:txBody>
@@ -8361,84 +8692,93 @@
           <a:lstStyle/>
           <a:p>
             <a:r>
-              <a:t>Cyclic Fire — Wire-Level View</a:t>
-            </a:r>
-          </a:p>
-        </p:txBody>
-      </p:sp>
-      <p:pic>
-        <p:nvPicPr>
-          <p:cNvPr id="3" name="Picture 2" descr="Picture2.png"/>
-          <p:cNvPicPr>
-            <a:picLocks noChangeAspect="1"/>
-          </p:cNvPicPr>
-          <p:nvPr/>
-        </p:nvPicPr>
-        <p:blipFill>
-          <a:blip r:embed="rId2"/>
-          <a:stretch>
-            <a:fillRect/>
-          </a:stretch>
-        </p:blipFill>
-        <p:spPr>
-          <a:xfrm>
-            <a:off x="3054096" y="1325880"/>
-            <a:ext cx="6060440" cy="3657600"/>
-          </a:xfrm>
-          <a:prstGeom prst="rect">
-            <a:avLst/>
-          </a:prstGeom>
-        </p:spPr>
-      </p:pic>
-      <p:sp>
-        <p:nvSpPr>
-          <p:cNvPr id="4" name="TextBox 3"/>
-          <p:cNvSpPr txBox="1"/>
-          <p:nvPr/>
-        </p:nvSpPr>
-        <p:spPr>
-          <a:xfrm>
-            <a:off x="548640" y="5074920"/>
-            <a:ext cx="11064240" cy="1463040"/>
-          </a:xfrm>
-          <a:prstGeom prst="rect">
-            <a:avLst/>
-          </a:prstGeom>
-          <a:noFill/>
-        </p:spPr>
-        <p:txBody>
-          <a:bodyPr wrap="square">
-            <a:spAutoFit/>
-          </a:bodyPr>
-          <a:lstStyle/>
-          <a:p>
-            <a:r>
-              <a:rPr sz="1400" b="1">
-                <a:solidFill>
-                  <a:srgbClr val="0B2E4F"/>
-                </a:solidFill>
-              </a:rPr>
-              <a:t>Saleae Logic 2 capture — Ch0 (top) = Grandmaster PD10,  Ch1 (bottom) = Follower PD10.</a:t>
-            </a:r>
-          </a:p>
-          <a:p>
-            <a:r>
-              <a:rPr sz="1400" b="0">
-                <a:solidFill>
-                  <a:srgbClr val="0B2E4F"/>
-                </a:solidFill>
-              </a:rPr>
-              <a:t>MARKER pattern: 1 high half-period + 9 low half-periods → one isolated rising edge every 5 full periods.</a:t>
-            </a:r>
-          </a:p>
-          <a:p>
-            <a:r>
-              <a:rPr sz="1400" b="0">
-                <a:solidFill>
-                  <a:srgbClr val="0B2E4F"/>
-                </a:solidFill>
-              </a:rPr>
-              <a:t>Both channels fire coincident edges over 0.3 s — visible evidence that the two boards share a single PTP time base.</a:t>
+              <a:t>Cyclic Fire — What Is It?</a:t>
+            </a:r>
+          </a:p>
+        </p:txBody>
+      </p:sp>
+      <p:sp>
+        <p:nvSpPr>
+          <p:cNvPr id="3" name="Content Placeholder 2"/>
+          <p:cNvSpPr>
+            <a:spLocks noGrp="1"/>
+          </p:cNvSpPr>
+          <p:nvPr>
+            <p:ph idx="13" sz="quarter"/>
+          </p:nvPr>
+        </p:nvSpPr>
+        <p:spPr/>
+        <p:txBody>
+          <a:bodyPr/>
+          <a:lstStyle/>
+          <a:p>
+            <a:pPr/>
+            <a:r>
+              <a:rPr sz="1800"/>
+              <a:t>A firmware module that fires a periodic GPIO pulse train on PD10</a:t>
+            </a:r>
+          </a:p>
+          <a:p>
+            <a:pPr lvl="1"/>
+            <a:r>
+              <a:rPr sz="1600"/>
+              <a:t>Pin sits on the EXT1 Xplained-Pro header — directly scope-clippable</a:t>
+            </a:r>
+          </a:p>
+          <a:p>
+            <a:pPr/>
+            <a:r>
+              <a:rPr sz="1800"/>
+              <a:t>Each pulse edge is scheduled against the PTP software clock, not a local timer</a:t>
+            </a:r>
+          </a:p>
+          <a:p>
+            <a:pPr lvl="1"/>
+            <a:r>
+              <a:rPr sz="1600"/>
+              <a:t>Implemented with tfuture — single-shot timer re-armed from its own callback</a:t>
+            </a:r>
+          </a:p>
+          <a:p>
+            <a:pPr/>
+            <a:r>
+              <a:rPr sz="1800"/>
+              <a:t>The scheduling time is given in absolute PTP wall-clock nanoseconds</a:t>
+            </a:r>
+          </a:p>
+          <a:p>
+            <a:pPr lvl="1"/>
+            <a:r>
+              <a:rPr sz="1600"/>
+              <a:t>cyclic_fire_start(period_us, phase_anchor_ns)</a:t>
+            </a:r>
+          </a:p>
+          <a:p>
+            <a:pPr lvl="1"/>
+            <a:r>
+              <a:rPr sz="1600"/>
+              <a:t>phase_anchor_ns = the PTP moment at which the very first edge should fire</a:t>
+            </a:r>
+          </a:p>
+          <a:p>
+            <a:pPr/>
+            <a:r>
+              <a:rPr sz="1800"/>
+              <a:t>Identical firmware, identical API call on both boards</a:t>
+            </a:r>
+          </a:p>
+          <a:p>
+            <a:pPr lvl="1"/>
+            <a:r>
+              <a:rPr sz="1600"/>
+              <a:t>→ a shared anchor_ns produces wire-level coincident edges across boards</a:t>
+            </a:r>
+          </a:p>
+          <a:p>
+            <a:pPr/>
+            <a:r>
+              <a:rPr sz="1800"/>
+              <a:t>A CPU-cheap, direct-from-wire way to observe whether two PTP clocks really agree</a:t>
             </a:r>
           </a:p>
         </p:txBody>
@@ -8477,84 +8817,100 @@
           <a:lstStyle/>
           <a:p>
             <a:r>
-              <a:t>Cyclic Fire — Zoom-In: Cross-Board Edge Delta</a:t>
-            </a:r>
-          </a:p>
-        </p:txBody>
-      </p:sp>
-      <p:pic>
-        <p:nvPicPr>
-          <p:cNvPr id="3" name="Picture 2" descr="Picture3.png"/>
-          <p:cNvPicPr>
-            <a:picLocks noChangeAspect="1"/>
-          </p:cNvPicPr>
-          <p:nvPr/>
-        </p:nvPicPr>
-        <p:blipFill>
-          <a:blip r:embed="rId2"/>
-          <a:stretch>
-            <a:fillRect/>
-          </a:stretch>
-        </p:blipFill>
-        <p:spPr>
-          <a:xfrm>
-            <a:off x="3054096" y="1325880"/>
-            <a:ext cx="6080760" cy="3657600"/>
-          </a:xfrm>
-          <a:prstGeom prst="rect">
-            <a:avLst/>
-          </a:prstGeom>
-        </p:spPr>
-      </p:pic>
-      <p:sp>
-        <p:nvSpPr>
-          <p:cNvPr id="4" name="TextBox 3"/>
-          <p:cNvSpPr txBox="1"/>
-          <p:nvPr/>
-        </p:nvSpPr>
-        <p:spPr>
-          <a:xfrm>
-            <a:off x="548640" y="5074920"/>
-            <a:ext cx="11064240" cy="1463040"/>
-          </a:xfrm>
-          <a:prstGeom prst="rect">
-            <a:avLst/>
-          </a:prstGeom>
-          <a:noFill/>
-        </p:spPr>
-        <p:txBody>
-          <a:bodyPr wrap="square">
-            <a:spAutoFit/>
-          </a:bodyPr>
-          <a:lstStyle/>
-          <a:p>
-            <a:r>
-              <a:rPr sz="1400" b="1">
-                <a:solidFill>
-                  <a:srgbClr val="0B2E4F"/>
-                </a:solidFill>
-              </a:rPr>
-              <a:t>Zoomed Logic 2 view of a single MARKER pulse pair  (period_us = 5000 → 20 % duty, 40 Hz).</a:t>
-            </a:r>
-          </a:p>
-          <a:p>
-            <a:r>
-              <a:rPr sz="1400" b="0">
-                <a:solidFill>
-                  <a:srgbClr val="0B2E4F"/>
-                </a:solidFill>
-              </a:rPr>
-              <a:t>Cursor tool ΔT = 34.98 µs — time between the Grandmaster rising edge (Ch0) and the Follower rising edge (Ch1).</a:t>
-            </a:r>
-          </a:p>
-          <a:p>
-            <a:r>
-              <a:rPr sz="1400" b="0">
-                <a:solidFill>
-                  <a:srgbClr val="0B2E4F"/>
-                </a:solidFill>
-              </a:rPr>
-              <a:t>Well inside the 100 µs product window — this single wire-level frame corroborates the automated 10 µs median statistic.</a:t>
+              <a:t>Cyclic Fire — What You Can Achieve</a:t>
+            </a:r>
+          </a:p>
+        </p:txBody>
+      </p:sp>
+      <p:sp>
+        <p:nvSpPr>
+          <p:cNvPr id="3" name="Content Placeholder 2"/>
+          <p:cNvSpPr>
+            <a:spLocks noGrp="1"/>
+          </p:cNvSpPr>
+          <p:nvPr>
+            <p:ph idx="13" sz="quarter"/>
+          </p:nvPr>
+        </p:nvSpPr>
+        <p:spPr/>
+        <p:txBody>
+          <a:bodyPr/>
+          <a:lstStyle/>
+          <a:p>
+            <a:pPr/>
+            <a:r>
+              <a:rPr sz="1800"/>
+              <a:t>Sync quality measurement: cross-board rising-edge delta quantifies PTP accuracy</a:t>
+            </a:r>
+          </a:p>
+          <a:p>
+            <a:pPr lvl="1"/>
+            <a:r>
+              <a:rPr sz="1600"/>
+              <a:t>Median → static bias (calibration target)</a:t>
+            </a:r>
+          </a:p>
+          <a:p>
+            <a:pPr lvl="1"/>
+            <a:r>
+              <a:rPr sz="1600"/>
+              <a:t>MAD / extrema → short-term wander, filter behaviour</a:t>
+            </a:r>
+          </a:p>
+          <a:p>
+            <a:pPr/>
+            <a:r>
+              <a:rPr sz="1800"/>
+              <a:t>Calibration feedback loop: run test → read D → update anchor offset → rerun</a:t>
+            </a:r>
+          </a:p>
+          <a:p>
+            <a:pPr/>
+            <a:r>
+              <a:rPr sz="1800"/>
+              <a:t>PTP regression test: a single gated CI metric (|median| + MAD ≤ 100 µs)</a:t>
+            </a:r>
+          </a:p>
+          <a:p>
+            <a:pPr/>
+            <a:r>
+              <a:rPr sz="1800"/>
+              <a:t>Sub-µs demonstration target: visible proof that two independent MCUs tick together</a:t>
+            </a:r>
+          </a:p>
+          <a:p>
+            <a:pPr/>
+            <a:r>
+              <a:rPr sz="1800"/>
+              <a:t>Distributed actuation reference: template for real coordinated outputs</a:t>
+            </a:r>
+          </a:p>
+          <a:p>
+            <a:pPr lvl="1"/>
+            <a:r>
+              <a:rPr sz="1600"/>
+              <a:t>Sensor sampling on N nodes at the same nanosecond</a:t>
+            </a:r>
+          </a:p>
+          <a:p>
+            <a:pPr lvl="1"/>
+            <a:r>
+              <a:rPr sz="1600"/>
+              <a:t>Time-slotted TX windows (TDMA over T1S)</a:t>
+            </a:r>
+          </a:p>
+          <a:p>
+            <a:pPr lvl="1"/>
+            <a:r>
+              <a:rPr sz="1600"/>
+              <a:t>Synchronised ADC trigger / actuator pulse</a:t>
+            </a:r>
+          </a:p>
+          <a:p>
+            <a:pPr/>
+            <a:r>
+              <a:rPr sz="1800"/>
+              <a:t>Failure detection: PLCA starvation, MAC wedge, clock drift all show up as edge drift</a:t>
             </a:r>
           </a:p>
         </p:txBody>
@@ -8593,7 +8949,7 @@
           <a:lstStyle/>
           <a:p>
             <a:r>
-              <a:t>PTP_CLOCK — Application API for PTP Time</a:t>
+              <a:t>Cyclic Fire — API &amp; Output Patterns</a:t>
             </a:r>
           </a:p>
         </p:txBody>
@@ -8641,12 +8997,12 @@
           <a:p>
             <a:pPr algn="l"/>
             <a:r>
-              <a:rPr sz="1300" b="1" i="0">
+              <a:rPr sz="1400" b="1" i="0">
                 <a:solidFill>
                   <a:srgbClr val="FFFFFF"/>
                 </a:solidFill>
               </a:rPr>
-              <a:t>uint64_t PTP_CLOCK_GetTime_ns(void);         // current wall-clock, interpolated</a:t>
+              <a:t>bool cyclic_fire_start(uint32_t period_us, uint64_t phase_anchor_ns);</a:t>
             </a:r>
           </a:p>
         </p:txBody>
@@ -8699,7 +9055,7 @@
                   <a:srgbClr val="FFFFFF"/>
                 </a:solidFill>
               </a:rPr>
-              <a:t>bool     PTP_CLOCK_IsValid(void);            // true once first anchor was set</a:t>
+              <a:t>bool cyclic_fire_start_ex(uint32_t period_us, uint64_t phase_anchor_ns, cyclic_fire_pattern_t pattern);</a:t>
             </a:r>
           </a:p>
         </p:txBody>
@@ -8713,7 +9069,7 @@
         <p:spPr>
           <a:xfrm>
             <a:off x="457200" y="2514600"/>
-            <a:ext cx="11247120" cy="502920"/>
+            <a:ext cx="5486400" cy="502920"/>
           </a:xfrm>
           <a:prstGeom prst="roundRect">
             <a:avLst/>
@@ -8752,7 +9108,7 @@
                   <a:srgbClr val="FFFFFF"/>
                 </a:solidFill>
               </a:rPr>
-              <a:t>int32_t  PTP_CLOCK_GetDriftPPB(void);        // measured MCU vs PTP rate offset</a:t>
+              <a:t>void cyclic_fire_stop(void);</a:t>
             </a:r>
           </a:p>
         </p:txBody>
@@ -8765,8 +9121,8 @@
         </p:nvSpPr>
         <p:spPr>
           <a:xfrm>
-            <a:off x="457200" y="3063240"/>
-            <a:ext cx="11247120" cy="502920"/>
+            <a:off x="6217920" y="2514600"/>
+            <a:ext cx="5486400" cy="502920"/>
           </a:xfrm>
           <a:prstGeom prst="roundRect">
             <a:avLst/>
@@ -8805,21 +9161,233 @@
                   <a:srgbClr val="FFFFFF"/>
                 </a:solidFill>
               </a:rPr>
-              <a:t>void     PTP_CLOCK_ForceSet(uint64_t ns);    // standalone set (no PTP sync)</a:t>
-            </a:r>
-          </a:p>
-        </p:txBody>
-      </p:sp>
-      <p:sp>
-        <p:nvSpPr>
-          <p:cNvPr id="7" name="TextBox 6"/>
+              <a:t>bool cyclic_fire_is_running(void);</a:t>
+            </a:r>
+          </a:p>
+        </p:txBody>
+      </p:sp>
+      <p:sp>
+        <p:nvSpPr>
+          <p:cNvPr id="7" name="Rounded Rectangle 6"/>
+          <p:cNvSpPr/>
+          <p:nvPr/>
+        </p:nvSpPr>
+        <p:spPr>
+          <a:xfrm>
+            <a:off x="457200" y="3063240"/>
+            <a:ext cx="5486400" cy="502920"/>
+          </a:xfrm>
+          <a:prstGeom prst="roundRect">
+            <a:avLst/>
+          </a:prstGeom>
+          <a:solidFill>
+            <a:srgbClr val="555555"/>
+          </a:solidFill>
+          <a:ln>
+            <a:solidFill>
+              <a:srgbClr val="555555"/>
+            </a:solidFill>
+          </a:ln>
+        </p:spPr>
+        <p:style>
+          <a:lnRef idx="1">
+            <a:schemeClr val="accent1"/>
+          </a:lnRef>
+          <a:fillRef idx="3">
+            <a:schemeClr val="accent1"/>
+          </a:fillRef>
+          <a:effectRef idx="2">
+            <a:schemeClr val="accent1"/>
+          </a:effectRef>
+          <a:fontRef idx="minor">
+            <a:schemeClr val="lt1"/>
+          </a:fontRef>
+        </p:style>
+        <p:txBody>
+          <a:bodyPr rtlCol="0" anchor="ctr" wrap="square"/>
+          <a:lstStyle/>
+          <a:p>
+            <a:pPr algn="l"/>
+            <a:r>
+              <a:rPr sz="1300" b="1" i="0">
+                <a:solidFill>
+                  <a:srgbClr val="FFFFFF"/>
+                </a:solidFill>
+              </a:rPr>
+              <a:t>uint64_t cyclic_fire_get_cycle_count(void);</a:t>
+            </a:r>
+          </a:p>
+        </p:txBody>
+      </p:sp>
+      <p:sp>
+        <p:nvSpPr>
+          <p:cNvPr id="8" name="Rounded Rectangle 7"/>
+          <p:cNvSpPr/>
+          <p:nvPr/>
+        </p:nvSpPr>
+        <p:spPr>
+          <a:xfrm>
+            <a:off x="6217920" y="3063240"/>
+            <a:ext cx="5486400" cy="502920"/>
+          </a:xfrm>
+          <a:prstGeom prst="roundRect">
+            <a:avLst/>
+          </a:prstGeom>
+          <a:solidFill>
+            <a:srgbClr val="555555"/>
+          </a:solidFill>
+          <a:ln>
+            <a:solidFill>
+              <a:srgbClr val="555555"/>
+            </a:solidFill>
+          </a:ln>
+        </p:spPr>
+        <p:style>
+          <a:lnRef idx="1">
+            <a:schemeClr val="accent1"/>
+          </a:lnRef>
+          <a:fillRef idx="3">
+            <a:schemeClr val="accent1"/>
+          </a:fillRef>
+          <a:effectRef idx="2">
+            <a:schemeClr val="accent1"/>
+          </a:effectRef>
+          <a:fontRef idx="minor">
+            <a:schemeClr val="lt1"/>
+          </a:fontRef>
+        </p:style>
+        <p:txBody>
+          <a:bodyPr rtlCol="0" anchor="ctr" wrap="square"/>
+          <a:lstStyle/>
+          <a:p>
+            <a:pPr algn="l"/>
+            <a:r>
+              <a:rPr sz="1300" b="1" i="0">
+                <a:solidFill>
+                  <a:srgbClr val="FFFFFF"/>
+                </a:solidFill>
+              </a:rPr>
+              <a:t>uint64_t cyclic_fire_get_missed_count(void);</a:t>
+            </a:r>
+          </a:p>
+        </p:txBody>
+      </p:sp>
+      <p:sp>
+        <p:nvSpPr>
+          <p:cNvPr id="9" name="Rounded Rectangle 8"/>
+          <p:cNvSpPr/>
+          <p:nvPr/>
+        </p:nvSpPr>
+        <p:spPr>
+          <a:xfrm>
+            <a:off x="457200" y="3794760"/>
+            <a:ext cx="5486400" cy="411480"/>
+          </a:xfrm>
+          <a:prstGeom prst="roundRect">
+            <a:avLst/>
+          </a:prstGeom>
+          <a:solidFill>
+            <a:srgbClr val="1F77B4"/>
+          </a:solidFill>
+          <a:ln>
+            <a:solidFill>
+              <a:srgbClr val="1F77B4"/>
+            </a:solidFill>
+          </a:ln>
+        </p:spPr>
+        <p:style>
+          <a:lnRef idx="1">
+            <a:schemeClr val="accent1"/>
+          </a:lnRef>
+          <a:fillRef idx="3">
+            <a:schemeClr val="accent1"/>
+          </a:fillRef>
+          <a:effectRef idx="2">
+            <a:schemeClr val="accent1"/>
+          </a:effectRef>
+          <a:fontRef idx="minor">
+            <a:schemeClr val="lt1"/>
+          </a:fontRef>
+        </p:style>
+        <p:txBody>
+          <a:bodyPr rtlCol="0" anchor="ctr" wrap="square"/>
+          <a:lstStyle/>
+          <a:p>
+            <a:pPr algn="l"/>
+            <a:r>
+              <a:rPr sz="1300" b="1" i="0">
+                <a:solidFill>
+                  <a:srgbClr val="FFFFFF"/>
+                </a:solidFill>
+              </a:rPr>
+              <a:t>PATTERN_SQUARE  — 50/50 rectangle (default)</a:t>
+            </a:r>
+          </a:p>
+        </p:txBody>
+      </p:sp>
+      <p:sp>
+        <p:nvSpPr>
+          <p:cNvPr id="10" name="Rounded Rectangle 9"/>
+          <p:cNvSpPr/>
+          <p:nvPr/>
+        </p:nvSpPr>
+        <p:spPr>
+          <a:xfrm>
+            <a:off x="6217920" y="3794760"/>
+            <a:ext cx="5486400" cy="411480"/>
+          </a:xfrm>
+          <a:prstGeom prst="roundRect">
+            <a:avLst/>
+          </a:prstGeom>
+          <a:solidFill>
+            <a:srgbClr val="1F77B4"/>
+          </a:solidFill>
+          <a:ln>
+            <a:solidFill>
+              <a:srgbClr val="1F77B4"/>
+            </a:solidFill>
+          </a:ln>
+        </p:spPr>
+        <p:style>
+          <a:lnRef idx="1">
+            <a:schemeClr val="accent1"/>
+          </a:lnRef>
+          <a:fillRef idx="3">
+            <a:schemeClr val="accent1"/>
+          </a:fillRef>
+          <a:effectRef idx="2">
+            <a:schemeClr val="accent1"/>
+          </a:effectRef>
+          <a:fontRef idx="minor">
+            <a:schemeClr val="lt1"/>
+          </a:fontRef>
+        </p:style>
+        <p:txBody>
+          <a:bodyPr rtlCol="0" anchor="ctr" wrap="square"/>
+          <a:lstStyle/>
+          <a:p>
+            <a:pPr algn="l"/>
+            <a:r>
+              <a:rPr sz="1300" b="1" i="0">
+                <a:solidFill>
+                  <a:srgbClr val="FFFFFF"/>
+                </a:solidFill>
+              </a:rPr>
+              <a:t>PATTERN_MARKER  — 1-high + 4-low isolated pulse</a:t>
+            </a:r>
+          </a:p>
+        </p:txBody>
+      </p:sp>
+      <p:sp>
+        <p:nvSpPr>
+          <p:cNvPr id="11" name="TextBox 10"/>
           <p:cNvSpPr txBox="1"/>
           <p:nvPr/>
         </p:nvSpPr>
         <p:spPr>
           <a:xfrm>
-            <a:off x="457200" y="3794760"/>
-            <a:ext cx="11247120" cy="2560320"/>
+            <a:off x="457200" y="4434840"/>
+            <a:ext cx="11247120" cy="2011680"/>
           </a:xfrm>
           <a:prstGeom prst="rect">
             <a:avLst/>
@@ -8838,7 +9406,7 @@
                   <a:srgbClr val="0B2E4F"/>
                 </a:solidFill>
               </a:rPr>
-              <a:t>• Any context — no SPI, no mutex, no blocking.  Safe from ISR and main loop.</a:t>
+              <a:t>• period_us is the FULL rectangle period — callback fires every period_us/2</a:t>
             </a:r>
           </a:p>
           <a:p>
@@ -8848,7 +9416,7 @@
                   <a:srgbClr val="0B2E4F"/>
                 </a:solidFill>
               </a:rPr>
-              <a:t>• Interpolates between anchors via TC0 (60 MHz) + drift IIR filter.</a:t>
+              <a:t>• Default 1000 µs → 1 kHz square wave</a:t>
             </a:r>
           </a:p>
           <a:p>
@@ -8858,7 +9426,7 @@
                   <a:srgbClr val="0B2E4F"/>
                 </a:solidFill>
               </a:rPr>
-              <a:t>• One anchor is refreshed on every PTP Sync (≈ 8 Hz).</a:t>
+              <a:t>• Periods below ~400 µs not recommended (half-period ≈ tfuture spin threshold)</a:t>
             </a:r>
           </a:p>
           <a:p>
@@ -8868,7 +9436,7 @@
                   <a:srgbClr val="0B2E4F"/>
                 </a:solidFill>
               </a:rPr>
-              <a:t>• Returns 0 until the first anchor has been set — always check PTP_CLOCK_IsValid() first.</a:t>
+              <a:t>• MARKER pattern isolates the rising edge — makes 'which board fires first?' unambiguous</a:t>
             </a:r>
           </a:p>
           <a:p>
@@ -8878,17 +9446,7 @@
                   <a:srgbClr val="0B2E4F"/>
                 </a:solidFill>
               </a:rPr>
-              <a:t>• GM and Follower expose the same API — application code is role-agnostic.</a:t>
-            </a:r>
-          </a:p>
-          <a:p>
-            <a:r>
-              <a:rPr sz="1400">
-                <a:solidFill>
-                  <a:srgbClr val="0B2E4F"/>
-                </a:solidFill>
-              </a:rPr>
-              <a:t>• Resolution ≈ 16.7 ns (TC0 tick); short-term jitter dominated by filter wander.</a:t>
+              <a:t>• CLI wrappers: cyclic_start, cyclic_start_marker, cyclic_start_free, cyclic_stop, cyclic_status</a:t>
             </a:r>
           </a:p>
         </p:txBody>
@@ -8927,21 +9485,45 @@
           <a:lstStyle/>
           <a:p>
             <a:r>
-              <a:t>PTP_CLOCK — Logging Firmware Events</a:t>
-            </a:r>
-          </a:p>
-        </p:txBody>
-      </p:sp>
-      <p:sp>
-        <p:nvSpPr>
-          <p:cNvPr id="3" name="TextBox 2"/>
+              <a:t>Cyclic Fire — Wire-Level View</a:t>
+            </a:r>
+          </a:p>
+        </p:txBody>
+      </p:sp>
+      <p:pic>
+        <p:nvPicPr>
+          <p:cNvPr id="3" name="Picture 2" descr="Picture2.png"/>
+          <p:cNvPicPr>
+            <a:picLocks noChangeAspect="1"/>
+          </p:cNvPicPr>
+          <p:nvPr/>
+        </p:nvPicPr>
+        <p:blipFill>
+          <a:blip r:embed="rId2"/>
+          <a:stretch>
+            <a:fillRect/>
+          </a:stretch>
+        </p:blipFill>
+        <p:spPr>
+          <a:xfrm>
+            <a:off x="3054096" y="1325880"/>
+            <a:ext cx="6060440" cy="3657600"/>
+          </a:xfrm>
+          <a:prstGeom prst="rect">
+            <a:avLst/>
+          </a:prstGeom>
+        </p:spPr>
+      </p:pic>
+      <p:sp>
+        <p:nvSpPr>
+          <p:cNvPr id="4" name="TextBox 3"/>
           <p:cNvSpPr txBox="1"/>
           <p:nvPr/>
         </p:nvSpPr>
         <p:spPr>
           <a:xfrm>
-            <a:off x="457200" y="1371600"/>
-            <a:ext cx="11247120" cy="3474720"/>
+            <a:off x="548640" y="5074920"/>
+            <a:ext cx="11064240" cy="1463040"/>
           </a:xfrm>
           <a:prstGeom prst="rect">
             <a:avLst/>
@@ -8955,229 +9537,32 @@
           <a:lstStyle/>
           <a:p>
             <a:r>
-              <a:rPr sz="1400">
+              <a:rPr sz="1400" b="1">
                 <a:solidFill>
                   <a:srgbClr val="0B2E4F"/>
                 </a:solidFill>
-                <a:latin typeface="Consolas"/>
-              </a:rPr>
-              <a:t>#include "ptp_clock.h"</a:t>
-            </a:r>
-          </a:p>
-          <a:p>
-            <a:r>
-              <a:rPr sz="1400">
+              </a:rPr>
+              <a:t>Saleae Logic 2 capture — Ch0 (top) = Grandmaster PD10,  Ch1 (bottom) = Follower PD10.</a:t>
+            </a:r>
+          </a:p>
+          <a:p>
+            <a:r>
+              <a:rPr sz="1400" b="0">
                 <a:solidFill>
                   <a:srgbClr val="0B2E4F"/>
                 </a:solidFill>
-                <a:latin typeface="Consolas"/>
-              </a:rPr>
-              <a:t> </a:t>
-            </a:r>
-          </a:p>
-          <a:p>
-            <a:r>
-              <a:rPr sz="1400">
+              </a:rPr>
+              <a:t>MARKER pattern: 1 high half-period + 9 low half-periods → one isolated rising edge every 5 full periods.</a:t>
+            </a:r>
+          </a:p>
+          <a:p>
+            <a:r>
+              <a:rPr sz="1400" b="0">
                 <a:solidFill>
                   <a:srgbClr val="0B2E4F"/>
                 </a:solidFill>
-                <a:latin typeface="Consolas"/>
-              </a:rPr>
-              <a:t>static void on_frame_received(void) {</a:t>
-            </a:r>
-          </a:p>
-          <a:p>
-            <a:r>
-              <a:rPr sz="1400">
-                <a:solidFill>
-                  <a:srgbClr val="0B2E4F"/>
-                </a:solidFill>
-                <a:latin typeface="Consolas"/>
-              </a:rPr>
-              <a:t>    uint64_t t_ns = PTP_CLOCK_GetTime_ns();     // synchronised wall-clock</a:t>
-            </a:r>
-          </a:p>
-          <a:p>
-            <a:r>
-              <a:rPr sz="1400">
-                <a:solidFill>
-                  <a:srgbClr val="0B2E4F"/>
-                </a:solidFill>
-                <a:latin typeface="Consolas"/>
-              </a:rPr>
-              <a:t>    SYS_CONSOLE_PRINT("RX %llu.%09llu  seq=%u\r\n",</a:t>
-            </a:r>
-          </a:p>
-          <a:p>
-            <a:r>
-              <a:rPr sz="1400">
-                <a:solidFill>
-                  <a:srgbClr val="0B2E4F"/>
-                </a:solidFill>
-                <a:latin typeface="Consolas"/>
-              </a:rPr>
-              <a:t>                      t_ns / 1000000000ull,</a:t>
-            </a:r>
-          </a:p>
-          <a:p>
-            <a:r>
-              <a:rPr sz="1400">
-                <a:solidFill>
-                  <a:srgbClr val="0B2E4F"/>
-                </a:solidFill>
-                <a:latin typeface="Consolas"/>
-              </a:rPr>
-              <a:t>                      t_ns % 1000000000ull,</a:t>
-            </a:r>
-          </a:p>
-          <a:p>
-            <a:r>
-              <a:rPr sz="1400">
-                <a:solidFill>
-                  <a:srgbClr val="0B2E4F"/>
-                </a:solidFill>
-                <a:latin typeface="Consolas"/>
-              </a:rPr>
-              <a:t>                      rx_seq);</a:t>
-            </a:r>
-          </a:p>
-          <a:p>
-            <a:r>
-              <a:rPr sz="1400">
-                <a:solidFill>
-                  <a:srgbClr val="0B2E4F"/>
-                </a:solidFill>
-                <a:latin typeface="Consolas"/>
-              </a:rPr>
-              <a:t>}</a:t>
-            </a:r>
-          </a:p>
-          <a:p>
-            <a:r>
-              <a:rPr sz="1400">
-                <a:solidFill>
-                  <a:srgbClr val="0B2E4F"/>
-                </a:solidFill>
-                <a:latin typeface="Consolas"/>
-              </a:rPr>
-              <a:t> </a:t>
-            </a:r>
-          </a:p>
-          <a:p>
-            <a:r>
-              <a:rPr sz="1400">
-                <a:solidFill>
-                  <a:srgbClr val="0B2E4F"/>
-                </a:solidFill>
-                <a:latin typeface="Consolas"/>
-              </a:rPr>
-              <a:t>void actuator_fire(uint64_t at_ns) {</a:t>
-            </a:r>
-          </a:p>
-          <a:p>
-            <a:r>
-              <a:rPr sz="1400">
-                <a:solidFill>
-                  <a:srgbClr val="0B2E4F"/>
-                </a:solidFill>
-                <a:latin typeface="Consolas"/>
-              </a:rPr>
-              <a:t>    while (PTP_CLOCK_GetTime_ns() &lt; at_ns) { /* tight spin */ }</a:t>
-            </a:r>
-          </a:p>
-          <a:p>
-            <a:r>
-              <a:rPr sz="1400">
-                <a:solidFill>
-                  <a:srgbClr val="0B2E4F"/>
-                </a:solidFill>
-                <a:latin typeface="Consolas"/>
-              </a:rPr>
-              <a:t>    GPIO_PinSet(ACT_PIN);</a:t>
-            </a:r>
-          </a:p>
-          <a:p>
-            <a:r>
-              <a:rPr sz="1400">
-                <a:solidFill>
-                  <a:srgbClr val="0B2E4F"/>
-                </a:solidFill>
-                <a:latin typeface="Consolas"/>
-              </a:rPr>
-              <a:t>}</a:t>
-            </a:r>
-          </a:p>
-        </p:txBody>
-      </p:sp>
-      <p:sp>
-        <p:nvSpPr>
-          <p:cNvPr id="4" name="TextBox 3"/>
-          <p:cNvSpPr txBox="1"/>
-          <p:nvPr/>
-        </p:nvSpPr>
-        <p:spPr>
-          <a:xfrm>
-            <a:off x="457200" y="4846320"/>
-            <a:ext cx="11247120" cy="1645920"/>
-          </a:xfrm>
-          <a:prstGeom prst="rect">
-            <a:avLst/>
-          </a:prstGeom>
-          <a:noFill/>
-        </p:spPr>
-        <p:txBody>
-          <a:bodyPr wrap="square">
-            <a:spAutoFit/>
-          </a:bodyPr>
-          <a:lstStyle/>
-          <a:p>
-            <a:r>
-              <a:rPr sz="1300">
-                <a:solidFill>
-                  <a:srgbClr val="0B2E4F"/>
-                </a:solidFill>
-              </a:rPr>
-              <a:t>• Pattern: call PTP_CLOCK_GetTime_ns() at the moment of interest, store alongside the event.</a:t>
-            </a:r>
-          </a:p>
-          <a:p>
-            <a:r>
-              <a:rPr sz="1300">
-                <a:solidFill>
-                  <a:srgbClr val="0B2E4F"/>
-                </a:solidFill>
-              </a:rPr>
-              <a:t>• Log to console, ring buffer, or CLI — the timestamp is portable across boards.</a:t>
-            </a:r>
-          </a:p>
-          <a:p>
-            <a:r>
-              <a:rPr sz="1300">
-                <a:solidFill>
-                  <a:srgbClr val="0B2E4F"/>
-                </a:solidFill>
-              </a:rPr>
-              <a:t>• For event correlation across nodes: compare two logs directly; no relative-time conversion.</a:t>
-            </a:r>
-          </a:p>
-          <a:p>
-            <a:r>
-              <a:rPr sz="1300">
-                <a:solidFill>
-                  <a:srgbClr val="0B2E4F"/>
-                </a:solidFill>
-              </a:rPr>
-              <a:t>• For scheduled actions: give the target time to the action, spin or sleep until reached.</a:t>
-            </a:r>
-          </a:p>
-          <a:p>
-            <a:r>
-              <a:rPr sz="1300">
-                <a:solidFill>
-                  <a:srgbClr val="0B2E4F"/>
-                </a:solidFill>
-              </a:rPr>
-              <a:t>• Always guard with PTP_CLOCK_IsValid() during startup to avoid 0-timestamps.</a:t>
+              </a:rPr>
+              <a:t>Both channels fire coincident edges over 0.3 s — visible evidence that the two boards share a single PTP time base.</a:t>
             </a:r>
           </a:p>
         </p:txBody>
@@ -9216,107 +9601,84 @@
           <a:lstStyle/>
           <a:p>
             <a:r>
-              <a:t>PTP_CLOCK — Cross-Board Correlation</a:t>
-            </a:r>
-          </a:p>
-        </p:txBody>
-      </p:sp>
-      <p:sp>
-        <p:nvSpPr>
-          <p:cNvPr id="3" name="Content Placeholder 2"/>
-          <p:cNvSpPr>
-            <a:spLocks noGrp="1"/>
-          </p:cNvSpPr>
-          <p:nvPr>
-            <p:ph idx="13" sz="quarter"/>
-          </p:nvPr>
-        </p:nvSpPr>
-        <p:spPr/>
-        <p:txBody>
-          <a:bodyPr/>
-          <a:lstStyle/>
-          <a:p>
-            <a:pPr/>
-            <a:r>
-              <a:rPr sz="1800"/>
-              <a:t>Every event stamped with PTP_CLOCK_GetTime_ns() lives on a common timeline</a:t>
-            </a:r>
-          </a:p>
-          <a:p>
-            <a:pPr/>
-            <a:r>
-              <a:rPr sz="1800"/>
-              <a:t>Typical workflows the API enables:</a:t>
-            </a:r>
-          </a:p>
-          <a:p>
-            <a:pPr lvl="1"/>
-            <a:r>
-              <a:rPr sz="1600"/>
-              <a:t>Distributed trace — collect logs from N nodes, sort by PTP timestamp</a:t>
-            </a:r>
-          </a:p>
-          <a:p>
-            <a:pPr lvl="1"/>
-            <a:r>
-              <a:rPr sz="1600"/>
-              <a:t>Race analysis — precise order of events on nodes A, B, C</a:t>
-            </a:r>
-          </a:p>
-          <a:p>
-            <a:pPr lvl="1"/>
-            <a:r>
-              <a:rPr sz="1600"/>
-              <a:t>Latency measurement — PTP_CLOCK_ns at TX on A vs RX on B</a:t>
-            </a:r>
-          </a:p>
-          <a:p>
-            <a:pPr lvl="1"/>
-            <a:r>
-              <a:rPr sz="1600"/>
-              <a:t>Scheduled output — compute target ns, hand to application, pin fires synchronously</a:t>
-            </a:r>
-          </a:p>
-          <a:p>
-            <a:pPr lvl="1"/>
-            <a:r>
-              <a:rPr sz="1600"/>
-              <a:t>Drift surveillance — log PTP_CLOCK_GetDriftPPB() over long runs</a:t>
-            </a:r>
-          </a:p>
-          <a:p>
-            <a:pPr/>
-            <a:r>
-              <a:rPr sz="1800"/>
-              <a:t>Accuracy envelope (current firmware):</a:t>
-            </a:r>
-          </a:p>
-          <a:p>
-            <a:pPr lvl="1"/>
-            <a:r>
-              <a:rPr sz="1600"/>
-              <a:t>Static bias between boards: ~10 µs after calibration</a:t>
-            </a:r>
-          </a:p>
-          <a:p>
-            <a:pPr lvl="1"/>
-            <a:r>
-              <a:rPr sz="1600"/>
-              <a:t>Short-term wander: ~40 µs RMS within a 0.7 s window</a:t>
-            </a:r>
-          </a:p>
-          <a:p>
-            <a:pPr lvl="1"/>
-            <a:r>
-              <a:rPr sz="1600"/>
-              <a:t>Long-term rate agreement: 1.2 ppm over 60 s</a:t>
-            </a:r>
-          </a:p>
-          <a:p>
-            <a:pPr/>
-            <a:r>
-              <a:rPr sz="1800"/>
-              <a:t>Cyclic Fire is the canonical consumer of this API — any feature using PTP time follows the same pattern</a:t>
+              <a:t>Cyclic Fire — Zoom-In: Cross-Board Edge Delta</a:t>
+            </a:r>
+          </a:p>
+        </p:txBody>
+      </p:sp>
+      <p:pic>
+        <p:nvPicPr>
+          <p:cNvPr id="3" name="Picture 2" descr="Picture3.png"/>
+          <p:cNvPicPr>
+            <a:picLocks noChangeAspect="1"/>
+          </p:cNvPicPr>
+          <p:nvPr/>
+        </p:nvPicPr>
+        <p:blipFill>
+          <a:blip r:embed="rId2"/>
+          <a:stretch>
+            <a:fillRect/>
+          </a:stretch>
+        </p:blipFill>
+        <p:spPr>
+          <a:xfrm>
+            <a:off x="3054096" y="1325880"/>
+            <a:ext cx="6080760" cy="3657600"/>
+          </a:xfrm>
+          <a:prstGeom prst="rect">
+            <a:avLst/>
+          </a:prstGeom>
+        </p:spPr>
+      </p:pic>
+      <p:sp>
+        <p:nvSpPr>
+          <p:cNvPr id="4" name="TextBox 3"/>
+          <p:cNvSpPr txBox="1"/>
+          <p:nvPr/>
+        </p:nvSpPr>
+        <p:spPr>
+          <a:xfrm>
+            <a:off x="548640" y="5074920"/>
+            <a:ext cx="11064240" cy="1463040"/>
+          </a:xfrm>
+          <a:prstGeom prst="rect">
+            <a:avLst/>
+          </a:prstGeom>
+          <a:noFill/>
+        </p:spPr>
+        <p:txBody>
+          <a:bodyPr wrap="square">
+            <a:spAutoFit/>
+          </a:bodyPr>
+          <a:lstStyle/>
+          <a:p>
+            <a:r>
+              <a:rPr sz="1400" b="1">
+                <a:solidFill>
+                  <a:srgbClr val="0B2E4F"/>
+                </a:solidFill>
+              </a:rPr>
+              <a:t>Zoomed Logic 2 view of a single MARKER pulse pair  (period_us = 5000 → 20 % duty, 40 Hz).</a:t>
+            </a:r>
+          </a:p>
+          <a:p>
+            <a:r>
+              <a:rPr sz="1400" b="0">
+                <a:solidFill>
+                  <a:srgbClr val="0B2E4F"/>
+                </a:solidFill>
+              </a:rPr>
+              <a:t>Cursor tool ΔT = 34.98 µs — time between the Grandmaster rising edge (Ch0) and the Follower rising edge (Ch1).</a:t>
+            </a:r>
+          </a:p>
+          <a:p>
+            <a:r>
+              <a:rPr sz="1400" b="0">
+                <a:solidFill>
+                  <a:srgbClr val="0B2E4F"/>
+                </a:solidFill>
+              </a:rPr>
+              <a:t>Well inside the 100 µs product window — this single wire-level frame corroborates the automated 10 µs median statistic.</a:t>
             </a:r>
           </a:p>
         </p:txBody>
@@ -9355,86 +9717,302 @@
           <a:lstStyle/>
           <a:p>
             <a:r>
-              <a:t>Results — Methodology</a:t>
-            </a:r>
-          </a:p>
-        </p:txBody>
-      </p:sp>
-      <p:sp>
-        <p:nvSpPr>
-          <p:cNvPr id="3" name="Content Placeholder 2"/>
-          <p:cNvSpPr>
-            <a:spLocks noGrp="1"/>
-          </p:cNvSpPr>
-          <p:nvPr>
-            <p:ph idx="13" sz="quarter"/>
-          </p:nvPr>
-        </p:nvSpPr>
-        <p:spPr/>
-        <p:txBody>
-          <a:bodyPr/>
-          <a:lstStyle/>
-          <a:p>
-            <a:pPr/>
-            <a:r>
-              <a:rPr sz="1800"/>
-              <a:t>Saleae Logic 8 — Ch0 = GM board PD10, Ch1 = Follower board PD10</a:t>
-            </a:r>
-          </a:p>
-          <a:p>
-            <a:pPr/>
-            <a:r>
-              <a:rPr sz="1800"/>
-              <a:t>cyclic_fire_hw_test.py orchestrates the full run:</a:t>
-            </a:r>
-          </a:p>
-          <a:p>
-            <a:pPr lvl="1"/>
-            <a:r>
-              <a:rPr sz="1600"/>
-              <a:t>Reset both boards → wait for FINE PTP state</a:t>
-            </a:r>
-          </a:p>
-          <a:p>
-            <a:pPr lvl="1"/>
-            <a:r>
-              <a:rPr sz="1600"/>
-              <a:t>Issue cyclic_start with a shared future anchor_ns</a:t>
-            </a:r>
-          </a:p>
-          <a:p>
-            <a:pPr lvl="1"/>
-            <a:r>
-              <a:rPr sz="1600"/>
-              <a:t>Capture ~0.7 s via the Logic 2 scripting socket</a:t>
-            </a:r>
-          </a:p>
-          <a:p>
-            <a:pPr lvl="1"/>
-            <a:r>
-              <a:rPr sz="1600"/>
-              <a:t>Extract rising edges, pair cross-board edges, compute delta distribution</a:t>
-            </a:r>
-          </a:p>
-          <a:p>
-            <a:pPr/>
-            <a:r>
-              <a:rPr sz="1800"/>
-              <a:t>Reported statistics: median, MAD, extrema, per-edge CSV dump</a:t>
-            </a:r>
-          </a:p>
-          <a:p>
-            <a:pPr/>
-            <a:r>
-              <a:rPr sz="1800"/>
-              <a:t>Pass gate:  |median| ≤ 50 µs  AND  MAD ≤ 50 µs    →    sum ≤ 100 µs window</a:t>
-            </a:r>
-          </a:p>
-          <a:p>
-            <a:pPr/>
-            <a:r>
-              <a:rPr sz="1800"/>
-              <a:t>Spot-check: Logic 2 cursor measurements cross-validated the script output</a:t>
+              <a:t>PTP_CLOCK — Application API for PTP Time</a:t>
+            </a:r>
+          </a:p>
+        </p:txBody>
+      </p:sp>
+      <p:sp>
+        <p:nvSpPr>
+          <p:cNvPr id="3" name="Rounded Rectangle 2"/>
+          <p:cNvSpPr/>
+          <p:nvPr/>
+        </p:nvSpPr>
+        <p:spPr>
+          <a:xfrm>
+            <a:off x="457200" y="1417320"/>
+            <a:ext cx="11247120" cy="502920"/>
+          </a:xfrm>
+          <a:prstGeom prst="roundRect">
+            <a:avLst/>
+          </a:prstGeom>
+          <a:solidFill>
+            <a:srgbClr val="0B2E4F"/>
+          </a:solidFill>
+          <a:ln>
+            <a:solidFill>
+              <a:srgbClr val="0B2E4F"/>
+            </a:solidFill>
+          </a:ln>
+        </p:spPr>
+        <p:style>
+          <a:lnRef idx="1">
+            <a:schemeClr val="accent1"/>
+          </a:lnRef>
+          <a:fillRef idx="3">
+            <a:schemeClr val="accent1"/>
+          </a:fillRef>
+          <a:effectRef idx="2">
+            <a:schemeClr val="accent1"/>
+          </a:effectRef>
+          <a:fontRef idx="minor">
+            <a:schemeClr val="lt1"/>
+          </a:fontRef>
+        </p:style>
+        <p:txBody>
+          <a:bodyPr rtlCol="0" anchor="ctr" wrap="square"/>
+          <a:lstStyle/>
+          <a:p>
+            <a:pPr algn="l"/>
+            <a:r>
+              <a:rPr sz="1300" b="1" i="0">
+                <a:solidFill>
+                  <a:srgbClr val="FFFFFF"/>
+                </a:solidFill>
+              </a:rPr>
+              <a:t>uint64_t PTP_CLOCK_GetTime_ns(void);         // current wall-clock, interpolated</a:t>
+            </a:r>
+          </a:p>
+        </p:txBody>
+      </p:sp>
+      <p:sp>
+        <p:nvSpPr>
+          <p:cNvPr id="4" name="Rounded Rectangle 3"/>
+          <p:cNvSpPr/>
+          <p:nvPr/>
+        </p:nvSpPr>
+        <p:spPr>
+          <a:xfrm>
+            <a:off x="457200" y="1965960"/>
+            <a:ext cx="11247120" cy="502920"/>
+          </a:xfrm>
+          <a:prstGeom prst="roundRect">
+            <a:avLst/>
+          </a:prstGeom>
+          <a:solidFill>
+            <a:srgbClr val="0B2E4F"/>
+          </a:solidFill>
+          <a:ln>
+            <a:solidFill>
+              <a:srgbClr val="0B2E4F"/>
+            </a:solidFill>
+          </a:ln>
+        </p:spPr>
+        <p:style>
+          <a:lnRef idx="1">
+            <a:schemeClr val="accent1"/>
+          </a:lnRef>
+          <a:fillRef idx="3">
+            <a:schemeClr val="accent1"/>
+          </a:fillRef>
+          <a:effectRef idx="2">
+            <a:schemeClr val="accent1"/>
+          </a:effectRef>
+          <a:fontRef idx="minor">
+            <a:schemeClr val="lt1"/>
+          </a:fontRef>
+        </p:style>
+        <p:txBody>
+          <a:bodyPr rtlCol="0" anchor="ctr" wrap="square"/>
+          <a:lstStyle/>
+          <a:p>
+            <a:pPr algn="l"/>
+            <a:r>
+              <a:rPr sz="1300" b="1" i="0">
+                <a:solidFill>
+                  <a:srgbClr val="FFFFFF"/>
+                </a:solidFill>
+              </a:rPr>
+              <a:t>bool     PTP_CLOCK_IsValid(void);            // true once first anchor was set</a:t>
+            </a:r>
+          </a:p>
+        </p:txBody>
+      </p:sp>
+      <p:sp>
+        <p:nvSpPr>
+          <p:cNvPr id="5" name="Rounded Rectangle 4"/>
+          <p:cNvSpPr/>
+          <p:nvPr/>
+        </p:nvSpPr>
+        <p:spPr>
+          <a:xfrm>
+            <a:off x="457200" y="2514600"/>
+            <a:ext cx="11247120" cy="502920"/>
+          </a:xfrm>
+          <a:prstGeom prst="roundRect">
+            <a:avLst/>
+          </a:prstGeom>
+          <a:solidFill>
+            <a:srgbClr val="555555"/>
+          </a:solidFill>
+          <a:ln>
+            <a:solidFill>
+              <a:srgbClr val="555555"/>
+            </a:solidFill>
+          </a:ln>
+        </p:spPr>
+        <p:style>
+          <a:lnRef idx="1">
+            <a:schemeClr val="accent1"/>
+          </a:lnRef>
+          <a:fillRef idx="3">
+            <a:schemeClr val="accent1"/>
+          </a:fillRef>
+          <a:effectRef idx="2">
+            <a:schemeClr val="accent1"/>
+          </a:effectRef>
+          <a:fontRef idx="minor">
+            <a:schemeClr val="lt1"/>
+          </a:fontRef>
+        </p:style>
+        <p:txBody>
+          <a:bodyPr rtlCol="0" anchor="ctr" wrap="square"/>
+          <a:lstStyle/>
+          <a:p>
+            <a:pPr algn="l"/>
+            <a:r>
+              <a:rPr sz="1300" b="1" i="0">
+                <a:solidFill>
+                  <a:srgbClr val="FFFFFF"/>
+                </a:solidFill>
+              </a:rPr>
+              <a:t>int32_t  PTP_CLOCK_GetDriftPPB(void);        // measured MCU vs PTP rate offset</a:t>
+            </a:r>
+          </a:p>
+        </p:txBody>
+      </p:sp>
+      <p:sp>
+        <p:nvSpPr>
+          <p:cNvPr id="6" name="Rounded Rectangle 5"/>
+          <p:cNvSpPr/>
+          <p:nvPr/>
+        </p:nvSpPr>
+        <p:spPr>
+          <a:xfrm>
+            <a:off x="457200" y="3063240"/>
+            <a:ext cx="11247120" cy="502920"/>
+          </a:xfrm>
+          <a:prstGeom prst="roundRect">
+            <a:avLst/>
+          </a:prstGeom>
+          <a:solidFill>
+            <a:srgbClr val="555555"/>
+          </a:solidFill>
+          <a:ln>
+            <a:solidFill>
+              <a:srgbClr val="555555"/>
+            </a:solidFill>
+          </a:ln>
+        </p:spPr>
+        <p:style>
+          <a:lnRef idx="1">
+            <a:schemeClr val="accent1"/>
+          </a:lnRef>
+          <a:fillRef idx="3">
+            <a:schemeClr val="accent1"/>
+          </a:fillRef>
+          <a:effectRef idx="2">
+            <a:schemeClr val="accent1"/>
+          </a:effectRef>
+          <a:fontRef idx="minor">
+            <a:schemeClr val="lt1"/>
+          </a:fontRef>
+        </p:style>
+        <p:txBody>
+          <a:bodyPr rtlCol="0" anchor="ctr" wrap="square"/>
+          <a:lstStyle/>
+          <a:p>
+            <a:pPr algn="l"/>
+            <a:r>
+              <a:rPr sz="1300" b="1" i="0">
+                <a:solidFill>
+                  <a:srgbClr val="FFFFFF"/>
+                </a:solidFill>
+              </a:rPr>
+              <a:t>void     PTP_CLOCK_ForceSet(uint64_t ns);    // standalone set (no PTP sync)</a:t>
+            </a:r>
+          </a:p>
+        </p:txBody>
+      </p:sp>
+      <p:sp>
+        <p:nvSpPr>
+          <p:cNvPr id="7" name="TextBox 6"/>
+          <p:cNvSpPr txBox="1"/>
+          <p:nvPr/>
+        </p:nvSpPr>
+        <p:spPr>
+          <a:xfrm>
+            <a:off x="457200" y="3794760"/>
+            <a:ext cx="11247120" cy="2560320"/>
+          </a:xfrm>
+          <a:prstGeom prst="rect">
+            <a:avLst/>
+          </a:prstGeom>
+          <a:noFill/>
+        </p:spPr>
+        <p:txBody>
+          <a:bodyPr wrap="square">
+            <a:spAutoFit/>
+          </a:bodyPr>
+          <a:lstStyle/>
+          <a:p>
+            <a:r>
+              <a:rPr sz="1400">
+                <a:solidFill>
+                  <a:srgbClr val="0B2E4F"/>
+                </a:solidFill>
+              </a:rPr>
+              <a:t>• Any context — no SPI, no mutex, no blocking.  Safe from ISR and main loop.</a:t>
+            </a:r>
+          </a:p>
+          <a:p>
+            <a:r>
+              <a:rPr sz="1400">
+                <a:solidFill>
+                  <a:srgbClr val="0B2E4F"/>
+                </a:solidFill>
+              </a:rPr>
+              <a:t>• Interpolates between anchors via TC0 (60 MHz) + drift IIR filter.</a:t>
+            </a:r>
+          </a:p>
+          <a:p>
+            <a:r>
+              <a:rPr sz="1400">
+                <a:solidFill>
+                  <a:srgbClr val="0B2E4F"/>
+                </a:solidFill>
+              </a:rPr>
+              <a:t>• One anchor is refreshed on every PTP Sync (≈ 8 Hz).</a:t>
+            </a:r>
+          </a:p>
+          <a:p>
+            <a:r>
+              <a:rPr sz="1400">
+                <a:solidFill>
+                  <a:srgbClr val="0B2E4F"/>
+                </a:solidFill>
+              </a:rPr>
+              <a:t>• Returns 0 until the first anchor has been set — always check PTP_CLOCK_IsValid() first.</a:t>
+            </a:r>
+          </a:p>
+          <a:p>
+            <a:r>
+              <a:rPr sz="1400">
+                <a:solidFill>
+                  <a:srgbClr val="0B2E4F"/>
+                </a:solidFill>
+              </a:rPr>
+              <a:t>• GM and Follower expose the same API — application code is role-agnostic.</a:t>
+            </a:r>
+          </a:p>
+          <a:p>
+            <a:r>
+              <a:rPr sz="1400">
+                <a:solidFill>
+                  <a:srgbClr val="0B2E4F"/>
+                </a:solidFill>
+              </a:rPr>
+              <a:t>• Resolution ≈ 16.7 ns (TC0 tick); short-term jitter dominated by filter wander.</a:t>
             </a:r>
           </a:p>
         </p:txBody>
@@ -9473,183 +10051,21 @@
           <a:lstStyle/>
           <a:p>
             <a:r>
-              <a:t>Results — Measurement Summary</a:t>
-            </a:r>
-          </a:p>
-        </p:txBody>
-      </p:sp>
-      <p:sp>
-        <p:nvSpPr>
-          <p:cNvPr id="3" name="Rounded Rectangle 2"/>
-          <p:cNvSpPr/>
-          <p:nvPr/>
-        </p:nvSpPr>
-        <p:spPr>
-          <a:xfrm>
-            <a:off x="640080" y="1737360"/>
-            <a:ext cx="3383280" cy="1645920"/>
-          </a:xfrm>
-          <a:prstGeom prst="roundRect">
-            <a:avLst/>
-          </a:prstGeom>
-          <a:solidFill>
-            <a:srgbClr val="2CA02C"/>
-          </a:solidFill>
-          <a:ln>
-            <a:solidFill>
-              <a:srgbClr val="2CA02C"/>
-            </a:solidFill>
-          </a:ln>
-        </p:spPr>
-        <p:style>
-          <a:lnRef idx="1">
-            <a:schemeClr val="accent1"/>
-          </a:lnRef>
-          <a:fillRef idx="3">
-            <a:schemeClr val="accent1"/>
-          </a:fillRef>
-          <a:effectRef idx="2">
-            <a:schemeClr val="accent1"/>
-          </a:effectRef>
-          <a:fontRef idx="minor">
-            <a:schemeClr val="lt1"/>
-          </a:fontRef>
-        </p:style>
-        <p:txBody>
-          <a:bodyPr rtlCol="0" anchor="ctr" wrap="square"/>
-          <a:lstStyle/>
-          <a:p>
-            <a:pPr algn="l"/>
-            <a:r>
-              <a:rPr sz="2600" b="1" i="0">
-                <a:solidFill>
-                  <a:srgbClr val="FFFFFF"/>
-                </a:solidFill>
-              </a:rPr>
-              <a:t>Median
-+10 µs</a:t>
-            </a:r>
-          </a:p>
-        </p:txBody>
-      </p:sp>
-      <p:sp>
-        <p:nvSpPr>
-          <p:cNvPr id="4" name="Rounded Rectangle 3"/>
-          <p:cNvSpPr/>
-          <p:nvPr/>
-        </p:nvSpPr>
-        <p:spPr>
-          <a:xfrm>
-            <a:off x="4297680" y="1737360"/>
-            <a:ext cx="3383280" cy="1645920"/>
-          </a:xfrm>
-          <a:prstGeom prst="roundRect">
-            <a:avLst/>
-          </a:prstGeom>
-          <a:solidFill>
-            <a:srgbClr val="1F77B4"/>
-          </a:solidFill>
-          <a:ln>
-            <a:solidFill>
-              <a:srgbClr val="1F77B4"/>
-            </a:solidFill>
-          </a:ln>
-        </p:spPr>
-        <p:style>
-          <a:lnRef idx="1">
-            <a:schemeClr val="accent1"/>
-          </a:lnRef>
-          <a:fillRef idx="3">
-            <a:schemeClr val="accent1"/>
-          </a:fillRef>
-          <a:effectRef idx="2">
-            <a:schemeClr val="accent1"/>
-          </a:effectRef>
-          <a:fontRef idx="minor">
-            <a:schemeClr val="lt1"/>
-          </a:fontRef>
-        </p:style>
-        <p:txBody>
-          <a:bodyPr rtlCol="0" anchor="ctr" wrap="square"/>
-          <a:lstStyle/>
-          <a:p>
-            <a:pPr algn="l"/>
-            <a:r>
-              <a:rPr sz="2600" b="1" i="0">
-                <a:solidFill>
-                  <a:srgbClr val="FFFFFF"/>
-                </a:solidFill>
-              </a:rPr>
-              <a:t>MAD
-38 µs</a:t>
-            </a:r>
-          </a:p>
-        </p:txBody>
-      </p:sp>
-      <p:sp>
-        <p:nvSpPr>
-          <p:cNvPr id="5" name="Rounded Rectangle 4"/>
-          <p:cNvSpPr/>
-          <p:nvPr/>
-        </p:nvSpPr>
-        <p:spPr>
-          <a:xfrm>
-            <a:off x="7955279" y="1737360"/>
-            <a:ext cx="3383280" cy="1645920"/>
-          </a:xfrm>
-          <a:prstGeom prst="roundRect">
-            <a:avLst/>
-          </a:prstGeom>
-          <a:solidFill>
-            <a:srgbClr val="2CA02C"/>
-          </a:solidFill>
-          <a:ln>
-            <a:solidFill>
-              <a:srgbClr val="2CA02C"/>
-            </a:solidFill>
-          </a:ln>
-        </p:spPr>
-        <p:style>
-          <a:lnRef idx="1">
-            <a:schemeClr val="accent1"/>
-          </a:lnRef>
-          <a:fillRef idx="3">
-            <a:schemeClr val="accent1"/>
-          </a:fillRef>
-          <a:effectRef idx="2">
-            <a:schemeClr val="accent1"/>
-          </a:effectRef>
-          <a:fontRef idx="minor">
-            <a:schemeClr val="lt1"/>
-          </a:fontRef>
-        </p:style>
-        <p:txBody>
-          <a:bodyPr rtlCol="0" anchor="ctr" wrap="square"/>
-          <a:lstStyle/>
-          <a:p>
-            <a:pPr algn="l"/>
-            <a:r>
-              <a:rPr sz="2600" b="1" i="0">
-                <a:solidFill>
-                  <a:srgbClr val="FFFFFF"/>
-                </a:solidFill>
-              </a:rPr>
-              <a:t>Verdict
-PASS</a:t>
-            </a:r>
-          </a:p>
-        </p:txBody>
-      </p:sp>
-      <p:sp>
-        <p:nvSpPr>
-          <p:cNvPr id="6" name="TextBox 5"/>
+              <a:t>PTP_CLOCK — Logging Firmware Events</a:t>
+            </a:r>
+          </a:p>
+        </p:txBody>
+      </p:sp>
+      <p:sp>
+        <p:nvSpPr>
+          <p:cNvPr id="3" name="TextBox 2"/>
           <p:cNvSpPr txBox="1"/>
           <p:nvPr/>
         </p:nvSpPr>
         <p:spPr>
           <a:xfrm>
-            <a:off x="640080" y="3657600"/>
-            <a:ext cx="10972800" cy="2560320"/>
+            <a:off x="457200" y="1371600"/>
+            <a:ext cx="11247120" cy="3474720"/>
           </a:xfrm>
           <a:prstGeom prst="rect">
             <a:avLst/>
@@ -9663,52 +10079,229 @@
           <a:lstStyle/>
           <a:p>
             <a:r>
-              <a:rPr sz="1700">
+              <a:rPr sz="1400">
                 <a:solidFill>
                   <a:srgbClr val="0B2E4F"/>
                 </a:solidFill>
-              </a:rPr>
-              <a:t>• Before RX-IRQ compensation:  median +10 005 µs  →  FAIL</a:t>
-            </a:r>
-          </a:p>
-          <a:p>
-            <a:r>
-              <a:rPr sz="1700">
+                <a:latin typeface="Consolas"/>
+              </a:rPr>
+              <a:t>#include "ptp_clock.h"</a:t>
+            </a:r>
+          </a:p>
+          <a:p>
+            <a:r>
+              <a:rPr sz="1400">
                 <a:solidFill>
                   <a:srgbClr val="0B2E4F"/>
                 </a:solidFill>
-              </a:rPr>
-              <a:t>• After the fix:  median +10 µs  →  inside the 100 µs product window</a:t>
-            </a:r>
-          </a:p>
-          <a:p>
-            <a:r>
-              <a:rPr sz="1700">
+                <a:latin typeface="Consolas"/>
+              </a:rPr>
+              <a:t> </a:t>
+            </a:r>
+          </a:p>
+          <a:p>
+            <a:r>
+              <a:rPr sz="1400">
                 <a:solidFill>
                   <a:srgbClr val="0B2E4F"/>
                 </a:solidFill>
-              </a:rPr>
-              <a:t>• Long-term (60 s) cross-board rate residual:  1.2 ppm</a:t>
-            </a:r>
-          </a:p>
-          <a:p>
-            <a:r>
-              <a:rPr sz="1700">
+                <a:latin typeface="Consolas"/>
+              </a:rPr>
+              <a:t>static void on_frame_received(void) {</a:t>
+            </a:r>
+          </a:p>
+          <a:p>
+            <a:r>
+              <a:rPr sz="1400">
                 <a:solidFill>
                   <a:srgbClr val="0B2E4F"/>
                 </a:solidFill>
-              </a:rPr>
-              <a:t>• MAD dominated by short-term drift-filter wander, not stack asymmetry</a:t>
-            </a:r>
-          </a:p>
-          <a:p>
-            <a:r>
-              <a:rPr sz="1700">
+                <a:latin typeface="Consolas"/>
+              </a:rPr>
+              <a:t>    uint64_t t_ns = PTP_CLOCK_GetTime_ns();     // synchronised wall-clock</a:t>
+            </a:r>
+          </a:p>
+          <a:p>
+            <a:r>
+              <a:rPr sz="1400">
                 <a:solidFill>
                   <a:srgbClr val="0B2E4F"/>
                 </a:solidFill>
-              </a:rPr>
-              <a:t>• Drift IIR raised from N=32 to N=128 → halved filter stddev</a:t>
+                <a:latin typeface="Consolas"/>
+              </a:rPr>
+              <a:t>    SYS_CONSOLE_PRINT("RX %llu.%09llu  seq=%u\r\n",</a:t>
+            </a:r>
+          </a:p>
+          <a:p>
+            <a:r>
+              <a:rPr sz="1400">
+                <a:solidFill>
+                  <a:srgbClr val="0B2E4F"/>
+                </a:solidFill>
+                <a:latin typeface="Consolas"/>
+              </a:rPr>
+              <a:t>                      t_ns / 1000000000ull,</a:t>
+            </a:r>
+          </a:p>
+          <a:p>
+            <a:r>
+              <a:rPr sz="1400">
+                <a:solidFill>
+                  <a:srgbClr val="0B2E4F"/>
+                </a:solidFill>
+                <a:latin typeface="Consolas"/>
+              </a:rPr>
+              <a:t>                      t_ns % 1000000000ull,</a:t>
+            </a:r>
+          </a:p>
+          <a:p>
+            <a:r>
+              <a:rPr sz="1400">
+                <a:solidFill>
+                  <a:srgbClr val="0B2E4F"/>
+                </a:solidFill>
+                <a:latin typeface="Consolas"/>
+              </a:rPr>
+              <a:t>                      rx_seq);</a:t>
+            </a:r>
+          </a:p>
+          <a:p>
+            <a:r>
+              <a:rPr sz="1400">
+                <a:solidFill>
+                  <a:srgbClr val="0B2E4F"/>
+                </a:solidFill>
+                <a:latin typeface="Consolas"/>
+              </a:rPr>
+              <a:t>}</a:t>
+            </a:r>
+          </a:p>
+          <a:p>
+            <a:r>
+              <a:rPr sz="1400">
+                <a:solidFill>
+                  <a:srgbClr val="0B2E4F"/>
+                </a:solidFill>
+                <a:latin typeface="Consolas"/>
+              </a:rPr>
+              <a:t> </a:t>
+            </a:r>
+          </a:p>
+          <a:p>
+            <a:r>
+              <a:rPr sz="1400">
+                <a:solidFill>
+                  <a:srgbClr val="0B2E4F"/>
+                </a:solidFill>
+                <a:latin typeface="Consolas"/>
+              </a:rPr>
+              <a:t>void actuator_fire(uint64_t at_ns) {</a:t>
+            </a:r>
+          </a:p>
+          <a:p>
+            <a:r>
+              <a:rPr sz="1400">
+                <a:solidFill>
+                  <a:srgbClr val="0B2E4F"/>
+                </a:solidFill>
+                <a:latin typeface="Consolas"/>
+              </a:rPr>
+              <a:t>    while (PTP_CLOCK_GetTime_ns() &lt; at_ns) { /* tight spin */ }</a:t>
+            </a:r>
+          </a:p>
+          <a:p>
+            <a:r>
+              <a:rPr sz="1400">
+                <a:solidFill>
+                  <a:srgbClr val="0B2E4F"/>
+                </a:solidFill>
+                <a:latin typeface="Consolas"/>
+              </a:rPr>
+              <a:t>    GPIO_PinSet(ACT_PIN);</a:t>
+            </a:r>
+          </a:p>
+          <a:p>
+            <a:r>
+              <a:rPr sz="1400">
+                <a:solidFill>
+                  <a:srgbClr val="0B2E4F"/>
+                </a:solidFill>
+                <a:latin typeface="Consolas"/>
+              </a:rPr>
+              <a:t>}</a:t>
+            </a:r>
+          </a:p>
+        </p:txBody>
+      </p:sp>
+      <p:sp>
+        <p:nvSpPr>
+          <p:cNvPr id="4" name="TextBox 3"/>
+          <p:cNvSpPr txBox="1"/>
+          <p:nvPr/>
+        </p:nvSpPr>
+        <p:spPr>
+          <a:xfrm>
+            <a:off x="457200" y="4846320"/>
+            <a:ext cx="11247120" cy="1645920"/>
+          </a:xfrm>
+          <a:prstGeom prst="rect">
+            <a:avLst/>
+          </a:prstGeom>
+          <a:noFill/>
+        </p:spPr>
+        <p:txBody>
+          <a:bodyPr wrap="square">
+            <a:spAutoFit/>
+          </a:bodyPr>
+          <a:lstStyle/>
+          <a:p>
+            <a:r>
+              <a:rPr sz="1300">
+                <a:solidFill>
+                  <a:srgbClr val="0B2E4F"/>
+                </a:solidFill>
+              </a:rPr>
+              <a:t>• Pattern: call PTP_CLOCK_GetTime_ns() at the moment of interest, store alongside the event.</a:t>
+            </a:r>
+          </a:p>
+          <a:p>
+            <a:r>
+              <a:rPr sz="1300">
+                <a:solidFill>
+                  <a:srgbClr val="0B2E4F"/>
+                </a:solidFill>
+              </a:rPr>
+              <a:t>• Log to console, ring buffer, or CLI — the timestamp is portable across boards.</a:t>
+            </a:r>
+          </a:p>
+          <a:p>
+            <a:r>
+              <a:rPr sz="1300">
+                <a:solidFill>
+                  <a:srgbClr val="0B2E4F"/>
+                </a:solidFill>
+              </a:rPr>
+              <a:t>• For event correlation across nodes: compare two logs directly; no relative-time conversion.</a:t>
+            </a:r>
+          </a:p>
+          <a:p>
+            <a:r>
+              <a:rPr sz="1300">
+                <a:solidFill>
+                  <a:srgbClr val="0B2E4F"/>
+                </a:solidFill>
+              </a:rPr>
+              <a:t>• For scheduled actions: give the target time to the action, spin or sleep until reached.</a:t>
+            </a:r>
+          </a:p>
+          <a:p>
+            <a:r>
+              <a:rPr sz="1300">
+                <a:solidFill>
+                  <a:srgbClr val="0B2E4F"/>
+                </a:solidFill>
+              </a:rPr>
+              <a:t>• Always guard with PTP_CLOCK_IsValid() during startup to avoid 0-timestamps.</a:t>
             </a:r>
           </a:p>
         </p:txBody>
@@ -9747,350 +10340,107 @@
           <a:lstStyle/>
           <a:p>
             <a:r>
-              <a:t>Reproducing the Project — Prerequisites</a:t>
-            </a:r>
-          </a:p>
-        </p:txBody>
-      </p:sp>
-      <p:sp>
-        <p:nvSpPr>
-          <p:cNvPr id="3" name="Rounded Rectangle 2"/>
-          <p:cNvSpPr/>
-          <p:nvPr/>
-        </p:nvSpPr>
-        <p:spPr>
-          <a:xfrm>
-            <a:off x="457200" y="1371600"/>
-            <a:ext cx="11247120" cy="502920"/>
-          </a:xfrm>
-          <a:prstGeom prst="roundRect">
-            <a:avLst/>
-          </a:prstGeom>
-          <a:solidFill>
-            <a:srgbClr val="0B2E4F"/>
-          </a:solidFill>
-          <a:ln>
-            <a:solidFill>
-              <a:srgbClr val="0B2E4F"/>
-            </a:solidFill>
-          </a:ln>
-        </p:spPr>
-        <p:style>
-          <a:lnRef idx="1">
-            <a:schemeClr val="accent1"/>
-          </a:lnRef>
-          <a:fillRef idx="3">
-            <a:schemeClr val="accent1"/>
-          </a:fillRef>
-          <a:effectRef idx="2">
-            <a:schemeClr val="accent1"/>
-          </a:effectRef>
-          <a:fontRef idx="minor">
-            <a:schemeClr val="lt1"/>
-          </a:fontRef>
-        </p:style>
-        <p:txBody>
-          <a:bodyPr rtlCol="0" anchor="ctr" wrap="square"/>
-          <a:lstStyle/>
-          <a:p>
-            <a:pPr algn="l"/>
-            <a:r>
-              <a:rPr sz="1400" b="1" i="0">
-                <a:solidFill>
-                  <a:srgbClr val="FFFFFF"/>
-                </a:solidFill>
-              </a:rPr>
-              <a:t>Hardware</a:t>
-            </a:r>
-          </a:p>
-        </p:txBody>
-      </p:sp>
-      <p:sp>
-        <p:nvSpPr>
-          <p:cNvPr id="4" name="TextBox 3"/>
-          <p:cNvSpPr txBox="1"/>
-          <p:nvPr/>
-        </p:nvSpPr>
-        <p:spPr>
-          <a:xfrm>
-            <a:off x="640080" y="1920240"/>
-            <a:ext cx="10972800" cy="548640"/>
-          </a:xfrm>
-          <a:prstGeom prst="rect">
-            <a:avLst/>
-          </a:prstGeom>
-          <a:noFill/>
-        </p:spPr>
-        <p:txBody>
-          <a:bodyPr wrap="none">
-            <a:spAutoFit/>
-          </a:bodyPr>
-          <a:lstStyle/>
-          <a:p>
-            <a:r>
-              <a:rPr sz="1400" b="0" i="0">
-                <a:solidFill>
-                  <a:srgbClr val="0B2E4F"/>
-                </a:solidFill>
-              </a:rPr>
-              <a:t>2 × ATSAME54 Curiosity Ultra  +  2 × LAN865x click board  —  connected pair-to-pair over 10BASE-T1S</a:t>
-            </a:r>
-          </a:p>
-        </p:txBody>
-      </p:sp>
-      <p:sp>
-        <p:nvSpPr>
-          <p:cNvPr id="5" name="TextBox 4"/>
-          <p:cNvSpPr txBox="1"/>
-          <p:nvPr/>
-        </p:nvSpPr>
-        <p:spPr>
-          <a:xfrm>
-            <a:off x="640080" y="2286000"/>
-            <a:ext cx="10972800" cy="365760"/>
-          </a:xfrm>
-          <a:prstGeom prst="rect">
-            <a:avLst/>
-          </a:prstGeom>
-          <a:noFill/>
-        </p:spPr>
-        <p:txBody>
-          <a:bodyPr wrap="none">
-            <a:spAutoFit/>
-          </a:bodyPr>
-          <a:lstStyle/>
-          <a:p>
-            <a:r>
-              <a:rPr sz="1300" b="0" i="0">
-                <a:solidFill>
-                  <a:srgbClr val="555555"/>
-                </a:solidFill>
-              </a:rPr>
-              <a:t>USB (EDBG) cables from each board to the PC for flashing and for the serial console (115200 8N1).</a:t>
-            </a:r>
-          </a:p>
-        </p:txBody>
-      </p:sp>
-      <p:sp>
-        <p:nvSpPr>
-          <p:cNvPr id="6" name="Rounded Rectangle 5"/>
-          <p:cNvSpPr/>
-          <p:nvPr/>
-        </p:nvSpPr>
-        <p:spPr>
-          <a:xfrm>
-            <a:off x="457200" y="2880360"/>
-            <a:ext cx="11247120" cy="502920"/>
-          </a:xfrm>
-          <a:prstGeom prst="roundRect">
-            <a:avLst/>
-          </a:prstGeom>
-          <a:solidFill>
-            <a:srgbClr val="0B2E4F"/>
-          </a:solidFill>
-          <a:ln>
-            <a:solidFill>
-              <a:srgbClr val="0B2E4F"/>
-            </a:solidFill>
-          </a:ln>
-        </p:spPr>
-        <p:style>
-          <a:lnRef idx="1">
-            <a:schemeClr val="accent1"/>
-          </a:lnRef>
-          <a:fillRef idx="3">
-            <a:schemeClr val="accent1"/>
-          </a:fillRef>
-          <a:effectRef idx="2">
-            <a:schemeClr val="accent1"/>
-          </a:effectRef>
-          <a:fontRef idx="minor">
-            <a:schemeClr val="lt1"/>
-          </a:fontRef>
-        </p:style>
-        <p:txBody>
-          <a:bodyPr rtlCol="0" anchor="ctr" wrap="square"/>
-          <a:lstStyle/>
-          <a:p>
-            <a:pPr algn="l"/>
-            <a:r>
-              <a:rPr sz="1400" b="1" i="0">
-                <a:solidFill>
-                  <a:srgbClr val="FFFFFF"/>
-                </a:solidFill>
-              </a:rPr>
-              <a:t>Software on the PC</a:t>
-            </a:r>
-          </a:p>
-        </p:txBody>
-      </p:sp>
-      <p:sp>
-        <p:nvSpPr>
-          <p:cNvPr id="7" name="TextBox 6"/>
-          <p:cNvSpPr txBox="1"/>
-          <p:nvPr/>
-        </p:nvSpPr>
-        <p:spPr>
-          <a:xfrm>
-            <a:off x="640080" y="3474720"/>
-            <a:ext cx="10972800" cy="2286000"/>
-          </a:xfrm>
-          <a:prstGeom prst="rect">
-            <a:avLst/>
-          </a:prstGeom>
-          <a:noFill/>
-        </p:spPr>
-        <p:txBody>
-          <a:bodyPr wrap="square">
-            <a:spAutoFit/>
-          </a:bodyPr>
-          <a:lstStyle/>
-          <a:p>
-            <a:r>
-              <a:rPr sz="1400">
-                <a:solidFill>
-                  <a:srgbClr val="0B2E4F"/>
-                </a:solidFill>
-              </a:rPr>
-              <a:t>• MPLAB XC32 v4.60 or v5.x  (default path  C:\Program Files\Microchip\xc32\)</a:t>
-            </a:r>
-          </a:p>
-          <a:p>
-            <a:r>
-              <a:rPr sz="1400">
-                <a:solidFill>
-                  <a:srgbClr val="0B2E4F"/>
-                </a:solidFill>
-              </a:rPr>
-              <a:t>• MPLAB X IDE / MDB  (used by flash.py to program the boards)</a:t>
-            </a:r>
-          </a:p>
-          <a:p>
-            <a:r>
-              <a:rPr sz="1400">
-                <a:solidFill>
-                  <a:srgbClr val="0B2E4F"/>
-                </a:solidFill>
-              </a:rPr>
-              <a:t>• CMake ≥ 4.1  +  Ninja  (both on PATH)</a:t>
-            </a:r>
-          </a:p>
-          <a:p>
-            <a:r>
-              <a:rPr sz="1400">
-                <a:solidFill>
-                  <a:srgbClr val="0B2E4F"/>
-                </a:solidFill>
-              </a:rPr>
-              <a:t>• Python 3.9+   with   pip install pyserial   (plus python-pptx only if you rebuild this deck)</a:t>
-            </a:r>
-          </a:p>
-          <a:p>
-            <a:r>
-              <a:rPr sz="1400">
-                <a:solidFill>
-                  <a:srgbClr val="0B2E4F"/>
-                </a:solidFill>
-              </a:rPr>
-              <a:t>• Two terminal windows — one per board — e.g. PuTTY or Tera Term  (115200 8N1)</a:t>
-            </a:r>
-          </a:p>
-        </p:txBody>
-      </p:sp>
-      <p:sp>
-        <p:nvSpPr>
-          <p:cNvPr id="8" name="Rounded Rectangle 7"/>
-          <p:cNvSpPr/>
-          <p:nvPr/>
-        </p:nvSpPr>
-        <p:spPr>
-          <a:xfrm>
-            <a:off x="457200" y="5532120"/>
-            <a:ext cx="11247120" cy="502920"/>
-          </a:xfrm>
-          <a:prstGeom prst="roundRect">
-            <a:avLst/>
-          </a:prstGeom>
-          <a:solidFill>
-            <a:srgbClr val="1F77B4"/>
-          </a:solidFill>
-          <a:ln>
-            <a:solidFill>
-              <a:srgbClr val="1F77B4"/>
-            </a:solidFill>
-          </a:ln>
-        </p:spPr>
-        <p:style>
-          <a:lnRef idx="1">
-            <a:schemeClr val="accent1"/>
-          </a:lnRef>
-          <a:fillRef idx="3">
-            <a:schemeClr val="accent1"/>
-          </a:fillRef>
-          <a:effectRef idx="2">
-            <a:schemeClr val="accent1"/>
-          </a:effectRef>
-          <a:fontRef idx="minor">
-            <a:schemeClr val="lt1"/>
-          </a:fontRef>
-        </p:style>
-        <p:txBody>
-          <a:bodyPr rtlCol="0" anchor="ctr" wrap="square"/>
-          <a:lstStyle/>
-          <a:p>
-            <a:pPr algn="l"/>
-            <a:r>
-              <a:rPr sz="1300" b="1" i="0">
-                <a:solidFill>
-                  <a:srgbClr val="FFFFFF"/>
-                </a:solidFill>
-              </a:rPr>
-              <a:t>Clone</a:t>
-            </a:r>
-          </a:p>
-        </p:txBody>
-      </p:sp>
-      <p:sp>
-        <p:nvSpPr>
-          <p:cNvPr id="9" name="TextBox 8"/>
-          <p:cNvSpPr txBox="1"/>
-          <p:nvPr/>
-        </p:nvSpPr>
-        <p:spPr>
-          <a:xfrm>
-            <a:off x="640080" y="6080760"/>
-            <a:ext cx="10972800" cy="731520"/>
-          </a:xfrm>
-          <a:prstGeom prst="rect">
-            <a:avLst/>
-          </a:prstGeom>
-          <a:noFill/>
-        </p:spPr>
-        <p:txBody>
-          <a:bodyPr wrap="square">
-            <a:spAutoFit/>
-          </a:bodyPr>
-          <a:lstStyle/>
-          <a:p>
-            <a:r>
-              <a:rPr sz="1300">
-                <a:solidFill>
-                  <a:srgbClr val="0B2E4F"/>
-                </a:solidFill>
-                <a:latin typeface="Consolas"/>
-              </a:rPr>
-              <a:t>git clone https://github.com/zabooh/net_10base_t1s.git</a:t>
-            </a:r>
-          </a:p>
-          <a:p>
-            <a:r>
-              <a:rPr sz="1300">
-                <a:solidFill>
-                  <a:srgbClr val="0B2E4F"/>
-                </a:solidFill>
-                <a:latin typeface="Consolas"/>
-              </a:rPr>
-              <a:t>cd net_10base_t1s\apps\tcpip_iperf_lan865x\firmware\tcpip_iperf_lan865x.X</a:t>
+              <a:t>PTP_CLOCK — Cross-Board Correlation</a:t>
+            </a:r>
+          </a:p>
+        </p:txBody>
+      </p:sp>
+      <p:sp>
+        <p:nvSpPr>
+          <p:cNvPr id="3" name="Content Placeholder 2"/>
+          <p:cNvSpPr>
+            <a:spLocks noGrp="1"/>
+          </p:cNvSpPr>
+          <p:nvPr>
+            <p:ph idx="13" sz="quarter"/>
+          </p:nvPr>
+        </p:nvSpPr>
+        <p:spPr/>
+        <p:txBody>
+          <a:bodyPr/>
+          <a:lstStyle/>
+          <a:p>
+            <a:pPr/>
+            <a:r>
+              <a:rPr sz="1800"/>
+              <a:t>Every event stamped with PTP_CLOCK_GetTime_ns() lives on a common timeline</a:t>
+            </a:r>
+          </a:p>
+          <a:p>
+            <a:pPr/>
+            <a:r>
+              <a:rPr sz="1800"/>
+              <a:t>Typical workflows the API enables:</a:t>
+            </a:r>
+          </a:p>
+          <a:p>
+            <a:pPr lvl="1"/>
+            <a:r>
+              <a:rPr sz="1600"/>
+              <a:t>Distributed trace — collect logs from N nodes, sort by PTP timestamp</a:t>
+            </a:r>
+          </a:p>
+          <a:p>
+            <a:pPr lvl="1"/>
+            <a:r>
+              <a:rPr sz="1600"/>
+              <a:t>Race analysis — precise order of events on nodes A, B, C</a:t>
+            </a:r>
+          </a:p>
+          <a:p>
+            <a:pPr lvl="1"/>
+            <a:r>
+              <a:rPr sz="1600"/>
+              <a:t>Latency measurement — PTP_CLOCK_ns at TX on A vs RX on B</a:t>
+            </a:r>
+          </a:p>
+          <a:p>
+            <a:pPr lvl="1"/>
+            <a:r>
+              <a:rPr sz="1600"/>
+              <a:t>Scheduled output — compute target ns, hand to application, pin fires synchronously</a:t>
+            </a:r>
+          </a:p>
+          <a:p>
+            <a:pPr lvl="1"/>
+            <a:r>
+              <a:rPr sz="1600"/>
+              <a:t>Drift surveillance — log PTP_CLOCK_GetDriftPPB() over long runs</a:t>
+            </a:r>
+          </a:p>
+          <a:p>
+            <a:pPr/>
+            <a:r>
+              <a:rPr sz="1800"/>
+              <a:t>Accuracy envelope (current firmware):</a:t>
+            </a:r>
+          </a:p>
+          <a:p>
+            <a:pPr lvl="1"/>
+            <a:r>
+              <a:rPr sz="1600"/>
+              <a:t>Static bias between boards: ~10 µs after calibration</a:t>
+            </a:r>
+          </a:p>
+          <a:p>
+            <a:pPr lvl="1"/>
+            <a:r>
+              <a:rPr sz="1600"/>
+              <a:t>Short-term wander: ~40 µs RMS within a 0.7 s window</a:t>
+            </a:r>
+          </a:p>
+          <a:p>
+            <a:pPr lvl="1"/>
+            <a:r>
+              <a:rPr sz="1600"/>
+              <a:t>Long-term rate agreement: 1.2 ppm over 60 s</a:t>
+            </a:r>
+          </a:p>
+          <a:p>
+            <a:pPr/>
+            <a:r>
+              <a:rPr sz="1800"/>
+              <a:t>Cyclic Fire is the canonical consumer of this API — any feature using PTP time follows the same pattern</a:t>
             </a:r>
           </a:p>
         </p:txBody>
@@ -10129,418 +10479,86 @@
           <a:lstStyle/>
           <a:p>
             <a:r>
-              <a:t>Reproducing the Project — Setup, Build, Run</a:t>
-            </a:r>
-          </a:p>
-        </p:txBody>
-      </p:sp>
-      <p:sp>
-        <p:nvSpPr>
-          <p:cNvPr id="3" name="Rounded Rectangle 2"/>
-          <p:cNvSpPr/>
-          <p:nvPr/>
-        </p:nvSpPr>
-        <p:spPr>
-          <a:xfrm>
-            <a:off x="457200" y="1280160"/>
-            <a:ext cx="11247120" cy="502920"/>
-          </a:xfrm>
-          <a:prstGeom prst="roundRect">
-            <a:avLst/>
-          </a:prstGeom>
-          <a:solidFill>
-            <a:srgbClr val="2CA02C"/>
-          </a:solidFill>
-          <a:ln>
-            <a:solidFill>
-              <a:srgbClr val="2CA02C"/>
-            </a:solidFill>
-          </a:ln>
-        </p:spPr>
-        <p:style>
-          <a:lnRef idx="1">
-            <a:schemeClr val="accent1"/>
-          </a:lnRef>
-          <a:fillRef idx="3">
-            <a:schemeClr val="accent1"/>
-          </a:fillRef>
-          <a:effectRef idx="2">
-            <a:schemeClr val="accent1"/>
-          </a:effectRef>
-          <a:fontRef idx="minor">
-            <a:schemeClr val="lt1"/>
-          </a:fontRef>
-        </p:style>
-        <p:txBody>
-          <a:bodyPr rtlCol="0" anchor="ctr" wrap="square"/>
-          <a:lstStyle/>
-          <a:p>
-            <a:pPr algn="l"/>
-            <a:r>
-              <a:rPr sz="1400" b="1" i="0">
-                <a:solidFill>
-                  <a:srgbClr val="FFFFFF"/>
-                </a:solidFill>
-              </a:rPr>
-              <a:t>Quick path — no build required (just run the demo)</a:t>
-            </a:r>
-          </a:p>
-        </p:txBody>
-      </p:sp>
-      <p:sp>
-        <p:nvSpPr>
-          <p:cNvPr id="4" name="TextBox 3"/>
-          <p:cNvSpPr txBox="1"/>
-          <p:nvPr/>
-        </p:nvSpPr>
-        <p:spPr>
-          <a:xfrm>
-            <a:off x="640080" y="1828800"/>
-            <a:ext cx="10972800" cy="1280160"/>
-          </a:xfrm>
-          <a:prstGeom prst="rect">
-            <a:avLst/>
-          </a:prstGeom>
-          <a:noFill/>
-        </p:spPr>
-        <p:txBody>
-          <a:bodyPr wrap="square">
-            <a:spAutoFit/>
-          </a:bodyPr>
-          <a:lstStyle/>
-          <a:p>
-            <a:r>
-              <a:rPr sz="1300">
-                <a:solidFill>
-                  <a:srgbClr val="0B2E4F"/>
-                </a:solidFill>
-              </a:rPr>
-              <a:t>After  git clone  and  python setup_flasher.py,  simply run:</a:t>
-            </a:r>
-          </a:p>
-          <a:p>
-            <a:r>
-              <a:rPr sz="1300">
-                <a:solidFill>
-                  <a:srgbClr val="0B2E4F"/>
-                </a:solidFill>
-                <a:latin typeface="Consolas"/>
-              </a:rPr>
-              <a:t>    python flash.py</a:t>
-            </a:r>
-          </a:p>
-          <a:p>
-            <a:r>
-              <a:rPr sz="1300">
-                <a:solidFill>
-                  <a:srgbClr val="0B2E4F"/>
-                </a:solidFill>
-              </a:rPr>
-              <a:t>flash.py finds the newest pre-built HEX under  out/…/image/*.hex  (checked into the repo) and programmes it onto both boards — no XC32 / CMake / build step needed.</a:t>
-            </a:r>
-          </a:p>
-        </p:txBody>
-      </p:sp>
-      <p:sp>
-        <p:nvSpPr>
-          <p:cNvPr id="5" name="Rounded Rectangle 4"/>
-          <p:cNvSpPr/>
-          <p:nvPr/>
-        </p:nvSpPr>
-        <p:spPr>
-          <a:xfrm>
-            <a:off x="457200" y="3063240"/>
-            <a:ext cx="11247120" cy="411480"/>
-          </a:xfrm>
-          <a:prstGeom prst="roundRect">
-            <a:avLst/>
-          </a:prstGeom>
-          <a:solidFill>
-            <a:srgbClr val="0B2E4F"/>
-          </a:solidFill>
-          <a:ln>
-            <a:solidFill>
-              <a:srgbClr val="0B2E4F"/>
-            </a:solidFill>
-          </a:ln>
-        </p:spPr>
-        <p:style>
-          <a:lnRef idx="1">
-            <a:schemeClr val="accent1"/>
-          </a:lnRef>
-          <a:fillRef idx="3">
-            <a:schemeClr val="accent1"/>
-          </a:fillRef>
-          <a:effectRef idx="2">
-            <a:schemeClr val="accent1"/>
-          </a:effectRef>
-          <a:fontRef idx="minor">
-            <a:schemeClr val="lt1"/>
-          </a:fontRef>
-        </p:style>
-        <p:txBody>
-          <a:bodyPr rtlCol="0" anchor="ctr" wrap="square"/>
-          <a:lstStyle/>
-          <a:p>
-            <a:pPr algn="l"/>
-            <a:r>
-              <a:rPr sz="1300" b="1" i="0">
-                <a:solidFill>
-                  <a:srgbClr val="FFFFFF"/>
-                </a:solidFill>
-              </a:rPr>
-              <a:t>Full rebuild  —  1.  One-time tool setup  (run once per machine)</a:t>
-            </a:r>
-          </a:p>
-        </p:txBody>
-      </p:sp>
-      <p:sp>
-        <p:nvSpPr>
-          <p:cNvPr id="6" name="TextBox 5"/>
-          <p:cNvSpPr txBox="1"/>
-          <p:nvPr/>
-        </p:nvSpPr>
-        <p:spPr>
-          <a:xfrm>
-            <a:off x="640080" y="3520440"/>
-            <a:ext cx="10972800" cy="1005840"/>
-          </a:xfrm>
-          <a:prstGeom prst="rect">
-            <a:avLst/>
-          </a:prstGeom>
-          <a:noFill/>
-        </p:spPr>
-        <p:txBody>
-          <a:bodyPr wrap="square">
-            <a:spAutoFit/>
-          </a:bodyPr>
-          <a:lstStyle/>
-          <a:p>
-            <a:r>
-              <a:rPr sz="1200">
-                <a:solidFill>
-                  <a:srgbClr val="0B2E4F"/>
-                </a:solidFill>
-                <a:latin typeface="Consolas"/>
-              </a:rPr>
-              <a:t>python setup_compiler.py      # pick the installed XC32 version</a:t>
-            </a:r>
-          </a:p>
-          <a:p>
-            <a:r>
-              <a:rPr sz="1200">
-                <a:solidFill>
-                  <a:srgbClr val="0B2E4F"/>
-                </a:solidFill>
-                <a:latin typeface="Consolas"/>
-              </a:rPr>
-              <a:t>python setup_flasher.py       # assign Board 1 (GM) and Board 2 (FOL) to their EDBG debuggers</a:t>
-            </a:r>
-          </a:p>
-          <a:p>
-            <a:r>
-              <a:rPr sz="1200">
-                <a:solidFill>
-                  <a:srgbClr val="0B2E4F"/>
-                </a:solidFill>
-                <a:latin typeface="Consolas"/>
-              </a:rPr>
-              <a:t>python setup_debug.py         # fix SAME54_DFP tool-pack (needed for VS Code debugging)</a:t>
-            </a:r>
-          </a:p>
-        </p:txBody>
-      </p:sp>
-      <p:sp>
-        <p:nvSpPr>
-          <p:cNvPr id="7" name="Rounded Rectangle 6"/>
-          <p:cNvSpPr/>
-          <p:nvPr/>
-        </p:nvSpPr>
-        <p:spPr>
-          <a:xfrm>
-            <a:off x="457200" y="4526280"/>
-            <a:ext cx="11247120" cy="411480"/>
-          </a:xfrm>
-          <a:prstGeom prst="roundRect">
-            <a:avLst/>
-          </a:prstGeom>
-          <a:solidFill>
-            <a:srgbClr val="0B2E4F"/>
-          </a:solidFill>
-          <a:ln>
-            <a:solidFill>
-              <a:srgbClr val="0B2E4F"/>
-            </a:solidFill>
-          </a:ln>
-        </p:spPr>
-        <p:style>
-          <a:lnRef idx="1">
-            <a:schemeClr val="accent1"/>
-          </a:lnRef>
-          <a:fillRef idx="3">
-            <a:schemeClr val="accent1"/>
-          </a:fillRef>
-          <a:effectRef idx="2">
-            <a:schemeClr val="accent1"/>
-          </a:effectRef>
-          <a:fontRef idx="minor">
-            <a:schemeClr val="lt1"/>
-          </a:fontRef>
-        </p:style>
-        <p:txBody>
-          <a:bodyPr rtlCol="0" anchor="ctr" wrap="square"/>
-          <a:lstStyle/>
-          <a:p>
-            <a:pPr algn="l"/>
-            <a:r>
-              <a:rPr sz="1300" b="1" i="0">
-                <a:solidFill>
-                  <a:srgbClr val="FFFFFF"/>
-                </a:solidFill>
-              </a:rPr>
-              <a:t>2.  Build and flash both boards</a:t>
-            </a:r>
-          </a:p>
-        </p:txBody>
-      </p:sp>
-      <p:sp>
-        <p:nvSpPr>
-          <p:cNvPr id="8" name="TextBox 7"/>
-          <p:cNvSpPr txBox="1"/>
-          <p:nvPr/>
-        </p:nvSpPr>
-        <p:spPr>
-          <a:xfrm>
-            <a:off x="640080" y="4983480"/>
-            <a:ext cx="10972800" cy="777240"/>
-          </a:xfrm>
-          <a:prstGeom prst="rect">
-            <a:avLst/>
-          </a:prstGeom>
-          <a:noFill/>
-        </p:spPr>
-        <p:txBody>
-          <a:bodyPr wrap="square">
-            <a:spAutoFit/>
-          </a:bodyPr>
-          <a:lstStyle/>
-          <a:p>
-            <a:r>
-              <a:rPr sz="1200">
-                <a:solidFill>
-                  <a:srgbClr val="0B2E4F"/>
-                </a:solidFill>
-                <a:latin typeface="Consolas"/>
-              </a:rPr>
-              <a:t>build.bat                     # incremental build   (build.bat rebuild for a clean build)</a:t>
-            </a:r>
-          </a:p>
-          <a:p>
-            <a:r>
-              <a:rPr sz="1200">
-                <a:solidFill>
-                  <a:srgbClr val="0B2E4F"/>
-                </a:solidFill>
-                <a:latin typeface="Consolas"/>
-              </a:rPr>
-              <a:t>python flash.py               # flash Board 1 and Board 2 in sequence</a:t>
-            </a:r>
-          </a:p>
-        </p:txBody>
-      </p:sp>
-      <p:sp>
-        <p:nvSpPr>
-          <p:cNvPr id="9" name="Rounded Rectangle 8"/>
-          <p:cNvSpPr/>
-          <p:nvPr/>
-        </p:nvSpPr>
-        <p:spPr>
-          <a:xfrm>
-            <a:off x="457200" y="5760720"/>
-            <a:ext cx="11247120" cy="411480"/>
-          </a:xfrm>
-          <a:prstGeom prst="roundRect">
-            <a:avLst/>
-          </a:prstGeom>
-          <a:solidFill>
-            <a:srgbClr val="1F77B4"/>
-          </a:solidFill>
-          <a:ln>
-            <a:solidFill>
-              <a:srgbClr val="1F77B4"/>
-            </a:solidFill>
-          </a:ln>
-        </p:spPr>
-        <p:style>
-          <a:lnRef idx="1">
-            <a:schemeClr val="accent1"/>
-          </a:lnRef>
-          <a:fillRef idx="3">
-            <a:schemeClr val="accent1"/>
-          </a:fillRef>
-          <a:effectRef idx="2">
-            <a:schemeClr val="accent1"/>
-          </a:effectRef>
-          <a:fontRef idx="minor">
-            <a:schemeClr val="lt1"/>
-          </a:fontRef>
-        </p:style>
-        <p:txBody>
-          <a:bodyPr rtlCol="0" anchor="ctr" wrap="square"/>
-          <a:lstStyle/>
-          <a:p>
-            <a:pPr algn="l"/>
-            <a:r>
-              <a:rPr sz="1300" b="1" i="0">
-                <a:solidFill>
-                  <a:srgbClr val="FFFFFF"/>
-                </a:solidFill>
-              </a:rPr>
-              <a:t>3.  Run the Cyclic Fire demo</a:t>
-            </a:r>
-          </a:p>
-        </p:txBody>
-      </p:sp>
-      <p:sp>
-        <p:nvSpPr>
-          <p:cNvPr id="10" name="TextBox 9"/>
-          <p:cNvSpPr txBox="1"/>
-          <p:nvPr/>
-        </p:nvSpPr>
-        <p:spPr>
-          <a:xfrm>
-            <a:off x="640080" y="6217920"/>
-            <a:ext cx="10972800" cy="1005840"/>
-          </a:xfrm>
-          <a:prstGeom prst="rect">
-            <a:avLst/>
-          </a:prstGeom>
-          <a:noFill/>
-        </p:spPr>
-        <p:txBody>
-          <a:bodyPr wrap="square">
-            <a:spAutoFit/>
-          </a:bodyPr>
-          <a:lstStyle/>
-          <a:p>
-            <a:r>
-              <a:rPr sz="1200">
-                <a:solidFill>
-                  <a:srgbClr val="0B2E4F"/>
-                </a:solidFill>
-              </a:rPr>
-              <a:t>Open two terminals (115200 8N1).  Wait for PTP state = FINE.  On each:</a:t>
-            </a:r>
-          </a:p>
-          <a:p>
-            <a:r>
-              <a:rPr sz="1200">
-                <a:solidFill>
-                  <a:srgbClr val="0B2E4F"/>
-                </a:solidFill>
-                <a:latin typeface="Consolas"/>
-              </a:rPr>
-              <a:t>    cyclic_start_marker 5000 &lt;anchor_ns&gt;    # or:  python cyclic_fire_hw_test.py --marker --period-us 5000</a:t>
+              <a:t>Results — Methodology</a:t>
+            </a:r>
+          </a:p>
+        </p:txBody>
+      </p:sp>
+      <p:sp>
+        <p:nvSpPr>
+          <p:cNvPr id="3" name="Content Placeholder 2"/>
+          <p:cNvSpPr>
+            <a:spLocks noGrp="1"/>
+          </p:cNvSpPr>
+          <p:nvPr>
+            <p:ph idx="13" sz="quarter"/>
+          </p:nvPr>
+        </p:nvSpPr>
+        <p:spPr/>
+        <p:txBody>
+          <a:bodyPr/>
+          <a:lstStyle/>
+          <a:p>
+            <a:pPr/>
+            <a:r>
+              <a:rPr sz="1800"/>
+              <a:t>Saleae Logic 8 — Ch0 = GM board PD10, Ch1 = Follower board PD10</a:t>
+            </a:r>
+          </a:p>
+          <a:p>
+            <a:pPr/>
+            <a:r>
+              <a:rPr sz="1800"/>
+              <a:t>cyclic_fire_hw_test.py orchestrates the full run:</a:t>
+            </a:r>
+          </a:p>
+          <a:p>
+            <a:pPr lvl="1"/>
+            <a:r>
+              <a:rPr sz="1600"/>
+              <a:t>Reset both boards → wait for FINE PTP state</a:t>
+            </a:r>
+          </a:p>
+          <a:p>
+            <a:pPr lvl="1"/>
+            <a:r>
+              <a:rPr sz="1600"/>
+              <a:t>Issue cyclic_start with a shared future anchor_ns</a:t>
+            </a:r>
+          </a:p>
+          <a:p>
+            <a:pPr lvl="1"/>
+            <a:r>
+              <a:rPr sz="1600"/>
+              <a:t>Capture ~0.7 s via the Logic 2 scripting socket</a:t>
+            </a:r>
+          </a:p>
+          <a:p>
+            <a:pPr lvl="1"/>
+            <a:r>
+              <a:rPr sz="1600"/>
+              <a:t>Extract rising edges, pair cross-board edges, compute delta distribution</a:t>
+            </a:r>
+          </a:p>
+          <a:p>
+            <a:pPr/>
+            <a:r>
+              <a:rPr sz="1800"/>
+              <a:t>Reported statistics: median, MAD, extrema, per-edge CSV dump</a:t>
+            </a:r>
+          </a:p>
+          <a:p>
+            <a:pPr/>
+            <a:r>
+              <a:rPr sz="1800"/>
+              <a:t>Pass gate:  |median| ≤ 50 µs  AND  MAD ≤ 50 µs    →    sum ≤ 100 µs window</a:t>
+            </a:r>
+          </a:p>
+          <a:p>
+            <a:pPr/>
+            <a:r>
+              <a:rPr sz="1800"/>
+              <a:t>Spot-check: Logic 2 cursor measurements cross-validated the script output</a:t>
             </a:r>
           </a:p>
         </p:txBody>
@@ -11124,6 +11142,280 @@
           <a:lstStyle/>
           <a:p>
             <a:r>
+              <a:t>Results — Measurement Summary</a:t>
+            </a:r>
+          </a:p>
+        </p:txBody>
+      </p:sp>
+      <p:sp>
+        <p:nvSpPr>
+          <p:cNvPr id="3" name="Rounded Rectangle 2"/>
+          <p:cNvSpPr/>
+          <p:nvPr/>
+        </p:nvSpPr>
+        <p:spPr>
+          <a:xfrm>
+            <a:off x="640080" y="1737360"/>
+            <a:ext cx="3383280" cy="1645920"/>
+          </a:xfrm>
+          <a:prstGeom prst="roundRect">
+            <a:avLst/>
+          </a:prstGeom>
+          <a:solidFill>
+            <a:srgbClr val="2CA02C"/>
+          </a:solidFill>
+          <a:ln>
+            <a:solidFill>
+              <a:srgbClr val="2CA02C"/>
+            </a:solidFill>
+          </a:ln>
+        </p:spPr>
+        <p:style>
+          <a:lnRef idx="1">
+            <a:schemeClr val="accent1"/>
+          </a:lnRef>
+          <a:fillRef idx="3">
+            <a:schemeClr val="accent1"/>
+          </a:fillRef>
+          <a:effectRef idx="2">
+            <a:schemeClr val="accent1"/>
+          </a:effectRef>
+          <a:fontRef idx="minor">
+            <a:schemeClr val="lt1"/>
+          </a:fontRef>
+        </p:style>
+        <p:txBody>
+          <a:bodyPr rtlCol="0" anchor="ctr" wrap="square"/>
+          <a:lstStyle/>
+          <a:p>
+            <a:pPr algn="l"/>
+            <a:r>
+              <a:rPr sz="2600" b="1" i="0">
+                <a:solidFill>
+                  <a:srgbClr val="FFFFFF"/>
+                </a:solidFill>
+              </a:rPr>
+              <a:t>Median
++10 µs</a:t>
+            </a:r>
+          </a:p>
+        </p:txBody>
+      </p:sp>
+      <p:sp>
+        <p:nvSpPr>
+          <p:cNvPr id="4" name="Rounded Rectangle 3"/>
+          <p:cNvSpPr/>
+          <p:nvPr/>
+        </p:nvSpPr>
+        <p:spPr>
+          <a:xfrm>
+            <a:off x="4297680" y="1737360"/>
+            <a:ext cx="3383280" cy="1645920"/>
+          </a:xfrm>
+          <a:prstGeom prst="roundRect">
+            <a:avLst/>
+          </a:prstGeom>
+          <a:solidFill>
+            <a:srgbClr val="1F77B4"/>
+          </a:solidFill>
+          <a:ln>
+            <a:solidFill>
+              <a:srgbClr val="1F77B4"/>
+            </a:solidFill>
+          </a:ln>
+        </p:spPr>
+        <p:style>
+          <a:lnRef idx="1">
+            <a:schemeClr val="accent1"/>
+          </a:lnRef>
+          <a:fillRef idx="3">
+            <a:schemeClr val="accent1"/>
+          </a:fillRef>
+          <a:effectRef idx="2">
+            <a:schemeClr val="accent1"/>
+          </a:effectRef>
+          <a:fontRef idx="minor">
+            <a:schemeClr val="lt1"/>
+          </a:fontRef>
+        </p:style>
+        <p:txBody>
+          <a:bodyPr rtlCol="0" anchor="ctr" wrap="square"/>
+          <a:lstStyle/>
+          <a:p>
+            <a:pPr algn="l"/>
+            <a:r>
+              <a:rPr sz="2600" b="1" i="0">
+                <a:solidFill>
+                  <a:srgbClr val="FFFFFF"/>
+                </a:solidFill>
+              </a:rPr>
+              <a:t>MAD
+38 µs</a:t>
+            </a:r>
+          </a:p>
+        </p:txBody>
+      </p:sp>
+      <p:sp>
+        <p:nvSpPr>
+          <p:cNvPr id="5" name="Rounded Rectangle 4"/>
+          <p:cNvSpPr/>
+          <p:nvPr/>
+        </p:nvSpPr>
+        <p:spPr>
+          <a:xfrm>
+            <a:off x="7955279" y="1737360"/>
+            <a:ext cx="3383280" cy="1645920"/>
+          </a:xfrm>
+          <a:prstGeom prst="roundRect">
+            <a:avLst/>
+          </a:prstGeom>
+          <a:solidFill>
+            <a:srgbClr val="2CA02C"/>
+          </a:solidFill>
+          <a:ln>
+            <a:solidFill>
+              <a:srgbClr val="2CA02C"/>
+            </a:solidFill>
+          </a:ln>
+        </p:spPr>
+        <p:style>
+          <a:lnRef idx="1">
+            <a:schemeClr val="accent1"/>
+          </a:lnRef>
+          <a:fillRef idx="3">
+            <a:schemeClr val="accent1"/>
+          </a:fillRef>
+          <a:effectRef idx="2">
+            <a:schemeClr val="accent1"/>
+          </a:effectRef>
+          <a:fontRef idx="minor">
+            <a:schemeClr val="lt1"/>
+          </a:fontRef>
+        </p:style>
+        <p:txBody>
+          <a:bodyPr rtlCol="0" anchor="ctr" wrap="square"/>
+          <a:lstStyle/>
+          <a:p>
+            <a:pPr algn="l"/>
+            <a:r>
+              <a:rPr sz="2600" b="1" i="0">
+                <a:solidFill>
+                  <a:srgbClr val="FFFFFF"/>
+                </a:solidFill>
+              </a:rPr>
+              <a:t>Verdict
+PASS</a:t>
+            </a:r>
+          </a:p>
+        </p:txBody>
+      </p:sp>
+      <p:sp>
+        <p:nvSpPr>
+          <p:cNvPr id="6" name="TextBox 5"/>
+          <p:cNvSpPr txBox="1"/>
+          <p:nvPr/>
+        </p:nvSpPr>
+        <p:spPr>
+          <a:xfrm>
+            <a:off x="640080" y="3657600"/>
+            <a:ext cx="10972800" cy="2560320"/>
+          </a:xfrm>
+          <a:prstGeom prst="rect">
+            <a:avLst/>
+          </a:prstGeom>
+          <a:noFill/>
+        </p:spPr>
+        <p:txBody>
+          <a:bodyPr wrap="square">
+            <a:spAutoFit/>
+          </a:bodyPr>
+          <a:lstStyle/>
+          <a:p>
+            <a:r>
+              <a:rPr sz="1700">
+                <a:solidFill>
+                  <a:srgbClr val="0B2E4F"/>
+                </a:solidFill>
+              </a:rPr>
+              <a:t>• Before RX-IRQ compensation:  median +10 005 µs  →  FAIL</a:t>
+            </a:r>
+          </a:p>
+          <a:p>
+            <a:r>
+              <a:rPr sz="1700">
+                <a:solidFill>
+                  <a:srgbClr val="0B2E4F"/>
+                </a:solidFill>
+              </a:rPr>
+              <a:t>• After the fix:  median +10 µs  →  inside the 100 µs product window</a:t>
+            </a:r>
+          </a:p>
+          <a:p>
+            <a:r>
+              <a:rPr sz="1700">
+                <a:solidFill>
+                  <a:srgbClr val="0B2E4F"/>
+                </a:solidFill>
+              </a:rPr>
+              <a:t>• Long-term (60 s) cross-board rate residual:  1.2 ppm</a:t>
+            </a:r>
+          </a:p>
+          <a:p>
+            <a:r>
+              <a:rPr sz="1700">
+                <a:solidFill>
+                  <a:srgbClr val="0B2E4F"/>
+                </a:solidFill>
+              </a:rPr>
+              <a:t>• MAD dominated by short-term drift-filter wander, not stack asymmetry</a:t>
+            </a:r>
+          </a:p>
+          <a:p>
+            <a:r>
+              <a:rPr sz="1700">
+                <a:solidFill>
+                  <a:srgbClr val="0B2E4F"/>
+                </a:solidFill>
+              </a:rPr>
+              <a:t>• Drift IIR raised from N=32 to N=128 → halved filter stddev</a:t>
+            </a:r>
+          </a:p>
+        </p:txBody>
+      </p:sp>
+    </p:spTree>
+  </p:cSld>
+  <p:clrMapOvr>
+    <a:masterClrMapping/>
+  </p:clrMapOvr>
+</p:sld>
+</file>
+
+<file path=ppt/slides/slide31.xml><?xml version="1.0" encoding="utf-8"?>
+<p:sld xmlns:a="http://schemas.openxmlformats.org/drawingml/2006/main" xmlns:p="http://schemas.openxmlformats.org/presentationml/2006/main" xmlns:r="http://schemas.openxmlformats.org/officeDocument/2006/relationships">
+  <p:cSld>
+    <p:spTree>
+      <p:nvGrpSpPr>
+        <p:cNvPr id="1" name=""/>
+        <p:cNvGrpSpPr/>
+        <p:nvPr/>
+      </p:nvGrpSpPr>
+      <p:grpSpPr/>
+      <p:sp>
+        <p:nvSpPr>
+          <p:cNvPr id="2" name="Title 1"/>
+          <p:cNvSpPr>
+            <a:spLocks noGrp="1"/>
+          </p:cNvSpPr>
+          <p:nvPr>
+            <p:ph type="title"/>
+          </p:nvPr>
+        </p:nvSpPr>
+        <p:spPr/>
+        <p:txBody>
+          <a:bodyPr/>
+          <a:lstStyle/>
+          <a:p>
+            <a:r>
               <a:t>Open Issues &amp; Outlook</a:t>
             </a:r>
           </a:p>
@@ -12984,114 +13276,487 @@
           <a:lstStyle/>
           <a:p>
             <a:r>
-              <a:t>Agenda</a:t>
-            </a:r>
-          </a:p>
-        </p:txBody>
-      </p:sp>
-      <p:sp>
-        <p:nvSpPr>
-          <p:cNvPr id="3" name="Content Placeholder 2"/>
-          <p:cNvSpPr>
-            <a:spLocks noGrp="1"/>
-          </p:cNvSpPr>
-          <p:nvPr>
-            <p:ph idx="13" sz="quarter"/>
-          </p:nvPr>
-        </p:nvSpPr>
-        <p:spPr/>
-        <p:txBody>
-          <a:bodyPr/>
-          <a:lstStyle/>
-          <a:p>
-            <a:pPr/>
-            <a:r>
-              <a:rPr sz="1800"/>
-              <a:t>Part 0 — Overview &amp; standalone button-LED demo</a:t>
-            </a:r>
-          </a:p>
-          <a:p>
-            <a:pPr/>
-            <a:r>
-              <a:rPr sz="1800"/>
-              <a:t>Part 1 — PTP theory (IEEE 1588)</a:t>
-            </a:r>
-          </a:p>
-          <a:p>
-            <a:pPr lvl="1"/>
-            <a:r>
-              <a:rPr sz="1600"/>
-              <a:t>Clock model, message exchange, timestamp accuracy, error sources</a:t>
-            </a:r>
-          </a:p>
-          <a:p>
-            <a:pPr/>
-            <a:r>
-              <a:rPr sz="1800"/>
-              <a:t>Part 2 — 10BASE-T1S context</a:t>
-            </a:r>
-          </a:p>
-          <a:p>
-            <a:pPr lvl="1"/>
-            <a:r>
-              <a:rPr sz="1600"/>
-              <a:t>Single-pair multidrop PHY, PLCA, implications for PTP</a:t>
-            </a:r>
-          </a:p>
-          <a:p>
-            <a:pPr/>
-            <a:r>
-              <a:rPr sz="1800"/>
-              <a:t>Part 3 — LAN8651 specifics</a:t>
-            </a:r>
-          </a:p>
-          <a:p>
-            <a:pPr lvl="1"/>
-            <a:r>
-              <a:rPr sz="1600"/>
-              <a:t>SPI MAC-PHY, timestamp engine, SFD-to-IRQ latency</a:t>
-            </a:r>
-          </a:p>
-          <a:p>
-            <a:pPr/>
-            <a:r>
-              <a:rPr sz="1800"/>
-              <a:t>Part 4 — Cyclic Fire application</a:t>
-            </a:r>
-          </a:p>
-          <a:p>
-            <a:pPr lvl="1"/>
-            <a:r>
-              <a:rPr sz="1600"/>
-              <a:t>Concept, use cases, API and patterns</a:t>
-            </a:r>
-          </a:p>
-          <a:p>
-            <a:pPr/>
-            <a:r>
-              <a:rPr sz="1800"/>
-              <a:t>Part 5 — PTP_CLOCK for firmware event logging</a:t>
-            </a:r>
-          </a:p>
-          <a:p>
-            <a:pPr lvl="1"/>
-            <a:r>
-              <a:rPr sz="1600"/>
-              <a:t>API, usage pattern, cross-board correlation</a:t>
-            </a:r>
-          </a:p>
-          <a:p>
-            <a:pPr/>
-            <a:r>
-              <a:rPr sz="1800"/>
-              <a:t>Part 6 — Measurement results, open issues &amp; outlook</a:t>
-            </a:r>
-          </a:p>
-          <a:p>
-            <a:pPr/>
-            <a:r>
-              <a:rPr sz="1800"/>
-              <a:t>Part 7 — Reproducing the project on your own machine</a:t>
+              <a:t>Standalone Demo — iperf Payload over Synchronised Link</a:t>
+            </a:r>
+          </a:p>
+        </p:txBody>
+      </p:sp>
+      <p:sp>
+        <p:nvSpPr>
+          <p:cNvPr id="3" name="Rounded Rectangle 2"/>
+          <p:cNvSpPr/>
+          <p:nvPr/>
+        </p:nvSpPr>
+        <p:spPr>
+          <a:xfrm>
+            <a:off x="274320" y="1325880"/>
+            <a:ext cx="11612880" cy="457200"/>
+          </a:xfrm>
+          <a:prstGeom prst="roundRect">
+            <a:avLst/>
+          </a:prstGeom>
+          <a:solidFill>
+            <a:srgbClr val="E8EEF5"/>
+          </a:solidFill>
+          <a:ln>
+            <a:solidFill>
+              <a:srgbClr val="E8EEF5"/>
+            </a:solidFill>
+          </a:ln>
+        </p:spPr>
+        <p:style>
+          <a:lnRef idx="1">
+            <a:schemeClr val="accent1"/>
+          </a:lnRef>
+          <a:fillRef idx="3">
+            <a:schemeClr val="accent1"/>
+          </a:fillRef>
+          <a:effectRef idx="2">
+            <a:schemeClr val="accent1"/>
+          </a:effectRef>
+          <a:fontRef idx="minor">
+            <a:schemeClr val="lt1"/>
+          </a:fontRef>
+        </p:style>
+        <p:txBody>
+          <a:bodyPr rtlCol="0" anchor="ctr" wrap="square"/>
+          <a:lstStyle/>
+          <a:p>
+            <a:pPr algn="l"/>
+            <a:r>
+              <a:rPr sz="1300" b="1" i="1">
+                <a:solidFill>
+                  <a:srgbClr val="0B2E4F"/>
+                </a:solidFill>
+              </a:rPr>
+              <a:t>After PTP lock, the opposite-role button launches iperf over the T1S link — real TCP traffic, no PC needed.</a:t>
+            </a:r>
+          </a:p>
+        </p:txBody>
+      </p:sp>
+      <p:sp>
+        <p:nvSpPr>
+          <p:cNvPr id="4" name="Rounded Rectangle 3"/>
+          <p:cNvSpPr/>
+          <p:nvPr/>
+        </p:nvSpPr>
+        <p:spPr>
+          <a:xfrm>
+            <a:off x="457200" y="1965960"/>
+            <a:ext cx="3749039" cy="1554480"/>
+          </a:xfrm>
+          <a:prstGeom prst="roundRect">
+            <a:avLst/>
+          </a:prstGeom>
+          <a:solidFill>
+            <a:srgbClr val="2CA02C"/>
+          </a:solidFill>
+          <a:ln>
+            <a:solidFill>
+              <a:srgbClr val="2CA02C"/>
+            </a:solidFill>
+          </a:ln>
+        </p:spPr>
+        <p:style>
+          <a:lnRef idx="1">
+            <a:schemeClr val="accent1"/>
+          </a:lnRef>
+          <a:fillRef idx="3">
+            <a:schemeClr val="accent1"/>
+          </a:fillRef>
+          <a:effectRef idx="2">
+            <a:schemeClr val="accent1"/>
+          </a:effectRef>
+          <a:fontRef idx="minor">
+            <a:schemeClr val="lt1"/>
+          </a:fontRef>
+        </p:style>
+        <p:txBody>
+          <a:bodyPr rtlCol="0" anchor="ctr" wrap="square"/>
+          <a:lstStyle/>
+          <a:p>
+            <a:pPr algn="l"/>
+            <a:r>
+              <a:rPr sz="1400" b="1" i="0">
+                <a:solidFill>
+                  <a:srgbClr val="FFFFFF"/>
+                </a:solidFill>
+              </a:rPr>
+              <a:t>Master board
+192.168.0.10/24
+iperf TCP server :5001</a:t>
+            </a:r>
+          </a:p>
+        </p:txBody>
+      </p:sp>
+      <p:sp>
+        <p:nvSpPr>
+          <p:cNvPr id="5" name="Rounded Rectangle 4"/>
+          <p:cNvSpPr/>
+          <p:nvPr/>
+        </p:nvSpPr>
+        <p:spPr>
+          <a:xfrm>
+            <a:off x="4480560" y="1965960"/>
+            <a:ext cx="3017520" cy="1554480"/>
+          </a:xfrm>
+          <a:prstGeom prst="roundRect">
+            <a:avLst/>
+          </a:prstGeom>
+          <a:solidFill>
+            <a:srgbClr val="0B2E4F"/>
+          </a:solidFill>
+          <a:ln>
+            <a:solidFill>
+              <a:srgbClr val="0B2E4F"/>
+            </a:solidFill>
+          </a:ln>
+        </p:spPr>
+        <p:style>
+          <a:lnRef idx="1">
+            <a:schemeClr val="accent1"/>
+          </a:lnRef>
+          <a:fillRef idx="3">
+            <a:schemeClr val="accent1"/>
+          </a:fillRef>
+          <a:effectRef idx="2">
+            <a:schemeClr val="accent1"/>
+          </a:effectRef>
+          <a:fontRef idx="minor">
+            <a:schemeClr val="lt1"/>
+          </a:fontRef>
+        </p:style>
+        <p:txBody>
+          <a:bodyPr rtlCol="0" anchor="ctr" wrap="square"/>
+          <a:lstStyle/>
+          <a:p>
+            <a:pPr algn="l"/>
+            <a:r>
+              <a:rPr sz="1300" b="1" i="0">
+                <a:solidFill>
+                  <a:srgbClr val="FFFFFF"/>
+                </a:solidFill>
+              </a:rPr>
+              <a:t>10BASE-T1S
+shared pair
+rate-capped 4 Mbps</a:t>
+            </a:r>
+          </a:p>
+        </p:txBody>
+      </p:sp>
+      <p:sp>
+        <p:nvSpPr>
+          <p:cNvPr id="6" name="Rounded Rectangle 5"/>
+          <p:cNvSpPr/>
+          <p:nvPr/>
+        </p:nvSpPr>
+        <p:spPr>
+          <a:xfrm>
+            <a:off x="7772400" y="1965960"/>
+            <a:ext cx="3749039" cy="1554480"/>
+          </a:xfrm>
+          <a:prstGeom prst="roundRect">
+            <a:avLst/>
+          </a:prstGeom>
+          <a:solidFill>
+            <a:srgbClr val="1F77B4"/>
+          </a:solidFill>
+          <a:ln>
+            <a:solidFill>
+              <a:srgbClr val="1F77B4"/>
+            </a:solidFill>
+          </a:ln>
+        </p:spPr>
+        <p:style>
+          <a:lnRef idx="1">
+            <a:schemeClr val="accent1"/>
+          </a:lnRef>
+          <a:fillRef idx="3">
+            <a:schemeClr val="accent1"/>
+          </a:fillRef>
+          <a:effectRef idx="2">
+            <a:schemeClr val="accent1"/>
+          </a:effectRef>
+          <a:fontRef idx="minor">
+            <a:schemeClr val="lt1"/>
+          </a:fontRef>
+        </p:style>
+        <p:txBody>
+          <a:bodyPr rtlCol="0" anchor="ctr" wrap="square"/>
+          <a:lstStyle/>
+          <a:p>
+            <a:pPr algn="l"/>
+            <a:r>
+              <a:rPr sz="1400" b="1" i="0">
+                <a:solidFill>
+                  <a:srgbClr val="FFFFFF"/>
+                </a:solidFill>
+              </a:rPr>
+              <a:t>Follower board
+192.168.0.20/24
+iperf TCP client →  .10:5001</a:t>
+            </a:r>
+          </a:p>
+        </p:txBody>
+      </p:sp>
+      <p:cxnSp>
+        <p:nvCxnSpPr>
+          <p:cNvPr id="7" name="Connector 6"/>
+          <p:cNvCxnSpPr/>
+          <p:nvPr/>
+        </p:nvCxnSpPr>
+        <p:spPr>
+          <a:xfrm>
+            <a:off x="4206240" y="2743200"/>
+            <a:ext cx="274320" cy="0"/>
+          </a:xfrm>
+          <a:prstGeom prst="line">
+            <a:avLst/>
+          </a:prstGeom>
+          <a:ln w="38100">
+            <a:solidFill>
+              <a:srgbClr val="555555"/>
+            </a:solidFill>
+          </a:ln>
+        </p:spPr>
+        <p:style>
+          <a:lnRef idx="2">
+            <a:schemeClr val="accent1"/>
+          </a:lnRef>
+          <a:fillRef idx="0">
+            <a:schemeClr val="accent1"/>
+          </a:fillRef>
+          <a:effectRef idx="1">
+            <a:schemeClr val="accent1"/>
+          </a:effectRef>
+          <a:fontRef idx="minor">
+            <a:schemeClr val="tx1"/>
+          </a:fontRef>
+        </p:style>
+      </p:cxnSp>
+      <p:cxnSp>
+        <p:nvCxnSpPr>
+          <p:cNvPr id="8" name="Connector 7"/>
+          <p:cNvCxnSpPr/>
+          <p:nvPr/>
+        </p:nvCxnSpPr>
+        <p:spPr>
+          <a:xfrm>
+            <a:off x="7498079" y="2743200"/>
+            <a:ext cx="274321" cy="0"/>
+          </a:xfrm>
+          <a:prstGeom prst="line">
+            <a:avLst/>
+          </a:prstGeom>
+          <a:ln w="38100">
+            <a:solidFill>
+              <a:srgbClr val="555555"/>
+            </a:solidFill>
+          </a:ln>
+        </p:spPr>
+        <p:style>
+          <a:lnRef idx="2">
+            <a:schemeClr val="accent1"/>
+          </a:lnRef>
+          <a:fillRef idx="0">
+            <a:schemeClr val="accent1"/>
+          </a:fillRef>
+          <a:effectRef idx="1">
+            <a:schemeClr val="accent1"/>
+          </a:effectRef>
+          <a:fontRef idx="minor">
+            <a:schemeClr val="tx1"/>
+          </a:fontRef>
+        </p:style>
+      </p:cxnSp>
+      <p:sp>
+        <p:nvSpPr>
+          <p:cNvPr id="9" name="Rounded Rectangle 8"/>
+          <p:cNvSpPr/>
+          <p:nvPr/>
+        </p:nvSpPr>
+        <p:spPr>
+          <a:xfrm>
+            <a:off x="274320" y="3749039"/>
+            <a:ext cx="11612880" cy="457200"/>
+          </a:xfrm>
+          <a:prstGeom prst="roundRect">
+            <a:avLst/>
+          </a:prstGeom>
+          <a:solidFill>
+            <a:srgbClr val="0B2E4F"/>
+          </a:solidFill>
+          <a:ln>
+            <a:solidFill>
+              <a:srgbClr val="0B2E4F"/>
+            </a:solidFill>
+          </a:ln>
+        </p:spPr>
+        <p:style>
+          <a:lnRef idx="1">
+            <a:schemeClr val="accent1"/>
+          </a:lnRef>
+          <a:fillRef idx="3">
+            <a:schemeClr val="accent1"/>
+          </a:fillRef>
+          <a:effectRef idx="2">
+            <a:schemeClr val="accent1"/>
+          </a:effectRef>
+          <a:fontRef idx="minor">
+            <a:schemeClr val="lt1"/>
+          </a:fontRef>
+        </p:style>
+        <p:txBody>
+          <a:bodyPr rtlCol="0" anchor="ctr" wrap="square"/>
+          <a:lstStyle/>
+          <a:p>
+            <a:pPr algn="l"/>
+            <a:r>
+              <a:rPr sz="1300" b="1" i="0">
+                <a:solidFill>
+                  <a:srgbClr val="FFFFFF"/>
+                </a:solidFill>
+              </a:rPr>
+              <a:t>Button usage after role selection  (primary button already stayed the way it was)</a:t>
+            </a:r>
+          </a:p>
+        </p:txBody>
+      </p:sp>
+      <p:sp>
+        <p:nvSpPr>
+          <p:cNvPr id="10" name="TextBox 9"/>
+          <p:cNvSpPr txBox="1"/>
+          <p:nvPr/>
+        </p:nvSpPr>
+        <p:spPr>
+          <a:xfrm>
+            <a:off x="457200" y="4297680"/>
+            <a:ext cx="11247120" cy="1005840"/>
+          </a:xfrm>
+          <a:prstGeom prst="rect">
+            <a:avLst/>
+          </a:prstGeom>
+          <a:noFill/>
+        </p:spPr>
+        <p:txBody>
+          <a:bodyPr wrap="square">
+            <a:spAutoFit/>
+          </a:bodyPr>
+          <a:lstStyle/>
+          <a:p>
+            <a:r>
+              <a:rPr sz="1300">
+                <a:solidFill>
+                  <a:srgbClr val="0B2E4F"/>
+                </a:solidFill>
+              </a:rPr>
+              <a:t>• Master  (SW2 was pressed first):  SW1 → start iperf server.  SW1 again → stop server.</a:t>
+            </a:r>
+          </a:p>
+          <a:p>
+            <a:r>
+              <a:rPr sz="1300">
+                <a:solidFill>
+                  <a:srgbClr val="0B2E4F"/>
+                </a:solidFill>
+              </a:rPr>
+              <a:t>• Follower (SW1 was pressed first): SW2 → start iperf client (streams 4 Mbps to .10:5001).  SW2 again → stop client.</a:t>
+            </a:r>
+          </a:p>
+          <a:p>
+            <a:r>
+              <a:rPr sz="1300">
+                <a:solidFill>
+                  <a:srgbClr val="0B2E4F"/>
+                </a:solidFill>
+              </a:rPr>
+              <a:t>• Pressing the primary button to leave the role also stops any iperf session that role owned.</a:t>
+            </a:r>
+          </a:p>
+        </p:txBody>
+      </p:sp>
+      <p:sp>
+        <p:nvSpPr>
+          <p:cNvPr id="11" name="TextBox 10"/>
+          <p:cNvSpPr txBox="1"/>
+          <p:nvPr/>
+        </p:nvSpPr>
+        <p:spPr>
+          <a:xfrm>
+            <a:off x="457200" y="5394960"/>
+            <a:ext cx="11247120" cy="1097280"/>
+          </a:xfrm>
+          <a:prstGeom prst="rect">
+            <a:avLst/>
+          </a:prstGeom>
+          <a:noFill/>
+        </p:spPr>
+        <p:txBody>
+          <a:bodyPr wrap="square">
+            <a:spAutoFit/>
+          </a:bodyPr>
+          <a:lstStyle/>
+          <a:p>
+            <a:r>
+              <a:rPr sz="1200">
+                <a:solidFill>
+                  <a:srgbClr val="0B2E4F"/>
+                </a:solidFill>
+              </a:rPr>
+              <a:t>• 4 Mbps cap: keeps the client inside the observed 4–6 Mbps sustainable T1S goodput and avoids PLCA back-pressure / TCPIPStack_Assert warnings.</a:t>
+            </a:r>
+          </a:p>
+          <a:p>
+            <a:r>
+              <a:rPr sz="1200">
+                <a:solidFill>
+                  <a:srgbClr val="0B2E4F"/>
+                </a:solidFill>
+              </a:rPr>
+              <a:t>• iperf banner and bandwidth reports are routed to the same UART as the PTP logs — one console for everything, no second serial window.</a:t>
+            </a:r>
+          </a:p>
+          <a:p>
+            <a:r>
+              <a:rPr sz="1200">
+                <a:solidFill>
+                  <a:srgbClr val="0B2E4F"/>
+                </a:solidFill>
+              </a:rPr>
+              <a:t>• Proves the sync is not cosmetic: the two boards exchange real, timed TCP payload on the very link PTP disciplined.</a:t>
+            </a:r>
+          </a:p>
+        </p:txBody>
+      </p:sp>
+      <p:sp>
+        <p:nvSpPr>
+          <p:cNvPr id="12" name="TextBox 11"/>
+          <p:cNvSpPr txBox="1"/>
+          <p:nvPr/>
+        </p:nvSpPr>
+        <p:spPr>
+          <a:xfrm>
+            <a:off x="274320" y="6537960"/>
+            <a:ext cx="11612880" cy="320040"/>
+          </a:xfrm>
+          <a:prstGeom prst="rect">
+            <a:avLst/>
+          </a:prstGeom>
+          <a:noFill/>
+        </p:spPr>
+        <p:txBody>
+          <a:bodyPr wrap="none">
+            <a:spAutoFit/>
+          </a:bodyPr>
+          <a:lstStyle/>
+          <a:p>
+            <a:r>
+              <a:rPr sz="1100" b="0" i="1">
+                <a:solidFill>
+                  <a:srgbClr val="555555"/>
+                </a:solidFill>
+              </a:rPr>
+              <a:t>Source: src/iperf_control.{c,h}  +  src/standalone_demo.c  (branch: iperf-payload-test, commit e360177)</a:t>
             </a:r>
           </a:p>
         </p:txBody>
@@ -13130,93 +13795,350 @@
           <a:lstStyle/>
           <a:p>
             <a:r>
-              <a:t>PTP — Purpose &amp; Clock Model</a:t>
-            </a:r>
-          </a:p>
-        </p:txBody>
-      </p:sp>
-      <p:sp>
-        <p:nvSpPr>
-          <p:cNvPr id="3" name="Content Placeholder 2"/>
-          <p:cNvSpPr>
-            <a:spLocks noGrp="1"/>
-          </p:cNvSpPr>
-          <p:nvPr>
-            <p:ph idx="13" sz="quarter"/>
-          </p:nvPr>
-        </p:nvSpPr>
-        <p:spPr/>
-        <p:txBody>
-          <a:bodyPr/>
-          <a:lstStyle/>
-          <a:p>
-            <a:pPr/>
-            <a:r>
-              <a:rPr sz="1800"/>
-              <a:t>Goal: distribute a common notion of time across networked nodes</a:t>
-            </a:r>
-          </a:p>
-          <a:p>
-            <a:pPr lvl="1"/>
-            <a:r>
-              <a:rPr sz="1600"/>
-              <a:t>Target accuracy: sub-microsecond on a LAN — not reachable with NTP</a:t>
-            </a:r>
-          </a:p>
-          <a:p>
-            <a:pPr/>
-            <a:r>
-              <a:rPr sz="1800"/>
-              <a:t>Roles within a PTP domain:</a:t>
-            </a:r>
-          </a:p>
-          <a:p>
-            <a:pPr lvl="1"/>
-            <a:r>
-              <a:rPr sz="1600"/>
-              <a:t>Grandmaster (GM) — reference clock, source of truth</a:t>
-            </a:r>
-          </a:p>
-          <a:p>
-            <a:pPr lvl="1"/>
-            <a:r>
-              <a:rPr sz="1600"/>
-              <a:t>Ordinary / Boundary clock — follower, steers local clock to GM</a:t>
-            </a:r>
-          </a:p>
-          <a:p>
-            <a:pPr lvl="1"/>
-            <a:r>
-              <a:rPr sz="1600"/>
-              <a:t>Transparent clock — forwards and corrects for residence time</a:t>
-            </a:r>
-          </a:p>
-          <a:p>
-            <a:pPr/>
-            <a:r>
-              <a:rPr sz="1800"/>
-              <a:t>Best Master Clock Algorithm (BMCA) elects the GM automatically</a:t>
-            </a:r>
-          </a:p>
-          <a:p>
-            <a:pPr/>
-            <a:r>
-              <a:rPr sz="1800"/>
-              <a:t>Local clock corrected in two dimensions:</a:t>
-            </a:r>
-          </a:p>
-          <a:p>
-            <a:pPr lvl="1"/>
-            <a:r>
-              <a:rPr sz="1600"/>
-              <a:t>Phase — absolute offset to GM (ns)</a:t>
-            </a:r>
-          </a:p>
-          <a:p>
-            <a:pPr lvl="1"/>
-            <a:r>
-              <a:rPr sz="1600"/>
-              <a:t>Rate — frequency ratio between local and GM oscillator (ppb)</a:t>
+              <a:t>Reproducing the Project — Prerequisites</a:t>
+            </a:r>
+          </a:p>
+        </p:txBody>
+      </p:sp>
+      <p:sp>
+        <p:nvSpPr>
+          <p:cNvPr id="3" name="Rounded Rectangle 2"/>
+          <p:cNvSpPr/>
+          <p:nvPr/>
+        </p:nvSpPr>
+        <p:spPr>
+          <a:xfrm>
+            <a:off x="457200" y="1371600"/>
+            <a:ext cx="11247120" cy="502920"/>
+          </a:xfrm>
+          <a:prstGeom prst="roundRect">
+            <a:avLst/>
+          </a:prstGeom>
+          <a:solidFill>
+            <a:srgbClr val="0B2E4F"/>
+          </a:solidFill>
+          <a:ln>
+            <a:solidFill>
+              <a:srgbClr val="0B2E4F"/>
+            </a:solidFill>
+          </a:ln>
+        </p:spPr>
+        <p:style>
+          <a:lnRef idx="1">
+            <a:schemeClr val="accent1"/>
+          </a:lnRef>
+          <a:fillRef idx="3">
+            <a:schemeClr val="accent1"/>
+          </a:fillRef>
+          <a:effectRef idx="2">
+            <a:schemeClr val="accent1"/>
+          </a:effectRef>
+          <a:fontRef idx="minor">
+            <a:schemeClr val="lt1"/>
+          </a:fontRef>
+        </p:style>
+        <p:txBody>
+          <a:bodyPr rtlCol="0" anchor="ctr" wrap="square"/>
+          <a:lstStyle/>
+          <a:p>
+            <a:pPr algn="l"/>
+            <a:r>
+              <a:rPr sz="1400" b="1" i="0">
+                <a:solidFill>
+                  <a:srgbClr val="FFFFFF"/>
+                </a:solidFill>
+              </a:rPr>
+              <a:t>Hardware</a:t>
+            </a:r>
+          </a:p>
+        </p:txBody>
+      </p:sp>
+      <p:sp>
+        <p:nvSpPr>
+          <p:cNvPr id="4" name="TextBox 3"/>
+          <p:cNvSpPr txBox="1"/>
+          <p:nvPr/>
+        </p:nvSpPr>
+        <p:spPr>
+          <a:xfrm>
+            <a:off x="640080" y="1920240"/>
+            <a:ext cx="10972800" cy="548640"/>
+          </a:xfrm>
+          <a:prstGeom prst="rect">
+            <a:avLst/>
+          </a:prstGeom>
+          <a:noFill/>
+        </p:spPr>
+        <p:txBody>
+          <a:bodyPr wrap="none">
+            <a:spAutoFit/>
+          </a:bodyPr>
+          <a:lstStyle/>
+          <a:p>
+            <a:r>
+              <a:rPr sz="1400" b="0" i="0">
+                <a:solidFill>
+                  <a:srgbClr val="0B2E4F"/>
+                </a:solidFill>
+              </a:rPr>
+              <a:t>2 × ATSAME54 Curiosity Ultra  +  2 × LAN865x click board  —  connected pair-to-pair over 10BASE-T1S</a:t>
+            </a:r>
+          </a:p>
+        </p:txBody>
+      </p:sp>
+      <p:sp>
+        <p:nvSpPr>
+          <p:cNvPr id="5" name="TextBox 4"/>
+          <p:cNvSpPr txBox="1"/>
+          <p:nvPr/>
+        </p:nvSpPr>
+        <p:spPr>
+          <a:xfrm>
+            <a:off x="640080" y="2286000"/>
+            <a:ext cx="10972800" cy="365760"/>
+          </a:xfrm>
+          <a:prstGeom prst="rect">
+            <a:avLst/>
+          </a:prstGeom>
+          <a:noFill/>
+        </p:spPr>
+        <p:txBody>
+          <a:bodyPr wrap="none">
+            <a:spAutoFit/>
+          </a:bodyPr>
+          <a:lstStyle/>
+          <a:p>
+            <a:r>
+              <a:rPr sz="1300" b="0" i="0">
+                <a:solidFill>
+                  <a:srgbClr val="555555"/>
+                </a:solidFill>
+              </a:rPr>
+              <a:t>USB (EDBG) cables from each board to the PC for flashing and for the serial console (115200 8N1).</a:t>
+            </a:r>
+          </a:p>
+        </p:txBody>
+      </p:sp>
+      <p:sp>
+        <p:nvSpPr>
+          <p:cNvPr id="6" name="Rounded Rectangle 5"/>
+          <p:cNvSpPr/>
+          <p:nvPr/>
+        </p:nvSpPr>
+        <p:spPr>
+          <a:xfrm>
+            <a:off x="457200" y="2880360"/>
+            <a:ext cx="11247120" cy="502920"/>
+          </a:xfrm>
+          <a:prstGeom prst="roundRect">
+            <a:avLst/>
+          </a:prstGeom>
+          <a:solidFill>
+            <a:srgbClr val="0B2E4F"/>
+          </a:solidFill>
+          <a:ln>
+            <a:solidFill>
+              <a:srgbClr val="0B2E4F"/>
+            </a:solidFill>
+          </a:ln>
+        </p:spPr>
+        <p:style>
+          <a:lnRef idx="1">
+            <a:schemeClr val="accent1"/>
+          </a:lnRef>
+          <a:fillRef idx="3">
+            <a:schemeClr val="accent1"/>
+          </a:fillRef>
+          <a:effectRef idx="2">
+            <a:schemeClr val="accent1"/>
+          </a:effectRef>
+          <a:fontRef idx="minor">
+            <a:schemeClr val="lt1"/>
+          </a:fontRef>
+        </p:style>
+        <p:txBody>
+          <a:bodyPr rtlCol="0" anchor="ctr" wrap="square"/>
+          <a:lstStyle/>
+          <a:p>
+            <a:pPr algn="l"/>
+            <a:r>
+              <a:rPr sz="1400" b="1" i="0">
+                <a:solidFill>
+                  <a:srgbClr val="FFFFFF"/>
+                </a:solidFill>
+              </a:rPr>
+              <a:t>Software on the PC</a:t>
+            </a:r>
+          </a:p>
+        </p:txBody>
+      </p:sp>
+      <p:sp>
+        <p:nvSpPr>
+          <p:cNvPr id="7" name="TextBox 6"/>
+          <p:cNvSpPr txBox="1"/>
+          <p:nvPr/>
+        </p:nvSpPr>
+        <p:spPr>
+          <a:xfrm>
+            <a:off x="640080" y="3474720"/>
+            <a:ext cx="10972800" cy="2286000"/>
+          </a:xfrm>
+          <a:prstGeom prst="rect">
+            <a:avLst/>
+          </a:prstGeom>
+          <a:noFill/>
+        </p:spPr>
+        <p:txBody>
+          <a:bodyPr wrap="square">
+            <a:spAutoFit/>
+          </a:bodyPr>
+          <a:lstStyle/>
+          <a:p>
+            <a:r>
+              <a:rPr sz="1400">
+                <a:solidFill>
+                  <a:srgbClr val="0B2E4F"/>
+                </a:solidFill>
+              </a:rPr>
+              <a:t>• MPLAB XC32 v4.60 or v5.x  (default path  C:\Program Files\Microchip\xc32\)</a:t>
+            </a:r>
+          </a:p>
+          <a:p>
+            <a:r>
+              <a:rPr sz="1400">
+                <a:solidFill>
+                  <a:srgbClr val="0B2E4F"/>
+                </a:solidFill>
+              </a:rPr>
+              <a:t>• MPLAB X IDE / MDB  (used by flash.py to program the boards)</a:t>
+            </a:r>
+          </a:p>
+          <a:p>
+            <a:r>
+              <a:rPr sz="1400">
+                <a:solidFill>
+                  <a:srgbClr val="0B2E4F"/>
+                </a:solidFill>
+              </a:rPr>
+              <a:t>• CMake ≥ 4.1  +  Ninja  (both on PATH)</a:t>
+            </a:r>
+          </a:p>
+          <a:p>
+            <a:r>
+              <a:rPr sz="1400">
+                <a:solidFill>
+                  <a:srgbClr val="0B2E4F"/>
+                </a:solidFill>
+              </a:rPr>
+              <a:t>• Python 3.9+   with   pip install pyserial   (plus python-pptx only if you rebuild this deck)</a:t>
+            </a:r>
+          </a:p>
+          <a:p>
+            <a:r>
+              <a:rPr sz="1400">
+                <a:solidFill>
+                  <a:srgbClr val="0B2E4F"/>
+                </a:solidFill>
+              </a:rPr>
+              <a:t>• Two terminal windows — one per board — e.g. PuTTY or Tera Term  (115200 8N1)</a:t>
+            </a:r>
+          </a:p>
+        </p:txBody>
+      </p:sp>
+      <p:sp>
+        <p:nvSpPr>
+          <p:cNvPr id="8" name="Rounded Rectangle 7"/>
+          <p:cNvSpPr/>
+          <p:nvPr/>
+        </p:nvSpPr>
+        <p:spPr>
+          <a:xfrm>
+            <a:off x="457200" y="5532120"/>
+            <a:ext cx="11247120" cy="502920"/>
+          </a:xfrm>
+          <a:prstGeom prst="roundRect">
+            <a:avLst/>
+          </a:prstGeom>
+          <a:solidFill>
+            <a:srgbClr val="1F77B4"/>
+          </a:solidFill>
+          <a:ln>
+            <a:solidFill>
+              <a:srgbClr val="1F77B4"/>
+            </a:solidFill>
+          </a:ln>
+        </p:spPr>
+        <p:style>
+          <a:lnRef idx="1">
+            <a:schemeClr val="accent1"/>
+          </a:lnRef>
+          <a:fillRef idx="3">
+            <a:schemeClr val="accent1"/>
+          </a:fillRef>
+          <a:effectRef idx="2">
+            <a:schemeClr val="accent1"/>
+          </a:effectRef>
+          <a:fontRef idx="minor">
+            <a:schemeClr val="lt1"/>
+          </a:fontRef>
+        </p:style>
+        <p:txBody>
+          <a:bodyPr rtlCol="0" anchor="ctr" wrap="square"/>
+          <a:lstStyle/>
+          <a:p>
+            <a:pPr algn="l"/>
+            <a:r>
+              <a:rPr sz="1300" b="1" i="0">
+                <a:solidFill>
+                  <a:srgbClr val="FFFFFF"/>
+                </a:solidFill>
+              </a:rPr>
+              <a:t>Clone</a:t>
+            </a:r>
+          </a:p>
+        </p:txBody>
+      </p:sp>
+      <p:sp>
+        <p:nvSpPr>
+          <p:cNvPr id="9" name="TextBox 8"/>
+          <p:cNvSpPr txBox="1"/>
+          <p:nvPr/>
+        </p:nvSpPr>
+        <p:spPr>
+          <a:xfrm>
+            <a:off x="640080" y="6080760"/>
+            <a:ext cx="10972800" cy="731520"/>
+          </a:xfrm>
+          <a:prstGeom prst="rect">
+            <a:avLst/>
+          </a:prstGeom>
+          <a:noFill/>
+        </p:spPr>
+        <p:txBody>
+          <a:bodyPr wrap="square">
+            <a:spAutoFit/>
+          </a:bodyPr>
+          <a:lstStyle/>
+          <a:p>
+            <a:r>
+              <a:rPr sz="1300">
+                <a:solidFill>
+                  <a:srgbClr val="0B2E4F"/>
+                </a:solidFill>
+                <a:latin typeface="Consolas"/>
+              </a:rPr>
+              <a:t>git clone https://github.com/zabooh/net_10base_t1s.git</a:t>
+            </a:r>
+          </a:p>
+          <a:p>
+            <a:r>
+              <a:rPr sz="1300">
+                <a:solidFill>
+                  <a:srgbClr val="0B2E4F"/>
+                </a:solidFill>
+                <a:latin typeface="Consolas"/>
+              </a:rPr>
+              <a:t>cd net_10base_t1s\apps\tcpip_iperf_lan865x\firmware\tcpip_iperf_lan865x.X</a:t>
             </a:r>
           </a:p>
         </p:txBody>
@@ -13255,81 +14177,118 @@
           <a:lstStyle/>
           <a:p>
             <a:r>
-              <a:t>PTP — Message Exchange</a:t>
-            </a:r>
-          </a:p>
-        </p:txBody>
-      </p:sp>
-      <p:cxnSp>
-        <p:nvCxnSpPr>
-          <p:cNvPr id="3" name="Connector 2"/>
-          <p:cNvCxnSpPr/>
+              <a:t>Reproducing the Project — Setup, Build, Run</a:t>
+            </a:r>
+          </a:p>
+        </p:txBody>
+      </p:sp>
+      <p:sp>
+        <p:nvSpPr>
+          <p:cNvPr id="3" name="Rounded Rectangle 2"/>
+          <p:cNvSpPr/>
           <p:nvPr/>
-        </p:nvCxnSpPr>
-        <p:spPr>
-          <a:xfrm>
-            <a:off x="2103120" y="1828800"/>
-            <a:ext cx="0" cy="3566160"/>
-          </a:xfrm>
-          <a:prstGeom prst="line">
-            <a:avLst/>
-          </a:prstGeom>
-          <a:ln w="38100">
+        </p:nvSpPr>
+        <p:spPr>
+          <a:xfrm>
+            <a:off x="457200" y="1280160"/>
+            <a:ext cx="11247120" cy="502920"/>
+          </a:xfrm>
+          <a:prstGeom prst="roundRect">
+            <a:avLst/>
+          </a:prstGeom>
+          <a:solidFill>
+            <a:srgbClr val="2CA02C"/>
+          </a:solidFill>
+          <a:ln>
             <a:solidFill>
-              <a:srgbClr val="0B2E4F"/>
+              <a:srgbClr val="2CA02C"/>
             </a:solidFill>
           </a:ln>
         </p:spPr>
         <p:style>
-          <a:lnRef idx="2">
+          <a:lnRef idx="1">
             <a:schemeClr val="accent1"/>
           </a:lnRef>
-          <a:fillRef idx="0">
+          <a:fillRef idx="3">
             <a:schemeClr val="accent1"/>
           </a:fillRef>
-          <a:effectRef idx="1">
+          <a:effectRef idx="2">
             <a:schemeClr val="accent1"/>
           </a:effectRef>
           <a:fontRef idx="minor">
-            <a:schemeClr val="tx1"/>
+            <a:schemeClr val="lt1"/>
           </a:fontRef>
         </p:style>
-      </p:cxnSp>
-      <p:cxnSp>
-        <p:nvCxnSpPr>
-          <p:cNvPr id="4" name="Connector 3"/>
-          <p:cNvCxnSpPr/>
+        <p:txBody>
+          <a:bodyPr rtlCol="0" anchor="ctr" wrap="square"/>
+          <a:lstStyle/>
+          <a:p>
+            <a:pPr algn="l"/>
+            <a:r>
+              <a:rPr sz="1400" b="1" i="0">
+                <a:solidFill>
+                  <a:srgbClr val="FFFFFF"/>
+                </a:solidFill>
+              </a:rPr>
+              <a:t>Quick path — no build required (just run the demo)</a:t>
+            </a:r>
+          </a:p>
+        </p:txBody>
+      </p:sp>
+      <p:sp>
+        <p:nvSpPr>
+          <p:cNvPr id="4" name="TextBox 3"/>
+          <p:cNvSpPr txBox="1"/>
           <p:nvPr/>
-        </p:nvCxnSpPr>
-        <p:spPr>
-          <a:xfrm>
-            <a:off x="9601200" y="1828800"/>
-            <a:ext cx="0" cy="3566160"/>
-          </a:xfrm>
-          <a:prstGeom prst="line">
-            <a:avLst/>
-          </a:prstGeom>
-          <a:ln w="38100">
-            <a:solidFill>
-              <a:srgbClr val="0B2E4F"/>
-            </a:solidFill>
-          </a:ln>
-        </p:spPr>
-        <p:style>
-          <a:lnRef idx="2">
-            <a:schemeClr val="accent1"/>
-          </a:lnRef>
-          <a:fillRef idx="0">
-            <a:schemeClr val="accent1"/>
-          </a:fillRef>
-          <a:effectRef idx="1">
-            <a:schemeClr val="accent1"/>
-          </a:effectRef>
-          <a:fontRef idx="minor">
-            <a:schemeClr val="tx1"/>
-          </a:fontRef>
-        </p:style>
-      </p:cxnSp>
+        </p:nvSpPr>
+        <p:spPr>
+          <a:xfrm>
+            <a:off x="640080" y="1828800"/>
+            <a:ext cx="10972800" cy="1280160"/>
+          </a:xfrm>
+          <a:prstGeom prst="rect">
+            <a:avLst/>
+          </a:prstGeom>
+          <a:noFill/>
+        </p:spPr>
+        <p:txBody>
+          <a:bodyPr wrap="square">
+            <a:spAutoFit/>
+          </a:bodyPr>
+          <a:lstStyle/>
+          <a:p>
+            <a:r>
+              <a:rPr sz="1300">
+                <a:solidFill>
+                  <a:srgbClr val="0B2E4F"/>
+                </a:solidFill>
+              </a:rPr>
+              <a:t>After  git clone  and  python setup_flasher.py,  simply run:</a:t>
+            </a:r>
+          </a:p>
+          <a:p>
+            <a:r>
+              <a:rPr sz="1300">
+                <a:solidFill>
+                  <a:srgbClr val="0B2E4F"/>
+                </a:solidFill>
+                <a:latin typeface="Consolas"/>
+              </a:rPr>
+              <a:t>    python flash.py</a:t>
+            </a:r>
+          </a:p>
+          <a:p>
+            <a:r>
+              <a:rPr sz="1300">
+                <a:solidFill>
+                  <a:srgbClr val="0B2E4F"/>
+                </a:solidFill>
+              </a:rPr>
+              <a:t>flash.py finds the newest pre-built HEX under  out/…/image/*.hex  (checked into the repo) and programmes it onto both boards — no XC32 / CMake / build step needed.</a:t>
+            </a:r>
+          </a:p>
+        </p:txBody>
+      </p:sp>
       <p:sp>
         <p:nvSpPr>
           <p:cNvPr id="5" name="Rounded Rectangle 4"/>
@@ -13338,8 +14297,8 @@
         </p:nvSpPr>
         <p:spPr>
           <a:xfrm>
-            <a:off x="1097279" y="1417320"/>
-            <a:ext cx="2011680" cy="365760"/>
+            <a:off x="457200" y="3063240"/>
+            <a:ext cx="11247120" cy="411480"/>
           </a:xfrm>
           <a:prstGeom prst="roundRect">
             <a:avLst/>
@@ -13373,26 +14332,82 @@
           <a:p>
             <a:pPr algn="l"/>
             <a:r>
-              <a:rPr sz="1400" b="1" i="0">
+              <a:rPr sz="1300" b="1" i="0">
                 <a:solidFill>
                   <a:srgbClr val="FFFFFF"/>
                 </a:solidFill>
               </a:rPr>
-              <a:t>Grandmaster</a:t>
-            </a:r>
-          </a:p>
-        </p:txBody>
-      </p:sp>
-      <p:sp>
-        <p:nvSpPr>
-          <p:cNvPr id="6" name="Rounded Rectangle 5"/>
+              <a:t>Full rebuild  —  1.  One-time tool setup  (run once per machine)</a:t>
+            </a:r>
+          </a:p>
+        </p:txBody>
+      </p:sp>
+      <p:sp>
+        <p:nvSpPr>
+          <p:cNvPr id="6" name="TextBox 5"/>
+          <p:cNvSpPr txBox="1"/>
+          <p:nvPr/>
+        </p:nvSpPr>
+        <p:spPr>
+          <a:xfrm>
+            <a:off x="640080" y="3520440"/>
+            <a:ext cx="10972800" cy="1005840"/>
+          </a:xfrm>
+          <a:prstGeom prst="rect">
+            <a:avLst/>
+          </a:prstGeom>
+          <a:noFill/>
+        </p:spPr>
+        <p:txBody>
+          <a:bodyPr wrap="square">
+            <a:spAutoFit/>
+          </a:bodyPr>
+          <a:lstStyle/>
+          <a:p>
+            <a:r>
+              <a:rPr sz="1200">
+                <a:solidFill>
+                  <a:srgbClr val="0B2E4F"/>
+                </a:solidFill>
+                <a:latin typeface="Consolas"/>
+              </a:rPr>
+              <a:t>python setup_compiler.py      # pick the installed XC32 version</a:t>
+            </a:r>
+          </a:p>
+          <a:p>
+            <a:r>
+              <a:rPr sz="1200">
+                <a:solidFill>
+                  <a:srgbClr val="0B2E4F"/>
+                </a:solidFill>
+                <a:latin typeface="Consolas"/>
+              </a:rPr>
+              <a:t>python setup_flasher.py       # assign Board 1 (GM) and Board 2 (FOL) to their EDBG debuggers</a:t>
+            </a:r>
+          </a:p>
+          <a:p>
+            <a:r>
+              <a:rPr sz="1200">
+                <a:solidFill>
+                  <a:srgbClr val="0B2E4F"/>
+                </a:solidFill>
+                <a:latin typeface="Consolas"/>
+              </a:rPr>
+              <a:t>python setup_debug.py         # fix SAME54_DFP tool-pack (needed for VS Code debugging)</a:t>
+            </a:r>
+          </a:p>
+        </p:txBody>
+      </p:sp>
+      <p:sp>
+        <p:nvSpPr>
+          <p:cNvPr id="7" name="Rounded Rectangle 6"/>
           <p:cNvSpPr/>
           <p:nvPr/>
         </p:nvSpPr>
         <p:spPr>
           <a:xfrm>
-            <a:off x="8595360" y="1417320"/>
-            <a:ext cx="2011680" cy="365760"/>
+            <a:off x="457200" y="4526280"/>
+            <a:ext cx="11247120" cy="411480"/>
           </a:xfrm>
           <a:prstGeom prst="roundRect">
             <a:avLst/>
@@ -13426,51 +14441,16 @@
           <a:p>
             <a:pPr algn="l"/>
             <a:r>
-              <a:rPr sz="1400" b="1" i="0">
+              <a:rPr sz="1300" b="1" i="0">
                 <a:solidFill>
                   <a:srgbClr val="FFFFFF"/>
                 </a:solidFill>
               </a:rPr>
-              <a:t>Follower</a:t>
-            </a:r>
-          </a:p>
-        </p:txBody>
-      </p:sp>
-      <p:cxnSp>
-        <p:nvCxnSpPr>
-          <p:cNvPr id="7" name="Connector 6"/>
-          <p:cNvCxnSpPr/>
-          <p:nvPr/>
-        </p:nvCxnSpPr>
-        <p:spPr>
-          <a:xfrm>
-            <a:off x="2103120" y="2194560"/>
-            <a:ext cx="7498080" cy="457200"/>
-          </a:xfrm>
-          <a:prstGeom prst="bentConnector3">
-            <a:avLst/>
-          </a:prstGeom>
-          <a:ln w="25400">
-            <a:solidFill>
-              <a:srgbClr val="1F77B4"/>
-            </a:solidFill>
-          </a:ln>
-        </p:spPr>
-        <p:style>
-          <a:lnRef idx="2">
-            <a:schemeClr val="accent1"/>
-          </a:lnRef>
-          <a:fillRef idx="0">
-            <a:schemeClr val="accent1"/>
-          </a:fillRef>
-          <a:effectRef idx="1">
-            <a:schemeClr val="accent1"/>
-          </a:effectRef>
-          <a:fontRef idx="minor">
-            <a:schemeClr val="tx1"/>
-          </a:fontRef>
-        </p:style>
-      </p:cxnSp>
+              <a:t>2.  Build and flash both boards</a:t>
+            </a:r>
+          </a:p>
+        </p:txBody>
+      </p:sp>
       <p:sp>
         <p:nvSpPr>
           <p:cNvPr id="8" name="TextBox 7"/>
@@ -13479,8 +14459,8 @@
         </p:nvSpPr>
         <p:spPr>
           <a:xfrm>
-            <a:off x="3657600" y="2148840"/>
-            <a:ext cx="4572000" cy="320040"/>
+            <a:off x="640080" y="4983480"/>
+            <a:ext cx="10972800" cy="777240"/>
           </a:xfrm>
           <a:prstGeom prst="rect">
             <a:avLst/>
@@ -13488,246 +14468,54 @@
           <a:noFill/>
         </p:spPr>
         <p:txBody>
-          <a:bodyPr wrap="none">
+          <a:bodyPr wrap="square">
             <a:spAutoFit/>
           </a:bodyPr>
           <a:lstStyle/>
           <a:p>
             <a:r>
-              <a:rPr sz="1200" b="1" i="0">
-                <a:solidFill>
-                  <a:srgbClr val="1F77B4"/>
-                </a:solidFill>
-              </a:rPr>
-              <a:t>Sync   (t1 on TX, t2 on RX)</a:t>
-            </a:r>
-          </a:p>
-        </p:txBody>
-      </p:sp>
-      <p:cxnSp>
-        <p:nvCxnSpPr>
-          <p:cNvPr id="9" name="Connector 8"/>
-          <p:cNvCxnSpPr/>
-          <p:nvPr/>
-        </p:nvCxnSpPr>
-        <p:spPr>
-          <a:xfrm>
-            <a:off x="2103120" y="2926080"/>
-            <a:ext cx="7498080" cy="182880"/>
-          </a:xfrm>
-          <a:prstGeom prst="bentConnector3">
-            <a:avLst/>
-          </a:prstGeom>
-          <a:ln w="25400">
-            <a:solidFill>
-              <a:srgbClr val="1F77B4"/>
-            </a:solidFill>
-          </a:ln>
-        </p:spPr>
-        <p:style>
-          <a:lnRef idx="2">
-            <a:schemeClr val="accent1"/>
-          </a:lnRef>
-          <a:fillRef idx="0">
-            <a:schemeClr val="accent1"/>
-          </a:fillRef>
-          <a:effectRef idx="1">
-            <a:schemeClr val="accent1"/>
-          </a:effectRef>
-          <a:fontRef idx="minor">
-            <a:schemeClr val="tx1"/>
-          </a:fontRef>
-        </p:style>
-      </p:cxnSp>
-      <p:sp>
-        <p:nvSpPr>
-          <p:cNvPr id="10" name="TextBox 9"/>
-          <p:cNvSpPr txBox="1"/>
-          <p:nvPr/>
-        </p:nvSpPr>
-        <p:spPr>
-          <a:xfrm>
-            <a:off x="3657600" y="2788920"/>
-            <a:ext cx="4572000" cy="320040"/>
-          </a:xfrm>
-          <a:prstGeom prst="rect">
-            <a:avLst/>
-          </a:prstGeom>
-          <a:noFill/>
-        </p:spPr>
-        <p:txBody>
-          <a:bodyPr wrap="none">
-            <a:spAutoFit/>
-          </a:bodyPr>
-          <a:lstStyle/>
-          <a:p>
-            <a:r>
-              <a:rPr sz="1200" b="1" i="0">
-                <a:solidFill>
-                  <a:srgbClr val="1F77B4"/>
-                </a:solidFill>
-              </a:rPr>
-              <a:t>Follow_Up  (carries t1)</a:t>
-            </a:r>
-          </a:p>
-        </p:txBody>
-      </p:sp>
-      <p:cxnSp>
-        <p:nvCxnSpPr>
-          <p:cNvPr id="11" name="Connector 10"/>
-          <p:cNvCxnSpPr/>
-          <p:nvPr/>
-        </p:nvCxnSpPr>
-        <p:spPr>
-          <a:xfrm flipH="1">
-            <a:off x="2103120" y="3566160"/>
-            <a:ext cx="7498080" cy="365760"/>
-          </a:xfrm>
-          <a:prstGeom prst="bentConnector3">
-            <a:avLst/>
-          </a:prstGeom>
-          <a:ln w="25400">
-            <a:solidFill>
-              <a:srgbClr val="1F77B4"/>
-            </a:solidFill>
-          </a:ln>
-        </p:spPr>
-        <p:style>
-          <a:lnRef idx="2">
-            <a:schemeClr val="accent1"/>
-          </a:lnRef>
-          <a:fillRef idx="0">
-            <a:schemeClr val="accent1"/>
-          </a:fillRef>
-          <a:effectRef idx="1">
-            <a:schemeClr val="accent1"/>
-          </a:effectRef>
-          <a:fontRef idx="minor">
-            <a:schemeClr val="tx1"/>
-          </a:fontRef>
-        </p:style>
-      </p:cxnSp>
-      <p:sp>
-        <p:nvSpPr>
-          <p:cNvPr id="12" name="TextBox 11"/>
-          <p:cNvSpPr txBox="1"/>
-          <p:nvPr/>
-        </p:nvSpPr>
-        <p:spPr>
-          <a:xfrm>
-            <a:off x="3657600" y="3703320"/>
-            <a:ext cx="4572000" cy="320040"/>
-          </a:xfrm>
-          <a:prstGeom prst="rect">
-            <a:avLst/>
-          </a:prstGeom>
-          <a:noFill/>
-        </p:spPr>
-        <p:txBody>
-          <a:bodyPr wrap="none">
-            <a:spAutoFit/>
-          </a:bodyPr>
-          <a:lstStyle/>
-          <a:p>
-            <a:r>
-              <a:rPr sz="1200" b="1" i="0">
-                <a:solidFill>
-                  <a:srgbClr val="1F77B4"/>
-                </a:solidFill>
-              </a:rPr>
-              <a:t>Delay_Req   (t3 on TX, t4 on RX)</a:t>
-            </a:r>
-          </a:p>
-        </p:txBody>
-      </p:sp>
-      <p:cxnSp>
-        <p:nvCxnSpPr>
-          <p:cNvPr id="13" name="Connector 12"/>
-          <p:cNvCxnSpPr/>
-          <p:nvPr/>
-        </p:nvCxnSpPr>
-        <p:spPr>
-          <a:xfrm>
-            <a:off x="2103120" y="4297680"/>
-            <a:ext cx="7498080" cy="274320"/>
-          </a:xfrm>
-          <a:prstGeom prst="bentConnector3">
-            <a:avLst/>
-          </a:prstGeom>
-          <a:ln w="25400">
-            <a:solidFill>
-              <a:srgbClr val="1F77B4"/>
-            </a:solidFill>
-          </a:ln>
-        </p:spPr>
-        <p:style>
-          <a:lnRef idx="2">
-            <a:schemeClr val="accent1"/>
-          </a:lnRef>
-          <a:fillRef idx="0">
-            <a:schemeClr val="accent1"/>
-          </a:fillRef>
-          <a:effectRef idx="1">
-            <a:schemeClr val="accent1"/>
-          </a:effectRef>
-          <a:fontRef idx="minor">
-            <a:schemeClr val="tx1"/>
-          </a:fontRef>
-        </p:style>
-      </p:cxnSp>
-      <p:sp>
-        <p:nvSpPr>
-          <p:cNvPr id="14" name="TextBox 13"/>
-          <p:cNvSpPr txBox="1"/>
-          <p:nvPr/>
-        </p:nvSpPr>
-        <p:spPr>
-          <a:xfrm>
-            <a:off x="3657600" y="4160520"/>
-            <a:ext cx="4572000" cy="320040"/>
-          </a:xfrm>
-          <a:prstGeom prst="rect">
-            <a:avLst/>
-          </a:prstGeom>
-          <a:noFill/>
-        </p:spPr>
-        <p:txBody>
-          <a:bodyPr wrap="none">
-            <a:spAutoFit/>
-          </a:bodyPr>
-          <a:lstStyle/>
-          <a:p>
-            <a:r>
-              <a:rPr sz="1200" b="1" i="0">
-                <a:solidFill>
-                  <a:srgbClr val="1F77B4"/>
-                </a:solidFill>
-              </a:rPr>
-              <a:t>Delay_Resp  (carries t4)</a:t>
-            </a:r>
-          </a:p>
-        </p:txBody>
-      </p:sp>
-      <p:sp>
-        <p:nvSpPr>
-          <p:cNvPr id="15" name="Oval 14"/>
+              <a:rPr sz="1200">
+                <a:solidFill>
+                  <a:srgbClr val="0B2E4F"/>
+                </a:solidFill>
+                <a:latin typeface="Consolas"/>
+              </a:rPr>
+              <a:t>build.bat                     # incremental build   (build.bat rebuild for a clean build)</a:t>
+            </a:r>
+          </a:p>
+          <a:p>
+            <a:r>
+              <a:rPr sz="1200">
+                <a:solidFill>
+                  <a:srgbClr val="0B2E4F"/>
+                </a:solidFill>
+                <a:latin typeface="Consolas"/>
+              </a:rPr>
+              <a:t>python flash.py               # flash Board 1 and Board 2 in sequence</a:t>
+            </a:r>
+          </a:p>
+        </p:txBody>
+      </p:sp>
+      <p:sp>
+        <p:nvSpPr>
+          <p:cNvPr id="9" name="Rounded Rectangle 8"/>
           <p:cNvSpPr/>
           <p:nvPr/>
         </p:nvSpPr>
         <p:spPr>
           <a:xfrm>
-            <a:off x="2029967" y="2121408"/>
-            <a:ext cx="146304" cy="146304"/>
-          </a:xfrm>
-          <a:prstGeom prst="ellipse">
+            <a:off x="457200" y="5760720"/>
+            <a:ext cx="11247120" cy="411480"/>
+          </a:xfrm>
+          <a:prstGeom prst="roundRect">
             <a:avLst/>
           </a:prstGeom>
           <a:solidFill>
-            <a:srgbClr val="D62728"/>
+            <a:srgbClr val="1F77B4"/>
           </a:solidFill>
           <a:ln>
             <a:solidFill>
-              <a:srgbClr val="D62728"/>
+              <a:srgbClr val="1F77B4"/>
             </a:solidFill>
           </a:ln>
         </p:spPr>
@@ -13746,23 +14534,31 @@
           </a:fontRef>
         </p:style>
         <p:txBody>
-          <a:bodyPr rtlCol="0" anchor="ctr"/>
-          <a:lstStyle/>
-          <a:p>
-            <a:pPr algn="ctr"/>
-          </a:p>
-        </p:txBody>
-      </p:sp>
-      <p:sp>
-        <p:nvSpPr>
-          <p:cNvPr id="16" name="TextBox 15"/>
+          <a:bodyPr rtlCol="0" anchor="ctr" wrap="square"/>
+          <a:lstStyle/>
+          <a:p>
+            <a:pPr algn="l"/>
+            <a:r>
+              <a:rPr sz="1300" b="1" i="0">
+                <a:solidFill>
+                  <a:srgbClr val="FFFFFF"/>
+                </a:solidFill>
+              </a:rPr>
+              <a:t>3.  Run the Cyclic Fire demo</a:t>
+            </a:r>
+          </a:p>
+        </p:txBody>
+      </p:sp>
+      <p:sp>
+        <p:nvSpPr>
+          <p:cNvPr id="10" name="TextBox 9"/>
           <p:cNvSpPr txBox="1"/>
           <p:nvPr/>
         </p:nvSpPr>
         <p:spPr>
           <a:xfrm>
-            <a:off x="2240279" y="2029967"/>
-            <a:ext cx="548640" cy="274320"/>
+            <a:off x="640080" y="6217920"/>
+            <a:ext cx="10972800" cy="1005840"/>
           </a:xfrm>
           <a:prstGeom prst="rect">
             <a:avLst/>
@@ -13770,305 +14566,29 @@
           <a:noFill/>
         </p:spPr>
         <p:txBody>
-          <a:bodyPr wrap="none">
+          <a:bodyPr wrap="square">
             <a:spAutoFit/>
           </a:bodyPr>
           <a:lstStyle/>
           <a:p>
             <a:r>
-              <a:rPr sz="1200" b="1" i="0">
-                <a:solidFill>
-                  <a:srgbClr val="D62728"/>
-                </a:solidFill>
-              </a:rPr>
-              <a:t>t1</a:t>
-            </a:r>
-          </a:p>
-        </p:txBody>
-      </p:sp>
-      <p:sp>
-        <p:nvSpPr>
-          <p:cNvPr id="17" name="Oval 16"/>
-          <p:cNvSpPr/>
-          <p:nvPr/>
-        </p:nvSpPr>
-        <p:spPr>
-          <a:xfrm>
-            <a:off x="9528048" y="2578608"/>
-            <a:ext cx="146304" cy="146304"/>
-          </a:xfrm>
-          <a:prstGeom prst="ellipse">
-            <a:avLst/>
-          </a:prstGeom>
-          <a:solidFill>
-            <a:srgbClr val="D62728"/>
-          </a:solidFill>
-          <a:ln>
-            <a:solidFill>
-              <a:srgbClr val="D62728"/>
-            </a:solidFill>
-          </a:ln>
-        </p:spPr>
-        <p:style>
-          <a:lnRef idx="1">
-            <a:schemeClr val="accent1"/>
-          </a:lnRef>
-          <a:fillRef idx="3">
-            <a:schemeClr val="accent1"/>
-          </a:fillRef>
-          <a:effectRef idx="2">
-            <a:schemeClr val="accent1"/>
-          </a:effectRef>
-          <a:fontRef idx="minor">
-            <a:schemeClr val="lt1"/>
-          </a:fontRef>
-        </p:style>
-        <p:txBody>
-          <a:bodyPr rtlCol="0" anchor="ctr"/>
-          <a:lstStyle/>
-          <a:p>
-            <a:pPr algn="ctr"/>
-          </a:p>
-        </p:txBody>
-      </p:sp>
-      <p:sp>
-        <p:nvSpPr>
-          <p:cNvPr id="18" name="TextBox 17"/>
-          <p:cNvSpPr txBox="1"/>
-          <p:nvPr/>
-        </p:nvSpPr>
-        <p:spPr>
-          <a:xfrm>
-            <a:off x="9738360" y="2487168"/>
-            <a:ext cx="548640" cy="274320"/>
-          </a:xfrm>
-          <a:prstGeom prst="rect">
-            <a:avLst/>
-          </a:prstGeom>
-          <a:noFill/>
-        </p:spPr>
-        <p:txBody>
-          <a:bodyPr wrap="none">
-            <a:spAutoFit/>
-          </a:bodyPr>
-          <a:lstStyle/>
-          <a:p>
-            <a:r>
-              <a:rPr sz="1200" b="1" i="0">
-                <a:solidFill>
-                  <a:srgbClr val="D62728"/>
-                </a:solidFill>
-              </a:rPr>
-              <a:t>t2</a:t>
-            </a:r>
-          </a:p>
-        </p:txBody>
-      </p:sp>
-      <p:sp>
-        <p:nvSpPr>
-          <p:cNvPr id="19" name="Oval 18"/>
-          <p:cNvSpPr/>
-          <p:nvPr/>
-        </p:nvSpPr>
-        <p:spPr>
-          <a:xfrm>
-            <a:off x="9528048" y="3493008"/>
-            <a:ext cx="146304" cy="146304"/>
-          </a:xfrm>
-          <a:prstGeom prst="ellipse">
-            <a:avLst/>
-          </a:prstGeom>
-          <a:solidFill>
-            <a:srgbClr val="D62728"/>
-          </a:solidFill>
-          <a:ln>
-            <a:solidFill>
-              <a:srgbClr val="D62728"/>
-            </a:solidFill>
-          </a:ln>
-        </p:spPr>
-        <p:style>
-          <a:lnRef idx="1">
-            <a:schemeClr val="accent1"/>
-          </a:lnRef>
-          <a:fillRef idx="3">
-            <a:schemeClr val="accent1"/>
-          </a:fillRef>
-          <a:effectRef idx="2">
-            <a:schemeClr val="accent1"/>
-          </a:effectRef>
-          <a:fontRef idx="minor">
-            <a:schemeClr val="lt1"/>
-          </a:fontRef>
-        </p:style>
-        <p:txBody>
-          <a:bodyPr rtlCol="0" anchor="ctr"/>
-          <a:lstStyle/>
-          <a:p>
-            <a:pPr algn="ctr"/>
-          </a:p>
-        </p:txBody>
-      </p:sp>
-      <p:sp>
-        <p:nvSpPr>
-          <p:cNvPr id="20" name="TextBox 19"/>
-          <p:cNvSpPr txBox="1"/>
-          <p:nvPr/>
-        </p:nvSpPr>
-        <p:spPr>
-          <a:xfrm>
-            <a:off x="9738360" y="3401568"/>
-            <a:ext cx="548640" cy="274320"/>
-          </a:xfrm>
-          <a:prstGeom prst="rect">
-            <a:avLst/>
-          </a:prstGeom>
-          <a:noFill/>
-        </p:spPr>
-        <p:txBody>
-          <a:bodyPr wrap="none">
-            <a:spAutoFit/>
-          </a:bodyPr>
-          <a:lstStyle/>
-          <a:p>
-            <a:r>
-              <a:rPr sz="1200" b="1" i="0">
-                <a:solidFill>
-                  <a:srgbClr val="D62728"/>
-                </a:solidFill>
-              </a:rPr>
-              <a:t>t3</a:t>
-            </a:r>
-          </a:p>
-        </p:txBody>
-      </p:sp>
-      <p:sp>
-        <p:nvSpPr>
-          <p:cNvPr id="21" name="Oval 20"/>
-          <p:cNvSpPr/>
-          <p:nvPr/>
-        </p:nvSpPr>
-        <p:spPr>
-          <a:xfrm>
-            <a:off x="2029967" y="3858768"/>
-            <a:ext cx="146304" cy="146304"/>
-          </a:xfrm>
-          <a:prstGeom prst="ellipse">
-            <a:avLst/>
-          </a:prstGeom>
-          <a:solidFill>
-            <a:srgbClr val="D62728"/>
-          </a:solidFill>
-          <a:ln>
-            <a:solidFill>
-              <a:srgbClr val="D62728"/>
-            </a:solidFill>
-          </a:ln>
-        </p:spPr>
-        <p:style>
-          <a:lnRef idx="1">
-            <a:schemeClr val="accent1"/>
-          </a:lnRef>
-          <a:fillRef idx="3">
-            <a:schemeClr val="accent1"/>
-          </a:fillRef>
-          <a:effectRef idx="2">
-            <a:schemeClr val="accent1"/>
-          </a:effectRef>
-          <a:fontRef idx="minor">
-            <a:schemeClr val="lt1"/>
-          </a:fontRef>
-        </p:style>
-        <p:txBody>
-          <a:bodyPr rtlCol="0" anchor="ctr"/>
-          <a:lstStyle/>
-          <a:p>
-            <a:pPr algn="ctr"/>
-          </a:p>
-        </p:txBody>
-      </p:sp>
-      <p:sp>
-        <p:nvSpPr>
-          <p:cNvPr id="22" name="TextBox 21"/>
-          <p:cNvSpPr txBox="1"/>
-          <p:nvPr/>
-        </p:nvSpPr>
-        <p:spPr>
-          <a:xfrm>
-            <a:off x="2240279" y="3767328"/>
-            <a:ext cx="548640" cy="274320"/>
-          </a:xfrm>
-          <a:prstGeom prst="rect">
-            <a:avLst/>
-          </a:prstGeom>
-          <a:noFill/>
-        </p:spPr>
-        <p:txBody>
-          <a:bodyPr wrap="none">
-            <a:spAutoFit/>
-          </a:bodyPr>
-          <a:lstStyle/>
-          <a:p>
-            <a:r>
-              <a:rPr sz="1200" b="1" i="0">
-                <a:solidFill>
-                  <a:srgbClr val="D62728"/>
-                </a:solidFill>
-              </a:rPr>
-              <a:t>t4</a:t>
-            </a:r>
-          </a:p>
-        </p:txBody>
-      </p:sp>
-      <p:sp>
-        <p:nvSpPr>
-          <p:cNvPr id="23" name="Rounded Rectangle 22"/>
-          <p:cNvSpPr/>
-          <p:nvPr/>
-        </p:nvSpPr>
-        <p:spPr>
-          <a:xfrm>
-            <a:off x="548640" y="5486400"/>
-            <a:ext cx="10972800" cy="502920"/>
-          </a:xfrm>
-          <a:prstGeom prst="roundRect">
-            <a:avLst/>
-          </a:prstGeom>
-          <a:solidFill>
-            <a:srgbClr val="E8EEF5"/>
-          </a:solidFill>
-          <a:ln>
-            <a:solidFill>
-              <a:srgbClr val="E8EEF5"/>
-            </a:solidFill>
-          </a:ln>
-        </p:spPr>
-        <p:style>
-          <a:lnRef idx="1">
-            <a:schemeClr val="accent1"/>
-          </a:lnRef>
-          <a:fillRef idx="3">
-            <a:schemeClr val="accent1"/>
-          </a:fillRef>
-          <a:effectRef idx="2">
-            <a:schemeClr val="accent1"/>
-          </a:effectRef>
-          <a:fontRef idx="minor">
-            <a:schemeClr val="lt1"/>
-          </a:fontRef>
-        </p:style>
-        <p:txBody>
-          <a:bodyPr rtlCol="0" anchor="ctr" wrap="square"/>
-          <a:lstStyle/>
-          <a:p>
-            <a:pPr algn="l"/>
-            <a:r>
-              <a:rPr sz="1300" b="1" i="0">
+              <a:rPr sz="1200">
                 <a:solidFill>
                   <a:srgbClr val="0B2E4F"/>
                 </a:solidFill>
               </a:rPr>
-              <a:t>mean_path_delay = ((t2 − t1) + (t4 − t3)) / 2       offset_from_master = (t2 − t1) − mean_path_delay</a:t>
+              <a:t>Open two terminals (115200 8N1).  Wait for PTP state = FINE.  On each:</a:t>
+            </a:r>
+          </a:p>
+          <a:p>
+            <a:r>
+              <a:rPr sz="1200">
+                <a:solidFill>
+                  <a:srgbClr val="0B2E4F"/>
+                </a:solidFill>
+                <a:latin typeface="Consolas"/>
+              </a:rPr>
+              <a:t>    cyclic_start_marker 5000 &lt;anchor_ns&gt;    # or:  python cyclic_fire_hw_test.py --marker --period-us 5000</a:t>
             </a:r>
           </a:p>
         </p:txBody>

--- a/PTP_LAN8651.pptx
+++ b/PTP_LAN8651.pptx
@@ -6316,8 +6316,8 @@
         </p:nvSpPr>
         <p:spPr>
           <a:xfrm>
-            <a:off x="548640" y="1920240"/>
-            <a:ext cx="1920240" cy="914400"/>
+            <a:off x="320040" y="1920240"/>
+            <a:ext cx="1737360" cy="914400"/>
           </a:xfrm>
           <a:prstGeom prst="roundRect">
             <a:avLst/>
@@ -6351,7 +6351,7 @@
           <a:p>
             <a:pPr algn="l"/>
             <a:r>
-              <a:rPr sz="1300" b="1" i="0">
+              <a:rPr sz="1200" b="1" i="0">
                 <a:solidFill>
                   <a:srgbClr val="FFFFFF"/>
                 </a:solidFill>
@@ -6370,8 +6370,8 @@
         </p:nvSpPr>
         <p:spPr>
           <a:xfrm>
-            <a:off x="2743200" y="1920240"/>
-            <a:ext cx="1920240" cy="914400"/>
+            <a:off x="2286000" y="1920240"/>
+            <a:ext cx="1828800" cy="914400"/>
           </a:xfrm>
           <a:prstGeom prst="roundRect">
             <a:avLst/>
@@ -6405,7 +6405,7 @@
           <a:p>
             <a:pPr algn="l"/>
             <a:r>
-              <a:rPr sz="1300" b="1" i="0">
+              <a:rPr sz="1200" b="1" i="0">
                 <a:solidFill>
                   <a:srgbClr val="FFFFFF"/>
                 </a:solidFill>
@@ -6424,8 +6424,8 @@
         </p:nvSpPr>
         <p:spPr>
           <a:xfrm>
-            <a:off x="4937760" y="1920240"/>
-            <a:ext cx="1920240" cy="914400"/>
+            <a:off x="4343400" y="1920240"/>
+            <a:ext cx="1828800" cy="914400"/>
           </a:xfrm>
           <a:prstGeom prst="roundRect">
             <a:avLst/>
@@ -6459,7 +6459,7 @@
           <a:p>
             <a:pPr algn="l"/>
             <a:r>
-              <a:rPr sz="1300" b="1" i="0">
+              <a:rPr sz="1200" b="1" i="0">
                 <a:solidFill>
                   <a:srgbClr val="FFFFFF"/>
                 </a:solidFill>
@@ -6478,8 +6478,62 @@
         </p:nvSpPr>
         <p:spPr>
           <a:xfrm>
-            <a:off x="7132320" y="1920240"/>
-            <a:ext cx="1920240" cy="914400"/>
+            <a:off x="6400800" y="1920240"/>
+            <a:ext cx="1737360" cy="914400"/>
+          </a:xfrm>
+          <a:prstGeom prst="roundRect">
+            <a:avLst/>
+          </a:prstGeom>
+          <a:solidFill>
+            <a:srgbClr val="D62728"/>
+          </a:solidFill>
+          <a:ln>
+            <a:solidFill>
+              <a:srgbClr val="D62728"/>
+            </a:solidFill>
+          </a:ln>
+        </p:spPr>
+        <p:style>
+          <a:lnRef idx="1">
+            <a:schemeClr val="accent1"/>
+          </a:lnRef>
+          <a:fillRef idx="3">
+            <a:schemeClr val="accent1"/>
+          </a:fillRef>
+          <a:effectRef idx="2">
+            <a:schemeClr val="accent1"/>
+          </a:effectRef>
+          <a:fontRef idx="minor">
+            <a:schemeClr val="lt1"/>
+          </a:fontRef>
+        </p:style>
+        <p:txBody>
+          <a:bodyPr rtlCol="0" anchor="ctr" wrap="square"/>
+          <a:lstStyle/>
+          <a:p>
+            <a:pPr algn="l"/>
+            <a:r>
+              <a:rPr sz="1200" b="1" i="0">
+                <a:solidFill>
+                  <a:srgbClr val="FFFFFF"/>
+                </a:solidFill>
+              </a:rPr>
+              <a:t>nIRQ
+to MCU</a:t>
+            </a:r>
+          </a:p>
+        </p:txBody>
+      </p:sp>
+      <p:sp>
+        <p:nvSpPr>
+          <p:cNvPr id="7" name="Rounded Rectangle 6"/>
+          <p:cNvSpPr/>
+          <p:nvPr/>
+        </p:nvSpPr>
+        <p:spPr>
+          <a:xfrm>
+            <a:off x="8366760" y="1920240"/>
+            <a:ext cx="2011680" cy="914400"/>
           </a:xfrm>
           <a:prstGeom prst="roundRect">
             <a:avLst/>
@@ -6513,37 +6567,37 @@
           <a:p>
             <a:pPr algn="l"/>
             <a:r>
-              <a:rPr sz="1300" b="1" i="0">
+              <a:rPr sz="1200" b="1" i="0">
                 <a:solidFill>
                   <a:srgbClr val="FFFFFF"/>
                 </a:solidFill>
               </a:rPr>
-              <a:t>SPI readout
-to MCU</a:t>
-            </a:r>
-          </a:p>
-        </p:txBody>
-      </p:sp>
-      <p:sp>
-        <p:nvSpPr>
-          <p:cNvPr id="7" name="Rounded Rectangle 6"/>
+              <a:t>ISR: SW-TS +
+signal TC6</a:t>
+            </a:r>
+          </a:p>
+        </p:txBody>
+      </p:sp>
+      <p:sp>
+        <p:nvSpPr>
+          <p:cNvPr id="8" name="Rounded Rectangle 7"/>
           <p:cNvSpPr/>
           <p:nvPr/>
         </p:nvSpPr>
         <p:spPr>
           <a:xfrm>
-            <a:off x="9326880" y="1920240"/>
-            <a:ext cx="1920240" cy="914400"/>
+            <a:off x="10607040" y="1920240"/>
+            <a:ext cx="1280160" cy="914400"/>
           </a:xfrm>
           <a:prstGeom prst="roundRect">
             <a:avLst/>
           </a:prstGeom>
           <a:solidFill>
-            <a:srgbClr val="D62728"/>
+            <a:srgbClr val="0B2E4F"/>
           </a:solidFill>
           <a:ln>
             <a:solidFill>
-              <a:srgbClr val="D62728"/>
+              <a:srgbClr val="0B2E4F"/>
             </a:solidFill>
           </a:ln>
         </p:spPr>
@@ -6567,52 +6621,17 @@
           <a:p>
             <a:pPr algn="l"/>
             <a:r>
-              <a:rPr sz="1300" b="1" i="0">
+              <a:rPr sz="1200" b="1" i="0">
                 <a:solidFill>
                   <a:srgbClr val="FFFFFF"/>
                 </a:solidFill>
               </a:rPr>
-              <a:t>nIRQ
-to MCU</a:t>
-            </a:r>
-          </a:p>
-        </p:txBody>
-      </p:sp>
-      <p:cxnSp>
-        <p:nvCxnSpPr>
-          <p:cNvPr id="8" name="Connector 7"/>
-          <p:cNvCxnSpPr/>
-          <p:nvPr/>
-        </p:nvCxnSpPr>
-        <p:spPr>
-          <a:xfrm>
-            <a:off x="2468880" y="2377440"/>
-            <a:ext cx="274320" cy="0"/>
-          </a:xfrm>
-          <a:prstGeom prst="bentConnector3">
-            <a:avLst/>
-          </a:prstGeom>
-          <a:ln w="25400">
-            <a:solidFill>
-              <a:srgbClr val="555555"/>
-            </a:solidFill>
-          </a:ln>
-        </p:spPr>
-        <p:style>
-          <a:lnRef idx="2">
-            <a:schemeClr val="accent1"/>
-          </a:lnRef>
-          <a:fillRef idx="0">
-            <a:schemeClr val="accent1"/>
-          </a:fillRef>
-          <a:effectRef idx="1">
-            <a:schemeClr val="accent1"/>
-          </a:effectRef>
-          <a:fontRef idx="minor">
-            <a:schemeClr val="tx1"/>
-          </a:fontRef>
-        </p:style>
-      </p:cxnSp>
+              <a:t>SPI
+readout</a:t>
+            </a:r>
+          </a:p>
+        </p:txBody>
+      </p:sp>
       <p:cxnSp>
         <p:nvCxnSpPr>
           <p:cNvPr id="9" name="Connector 8"/>
@@ -6621,8 +6640,8 @@
         </p:nvCxnSpPr>
         <p:spPr>
           <a:xfrm>
-            <a:off x="4663440" y="2377440"/>
-            <a:ext cx="274319" cy="0"/>
+            <a:off x="2057400" y="2377440"/>
+            <a:ext cx="228600" cy="0"/>
           </a:xfrm>
           <a:prstGeom prst="bentConnector3">
             <a:avLst/>
@@ -6656,8 +6675,8 @@
         </p:nvCxnSpPr>
         <p:spPr>
           <a:xfrm>
-            <a:off x="6858000" y="2377440"/>
-            <a:ext cx="274320" cy="0"/>
+            <a:off x="4114800" y="2377440"/>
+            <a:ext cx="228600" cy="0"/>
           </a:xfrm>
           <a:prstGeom prst="bentConnector3">
             <a:avLst/>
@@ -6691,8 +6710,8 @@
         </p:nvCxnSpPr>
         <p:spPr>
           <a:xfrm>
-            <a:off x="9052560" y="2377440"/>
-            <a:ext cx="274320" cy="0"/>
+            <a:off x="6172200" y="2377440"/>
+            <a:ext cx="228600" cy="0"/>
           </a:xfrm>
           <a:prstGeom prst="bentConnector3">
             <a:avLst/>
@@ -6718,16 +6737,86 @@
           </a:fontRef>
         </p:style>
       </p:cxnSp>
-      <p:sp>
-        <p:nvSpPr>
-          <p:cNvPr id="12" name="TextBox 11"/>
+      <p:cxnSp>
+        <p:nvCxnSpPr>
+          <p:cNvPr id="12" name="Connector 11"/>
+          <p:cNvCxnSpPr/>
+          <p:nvPr/>
+        </p:nvCxnSpPr>
+        <p:spPr>
+          <a:xfrm>
+            <a:off x="8138160" y="2377440"/>
+            <a:ext cx="228600" cy="0"/>
+          </a:xfrm>
+          <a:prstGeom prst="bentConnector3">
+            <a:avLst/>
+          </a:prstGeom>
+          <a:ln w="25400">
+            <a:solidFill>
+              <a:srgbClr val="555555"/>
+            </a:solidFill>
+          </a:ln>
+        </p:spPr>
+        <p:style>
+          <a:lnRef idx="2">
+            <a:schemeClr val="accent1"/>
+          </a:lnRef>
+          <a:fillRef idx="0">
+            <a:schemeClr val="accent1"/>
+          </a:fillRef>
+          <a:effectRef idx="1">
+            <a:schemeClr val="accent1"/>
+          </a:effectRef>
+          <a:fontRef idx="minor">
+            <a:schemeClr val="tx1"/>
+          </a:fontRef>
+        </p:style>
+      </p:cxnSp>
+      <p:cxnSp>
+        <p:nvCxnSpPr>
+          <p:cNvPr id="13" name="Connector 12"/>
+          <p:cNvCxnSpPr/>
+          <p:nvPr/>
+        </p:nvCxnSpPr>
+        <p:spPr>
+          <a:xfrm>
+            <a:off x="10378440" y="2377440"/>
+            <a:ext cx="228600" cy="0"/>
+          </a:xfrm>
+          <a:prstGeom prst="bentConnector3">
+            <a:avLst/>
+          </a:prstGeom>
+          <a:ln w="25400">
+            <a:solidFill>
+              <a:srgbClr val="555555"/>
+            </a:solidFill>
+          </a:ln>
+        </p:spPr>
+        <p:style>
+          <a:lnRef idx="2">
+            <a:schemeClr val="accent1"/>
+          </a:lnRef>
+          <a:fillRef idx="0">
+            <a:schemeClr val="accent1"/>
+          </a:fillRef>
+          <a:effectRef idx="1">
+            <a:schemeClr val="accent1"/>
+          </a:effectRef>
+          <a:fontRef idx="minor">
+            <a:schemeClr val="tx1"/>
+          </a:fontRef>
+        </p:style>
+      </p:cxnSp>
+      <p:sp>
+        <p:nvSpPr>
+          <p:cNvPr id="14" name="TextBox 13"/>
           <p:cNvSpPr txBox="1"/>
           <p:nvPr/>
         </p:nvSpPr>
         <p:spPr>
           <a:xfrm>
-            <a:off x="548640" y="3108960"/>
-            <a:ext cx="10972800" cy="3200400"/>
+            <a:off x="457200" y="3108960"/>
+            <a:ext cx="11247120" cy="3200400"/>
           </a:xfrm>
           <a:prstGeom prst="rect">
             <a:avLst/>
@@ -6741,52 +6830,62 @@
           <a:lstStyle/>
           <a:p>
             <a:r>
-              <a:rPr sz="1600">
+              <a:rPr sz="1400">
                 <a:solidFill>
                   <a:srgbClr val="0B2E4F"/>
                 </a:solidFill>
               </a:rPr>
-              <a:t>• TX path: MCU writes frame over SPI → MAC transmits → SFD on wire = t1 latched</a:t>
-            </a:r>
-          </a:p>
-          <a:p>
-            <a:r>
-              <a:rPr sz="1600">
+              <a:t>• MAC latches the hardware timestamp on the SFD bit — that is the 'ground truth' moment.</a:t>
+            </a:r>
+          </a:p>
+          <a:p>
+            <a:r>
+              <a:rPr sz="1400">
                 <a:solidFill>
                   <a:srgbClr val="0B2E4F"/>
                 </a:solidFill>
               </a:rPr>
-              <a:t>• RX path: SFD on wire = t2 latched → MAC stores timestamp → nIRQ → MCU reads over SPI</a:t>
-            </a:r>
-          </a:p>
-          <a:p>
-            <a:r>
-              <a:rPr sz="1600">
+              <a:t>• LAN8651 then asserts nIRQ to the MCU.</a:t>
+            </a:r>
+          </a:p>
+          <a:p>
+            <a:r>
+              <a:rPr sz="1400">
                 <a:solidFill>
                   <a:srgbClr val="0B2E4F"/>
                 </a:solidFill>
               </a:rPr>
-              <a:t>• TX: ~800 µs from SFD-on-wire to the TX-timestamp-available nIRQ  (pipeline + SPI)</a:t>
-            </a:r>
-          </a:p>
-          <a:p>
-            <a:r>
-              <a:rPr sz="1600">
+              <a:t>• In the nIRQ ISR the driver captures the internal SW timestamp (SYS_TIME tick) — pairs SFD with MCU time, semi-deterministic.</a:t>
+            </a:r>
+          </a:p>
+          <a:p>
+            <a:r>
+              <a:rPr sz="1400">
                 <a:solidFill>
                   <a:srgbClr val="0B2E4F"/>
                 </a:solidFill>
               </a:rPr>
-              <a:t>• RX: ~10 ms from SFD-on-wire to the RX-nIRQ   (LAN8651 behaviour)</a:t>
-            </a:r>
-          </a:p>
-          <a:p>
-            <a:r>
-              <a:rPr sz="1600">
+              <a:t>• The ISR then signals the TC6 driver layer, which later performs the SPI transfer that carries the frame and the HW timestamp to the host.</a:t>
+            </a:r>
+          </a:p>
+          <a:p>
+            <a:r>
+              <a:rPr sz="1400">
                 <a:solidFill>
                   <a:srgbClr val="0B2E4F"/>
                 </a:solidFill>
               </a:rPr>
-              <a:t>• Both biases must be compensated outside PTP — protocol cannot see them</a:t>
+              <a:t>• RX bias: ~10 ms from SFD-on-wire to the RX-nIRQ assertion on the LAN8651 — compensated outside PTP (PTP_FOL_ANCHOR_OFFSET_NS).</a:t>
+            </a:r>
+          </a:p>
+          <a:p>
+            <a:r>
+              <a:rPr sz="1400">
+                <a:solidFill>
+                  <a:srgbClr val="0B2E4F"/>
+                </a:solidFill>
+              </a:rPr>
+              <a:t>• TX bias: ~800 µs from SFD-on-wire to TX-timestamp nIRQ — compensated via PTP_GM_ANCHOR_OFFSET_NS.</a:t>
             </a:r>
           </a:p>
         </p:txBody>

--- a/PTP_LAN8651.pptx
+++ b/PTP_LAN8651.pptx
@@ -42,6 +42,7 @@
     <p:sldId id="284" r:id="rId40"/>
     <p:sldId id="285" r:id="rId41"/>
     <p:sldId id="286" r:id="rId42"/>
+    <p:sldId id="287" r:id="rId43"/>
   </p:sldIdLst>
   <p:sldSz cx="12188825" cy="6858000"/>
   <p:notesSz cx="6858000" cy="9144000"/>
@@ -4583,114 +4584,626 @@
           <a:lstStyle/>
           <a:p>
             <a:r>
-              <a:t>Agenda</a:t>
-            </a:r>
-          </a:p>
-        </p:txBody>
-      </p:sp>
-      <p:sp>
-        <p:nvSpPr>
-          <p:cNvPr id="3" name="Content Placeholder 2"/>
-          <p:cNvSpPr>
-            <a:spLocks noGrp="1"/>
-          </p:cNvSpPr>
-          <p:nvPr>
-            <p:ph idx="13" sz="quarter"/>
-          </p:nvPr>
-        </p:nvSpPr>
-        <p:spPr/>
-        <p:txBody>
-          <a:bodyPr/>
-          <a:lstStyle/>
-          <a:p>
-            <a:pPr/>
-            <a:r>
-              <a:rPr sz="1800"/>
-              <a:t>Part 0 — Overview &amp; standalone button-LED demo</a:t>
-            </a:r>
-          </a:p>
-          <a:p>
-            <a:pPr/>
-            <a:r>
-              <a:rPr sz="1800"/>
-              <a:t>Part 1 — Reproduce the demo on your own machine</a:t>
-            </a:r>
-          </a:p>
-          <a:p>
-            <a:pPr/>
-            <a:r>
-              <a:rPr sz="1800"/>
-              <a:t>Part 2 — PTP theory (IEEE 1588)</a:t>
-            </a:r>
-          </a:p>
-          <a:p>
-            <a:pPr lvl="1"/>
-            <a:r>
-              <a:rPr sz="1600"/>
-              <a:t>Clock model, message exchange, timestamp accuracy, error sources</a:t>
-            </a:r>
-          </a:p>
-          <a:p>
-            <a:pPr/>
-            <a:r>
-              <a:rPr sz="1800"/>
-              <a:t>Part 3 — 10BASE-T1S context</a:t>
-            </a:r>
-          </a:p>
-          <a:p>
-            <a:pPr lvl="1"/>
-            <a:r>
-              <a:rPr sz="1600"/>
-              <a:t>Single-pair multidrop PHY, PLCA, implications for PTP</a:t>
-            </a:r>
-          </a:p>
-          <a:p>
-            <a:pPr/>
-            <a:r>
-              <a:rPr sz="1800"/>
-              <a:t>Part 4 — LAN8651 specifics</a:t>
-            </a:r>
-          </a:p>
-          <a:p>
-            <a:pPr lvl="1"/>
-            <a:r>
-              <a:rPr sz="1600"/>
-              <a:t>SPI MAC-PHY, timestamp engine, SFD-to-IRQ latency</a:t>
-            </a:r>
-          </a:p>
-          <a:p>
-            <a:pPr/>
-            <a:r>
-              <a:rPr sz="1800"/>
-              <a:t>Part 5 — Cyclic Fire application</a:t>
-            </a:r>
-          </a:p>
-          <a:p>
-            <a:pPr lvl="1"/>
-            <a:r>
-              <a:rPr sz="1600"/>
-              <a:t>Concept, use cases, API and patterns</a:t>
-            </a:r>
-          </a:p>
-          <a:p>
-            <a:pPr/>
-            <a:r>
-              <a:rPr sz="1800"/>
-              <a:t>Part 6 — PTP_CLOCK for firmware event logging</a:t>
-            </a:r>
-          </a:p>
-          <a:p>
-            <a:pPr lvl="1"/>
-            <a:r>
-              <a:rPr sz="1600"/>
-              <a:t>API, usage pattern, cross-board correlation</a:t>
-            </a:r>
-          </a:p>
-          <a:p>
-            <a:pPr/>
-            <a:r>
-              <a:rPr sz="1800"/>
-              <a:t>Part 7 — Measurement results, open issues &amp; outlook</a:t>
+              <a:t>Live CLI Test — GM + Follower over Two Terminals</a:t>
+            </a:r>
+          </a:p>
+        </p:txBody>
+      </p:sp>
+      <p:sp>
+        <p:nvSpPr>
+          <p:cNvPr id="3" name="Rounded Rectangle 2"/>
+          <p:cNvSpPr/>
+          <p:nvPr/>
+        </p:nvSpPr>
+        <p:spPr>
+          <a:xfrm>
+            <a:off x="320040" y="1325880"/>
+            <a:ext cx="11475720" cy="457200"/>
+          </a:xfrm>
+          <a:prstGeom prst="roundRect">
+            <a:avLst/>
+          </a:prstGeom>
+          <a:solidFill>
+            <a:srgbClr val="E8EEF5"/>
+          </a:solidFill>
+          <a:ln>
+            <a:solidFill>
+              <a:srgbClr val="E8EEF5"/>
+            </a:solidFill>
+          </a:ln>
+        </p:spPr>
+        <p:style>
+          <a:lnRef idx="1">
+            <a:schemeClr val="accent1"/>
+          </a:lnRef>
+          <a:fillRef idx="3">
+            <a:schemeClr val="accent1"/>
+          </a:fillRef>
+          <a:effectRef idx="2">
+            <a:schemeClr val="accent1"/>
+          </a:effectRef>
+          <a:fontRef idx="minor">
+            <a:schemeClr val="lt1"/>
+          </a:fontRef>
+        </p:style>
+        <p:txBody>
+          <a:bodyPr rtlCol="0" anchor="ctr" wrap="square"/>
+          <a:lstStyle/>
+          <a:p>
+            <a:pPr algn="l"/>
+            <a:r>
+              <a:rPr sz="1300" b="1" i="1">
+                <a:solidFill>
+                  <a:srgbClr val="0B2E4F"/>
+                </a:solidFill>
+              </a:rPr>
+              <a:t>After flashing, open two serial terminals (115200 8N1, no flow control) — one per board — and type the role command.  No scripts needed; firmware does the rest.</a:t>
+            </a:r>
+          </a:p>
+        </p:txBody>
+      </p:sp>
+      <p:sp>
+        <p:nvSpPr>
+          <p:cNvPr id="4" name="Rounded Rectangle 3"/>
+          <p:cNvSpPr/>
+          <p:nvPr/>
+        </p:nvSpPr>
+        <p:spPr>
+          <a:xfrm>
+            <a:off x="320040" y="1965960"/>
+            <a:ext cx="5577840" cy="457200"/>
+          </a:xfrm>
+          <a:prstGeom prst="roundRect">
+            <a:avLst/>
+          </a:prstGeom>
+          <a:solidFill>
+            <a:srgbClr val="2CA02C"/>
+          </a:solidFill>
+          <a:ln>
+            <a:solidFill>
+              <a:srgbClr val="2CA02C"/>
+            </a:solidFill>
+          </a:ln>
+        </p:spPr>
+        <p:style>
+          <a:lnRef idx="1">
+            <a:schemeClr val="accent1"/>
+          </a:lnRef>
+          <a:fillRef idx="3">
+            <a:schemeClr val="accent1"/>
+          </a:fillRef>
+          <a:effectRef idx="2">
+            <a:schemeClr val="accent1"/>
+          </a:effectRef>
+          <a:fontRef idx="minor">
+            <a:schemeClr val="lt1"/>
+          </a:fontRef>
+        </p:style>
+        <p:txBody>
+          <a:bodyPr rtlCol="0" anchor="ctr" wrap="square"/>
+          <a:lstStyle/>
+          <a:p>
+            <a:pPr algn="l"/>
+            <a:r>
+              <a:rPr sz="1400" b="1" i="0">
+                <a:solidFill>
+                  <a:srgbClr val="FFFFFF"/>
+                </a:solidFill>
+              </a:rPr>
+              <a:t>Terminal 1  —  Board 1 (GM)  e.g.  COM8</a:t>
+            </a:r>
+          </a:p>
+        </p:txBody>
+      </p:sp>
+      <p:sp>
+        <p:nvSpPr>
+          <p:cNvPr id="5" name="Rounded Rectangle 4"/>
+          <p:cNvSpPr/>
+          <p:nvPr/>
+        </p:nvSpPr>
+        <p:spPr>
+          <a:xfrm>
+            <a:off x="5989320" y="1965960"/>
+            <a:ext cx="5577840" cy="457200"/>
+          </a:xfrm>
+          <a:prstGeom prst="roundRect">
+            <a:avLst/>
+          </a:prstGeom>
+          <a:solidFill>
+            <a:srgbClr val="1F77B4"/>
+          </a:solidFill>
+          <a:ln>
+            <a:solidFill>
+              <a:srgbClr val="1F77B4"/>
+            </a:solidFill>
+          </a:ln>
+        </p:spPr>
+        <p:style>
+          <a:lnRef idx="1">
+            <a:schemeClr val="accent1"/>
+          </a:lnRef>
+          <a:fillRef idx="3">
+            <a:schemeClr val="accent1"/>
+          </a:fillRef>
+          <a:effectRef idx="2">
+            <a:schemeClr val="accent1"/>
+          </a:effectRef>
+          <a:fontRef idx="minor">
+            <a:schemeClr val="lt1"/>
+          </a:fontRef>
+        </p:style>
+        <p:txBody>
+          <a:bodyPr rtlCol="0" anchor="ctr" wrap="square"/>
+          <a:lstStyle/>
+          <a:p>
+            <a:pPr algn="l"/>
+            <a:r>
+              <a:rPr sz="1400" b="1" i="0">
+                <a:solidFill>
+                  <a:srgbClr val="FFFFFF"/>
+                </a:solidFill>
+              </a:rPr>
+              <a:t>Terminal 2  —  Board 2 (FOL)  e.g.  COM10</a:t>
+            </a:r>
+          </a:p>
+        </p:txBody>
+      </p:sp>
+      <p:sp>
+        <p:nvSpPr>
+          <p:cNvPr id="6" name="Rounded Rectangle 5"/>
+          <p:cNvSpPr/>
+          <p:nvPr/>
+        </p:nvSpPr>
+        <p:spPr>
+          <a:xfrm>
+            <a:off x="320040" y="2514600"/>
+            <a:ext cx="5577840" cy="411480"/>
+          </a:xfrm>
+          <a:prstGeom prst="roundRect">
+            <a:avLst/>
+          </a:prstGeom>
+          <a:solidFill>
+            <a:srgbClr val="0B2E4F"/>
+          </a:solidFill>
+          <a:ln>
+            <a:solidFill>
+              <a:srgbClr val="0B2E4F"/>
+            </a:solidFill>
+          </a:ln>
+        </p:spPr>
+        <p:style>
+          <a:lnRef idx="1">
+            <a:schemeClr val="accent1"/>
+          </a:lnRef>
+          <a:fillRef idx="3">
+            <a:schemeClr val="accent1"/>
+          </a:fillRef>
+          <a:effectRef idx="2">
+            <a:schemeClr val="accent1"/>
+          </a:effectRef>
+          <a:fontRef idx="minor">
+            <a:schemeClr val="lt1"/>
+          </a:fontRef>
+        </p:style>
+        <p:txBody>
+          <a:bodyPr rtlCol="0" anchor="ctr" wrap="square"/>
+          <a:lstStyle/>
+          <a:p>
+            <a:pPr algn="l"/>
+            <a:r>
+              <a:rPr sz="1400" b="1" i="0">
+                <a:solidFill>
+                  <a:srgbClr val="FFFFFF"/>
+                </a:solidFill>
+              </a:rPr>
+              <a:t>&gt; ptp_mode master v</a:t>
+            </a:r>
+          </a:p>
+        </p:txBody>
+      </p:sp>
+      <p:sp>
+        <p:nvSpPr>
+          <p:cNvPr id="7" name="TextBox 6"/>
+          <p:cNvSpPr txBox="1"/>
+          <p:nvPr/>
+        </p:nvSpPr>
+        <p:spPr>
+          <a:xfrm>
+            <a:off x="365760" y="3017520"/>
+            <a:ext cx="5486400" cy="868680"/>
+          </a:xfrm>
+          <a:prstGeom prst="rect">
+            <a:avLst/>
+          </a:prstGeom>
+          <a:noFill/>
+        </p:spPr>
+        <p:txBody>
+          <a:bodyPr wrap="square">
+            <a:spAutoFit/>
+          </a:bodyPr>
+          <a:lstStyle/>
+          <a:p>
+            <a:r>
+              <a:rPr sz="1200">
+                <a:solidFill>
+                  <a:srgbClr val="0B2E4F"/>
+                </a:solidFill>
+              </a:rPr>
+              <a:t>• Immediately prints 'PTP master STARTED (via CLI)'.</a:t>
+            </a:r>
+          </a:p>
+          <a:p>
+            <a:r>
+              <a:rPr sz="1200">
+                <a:solidFill>
+                  <a:srgbClr val="0B2E4F"/>
+                </a:solidFill>
+              </a:rPr>
+              <a:t>• Board begins sending Sync + Follow_Up ≈ every 125 ms.</a:t>
+            </a:r>
+          </a:p>
+          <a:p>
+            <a:r>
+              <a:rPr sz="1200">
+                <a:solidFill>
+                  <a:srgbClr val="0B2E4F"/>
+                </a:solidFill>
+              </a:rPr>
+              <a:t>• Verbose flag 'v' → one '[GM] #N  t1=hh:mm:ss.nnnnnnnnn' line per Sync.</a:t>
+            </a:r>
+          </a:p>
+          <a:p>
+            <a:r>
+              <a:rPr sz="1200">
+                <a:solidFill>
+                  <a:srgbClr val="0B2E4F"/>
+                </a:solidFill>
+              </a:rPr>
+              <a:t>• Stays master until 'ptp_mode off' or reset.</a:t>
+            </a:r>
+          </a:p>
+        </p:txBody>
+      </p:sp>
+      <p:sp>
+        <p:nvSpPr>
+          <p:cNvPr id="8" name="Rounded Rectangle 7"/>
+          <p:cNvSpPr/>
+          <p:nvPr/>
+        </p:nvSpPr>
+        <p:spPr>
+          <a:xfrm>
+            <a:off x="5989320" y="2514600"/>
+            <a:ext cx="5577840" cy="411480"/>
+          </a:xfrm>
+          <a:prstGeom prst="roundRect">
+            <a:avLst/>
+          </a:prstGeom>
+          <a:solidFill>
+            <a:srgbClr val="0B2E4F"/>
+          </a:solidFill>
+          <a:ln>
+            <a:solidFill>
+              <a:srgbClr val="0B2E4F"/>
+            </a:solidFill>
+          </a:ln>
+        </p:spPr>
+        <p:style>
+          <a:lnRef idx="1">
+            <a:schemeClr val="accent1"/>
+          </a:lnRef>
+          <a:fillRef idx="3">
+            <a:schemeClr val="accent1"/>
+          </a:fillRef>
+          <a:effectRef idx="2">
+            <a:schemeClr val="accent1"/>
+          </a:effectRef>
+          <a:fontRef idx="minor">
+            <a:schemeClr val="lt1"/>
+          </a:fontRef>
+        </p:style>
+        <p:txBody>
+          <a:bodyPr rtlCol="0" anchor="ctr" wrap="square"/>
+          <a:lstStyle/>
+          <a:p>
+            <a:pPr algn="l"/>
+            <a:r>
+              <a:rPr sz="1400" b="1" i="0">
+                <a:solidFill>
+                  <a:srgbClr val="FFFFFF"/>
+                </a:solidFill>
+              </a:rPr>
+              <a:t>&gt; ptp_mode follower v</a:t>
+            </a:r>
+          </a:p>
+        </p:txBody>
+      </p:sp>
+      <p:sp>
+        <p:nvSpPr>
+          <p:cNvPr id="9" name="TextBox 8"/>
+          <p:cNvSpPr txBox="1"/>
+          <p:nvPr/>
+        </p:nvSpPr>
+        <p:spPr>
+          <a:xfrm>
+            <a:off x="6035040" y="3017520"/>
+            <a:ext cx="5486400" cy="868680"/>
+          </a:xfrm>
+          <a:prstGeom prst="rect">
+            <a:avLst/>
+          </a:prstGeom>
+          <a:noFill/>
+        </p:spPr>
+        <p:txBody>
+          <a:bodyPr wrap="square">
+            <a:spAutoFit/>
+          </a:bodyPr>
+          <a:lstStyle/>
+          <a:p>
+            <a:r>
+              <a:rPr sz="1200">
+                <a:solidFill>
+                  <a:srgbClr val="0B2E4F"/>
+                </a:solidFill>
+              </a:rPr>
+              <a:t>• Servo steps:  UNINIT → MATCHFREQ → HARDSYNC → COARSE → FINE.</a:t>
+            </a:r>
+          </a:p>
+          <a:p>
+            <a:r>
+              <a:rPr sz="1200">
+                <a:solidFill>
+                  <a:srgbClr val="0B2E4F"/>
+                </a:solidFill>
+              </a:rPr>
+              <a:t>• FINE typically reached in 2-3 s after the master is up.</a:t>
+            </a:r>
+          </a:p>
+          <a:p>
+            <a:r>
+              <a:rPr sz="1200">
+                <a:solidFill>
+                  <a:srgbClr val="0B2E4F"/>
+                </a:solidFill>
+              </a:rPr>
+              <a:t>• Then prints one '[FOL] FINE  t1=… off=±N ns' line per Sync.</a:t>
+            </a:r>
+          </a:p>
+          <a:p>
+            <a:r>
+              <a:rPr sz="1200">
+                <a:solidFill>
+                  <a:srgbClr val="0B2E4F"/>
+                </a:solidFill>
+              </a:rPr>
+              <a:t>• 'ptp_status' at any time → current servo state + last offset.</a:t>
+            </a:r>
+          </a:p>
+        </p:txBody>
+      </p:sp>
+      <p:sp>
+        <p:nvSpPr>
+          <p:cNvPr id="10" name="Rounded Rectangle 9"/>
+          <p:cNvSpPr/>
+          <p:nvPr/>
+        </p:nvSpPr>
+        <p:spPr>
+          <a:xfrm>
+            <a:off x="320040" y="4160520"/>
+            <a:ext cx="11475720" cy="411480"/>
+          </a:xfrm>
+          <a:prstGeom prst="roundRect">
+            <a:avLst/>
+          </a:prstGeom>
+          <a:solidFill>
+            <a:srgbClr val="0B2E4F"/>
+          </a:solidFill>
+          <a:ln>
+            <a:solidFill>
+              <a:srgbClr val="0B2E4F"/>
+            </a:solidFill>
+          </a:ln>
+        </p:spPr>
+        <p:style>
+          <a:lnRef idx="1">
+            <a:schemeClr val="accent1"/>
+          </a:lnRef>
+          <a:fillRef idx="3">
+            <a:schemeClr val="accent1"/>
+          </a:fillRef>
+          <a:effectRef idx="2">
+            <a:schemeClr val="accent1"/>
+          </a:effectRef>
+          <a:fontRef idx="minor">
+            <a:schemeClr val="lt1"/>
+          </a:fontRef>
+        </p:style>
+        <p:txBody>
+          <a:bodyPr rtlCol="0" anchor="ctr" wrap="square"/>
+          <a:lstStyle/>
+          <a:p>
+            <a:pPr algn="l"/>
+            <a:r>
+              <a:rPr sz="1300" b="1" i="0">
+                <a:solidFill>
+                  <a:srgbClr val="FFFFFF"/>
+                </a:solidFill>
+              </a:rPr>
+              <a:t>Expected Follower console output</a:t>
+            </a:r>
+          </a:p>
+        </p:txBody>
+      </p:sp>
+      <p:sp>
+        <p:nvSpPr>
+          <p:cNvPr id="11" name="TextBox 10"/>
+          <p:cNvSpPr txBox="1"/>
+          <p:nvPr/>
+        </p:nvSpPr>
+        <p:spPr>
+          <a:xfrm>
+            <a:off x="320040" y="4617720"/>
+            <a:ext cx="11475720" cy="1371600"/>
+          </a:xfrm>
+          <a:prstGeom prst="rect">
+            <a:avLst/>
+          </a:prstGeom>
+          <a:noFill/>
+        </p:spPr>
+        <p:txBody>
+          <a:bodyPr wrap="none">
+            <a:spAutoFit/>
+          </a:bodyPr>
+          <a:lstStyle/>
+          <a:p>
+            <a:r>
+              <a:rPr sz="1100">
+                <a:solidFill>
+                  <a:srgbClr val="0B2E4F"/>
+                </a:solidFill>
+                <a:latin typeface="Consolas"/>
+              </a:rPr>
+              <a:t>&gt; ptp_mode follower v</a:t>
+            </a:r>
+          </a:p>
+          <a:p>
+            <a:r>
+              <a:rPr sz="1100">
+                <a:solidFill>
+                  <a:srgbClr val="0B2E4F"/>
+                </a:solidFill>
+                <a:latin typeface="Consolas"/>
+              </a:rPr>
+              <a:t>PTP follower STARTED (via CLI)</a:t>
+            </a:r>
+          </a:p>
+          <a:p>
+            <a:r>
+              <a:rPr sz="1100">
+                <a:solidFill>
+                  <a:srgbClr val="0B2E4F"/>
+                </a:solidFill>
+                <a:latin typeface="Consolas"/>
+              </a:rPr>
+              <a:t>PTP UNINIT-&gt;MATCHFREQ  scheduling TI=40 TISUBN=0x3A00000D</a:t>
+            </a:r>
+          </a:p>
+          <a:p>
+            <a:r>
+              <a:rPr sz="1100">
+                <a:solidFill>
+                  <a:srgbClr val="0B2E4F"/>
+                </a:solidFill>
+                <a:latin typeface="Consolas"/>
+              </a:rPr>
+              <a:t>[00:00:02.332 PTP  ] MATCHFREQ-&gt;HARDSYNC offset=-13497830</a:t>
+            </a:r>
+          </a:p>
+          <a:p>
+            <a:r>
+              <a:rPr sz="1100">
+                <a:solidFill>
+                  <a:srgbClr val="0B2E4F"/>
+                </a:solidFill>
+                <a:latin typeface="Consolas"/>
+              </a:rPr>
+              <a:t>Hard sync completed</a:t>
+            </a:r>
+          </a:p>
+          <a:p>
+            <a:r>
+              <a:rPr sz="1100">
+                <a:solidFill>
+                  <a:srgbClr val="0B2E4F"/>
+                </a:solidFill>
+                <a:latin typeface="Consolas"/>
+              </a:rPr>
+              <a:t>PTP COARSE     offset=-2034</a:t>
+            </a:r>
+          </a:p>
+          <a:p>
+            <a:r>
+              <a:rPr sz="1100">
+                <a:solidFill>
+                  <a:srgbClr val="0B2E4F"/>
+                </a:solidFill>
+                <a:latin typeface="Consolas"/>
+              </a:rPr>
+              <a:t>PTP FINE       offset=-23</a:t>
+            </a:r>
+          </a:p>
+          <a:p>
+            <a:r>
+              <a:rPr sz="1100">
+                <a:solidFill>
+                  <a:srgbClr val="0B2E4F"/>
+                </a:solidFill>
+                <a:latin typeface="Consolas"/>
+              </a:rPr>
+              <a:t>[FOL] FINE  t1=00:00:05.123456789  t2=00:00:05.123514600  off=      +57 ns</a:t>
+            </a:r>
+          </a:p>
+          <a:p>
+            <a:r>
+              <a:rPr sz="1100">
+                <a:solidFill>
+                  <a:srgbClr val="0B2E4F"/>
+                </a:solidFill>
+                <a:latin typeface="Consolas"/>
+              </a:rPr>
+              <a:t>[FOL] FINE  t1=00:00:05.248334810  t2=00:00:05.248392100  off=      +55 ns</a:t>
+            </a:r>
+          </a:p>
+        </p:txBody>
+      </p:sp>
+      <p:sp>
+        <p:nvSpPr>
+          <p:cNvPr id="12" name="Rounded Rectangle 11"/>
+          <p:cNvSpPr/>
+          <p:nvPr/>
+        </p:nvSpPr>
+        <p:spPr>
+          <a:xfrm>
+            <a:off x="320040" y="6035040"/>
+            <a:ext cx="11475720" cy="502920"/>
+          </a:xfrm>
+          <a:prstGeom prst="roundRect">
+            <a:avLst/>
+          </a:prstGeom>
+          <a:solidFill>
+            <a:srgbClr val="2CA02C"/>
+          </a:solidFill>
+          <a:ln>
+            <a:solidFill>
+              <a:srgbClr val="2CA02C"/>
+            </a:solidFill>
+          </a:ln>
+        </p:spPr>
+        <p:style>
+          <a:lnRef idx="1">
+            <a:schemeClr val="accent1"/>
+          </a:lnRef>
+          <a:fillRef idx="3">
+            <a:schemeClr val="accent1"/>
+          </a:fillRef>
+          <a:effectRef idx="2">
+            <a:schemeClr val="accent1"/>
+          </a:effectRef>
+          <a:fontRef idx="minor">
+            <a:schemeClr val="lt1"/>
+          </a:fontRef>
+        </p:style>
+        <p:txBody>
+          <a:bodyPr rtlCol="0" anchor="ctr" wrap="square"/>
+          <a:lstStyle/>
+          <a:p>
+            <a:pPr algn="l"/>
+            <a:r>
+              <a:rPr sz="1300" b="1" i="0">
+                <a:solidFill>
+                  <a:srgbClr val="FFFFFF"/>
+                </a:solidFill>
+              </a:rPr>
+              <a:t>Initial lock offsets are typically ±200 ns, steady-state under ±1 µs.  Sustained 'FINE' lines = two boards share one nanosecond clock, ready for cyclic_fire, iperf, SW-NTP, or any PTP_CLOCK_GetTime_ns() application.</a:t>
             </a:r>
           </a:p>
         </p:txBody>
@@ -4729,7 +5242,7 @@
           <a:lstStyle/>
           <a:p>
             <a:r>
-              <a:t>PTP — Purpose &amp; Clock Model</a:t>
+              <a:t>Agenda</a:t>
             </a:r>
           </a:p>
         </p:txBody>
@@ -4752,70 +5265,91 @@
             <a:pPr/>
             <a:r>
               <a:rPr sz="1800"/>
-              <a:t>Goal: distribute a common notion of time across networked nodes</a:t>
+              <a:t>Part 0 — Overview &amp; standalone button-LED demo</a:t>
+            </a:r>
+          </a:p>
+          <a:p>
+            <a:pPr/>
+            <a:r>
+              <a:rPr sz="1800"/>
+              <a:t>Part 1 — Reproduce the demo on your own machine</a:t>
+            </a:r>
+          </a:p>
+          <a:p>
+            <a:pPr/>
+            <a:r>
+              <a:rPr sz="1800"/>
+              <a:t>Part 2 — PTP theory (IEEE 1588)</a:t>
             </a:r>
           </a:p>
           <a:p>
             <a:pPr lvl="1"/>
             <a:r>
               <a:rPr sz="1600"/>
-              <a:t>Target accuracy: sub-microsecond on a LAN — not reachable with NTP</a:t>
+              <a:t>Clock model, message exchange, timestamp accuracy, error sources</a:t>
             </a:r>
           </a:p>
           <a:p>
             <a:pPr/>
             <a:r>
               <a:rPr sz="1800"/>
-              <a:t>Roles within a PTP domain:</a:t>
+              <a:t>Part 3 — 10BASE-T1S context</a:t>
             </a:r>
           </a:p>
           <a:p>
             <a:pPr lvl="1"/>
             <a:r>
               <a:rPr sz="1600"/>
-              <a:t>Grandmaster (GM) — reference clock, source of truth</a:t>
+              <a:t>Single-pair multidrop PHY, PLCA, implications for PTP</a:t>
+            </a:r>
+          </a:p>
+          <a:p>
+            <a:pPr/>
+            <a:r>
+              <a:rPr sz="1800"/>
+              <a:t>Part 4 — LAN8651 specifics</a:t>
             </a:r>
           </a:p>
           <a:p>
             <a:pPr lvl="1"/>
             <a:r>
               <a:rPr sz="1600"/>
-              <a:t>Ordinary / Boundary clock — follower, steers local clock to GM</a:t>
+              <a:t>SPI MAC-PHY, timestamp engine, SFD-to-IRQ latency</a:t>
+            </a:r>
+          </a:p>
+          <a:p>
+            <a:pPr/>
+            <a:r>
+              <a:rPr sz="1800"/>
+              <a:t>Part 5 — Cyclic Fire application</a:t>
             </a:r>
           </a:p>
           <a:p>
             <a:pPr lvl="1"/>
             <a:r>
               <a:rPr sz="1600"/>
-              <a:t>Transparent clock — forwards and corrects for residence time</a:t>
+              <a:t>Concept, use cases, API and patterns</a:t>
             </a:r>
           </a:p>
           <a:p>
             <a:pPr/>
             <a:r>
               <a:rPr sz="1800"/>
-              <a:t>Best Master Clock Algorithm (BMCA) elects the GM automatically</a:t>
+              <a:t>Part 6 — PTP_CLOCK for firmware event logging</a:t>
+            </a:r>
+          </a:p>
+          <a:p>
+            <a:pPr lvl="1"/>
+            <a:r>
+              <a:rPr sz="1600"/>
+              <a:t>API, usage pattern, cross-board correlation</a:t>
             </a:r>
           </a:p>
           <a:p>
             <a:pPr/>
             <a:r>
               <a:rPr sz="1800"/>
-              <a:t>Local clock corrected in two dimensions:</a:t>
-            </a:r>
-          </a:p>
-          <a:p>
-            <a:pPr lvl="1"/>
-            <a:r>
-              <a:rPr sz="1600"/>
-              <a:t>Phase — absolute offset to GM (ns)</a:t>
-            </a:r>
-          </a:p>
-          <a:p>
-            <a:pPr lvl="1"/>
-            <a:r>
-              <a:rPr sz="1600"/>
-              <a:t>Rate — frequency ratio between local and GM oscillator (ppb)</a:t>
+              <a:t>Part 7 — Measurement results, open issues &amp; outlook</a:t>
             </a:r>
           </a:p>
         </p:txBody>
@@ -4854,820 +5388,93 @@
           <a:lstStyle/>
           <a:p>
             <a:r>
-              <a:t>PTP — Message Exchange</a:t>
-            </a:r>
-          </a:p>
-        </p:txBody>
-      </p:sp>
-      <p:cxnSp>
-        <p:nvCxnSpPr>
-          <p:cNvPr id="3" name="Connector 2"/>
-          <p:cNvCxnSpPr/>
-          <p:nvPr/>
-        </p:nvCxnSpPr>
-        <p:spPr>
-          <a:xfrm>
-            <a:off x="2103120" y="1828800"/>
-            <a:ext cx="0" cy="3566160"/>
-          </a:xfrm>
-          <a:prstGeom prst="line">
-            <a:avLst/>
-          </a:prstGeom>
-          <a:ln w="38100">
-            <a:solidFill>
-              <a:srgbClr val="0B2E4F"/>
-            </a:solidFill>
-          </a:ln>
-        </p:spPr>
-        <p:style>
-          <a:lnRef idx="2">
-            <a:schemeClr val="accent1"/>
-          </a:lnRef>
-          <a:fillRef idx="0">
-            <a:schemeClr val="accent1"/>
-          </a:fillRef>
-          <a:effectRef idx="1">
-            <a:schemeClr val="accent1"/>
-          </a:effectRef>
-          <a:fontRef idx="minor">
-            <a:schemeClr val="tx1"/>
-          </a:fontRef>
-        </p:style>
-      </p:cxnSp>
-      <p:cxnSp>
-        <p:nvCxnSpPr>
-          <p:cNvPr id="4" name="Connector 3"/>
-          <p:cNvCxnSpPr/>
-          <p:nvPr/>
-        </p:nvCxnSpPr>
-        <p:spPr>
-          <a:xfrm>
-            <a:off x="9601200" y="1828800"/>
-            <a:ext cx="0" cy="3566160"/>
-          </a:xfrm>
-          <a:prstGeom prst="line">
-            <a:avLst/>
-          </a:prstGeom>
-          <a:ln w="38100">
-            <a:solidFill>
-              <a:srgbClr val="0B2E4F"/>
-            </a:solidFill>
-          </a:ln>
-        </p:spPr>
-        <p:style>
-          <a:lnRef idx="2">
-            <a:schemeClr val="accent1"/>
-          </a:lnRef>
-          <a:fillRef idx="0">
-            <a:schemeClr val="accent1"/>
-          </a:fillRef>
-          <a:effectRef idx="1">
-            <a:schemeClr val="accent1"/>
-          </a:effectRef>
-          <a:fontRef idx="minor">
-            <a:schemeClr val="tx1"/>
-          </a:fontRef>
-        </p:style>
-      </p:cxnSp>
-      <p:sp>
-        <p:nvSpPr>
-          <p:cNvPr id="5" name="Rounded Rectangle 4"/>
-          <p:cNvSpPr/>
-          <p:nvPr/>
-        </p:nvSpPr>
-        <p:spPr>
-          <a:xfrm>
-            <a:off x="1097279" y="1417320"/>
-            <a:ext cx="2011680" cy="365760"/>
-          </a:xfrm>
-          <a:prstGeom prst="roundRect">
-            <a:avLst/>
-          </a:prstGeom>
-          <a:solidFill>
-            <a:srgbClr val="0B2E4F"/>
-          </a:solidFill>
-          <a:ln>
-            <a:solidFill>
-              <a:srgbClr val="0B2E4F"/>
-            </a:solidFill>
-          </a:ln>
-        </p:spPr>
-        <p:style>
-          <a:lnRef idx="1">
-            <a:schemeClr val="accent1"/>
-          </a:lnRef>
-          <a:fillRef idx="3">
-            <a:schemeClr val="accent1"/>
-          </a:fillRef>
-          <a:effectRef idx="2">
-            <a:schemeClr val="accent1"/>
-          </a:effectRef>
-          <a:fontRef idx="minor">
-            <a:schemeClr val="lt1"/>
-          </a:fontRef>
-        </p:style>
-        <p:txBody>
-          <a:bodyPr rtlCol="0" anchor="ctr" wrap="square"/>
-          <a:lstStyle/>
-          <a:p>
-            <a:pPr algn="l"/>
-            <a:r>
-              <a:rPr sz="1400" b="1" i="0">
-                <a:solidFill>
-                  <a:srgbClr val="FFFFFF"/>
-                </a:solidFill>
-              </a:rPr>
-              <a:t>Grandmaster</a:t>
-            </a:r>
-          </a:p>
-        </p:txBody>
-      </p:sp>
-      <p:sp>
-        <p:nvSpPr>
-          <p:cNvPr id="6" name="Rounded Rectangle 5"/>
-          <p:cNvSpPr/>
-          <p:nvPr/>
-        </p:nvSpPr>
-        <p:spPr>
-          <a:xfrm>
-            <a:off x="8595360" y="1417320"/>
-            <a:ext cx="2011680" cy="365760"/>
-          </a:xfrm>
-          <a:prstGeom prst="roundRect">
-            <a:avLst/>
-          </a:prstGeom>
-          <a:solidFill>
-            <a:srgbClr val="0B2E4F"/>
-          </a:solidFill>
-          <a:ln>
-            <a:solidFill>
-              <a:srgbClr val="0B2E4F"/>
-            </a:solidFill>
-          </a:ln>
-        </p:spPr>
-        <p:style>
-          <a:lnRef idx="1">
-            <a:schemeClr val="accent1"/>
-          </a:lnRef>
-          <a:fillRef idx="3">
-            <a:schemeClr val="accent1"/>
-          </a:fillRef>
-          <a:effectRef idx="2">
-            <a:schemeClr val="accent1"/>
-          </a:effectRef>
-          <a:fontRef idx="minor">
-            <a:schemeClr val="lt1"/>
-          </a:fontRef>
-        </p:style>
-        <p:txBody>
-          <a:bodyPr rtlCol="0" anchor="ctr" wrap="square"/>
-          <a:lstStyle/>
-          <a:p>
-            <a:pPr algn="l"/>
-            <a:r>
-              <a:rPr sz="1400" b="1" i="0">
-                <a:solidFill>
-                  <a:srgbClr val="FFFFFF"/>
-                </a:solidFill>
-              </a:rPr>
-              <a:t>Follower</a:t>
-            </a:r>
-          </a:p>
-        </p:txBody>
-      </p:sp>
-      <p:cxnSp>
-        <p:nvCxnSpPr>
-          <p:cNvPr id="7" name="Connector 6"/>
-          <p:cNvCxnSpPr/>
-          <p:nvPr/>
-        </p:nvCxnSpPr>
-        <p:spPr>
-          <a:xfrm>
-            <a:off x="2103120" y="2194560"/>
-            <a:ext cx="7498080" cy="457200"/>
-          </a:xfrm>
-          <a:prstGeom prst="bentConnector3">
-            <a:avLst/>
-          </a:prstGeom>
-          <a:ln w="25400">
-            <a:solidFill>
-              <a:srgbClr val="1F77B4"/>
-            </a:solidFill>
-          </a:ln>
-        </p:spPr>
-        <p:style>
-          <a:lnRef idx="2">
-            <a:schemeClr val="accent1"/>
-          </a:lnRef>
-          <a:fillRef idx="0">
-            <a:schemeClr val="accent1"/>
-          </a:fillRef>
-          <a:effectRef idx="1">
-            <a:schemeClr val="accent1"/>
-          </a:effectRef>
-          <a:fontRef idx="minor">
-            <a:schemeClr val="tx1"/>
-          </a:fontRef>
-        </p:style>
-      </p:cxnSp>
-      <p:sp>
-        <p:nvSpPr>
-          <p:cNvPr id="8" name="TextBox 7"/>
-          <p:cNvSpPr txBox="1"/>
-          <p:nvPr/>
-        </p:nvSpPr>
-        <p:spPr>
-          <a:xfrm>
-            <a:off x="3657600" y="2148840"/>
-            <a:ext cx="4572000" cy="320040"/>
-          </a:xfrm>
-          <a:prstGeom prst="rect">
-            <a:avLst/>
-          </a:prstGeom>
-          <a:noFill/>
-        </p:spPr>
-        <p:txBody>
-          <a:bodyPr wrap="none">
-            <a:spAutoFit/>
-          </a:bodyPr>
-          <a:lstStyle/>
-          <a:p>
-            <a:r>
-              <a:rPr sz="1200" b="1" i="0">
-                <a:solidFill>
-                  <a:srgbClr val="1F77B4"/>
-                </a:solidFill>
-              </a:rPr>
-              <a:t>Sync   (t1 on TX, t2 on RX)</a:t>
-            </a:r>
-          </a:p>
-        </p:txBody>
-      </p:sp>
-      <p:cxnSp>
-        <p:nvCxnSpPr>
-          <p:cNvPr id="9" name="Connector 8"/>
-          <p:cNvCxnSpPr/>
-          <p:nvPr/>
-        </p:nvCxnSpPr>
-        <p:spPr>
-          <a:xfrm>
-            <a:off x="2103120" y="2926080"/>
-            <a:ext cx="7498080" cy="182880"/>
-          </a:xfrm>
-          <a:prstGeom prst="bentConnector3">
-            <a:avLst/>
-          </a:prstGeom>
-          <a:ln w="25400">
-            <a:solidFill>
-              <a:srgbClr val="1F77B4"/>
-            </a:solidFill>
-          </a:ln>
-        </p:spPr>
-        <p:style>
-          <a:lnRef idx="2">
-            <a:schemeClr val="accent1"/>
-          </a:lnRef>
-          <a:fillRef idx="0">
-            <a:schemeClr val="accent1"/>
-          </a:fillRef>
-          <a:effectRef idx="1">
-            <a:schemeClr val="accent1"/>
-          </a:effectRef>
-          <a:fontRef idx="minor">
-            <a:schemeClr val="tx1"/>
-          </a:fontRef>
-        </p:style>
-      </p:cxnSp>
-      <p:sp>
-        <p:nvSpPr>
-          <p:cNvPr id="10" name="TextBox 9"/>
-          <p:cNvSpPr txBox="1"/>
-          <p:nvPr/>
-        </p:nvSpPr>
-        <p:spPr>
-          <a:xfrm>
-            <a:off x="3657600" y="2788920"/>
-            <a:ext cx="4572000" cy="320040"/>
-          </a:xfrm>
-          <a:prstGeom prst="rect">
-            <a:avLst/>
-          </a:prstGeom>
-          <a:noFill/>
-        </p:spPr>
-        <p:txBody>
-          <a:bodyPr wrap="none">
-            <a:spAutoFit/>
-          </a:bodyPr>
-          <a:lstStyle/>
-          <a:p>
-            <a:r>
-              <a:rPr sz="1200" b="1" i="0">
-                <a:solidFill>
-                  <a:srgbClr val="1F77B4"/>
-                </a:solidFill>
-              </a:rPr>
-              <a:t>Follow_Up  (carries t1)</a:t>
-            </a:r>
-          </a:p>
-        </p:txBody>
-      </p:sp>
-      <p:cxnSp>
-        <p:nvCxnSpPr>
-          <p:cNvPr id="11" name="Connector 10"/>
-          <p:cNvCxnSpPr/>
-          <p:nvPr/>
-        </p:nvCxnSpPr>
-        <p:spPr>
-          <a:xfrm flipH="1">
-            <a:off x="2103120" y="3566160"/>
-            <a:ext cx="7498080" cy="365760"/>
-          </a:xfrm>
-          <a:prstGeom prst="bentConnector3">
-            <a:avLst/>
-          </a:prstGeom>
-          <a:ln w="25400">
-            <a:solidFill>
-              <a:srgbClr val="1F77B4"/>
-            </a:solidFill>
-          </a:ln>
-        </p:spPr>
-        <p:style>
-          <a:lnRef idx="2">
-            <a:schemeClr val="accent1"/>
-          </a:lnRef>
-          <a:fillRef idx="0">
-            <a:schemeClr val="accent1"/>
-          </a:fillRef>
-          <a:effectRef idx="1">
-            <a:schemeClr val="accent1"/>
-          </a:effectRef>
-          <a:fontRef idx="minor">
-            <a:schemeClr val="tx1"/>
-          </a:fontRef>
-        </p:style>
-      </p:cxnSp>
-      <p:sp>
-        <p:nvSpPr>
-          <p:cNvPr id="12" name="TextBox 11"/>
-          <p:cNvSpPr txBox="1"/>
-          <p:nvPr/>
-        </p:nvSpPr>
-        <p:spPr>
-          <a:xfrm>
-            <a:off x="3657600" y="3703320"/>
-            <a:ext cx="4572000" cy="320040"/>
-          </a:xfrm>
-          <a:prstGeom prst="rect">
-            <a:avLst/>
-          </a:prstGeom>
-          <a:noFill/>
-        </p:spPr>
-        <p:txBody>
-          <a:bodyPr wrap="none">
-            <a:spAutoFit/>
-          </a:bodyPr>
-          <a:lstStyle/>
-          <a:p>
-            <a:r>
-              <a:rPr sz="1200" b="1" i="0">
-                <a:solidFill>
-                  <a:srgbClr val="1F77B4"/>
-                </a:solidFill>
-              </a:rPr>
-              <a:t>Delay_Req   (t3 on TX, t4 on RX)</a:t>
-            </a:r>
-          </a:p>
-        </p:txBody>
-      </p:sp>
-      <p:cxnSp>
-        <p:nvCxnSpPr>
-          <p:cNvPr id="13" name="Connector 12"/>
-          <p:cNvCxnSpPr/>
-          <p:nvPr/>
-        </p:nvCxnSpPr>
-        <p:spPr>
-          <a:xfrm>
-            <a:off x="2103120" y="4297680"/>
-            <a:ext cx="7498080" cy="274320"/>
-          </a:xfrm>
-          <a:prstGeom prst="bentConnector3">
-            <a:avLst/>
-          </a:prstGeom>
-          <a:ln w="25400">
-            <a:solidFill>
-              <a:srgbClr val="1F77B4"/>
-            </a:solidFill>
-          </a:ln>
-        </p:spPr>
-        <p:style>
-          <a:lnRef idx="2">
-            <a:schemeClr val="accent1"/>
-          </a:lnRef>
-          <a:fillRef idx="0">
-            <a:schemeClr val="accent1"/>
-          </a:fillRef>
-          <a:effectRef idx="1">
-            <a:schemeClr val="accent1"/>
-          </a:effectRef>
-          <a:fontRef idx="minor">
-            <a:schemeClr val="tx1"/>
-          </a:fontRef>
-        </p:style>
-      </p:cxnSp>
-      <p:sp>
-        <p:nvSpPr>
-          <p:cNvPr id="14" name="TextBox 13"/>
-          <p:cNvSpPr txBox="1"/>
-          <p:nvPr/>
-        </p:nvSpPr>
-        <p:spPr>
-          <a:xfrm>
-            <a:off x="3657600" y="4160520"/>
-            <a:ext cx="4572000" cy="320040"/>
-          </a:xfrm>
-          <a:prstGeom prst="rect">
-            <a:avLst/>
-          </a:prstGeom>
-          <a:noFill/>
-        </p:spPr>
-        <p:txBody>
-          <a:bodyPr wrap="none">
-            <a:spAutoFit/>
-          </a:bodyPr>
-          <a:lstStyle/>
-          <a:p>
-            <a:r>
-              <a:rPr sz="1200" b="1" i="0">
-                <a:solidFill>
-                  <a:srgbClr val="1F77B4"/>
-                </a:solidFill>
-              </a:rPr>
-              <a:t>Delay_Resp  (carries t4)</a:t>
-            </a:r>
-          </a:p>
-        </p:txBody>
-      </p:sp>
-      <p:sp>
-        <p:nvSpPr>
-          <p:cNvPr id="15" name="Oval 14"/>
-          <p:cNvSpPr/>
-          <p:nvPr/>
-        </p:nvSpPr>
-        <p:spPr>
-          <a:xfrm>
-            <a:off x="2029967" y="2121408"/>
-            <a:ext cx="146304" cy="146304"/>
-          </a:xfrm>
-          <a:prstGeom prst="ellipse">
-            <a:avLst/>
-          </a:prstGeom>
-          <a:solidFill>
-            <a:srgbClr val="D62728"/>
-          </a:solidFill>
-          <a:ln>
-            <a:solidFill>
-              <a:srgbClr val="D62728"/>
-            </a:solidFill>
-          </a:ln>
-        </p:spPr>
-        <p:style>
-          <a:lnRef idx="1">
-            <a:schemeClr val="accent1"/>
-          </a:lnRef>
-          <a:fillRef idx="3">
-            <a:schemeClr val="accent1"/>
-          </a:fillRef>
-          <a:effectRef idx="2">
-            <a:schemeClr val="accent1"/>
-          </a:effectRef>
-          <a:fontRef idx="minor">
-            <a:schemeClr val="lt1"/>
-          </a:fontRef>
-        </p:style>
-        <p:txBody>
-          <a:bodyPr rtlCol="0" anchor="ctr"/>
-          <a:lstStyle/>
-          <a:p>
-            <a:pPr algn="ctr"/>
-          </a:p>
-        </p:txBody>
-      </p:sp>
-      <p:sp>
-        <p:nvSpPr>
-          <p:cNvPr id="16" name="TextBox 15"/>
-          <p:cNvSpPr txBox="1"/>
-          <p:nvPr/>
-        </p:nvSpPr>
-        <p:spPr>
-          <a:xfrm>
-            <a:off x="2240279" y="2029967"/>
-            <a:ext cx="548640" cy="274320"/>
-          </a:xfrm>
-          <a:prstGeom prst="rect">
-            <a:avLst/>
-          </a:prstGeom>
-          <a:noFill/>
-        </p:spPr>
-        <p:txBody>
-          <a:bodyPr wrap="none">
-            <a:spAutoFit/>
-          </a:bodyPr>
-          <a:lstStyle/>
-          <a:p>
-            <a:r>
-              <a:rPr sz="1200" b="1" i="0">
-                <a:solidFill>
-                  <a:srgbClr val="D62728"/>
-                </a:solidFill>
-              </a:rPr>
-              <a:t>t1</a:t>
-            </a:r>
-          </a:p>
-        </p:txBody>
-      </p:sp>
-      <p:sp>
-        <p:nvSpPr>
-          <p:cNvPr id="17" name="Oval 16"/>
-          <p:cNvSpPr/>
-          <p:nvPr/>
-        </p:nvSpPr>
-        <p:spPr>
-          <a:xfrm>
-            <a:off x="9528048" y="2578608"/>
-            <a:ext cx="146304" cy="146304"/>
-          </a:xfrm>
-          <a:prstGeom prst="ellipse">
-            <a:avLst/>
-          </a:prstGeom>
-          <a:solidFill>
-            <a:srgbClr val="D62728"/>
-          </a:solidFill>
-          <a:ln>
-            <a:solidFill>
-              <a:srgbClr val="D62728"/>
-            </a:solidFill>
-          </a:ln>
-        </p:spPr>
-        <p:style>
-          <a:lnRef idx="1">
-            <a:schemeClr val="accent1"/>
-          </a:lnRef>
-          <a:fillRef idx="3">
-            <a:schemeClr val="accent1"/>
-          </a:fillRef>
-          <a:effectRef idx="2">
-            <a:schemeClr val="accent1"/>
-          </a:effectRef>
-          <a:fontRef idx="minor">
-            <a:schemeClr val="lt1"/>
-          </a:fontRef>
-        </p:style>
-        <p:txBody>
-          <a:bodyPr rtlCol="0" anchor="ctr"/>
-          <a:lstStyle/>
-          <a:p>
-            <a:pPr algn="ctr"/>
-          </a:p>
-        </p:txBody>
-      </p:sp>
-      <p:sp>
-        <p:nvSpPr>
-          <p:cNvPr id="18" name="TextBox 17"/>
-          <p:cNvSpPr txBox="1"/>
-          <p:nvPr/>
-        </p:nvSpPr>
-        <p:spPr>
-          <a:xfrm>
-            <a:off x="9738360" y="2487168"/>
-            <a:ext cx="548640" cy="274320"/>
-          </a:xfrm>
-          <a:prstGeom prst="rect">
-            <a:avLst/>
-          </a:prstGeom>
-          <a:noFill/>
-        </p:spPr>
-        <p:txBody>
-          <a:bodyPr wrap="none">
-            <a:spAutoFit/>
-          </a:bodyPr>
-          <a:lstStyle/>
-          <a:p>
-            <a:r>
-              <a:rPr sz="1200" b="1" i="0">
-                <a:solidFill>
-                  <a:srgbClr val="D62728"/>
-                </a:solidFill>
-              </a:rPr>
-              <a:t>t2</a:t>
-            </a:r>
-          </a:p>
-        </p:txBody>
-      </p:sp>
-      <p:sp>
-        <p:nvSpPr>
-          <p:cNvPr id="19" name="Oval 18"/>
-          <p:cNvSpPr/>
-          <p:nvPr/>
-        </p:nvSpPr>
-        <p:spPr>
-          <a:xfrm>
-            <a:off x="9528048" y="3493008"/>
-            <a:ext cx="146304" cy="146304"/>
-          </a:xfrm>
-          <a:prstGeom prst="ellipse">
-            <a:avLst/>
-          </a:prstGeom>
-          <a:solidFill>
-            <a:srgbClr val="D62728"/>
-          </a:solidFill>
-          <a:ln>
-            <a:solidFill>
-              <a:srgbClr val="D62728"/>
-            </a:solidFill>
-          </a:ln>
-        </p:spPr>
-        <p:style>
-          <a:lnRef idx="1">
-            <a:schemeClr val="accent1"/>
-          </a:lnRef>
-          <a:fillRef idx="3">
-            <a:schemeClr val="accent1"/>
-          </a:fillRef>
-          <a:effectRef idx="2">
-            <a:schemeClr val="accent1"/>
-          </a:effectRef>
-          <a:fontRef idx="minor">
-            <a:schemeClr val="lt1"/>
-          </a:fontRef>
-        </p:style>
-        <p:txBody>
-          <a:bodyPr rtlCol="0" anchor="ctr"/>
-          <a:lstStyle/>
-          <a:p>
-            <a:pPr algn="ctr"/>
-          </a:p>
-        </p:txBody>
-      </p:sp>
-      <p:sp>
-        <p:nvSpPr>
-          <p:cNvPr id="20" name="TextBox 19"/>
-          <p:cNvSpPr txBox="1"/>
-          <p:nvPr/>
-        </p:nvSpPr>
-        <p:spPr>
-          <a:xfrm>
-            <a:off x="9738360" y="3401568"/>
-            <a:ext cx="548640" cy="274320"/>
-          </a:xfrm>
-          <a:prstGeom prst="rect">
-            <a:avLst/>
-          </a:prstGeom>
-          <a:noFill/>
-        </p:spPr>
-        <p:txBody>
-          <a:bodyPr wrap="none">
-            <a:spAutoFit/>
-          </a:bodyPr>
-          <a:lstStyle/>
-          <a:p>
-            <a:r>
-              <a:rPr sz="1200" b="1" i="0">
-                <a:solidFill>
-                  <a:srgbClr val="D62728"/>
-                </a:solidFill>
-              </a:rPr>
-              <a:t>t3</a:t>
-            </a:r>
-          </a:p>
-        </p:txBody>
-      </p:sp>
-      <p:sp>
-        <p:nvSpPr>
-          <p:cNvPr id="21" name="Oval 20"/>
-          <p:cNvSpPr/>
-          <p:nvPr/>
-        </p:nvSpPr>
-        <p:spPr>
-          <a:xfrm>
-            <a:off x="2029967" y="3858768"/>
-            <a:ext cx="146304" cy="146304"/>
-          </a:xfrm>
-          <a:prstGeom prst="ellipse">
-            <a:avLst/>
-          </a:prstGeom>
-          <a:solidFill>
-            <a:srgbClr val="D62728"/>
-          </a:solidFill>
-          <a:ln>
-            <a:solidFill>
-              <a:srgbClr val="D62728"/>
-            </a:solidFill>
-          </a:ln>
-        </p:spPr>
-        <p:style>
-          <a:lnRef idx="1">
-            <a:schemeClr val="accent1"/>
-          </a:lnRef>
-          <a:fillRef idx="3">
-            <a:schemeClr val="accent1"/>
-          </a:fillRef>
-          <a:effectRef idx="2">
-            <a:schemeClr val="accent1"/>
-          </a:effectRef>
-          <a:fontRef idx="minor">
-            <a:schemeClr val="lt1"/>
-          </a:fontRef>
-        </p:style>
-        <p:txBody>
-          <a:bodyPr rtlCol="0" anchor="ctr"/>
-          <a:lstStyle/>
-          <a:p>
-            <a:pPr algn="ctr"/>
-          </a:p>
-        </p:txBody>
-      </p:sp>
-      <p:sp>
-        <p:nvSpPr>
-          <p:cNvPr id="22" name="TextBox 21"/>
-          <p:cNvSpPr txBox="1"/>
-          <p:nvPr/>
-        </p:nvSpPr>
-        <p:spPr>
-          <a:xfrm>
-            <a:off x="2240279" y="3767328"/>
-            <a:ext cx="548640" cy="274320"/>
-          </a:xfrm>
-          <a:prstGeom prst="rect">
-            <a:avLst/>
-          </a:prstGeom>
-          <a:noFill/>
-        </p:spPr>
-        <p:txBody>
-          <a:bodyPr wrap="none">
-            <a:spAutoFit/>
-          </a:bodyPr>
-          <a:lstStyle/>
-          <a:p>
-            <a:r>
-              <a:rPr sz="1200" b="1" i="0">
-                <a:solidFill>
-                  <a:srgbClr val="D62728"/>
-                </a:solidFill>
-              </a:rPr>
-              <a:t>t4</a:t>
-            </a:r>
-          </a:p>
-        </p:txBody>
-      </p:sp>
-      <p:sp>
-        <p:nvSpPr>
-          <p:cNvPr id="23" name="Rounded Rectangle 22"/>
-          <p:cNvSpPr/>
-          <p:nvPr/>
-        </p:nvSpPr>
-        <p:spPr>
-          <a:xfrm>
-            <a:off x="548640" y="5486400"/>
-            <a:ext cx="10972800" cy="502920"/>
-          </a:xfrm>
-          <a:prstGeom prst="roundRect">
-            <a:avLst/>
-          </a:prstGeom>
-          <a:solidFill>
-            <a:srgbClr val="E8EEF5"/>
-          </a:solidFill>
-          <a:ln>
-            <a:solidFill>
-              <a:srgbClr val="E8EEF5"/>
-            </a:solidFill>
-          </a:ln>
-        </p:spPr>
-        <p:style>
-          <a:lnRef idx="1">
-            <a:schemeClr val="accent1"/>
-          </a:lnRef>
-          <a:fillRef idx="3">
-            <a:schemeClr val="accent1"/>
-          </a:fillRef>
-          <a:effectRef idx="2">
-            <a:schemeClr val="accent1"/>
-          </a:effectRef>
-          <a:fontRef idx="minor">
-            <a:schemeClr val="lt1"/>
-          </a:fontRef>
-        </p:style>
-        <p:txBody>
-          <a:bodyPr rtlCol="0" anchor="ctr" wrap="square"/>
-          <a:lstStyle/>
-          <a:p>
-            <a:pPr algn="l"/>
-            <a:r>
-              <a:rPr sz="1300" b="1" i="0">
-                <a:solidFill>
-                  <a:srgbClr val="0B2E4F"/>
-                </a:solidFill>
-              </a:rPr>
-              <a:t>mean_path_delay = ((t2 − t1) + (t4 − t3)) / 2       offset_from_master = (t2 − t1) − mean_path_delay</a:t>
+              <a:t>PTP — Purpose &amp; Clock Model</a:t>
+            </a:r>
+          </a:p>
+        </p:txBody>
+      </p:sp>
+      <p:sp>
+        <p:nvSpPr>
+          <p:cNvPr id="3" name="Content Placeholder 2"/>
+          <p:cNvSpPr>
+            <a:spLocks noGrp="1"/>
+          </p:cNvSpPr>
+          <p:nvPr>
+            <p:ph idx="13" sz="quarter"/>
+          </p:nvPr>
+        </p:nvSpPr>
+        <p:spPr/>
+        <p:txBody>
+          <a:bodyPr/>
+          <a:lstStyle/>
+          <a:p>
+            <a:pPr/>
+            <a:r>
+              <a:rPr sz="1800"/>
+              <a:t>Goal: distribute a common notion of time across networked nodes</a:t>
+            </a:r>
+          </a:p>
+          <a:p>
+            <a:pPr lvl="1"/>
+            <a:r>
+              <a:rPr sz="1600"/>
+              <a:t>Target accuracy: sub-microsecond on a LAN — not reachable with NTP</a:t>
+            </a:r>
+          </a:p>
+          <a:p>
+            <a:pPr/>
+            <a:r>
+              <a:rPr sz="1800"/>
+              <a:t>Roles within a PTP domain:</a:t>
+            </a:r>
+          </a:p>
+          <a:p>
+            <a:pPr lvl="1"/>
+            <a:r>
+              <a:rPr sz="1600"/>
+              <a:t>Grandmaster (GM) — reference clock, source of truth</a:t>
+            </a:r>
+          </a:p>
+          <a:p>
+            <a:pPr lvl="1"/>
+            <a:r>
+              <a:rPr sz="1600"/>
+              <a:t>Ordinary / Boundary clock — follower, steers local clock to GM</a:t>
+            </a:r>
+          </a:p>
+          <a:p>
+            <a:pPr lvl="1"/>
+            <a:r>
+              <a:rPr sz="1600"/>
+              <a:t>Transparent clock — forwards and corrects for residence time</a:t>
+            </a:r>
+          </a:p>
+          <a:p>
+            <a:pPr/>
+            <a:r>
+              <a:rPr sz="1800"/>
+              <a:t>Best Master Clock Algorithm (BMCA) elects the GM automatically</a:t>
+            </a:r>
+          </a:p>
+          <a:p>
+            <a:pPr/>
+            <a:r>
+              <a:rPr sz="1800"/>
+              <a:t>Local clock corrected in two dimensions:</a:t>
+            </a:r>
+          </a:p>
+          <a:p>
+            <a:pPr lvl="1"/>
+            <a:r>
+              <a:rPr sz="1600"/>
+              <a:t>Phase — absolute offset to GM (ns)</a:t>
+            </a:r>
+          </a:p>
+          <a:p>
+            <a:pPr lvl="1"/>
+            <a:r>
+              <a:rPr sz="1600"/>
+              <a:t>Rate — frequency ratio between local and GM oscillator (ppb)</a:t>
             </a:r>
           </a:p>
         </p:txBody>
@@ -5706,93 +5513,820 @@
           <a:lstStyle/>
           <a:p>
             <a:r>
-              <a:t>PTP — Hardware Timestamping</a:t>
-            </a:r>
-          </a:p>
-        </p:txBody>
-      </p:sp>
-      <p:sp>
-        <p:nvSpPr>
-          <p:cNvPr id="3" name="Content Placeholder 2"/>
-          <p:cNvSpPr>
-            <a:spLocks noGrp="1"/>
-          </p:cNvSpPr>
-          <p:nvPr>
-            <p:ph idx="13" sz="quarter"/>
-          </p:nvPr>
-        </p:nvSpPr>
-        <p:spPr/>
-        <p:txBody>
-          <a:bodyPr/>
-          <a:lstStyle/>
-          <a:p>
-            <a:pPr/>
-            <a:r>
-              <a:rPr sz="1800"/>
-              <a:t>Where the timestamp is taken dictates the achievable accuracy</a:t>
-            </a:r>
-          </a:p>
-          <a:p>
-            <a:pPr/>
-            <a:r>
-              <a:rPr sz="1800"/>
-              <a:t>Software timestamping (at socket layer):</a:t>
-            </a:r>
-          </a:p>
-          <a:p>
-            <a:pPr lvl="1"/>
-            <a:r>
-              <a:rPr sz="1600"/>
-              <a:t>Jitter from kernel scheduling, stack queues, cache effects</a:t>
-            </a:r>
-          </a:p>
-          <a:p>
-            <a:pPr lvl="1"/>
-            <a:r>
-              <a:rPr sz="1600"/>
-              <a:t>Typical accuracy: tens of microseconds to low milliseconds</a:t>
-            </a:r>
-          </a:p>
-          <a:p>
-            <a:pPr/>
-            <a:r>
-              <a:rPr sz="1800"/>
-              <a:t>Hardware timestamping (at PHY/MAC Start-of-Frame):</a:t>
-            </a:r>
-          </a:p>
-          <a:p>
-            <a:pPr lvl="1"/>
-            <a:r>
-              <a:rPr sz="1600"/>
-              <a:t>Timestamp latched on the SFD bit — ideal reference point</a:t>
-            </a:r>
-          </a:p>
-          <a:p>
-            <a:pPr lvl="1"/>
-            <a:r>
-              <a:rPr sz="1600"/>
-              <a:t>Removes OS/driver jitter from the measurement</a:t>
-            </a:r>
-          </a:p>
-          <a:p>
-            <a:pPr lvl="1"/>
-            <a:r>
-              <a:rPr sz="1600"/>
-              <a:t>Typical accuracy: tens of nanoseconds, limited by counter resolution</a:t>
-            </a:r>
-          </a:p>
-          <a:p>
-            <a:pPr/>
-            <a:r>
-              <a:rPr sz="1800"/>
-              <a:t>IEEE 1588 assumes path symmetry — PTP cannot measure asymmetry directly</a:t>
-            </a:r>
-          </a:p>
-          <a:p>
-            <a:pPr lvl="1"/>
-            <a:r>
-              <a:rPr sz="1600"/>
-              <a:t>Any TX/RX pipeline asymmetry becomes a constant offset → must be calibrated</a:t>
+              <a:t>PTP — Message Exchange</a:t>
+            </a:r>
+          </a:p>
+        </p:txBody>
+      </p:sp>
+      <p:cxnSp>
+        <p:nvCxnSpPr>
+          <p:cNvPr id="3" name="Connector 2"/>
+          <p:cNvCxnSpPr/>
+          <p:nvPr/>
+        </p:nvCxnSpPr>
+        <p:spPr>
+          <a:xfrm>
+            <a:off x="2103120" y="1828800"/>
+            <a:ext cx="0" cy="3566160"/>
+          </a:xfrm>
+          <a:prstGeom prst="line">
+            <a:avLst/>
+          </a:prstGeom>
+          <a:ln w="38100">
+            <a:solidFill>
+              <a:srgbClr val="0B2E4F"/>
+            </a:solidFill>
+          </a:ln>
+        </p:spPr>
+        <p:style>
+          <a:lnRef idx="2">
+            <a:schemeClr val="accent1"/>
+          </a:lnRef>
+          <a:fillRef idx="0">
+            <a:schemeClr val="accent1"/>
+          </a:fillRef>
+          <a:effectRef idx="1">
+            <a:schemeClr val="accent1"/>
+          </a:effectRef>
+          <a:fontRef idx="minor">
+            <a:schemeClr val="tx1"/>
+          </a:fontRef>
+        </p:style>
+      </p:cxnSp>
+      <p:cxnSp>
+        <p:nvCxnSpPr>
+          <p:cNvPr id="4" name="Connector 3"/>
+          <p:cNvCxnSpPr/>
+          <p:nvPr/>
+        </p:nvCxnSpPr>
+        <p:spPr>
+          <a:xfrm>
+            <a:off x="9601200" y="1828800"/>
+            <a:ext cx="0" cy="3566160"/>
+          </a:xfrm>
+          <a:prstGeom prst="line">
+            <a:avLst/>
+          </a:prstGeom>
+          <a:ln w="38100">
+            <a:solidFill>
+              <a:srgbClr val="0B2E4F"/>
+            </a:solidFill>
+          </a:ln>
+        </p:spPr>
+        <p:style>
+          <a:lnRef idx="2">
+            <a:schemeClr val="accent1"/>
+          </a:lnRef>
+          <a:fillRef idx="0">
+            <a:schemeClr val="accent1"/>
+          </a:fillRef>
+          <a:effectRef idx="1">
+            <a:schemeClr val="accent1"/>
+          </a:effectRef>
+          <a:fontRef idx="minor">
+            <a:schemeClr val="tx1"/>
+          </a:fontRef>
+        </p:style>
+      </p:cxnSp>
+      <p:sp>
+        <p:nvSpPr>
+          <p:cNvPr id="5" name="Rounded Rectangle 4"/>
+          <p:cNvSpPr/>
+          <p:nvPr/>
+        </p:nvSpPr>
+        <p:spPr>
+          <a:xfrm>
+            <a:off x="1097279" y="1417320"/>
+            <a:ext cx="2011680" cy="365760"/>
+          </a:xfrm>
+          <a:prstGeom prst="roundRect">
+            <a:avLst/>
+          </a:prstGeom>
+          <a:solidFill>
+            <a:srgbClr val="0B2E4F"/>
+          </a:solidFill>
+          <a:ln>
+            <a:solidFill>
+              <a:srgbClr val="0B2E4F"/>
+            </a:solidFill>
+          </a:ln>
+        </p:spPr>
+        <p:style>
+          <a:lnRef idx="1">
+            <a:schemeClr val="accent1"/>
+          </a:lnRef>
+          <a:fillRef idx="3">
+            <a:schemeClr val="accent1"/>
+          </a:fillRef>
+          <a:effectRef idx="2">
+            <a:schemeClr val="accent1"/>
+          </a:effectRef>
+          <a:fontRef idx="minor">
+            <a:schemeClr val="lt1"/>
+          </a:fontRef>
+        </p:style>
+        <p:txBody>
+          <a:bodyPr rtlCol="0" anchor="ctr" wrap="square"/>
+          <a:lstStyle/>
+          <a:p>
+            <a:pPr algn="l"/>
+            <a:r>
+              <a:rPr sz="1400" b="1" i="0">
+                <a:solidFill>
+                  <a:srgbClr val="FFFFFF"/>
+                </a:solidFill>
+              </a:rPr>
+              <a:t>Grandmaster</a:t>
+            </a:r>
+          </a:p>
+        </p:txBody>
+      </p:sp>
+      <p:sp>
+        <p:nvSpPr>
+          <p:cNvPr id="6" name="Rounded Rectangle 5"/>
+          <p:cNvSpPr/>
+          <p:nvPr/>
+        </p:nvSpPr>
+        <p:spPr>
+          <a:xfrm>
+            <a:off x="8595360" y="1417320"/>
+            <a:ext cx="2011680" cy="365760"/>
+          </a:xfrm>
+          <a:prstGeom prst="roundRect">
+            <a:avLst/>
+          </a:prstGeom>
+          <a:solidFill>
+            <a:srgbClr val="0B2E4F"/>
+          </a:solidFill>
+          <a:ln>
+            <a:solidFill>
+              <a:srgbClr val="0B2E4F"/>
+            </a:solidFill>
+          </a:ln>
+        </p:spPr>
+        <p:style>
+          <a:lnRef idx="1">
+            <a:schemeClr val="accent1"/>
+          </a:lnRef>
+          <a:fillRef idx="3">
+            <a:schemeClr val="accent1"/>
+          </a:fillRef>
+          <a:effectRef idx="2">
+            <a:schemeClr val="accent1"/>
+          </a:effectRef>
+          <a:fontRef idx="minor">
+            <a:schemeClr val="lt1"/>
+          </a:fontRef>
+        </p:style>
+        <p:txBody>
+          <a:bodyPr rtlCol="0" anchor="ctr" wrap="square"/>
+          <a:lstStyle/>
+          <a:p>
+            <a:pPr algn="l"/>
+            <a:r>
+              <a:rPr sz="1400" b="1" i="0">
+                <a:solidFill>
+                  <a:srgbClr val="FFFFFF"/>
+                </a:solidFill>
+              </a:rPr>
+              <a:t>Follower</a:t>
+            </a:r>
+          </a:p>
+        </p:txBody>
+      </p:sp>
+      <p:cxnSp>
+        <p:nvCxnSpPr>
+          <p:cNvPr id="7" name="Connector 6"/>
+          <p:cNvCxnSpPr/>
+          <p:nvPr/>
+        </p:nvCxnSpPr>
+        <p:spPr>
+          <a:xfrm>
+            <a:off x="2103120" y="2194560"/>
+            <a:ext cx="7498080" cy="457200"/>
+          </a:xfrm>
+          <a:prstGeom prst="bentConnector3">
+            <a:avLst/>
+          </a:prstGeom>
+          <a:ln w="25400">
+            <a:solidFill>
+              <a:srgbClr val="1F77B4"/>
+            </a:solidFill>
+          </a:ln>
+        </p:spPr>
+        <p:style>
+          <a:lnRef idx="2">
+            <a:schemeClr val="accent1"/>
+          </a:lnRef>
+          <a:fillRef idx="0">
+            <a:schemeClr val="accent1"/>
+          </a:fillRef>
+          <a:effectRef idx="1">
+            <a:schemeClr val="accent1"/>
+          </a:effectRef>
+          <a:fontRef idx="minor">
+            <a:schemeClr val="tx1"/>
+          </a:fontRef>
+        </p:style>
+      </p:cxnSp>
+      <p:sp>
+        <p:nvSpPr>
+          <p:cNvPr id="8" name="TextBox 7"/>
+          <p:cNvSpPr txBox="1"/>
+          <p:nvPr/>
+        </p:nvSpPr>
+        <p:spPr>
+          <a:xfrm>
+            <a:off x="3657600" y="2148840"/>
+            <a:ext cx="4572000" cy="320040"/>
+          </a:xfrm>
+          <a:prstGeom prst="rect">
+            <a:avLst/>
+          </a:prstGeom>
+          <a:noFill/>
+        </p:spPr>
+        <p:txBody>
+          <a:bodyPr wrap="none">
+            <a:spAutoFit/>
+          </a:bodyPr>
+          <a:lstStyle/>
+          <a:p>
+            <a:r>
+              <a:rPr sz="1200" b="1" i="0">
+                <a:solidFill>
+                  <a:srgbClr val="1F77B4"/>
+                </a:solidFill>
+              </a:rPr>
+              <a:t>Sync   (t1 on TX, t2 on RX)</a:t>
+            </a:r>
+          </a:p>
+        </p:txBody>
+      </p:sp>
+      <p:cxnSp>
+        <p:nvCxnSpPr>
+          <p:cNvPr id="9" name="Connector 8"/>
+          <p:cNvCxnSpPr/>
+          <p:nvPr/>
+        </p:nvCxnSpPr>
+        <p:spPr>
+          <a:xfrm>
+            <a:off x="2103120" y="2926080"/>
+            <a:ext cx="7498080" cy="182880"/>
+          </a:xfrm>
+          <a:prstGeom prst="bentConnector3">
+            <a:avLst/>
+          </a:prstGeom>
+          <a:ln w="25400">
+            <a:solidFill>
+              <a:srgbClr val="1F77B4"/>
+            </a:solidFill>
+          </a:ln>
+        </p:spPr>
+        <p:style>
+          <a:lnRef idx="2">
+            <a:schemeClr val="accent1"/>
+          </a:lnRef>
+          <a:fillRef idx="0">
+            <a:schemeClr val="accent1"/>
+          </a:fillRef>
+          <a:effectRef idx="1">
+            <a:schemeClr val="accent1"/>
+          </a:effectRef>
+          <a:fontRef idx="minor">
+            <a:schemeClr val="tx1"/>
+          </a:fontRef>
+        </p:style>
+      </p:cxnSp>
+      <p:sp>
+        <p:nvSpPr>
+          <p:cNvPr id="10" name="TextBox 9"/>
+          <p:cNvSpPr txBox="1"/>
+          <p:nvPr/>
+        </p:nvSpPr>
+        <p:spPr>
+          <a:xfrm>
+            <a:off x="3657600" y="2788920"/>
+            <a:ext cx="4572000" cy="320040"/>
+          </a:xfrm>
+          <a:prstGeom prst="rect">
+            <a:avLst/>
+          </a:prstGeom>
+          <a:noFill/>
+        </p:spPr>
+        <p:txBody>
+          <a:bodyPr wrap="none">
+            <a:spAutoFit/>
+          </a:bodyPr>
+          <a:lstStyle/>
+          <a:p>
+            <a:r>
+              <a:rPr sz="1200" b="1" i="0">
+                <a:solidFill>
+                  <a:srgbClr val="1F77B4"/>
+                </a:solidFill>
+              </a:rPr>
+              <a:t>Follow_Up  (carries t1)</a:t>
+            </a:r>
+          </a:p>
+        </p:txBody>
+      </p:sp>
+      <p:cxnSp>
+        <p:nvCxnSpPr>
+          <p:cNvPr id="11" name="Connector 10"/>
+          <p:cNvCxnSpPr/>
+          <p:nvPr/>
+        </p:nvCxnSpPr>
+        <p:spPr>
+          <a:xfrm flipH="1">
+            <a:off x="2103120" y="3566160"/>
+            <a:ext cx="7498080" cy="365760"/>
+          </a:xfrm>
+          <a:prstGeom prst="bentConnector3">
+            <a:avLst/>
+          </a:prstGeom>
+          <a:ln w="25400">
+            <a:solidFill>
+              <a:srgbClr val="1F77B4"/>
+            </a:solidFill>
+          </a:ln>
+        </p:spPr>
+        <p:style>
+          <a:lnRef idx="2">
+            <a:schemeClr val="accent1"/>
+          </a:lnRef>
+          <a:fillRef idx="0">
+            <a:schemeClr val="accent1"/>
+          </a:fillRef>
+          <a:effectRef idx="1">
+            <a:schemeClr val="accent1"/>
+          </a:effectRef>
+          <a:fontRef idx="minor">
+            <a:schemeClr val="tx1"/>
+          </a:fontRef>
+        </p:style>
+      </p:cxnSp>
+      <p:sp>
+        <p:nvSpPr>
+          <p:cNvPr id="12" name="TextBox 11"/>
+          <p:cNvSpPr txBox="1"/>
+          <p:nvPr/>
+        </p:nvSpPr>
+        <p:spPr>
+          <a:xfrm>
+            <a:off x="3657600" y="3703320"/>
+            <a:ext cx="4572000" cy="320040"/>
+          </a:xfrm>
+          <a:prstGeom prst="rect">
+            <a:avLst/>
+          </a:prstGeom>
+          <a:noFill/>
+        </p:spPr>
+        <p:txBody>
+          <a:bodyPr wrap="none">
+            <a:spAutoFit/>
+          </a:bodyPr>
+          <a:lstStyle/>
+          <a:p>
+            <a:r>
+              <a:rPr sz="1200" b="1" i="0">
+                <a:solidFill>
+                  <a:srgbClr val="1F77B4"/>
+                </a:solidFill>
+              </a:rPr>
+              <a:t>Delay_Req   (t3 on TX, t4 on RX)</a:t>
+            </a:r>
+          </a:p>
+        </p:txBody>
+      </p:sp>
+      <p:cxnSp>
+        <p:nvCxnSpPr>
+          <p:cNvPr id="13" name="Connector 12"/>
+          <p:cNvCxnSpPr/>
+          <p:nvPr/>
+        </p:nvCxnSpPr>
+        <p:spPr>
+          <a:xfrm>
+            <a:off x="2103120" y="4297680"/>
+            <a:ext cx="7498080" cy="274320"/>
+          </a:xfrm>
+          <a:prstGeom prst="bentConnector3">
+            <a:avLst/>
+          </a:prstGeom>
+          <a:ln w="25400">
+            <a:solidFill>
+              <a:srgbClr val="1F77B4"/>
+            </a:solidFill>
+          </a:ln>
+        </p:spPr>
+        <p:style>
+          <a:lnRef idx="2">
+            <a:schemeClr val="accent1"/>
+          </a:lnRef>
+          <a:fillRef idx="0">
+            <a:schemeClr val="accent1"/>
+          </a:fillRef>
+          <a:effectRef idx="1">
+            <a:schemeClr val="accent1"/>
+          </a:effectRef>
+          <a:fontRef idx="minor">
+            <a:schemeClr val="tx1"/>
+          </a:fontRef>
+        </p:style>
+      </p:cxnSp>
+      <p:sp>
+        <p:nvSpPr>
+          <p:cNvPr id="14" name="TextBox 13"/>
+          <p:cNvSpPr txBox="1"/>
+          <p:nvPr/>
+        </p:nvSpPr>
+        <p:spPr>
+          <a:xfrm>
+            <a:off x="3657600" y="4160520"/>
+            <a:ext cx="4572000" cy="320040"/>
+          </a:xfrm>
+          <a:prstGeom prst="rect">
+            <a:avLst/>
+          </a:prstGeom>
+          <a:noFill/>
+        </p:spPr>
+        <p:txBody>
+          <a:bodyPr wrap="none">
+            <a:spAutoFit/>
+          </a:bodyPr>
+          <a:lstStyle/>
+          <a:p>
+            <a:r>
+              <a:rPr sz="1200" b="1" i="0">
+                <a:solidFill>
+                  <a:srgbClr val="1F77B4"/>
+                </a:solidFill>
+              </a:rPr>
+              <a:t>Delay_Resp  (carries t4)</a:t>
+            </a:r>
+          </a:p>
+        </p:txBody>
+      </p:sp>
+      <p:sp>
+        <p:nvSpPr>
+          <p:cNvPr id="15" name="Oval 14"/>
+          <p:cNvSpPr/>
+          <p:nvPr/>
+        </p:nvSpPr>
+        <p:spPr>
+          <a:xfrm>
+            <a:off x="2029967" y="2121408"/>
+            <a:ext cx="146304" cy="146304"/>
+          </a:xfrm>
+          <a:prstGeom prst="ellipse">
+            <a:avLst/>
+          </a:prstGeom>
+          <a:solidFill>
+            <a:srgbClr val="D62728"/>
+          </a:solidFill>
+          <a:ln>
+            <a:solidFill>
+              <a:srgbClr val="D62728"/>
+            </a:solidFill>
+          </a:ln>
+        </p:spPr>
+        <p:style>
+          <a:lnRef idx="1">
+            <a:schemeClr val="accent1"/>
+          </a:lnRef>
+          <a:fillRef idx="3">
+            <a:schemeClr val="accent1"/>
+          </a:fillRef>
+          <a:effectRef idx="2">
+            <a:schemeClr val="accent1"/>
+          </a:effectRef>
+          <a:fontRef idx="minor">
+            <a:schemeClr val="lt1"/>
+          </a:fontRef>
+        </p:style>
+        <p:txBody>
+          <a:bodyPr rtlCol="0" anchor="ctr"/>
+          <a:lstStyle/>
+          <a:p>
+            <a:pPr algn="ctr"/>
+          </a:p>
+        </p:txBody>
+      </p:sp>
+      <p:sp>
+        <p:nvSpPr>
+          <p:cNvPr id="16" name="TextBox 15"/>
+          <p:cNvSpPr txBox="1"/>
+          <p:nvPr/>
+        </p:nvSpPr>
+        <p:spPr>
+          <a:xfrm>
+            <a:off x="2240279" y="2029967"/>
+            <a:ext cx="548640" cy="274320"/>
+          </a:xfrm>
+          <a:prstGeom prst="rect">
+            <a:avLst/>
+          </a:prstGeom>
+          <a:noFill/>
+        </p:spPr>
+        <p:txBody>
+          <a:bodyPr wrap="none">
+            <a:spAutoFit/>
+          </a:bodyPr>
+          <a:lstStyle/>
+          <a:p>
+            <a:r>
+              <a:rPr sz="1200" b="1" i="0">
+                <a:solidFill>
+                  <a:srgbClr val="D62728"/>
+                </a:solidFill>
+              </a:rPr>
+              <a:t>t1</a:t>
+            </a:r>
+          </a:p>
+        </p:txBody>
+      </p:sp>
+      <p:sp>
+        <p:nvSpPr>
+          <p:cNvPr id="17" name="Oval 16"/>
+          <p:cNvSpPr/>
+          <p:nvPr/>
+        </p:nvSpPr>
+        <p:spPr>
+          <a:xfrm>
+            <a:off x="9528048" y="2578608"/>
+            <a:ext cx="146304" cy="146304"/>
+          </a:xfrm>
+          <a:prstGeom prst="ellipse">
+            <a:avLst/>
+          </a:prstGeom>
+          <a:solidFill>
+            <a:srgbClr val="D62728"/>
+          </a:solidFill>
+          <a:ln>
+            <a:solidFill>
+              <a:srgbClr val="D62728"/>
+            </a:solidFill>
+          </a:ln>
+        </p:spPr>
+        <p:style>
+          <a:lnRef idx="1">
+            <a:schemeClr val="accent1"/>
+          </a:lnRef>
+          <a:fillRef idx="3">
+            <a:schemeClr val="accent1"/>
+          </a:fillRef>
+          <a:effectRef idx="2">
+            <a:schemeClr val="accent1"/>
+          </a:effectRef>
+          <a:fontRef idx="minor">
+            <a:schemeClr val="lt1"/>
+          </a:fontRef>
+        </p:style>
+        <p:txBody>
+          <a:bodyPr rtlCol="0" anchor="ctr"/>
+          <a:lstStyle/>
+          <a:p>
+            <a:pPr algn="ctr"/>
+          </a:p>
+        </p:txBody>
+      </p:sp>
+      <p:sp>
+        <p:nvSpPr>
+          <p:cNvPr id="18" name="TextBox 17"/>
+          <p:cNvSpPr txBox="1"/>
+          <p:nvPr/>
+        </p:nvSpPr>
+        <p:spPr>
+          <a:xfrm>
+            <a:off x="9738360" y="2487168"/>
+            <a:ext cx="548640" cy="274320"/>
+          </a:xfrm>
+          <a:prstGeom prst="rect">
+            <a:avLst/>
+          </a:prstGeom>
+          <a:noFill/>
+        </p:spPr>
+        <p:txBody>
+          <a:bodyPr wrap="none">
+            <a:spAutoFit/>
+          </a:bodyPr>
+          <a:lstStyle/>
+          <a:p>
+            <a:r>
+              <a:rPr sz="1200" b="1" i="0">
+                <a:solidFill>
+                  <a:srgbClr val="D62728"/>
+                </a:solidFill>
+              </a:rPr>
+              <a:t>t2</a:t>
+            </a:r>
+          </a:p>
+        </p:txBody>
+      </p:sp>
+      <p:sp>
+        <p:nvSpPr>
+          <p:cNvPr id="19" name="Oval 18"/>
+          <p:cNvSpPr/>
+          <p:nvPr/>
+        </p:nvSpPr>
+        <p:spPr>
+          <a:xfrm>
+            <a:off x="9528048" y="3493008"/>
+            <a:ext cx="146304" cy="146304"/>
+          </a:xfrm>
+          <a:prstGeom prst="ellipse">
+            <a:avLst/>
+          </a:prstGeom>
+          <a:solidFill>
+            <a:srgbClr val="D62728"/>
+          </a:solidFill>
+          <a:ln>
+            <a:solidFill>
+              <a:srgbClr val="D62728"/>
+            </a:solidFill>
+          </a:ln>
+        </p:spPr>
+        <p:style>
+          <a:lnRef idx="1">
+            <a:schemeClr val="accent1"/>
+          </a:lnRef>
+          <a:fillRef idx="3">
+            <a:schemeClr val="accent1"/>
+          </a:fillRef>
+          <a:effectRef idx="2">
+            <a:schemeClr val="accent1"/>
+          </a:effectRef>
+          <a:fontRef idx="minor">
+            <a:schemeClr val="lt1"/>
+          </a:fontRef>
+        </p:style>
+        <p:txBody>
+          <a:bodyPr rtlCol="0" anchor="ctr"/>
+          <a:lstStyle/>
+          <a:p>
+            <a:pPr algn="ctr"/>
+          </a:p>
+        </p:txBody>
+      </p:sp>
+      <p:sp>
+        <p:nvSpPr>
+          <p:cNvPr id="20" name="TextBox 19"/>
+          <p:cNvSpPr txBox="1"/>
+          <p:nvPr/>
+        </p:nvSpPr>
+        <p:spPr>
+          <a:xfrm>
+            <a:off x="9738360" y="3401568"/>
+            <a:ext cx="548640" cy="274320"/>
+          </a:xfrm>
+          <a:prstGeom prst="rect">
+            <a:avLst/>
+          </a:prstGeom>
+          <a:noFill/>
+        </p:spPr>
+        <p:txBody>
+          <a:bodyPr wrap="none">
+            <a:spAutoFit/>
+          </a:bodyPr>
+          <a:lstStyle/>
+          <a:p>
+            <a:r>
+              <a:rPr sz="1200" b="1" i="0">
+                <a:solidFill>
+                  <a:srgbClr val="D62728"/>
+                </a:solidFill>
+              </a:rPr>
+              <a:t>t3</a:t>
+            </a:r>
+          </a:p>
+        </p:txBody>
+      </p:sp>
+      <p:sp>
+        <p:nvSpPr>
+          <p:cNvPr id="21" name="Oval 20"/>
+          <p:cNvSpPr/>
+          <p:nvPr/>
+        </p:nvSpPr>
+        <p:spPr>
+          <a:xfrm>
+            <a:off x="2029967" y="3858768"/>
+            <a:ext cx="146304" cy="146304"/>
+          </a:xfrm>
+          <a:prstGeom prst="ellipse">
+            <a:avLst/>
+          </a:prstGeom>
+          <a:solidFill>
+            <a:srgbClr val="D62728"/>
+          </a:solidFill>
+          <a:ln>
+            <a:solidFill>
+              <a:srgbClr val="D62728"/>
+            </a:solidFill>
+          </a:ln>
+        </p:spPr>
+        <p:style>
+          <a:lnRef idx="1">
+            <a:schemeClr val="accent1"/>
+          </a:lnRef>
+          <a:fillRef idx="3">
+            <a:schemeClr val="accent1"/>
+          </a:fillRef>
+          <a:effectRef idx="2">
+            <a:schemeClr val="accent1"/>
+          </a:effectRef>
+          <a:fontRef idx="minor">
+            <a:schemeClr val="lt1"/>
+          </a:fontRef>
+        </p:style>
+        <p:txBody>
+          <a:bodyPr rtlCol="0" anchor="ctr"/>
+          <a:lstStyle/>
+          <a:p>
+            <a:pPr algn="ctr"/>
+          </a:p>
+        </p:txBody>
+      </p:sp>
+      <p:sp>
+        <p:nvSpPr>
+          <p:cNvPr id="22" name="TextBox 21"/>
+          <p:cNvSpPr txBox="1"/>
+          <p:nvPr/>
+        </p:nvSpPr>
+        <p:spPr>
+          <a:xfrm>
+            <a:off x="2240279" y="3767328"/>
+            <a:ext cx="548640" cy="274320"/>
+          </a:xfrm>
+          <a:prstGeom prst="rect">
+            <a:avLst/>
+          </a:prstGeom>
+          <a:noFill/>
+        </p:spPr>
+        <p:txBody>
+          <a:bodyPr wrap="none">
+            <a:spAutoFit/>
+          </a:bodyPr>
+          <a:lstStyle/>
+          <a:p>
+            <a:r>
+              <a:rPr sz="1200" b="1" i="0">
+                <a:solidFill>
+                  <a:srgbClr val="D62728"/>
+                </a:solidFill>
+              </a:rPr>
+              <a:t>t4</a:t>
+            </a:r>
+          </a:p>
+        </p:txBody>
+      </p:sp>
+      <p:sp>
+        <p:nvSpPr>
+          <p:cNvPr id="23" name="Rounded Rectangle 22"/>
+          <p:cNvSpPr/>
+          <p:nvPr/>
+        </p:nvSpPr>
+        <p:spPr>
+          <a:xfrm>
+            <a:off x="548640" y="5486400"/>
+            <a:ext cx="10972800" cy="502920"/>
+          </a:xfrm>
+          <a:prstGeom prst="roundRect">
+            <a:avLst/>
+          </a:prstGeom>
+          <a:solidFill>
+            <a:srgbClr val="E8EEF5"/>
+          </a:solidFill>
+          <a:ln>
+            <a:solidFill>
+              <a:srgbClr val="E8EEF5"/>
+            </a:solidFill>
+          </a:ln>
+        </p:spPr>
+        <p:style>
+          <a:lnRef idx="1">
+            <a:schemeClr val="accent1"/>
+          </a:lnRef>
+          <a:fillRef idx="3">
+            <a:schemeClr val="accent1"/>
+          </a:fillRef>
+          <a:effectRef idx="2">
+            <a:schemeClr val="accent1"/>
+          </a:effectRef>
+          <a:fontRef idx="minor">
+            <a:schemeClr val="lt1"/>
+          </a:fontRef>
+        </p:style>
+        <p:txBody>
+          <a:bodyPr rtlCol="0" anchor="ctr" wrap="square"/>
+          <a:lstStyle/>
+          <a:p>
+            <a:pPr algn="l"/>
+            <a:r>
+              <a:rPr sz="1300" b="1" i="0">
+                <a:solidFill>
+                  <a:srgbClr val="0B2E4F"/>
+                </a:solidFill>
+              </a:rPr>
+              <a:t>mean_path_delay = ((t2 − t1) + (t4 − t3)) / 2       offset_from_master = (t2 − t1) − mean_path_delay</a:t>
             </a:r>
           </a:p>
         </p:txBody>
@@ -5831,7 +6365,7 @@
           <a:lstStyle/>
           <a:p>
             <a:r>
-              <a:t>PTP — Error Sources</a:t>
+              <a:t>PTP — Hardware Timestamping</a:t>
             </a:r>
           </a:p>
         </p:txBody>
@@ -5854,63 +6388,70 @@
             <a:pPr/>
             <a:r>
               <a:rPr sz="1800"/>
-              <a:t>Oscillator rate offset and wander (short- and long-term)</a:t>
+              <a:t>Where the timestamp is taken dictates the achievable accuracy</a:t>
             </a:r>
           </a:p>
           <a:p>
             <a:pPr/>
             <a:r>
               <a:rPr sz="1800"/>
-              <a:t>Quantisation of hardware timestamps (timestamp counter tick period)</a:t>
+              <a:t>Software timestamping (at socket layer):</a:t>
+            </a:r>
+          </a:p>
+          <a:p>
+            <a:pPr lvl="1"/>
+            <a:r>
+              <a:rPr sz="1600"/>
+              <a:t>Jitter from kernel scheduling, stack queues, cache effects</a:t>
+            </a:r>
+          </a:p>
+          <a:p>
+            <a:pPr lvl="1"/>
+            <a:r>
+              <a:rPr sz="1600"/>
+              <a:t>Typical accuracy: tens of microseconds to low milliseconds</a:t>
             </a:r>
           </a:p>
           <a:p>
             <a:pPr/>
             <a:r>
               <a:rPr sz="1800"/>
-              <a:t>Asymmetric TX vs RX datapath latency — not observable by PTP math</a:t>
+              <a:t>Hardware timestamping (at PHY/MAC Start-of-Frame):</a:t>
+            </a:r>
+          </a:p>
+          <a:p>
+            <a:pPr lvl="1"/>
+            <a:r>
+              <a:rPr sz="1600"/>
+              <a:t>Timestamp latched on the SFD bit — ideal reference point</a:t>
+            </a:r>
+          </a:p>
+          <a:p>
+            <a:pPr lvl="1"/>
+            <a:r>
+              <a:rPr sz="1600"/>
+              <a:t>Removes OS/driver jitter from the measurement</a:t>
+            </a:r>
+          </a:p>
+          <a:p>
+            <a:pPr lvl="1"/>
+            <a:r>
+              <a:rPr sz="1600"/>
+              <a:t>Typical accuracy: tens of nanoseconds, limited by counter resolution</a:t>
             </a:r>
           </a:p>
           <a:p>
             <a:pPr/>
             <a:r>
               <a:rPr sz="1800"/>
-              <a:t>Link-layer residence time variance (queuing, media access)</a:t>
+              <a:t>IEEE 1588 assumes path symmetry — PTP cannot measure asymmetry directly</a:t>
             </a:r>
           </a:p>
           <a:p>
             <a:pPr lvl="1"/>
             <a:r>
               <a:rPr sz="1600"/>
-              <a:t>Especially relevant on shared media such as 10BASE-T1S PLCA</a:t>
-            </a:r>
-          </a:p>
-          <a:p>
-            <a:pPr/>
-            <a:r>
-              <a:rPr sz="1800"/>
-              <a:t>Temperature drift of crystals → rate changes slowly over minutes/hours</a:t>
-            </a:r>
-          </a:p>
-          <a:p>
-            <a:pPr/>
-            <a:r>
-              <a:rPr sz="1800"/>
-              <a:t>Servo dynamics:</a:t>
-            </a:r>
-          </a:p>
-          <a:p>
-            <a:pPr lvl="1"/>
-            <a:r>
-              <a:rPr sz="1600"/>
-              <a:t>Fast servo → tracks wander, amplifies measurement noise</a:t>
-            </a:r>
-          </a:p>
-          <a:p>
-            <a:pPr lvl="1"/>
-            <a:r>
-              <a:rPr sz="1600"/>
-              <a:t>Slow servo → quiet but sluggish against temperature transients</a:t>
+              <a:t>Any TX/RX pipeline asymmetry becomes a constant offset → must be calibrated</a:t>
             </a:r>
           </a:p>
         </p:txBody>
@@ -5949,7 +6490,7 @@
           <a:lstStyle/>
           <a:p>
             <a:r>
-              <a:t>10BASE-T1S — PHY Overview</a:t>
+              <a:t>PTP — Error Sources</a:t>
             </a:r>
           </a:p>
         </p:txBody>
@@ -5972,63 +6513,63 @@
             <a:pPr/>
             <a:r>
               <a:rPr sz="1800"/>
-              <a:t>10 Mbit/s full-duplex-equivalent over a single unshielded twisted pair</a:t>
+              <a:t>Oscillator rate offset and wander (short- and long-term)</a:t>
             </a:r>
           </a:p>
           <a:p>
             <a:pPr/>
             <a:r>
               <a:rPr sz="1800"/>
-              <a:t>Two physical topologies supported:</a:t>
+              <a:t>Quantisation of hardware timestamps (timestamp counter tick period)</a:t>
+            </a:r>
+          </a:p>
+          <a:p>
+            <a:pPr/>
+            <a:r>
+              <a:rPr sz="1800"/>
+              <a:t>Asymmetric TX vs RX datapath latency — not observable by PTP math</a:t>
+            </a:r>
+          </a:p>
+          <a:p>
+            <a:pPr/>
+            <a:r>
+              <a:rPr sz="1800"/>
+              <a:t>Link-layer residence time variance (queuing, media access)</a:t>
             </a:r>
           </a:p>
           <a:p>
             <a:pPr lvl="1"/>
             <a:r>
               <a:rPr sz="1600"/>
-              <a:t>Point-to-point — two nodes sharing one pair</a:t>
+              <a:t>Especially relevant on shared media such as 10BASE-T1S PLCA</a:t>
+            </a:r>
+          </a:p>
+          <a:p>
+            <a:pPr/>
+            <a:r>
+              <a:rPr sz="1800"/>
+              <a:t>Temperature drift of crystals → rate changes slowly over minutes/hours</a:t>
+            </a:r>
+          </a:p>
+          <a:p>
+            <a:pPr/>
+            <a:r>
+              <a:rPr sz="1800"/>
+              <a:t>Servo dynamics:</a:t>
             </a:r>
           </a:p>
           <a:p>
             <a:pPr lvl="1"/>
             <a:r>
               <a:rPr sz="1600"/>
-              <a:t>Multidrop — many nodes on one shared segment (up to 8+ specified)</a:t>
-            </a:r>
-          </a:p>
-          <a:p>
-            <a:pPr/>
-            <a:r>
-              <a:rPr sz="1800"/>
-              <a:t>Targets automotive in-vehicle networking and industrial sensor aggregation</a:t>
-            </a:r>
-          </a:p>
-          <a:p>
-            <a:pPr/>
-            <a:r>
-              <a:rPr sz="1800"/>
-              <a:t>Cable reach up to ~25 m on a shared segment, low EMI, low cost wiring</a:t>
-            </a:r>
-          </a:p>
-          <a:p>
-            <a:pPr/>
-            <a:r>
-              <a:rPr sz="1800"/>
-              <a:t>Media access arbitration via PLCA (Physical Layer Collision Avoidance):</a:t>
+              <a:t>Fast servo → tracks wander, amplifies measurement noise</a:t>
             </a:r>
           </a:p>
           <a:p>
             <a:pPr lvl="1"/>
             <a:r>
               <a:rPr sz="1600"/>
-              <a:t>Time-slotted, deterministic round-robin transmit opportunities</a:t>
-            </a:r>
-          </a:p>
-          <a:p>
-            <a:pPr lvl="1"/>
-            <a:r>
-              <a:rPr sz="1600"/>
-              <a:t>No CSMA/CD backoff → bounded worst-case access latency</a:t>
+              <a:t>Slow servo → quiet but sluggish against temperature transients</a:t>
             </a:r>
           </a:p>
         </p:txBody>
@@ -6067,7 +6608,7 @@
           <a:lstStyle/>
           <a:p>
             <a:r>
-              <a:t>10BASE-T1S — PTP Implications</a:t>
+              <a:t>10BASE-T1S — PHY Overview</a:t>
             </a:r>
           </a:p>
         </p:txBody>
@@ -6090,63 +6631,63 @@
             <a:pPr/>
             <a:r>
               <a:rPr sz="1800"/>
-              <a:t>PTP works over 10BASE-T1S the same way as over ordinary Ethernet</a:t>
+              <a:t>10 Mbit/s full-duplex-equivalent over a single unshielded twisted pair</a:t>
             </a:r>
           </a:p>
           <a:p>
             <a:pPr/>
             <a:r>
               <a:rPr sz="1800"/>
-              <a:t>Favourable properties:</a:t>
+              <a:t>Two physical topologies supported:</a:t>
             </a:r>
           </a:p>
           <a:p>
             <a:pPr lvl="1"/>
             <a:r>
               <a:rPr sz="1600"/>
-              <a:t>PLCA bounds media-access jitter — residence time is predictable</a:t>
+              <a:t>Point-to-point — two nodes sharing one pair</a:t>
             </a:r>
           </a:p>
           <a:p>
             <a:pPr lvl="1"/>
             <a:r>
               <a:rPr sz="1600"/>
-              <a:t>Physical medium is symmetric by construction (same pair, same direction)</a:t>
+              <a:t>Multidrop — many nodes on one shared segment (up to 8+ specified)</a:t>
             </a:r>
           </a:p>
           <a:p>
             <a:pPr/>
             <a:r>
               <a:rPr sz="1800"/>
-              <a:t>Challenges:</a:t>
+              <a:t>Targets automotive in-vehicle networking and industrial sensor aggregation</a:t>
+            </a:r>
+          </a:p>
+          <a:p>
+            <a:pPr/>
+            <a:r>
+              <a:rPr sz="1800"/>
+              <a:t>Cable reach up to ~25 m on a shared segment, low EMI, low cost wiring</a:t>
+            </a:r>
+          </a:p>
+          <a:p>
+            <a:pPr/>
+            <a:r>
+              <a:rPr sz="1800"/>
+              <a:t>Media access arbitration via PLCA (Physical Layer Collision Avoidance):</a:t>
             </a:r>
           </a:p>
           <a:p>
             <a:pPr lvl="1"/>
             <a:r>
               <a:rPr sz="1600"/>
-              <a:t>10 Mbit/s → one byte takes 800 ns, lower timestamp resolution than 1 GbE</a:t>
+              <a:t>Time-slotted, deterministic round-robin transmit opportunities</a:t>
             </a:r>
           </a:p>
           <a:p>
             <a:pPr lvl="1"/>
             <a:r>
               <a:rPr sz="1600"/>
-              <a:t>PLCA slot wait adds variable queuing before TX</a:t>
-            </a:r>
-          </a:p>
-          <a:p>
-            <a:pPr lvl="2"/>
-            <a:r>
-              <a:rPr sz="1400"/>
-              <a:t>→ hardware SFD timestamping removes this from the PTP measurement</a:t>
-            </a:r>
-          </a:p>
-          <a:p>
-            <a:pPr lvl="1"/>
-            <a:r>
-              <a:rPr sz="1600"/>
-              <a:t>MAC-PHY vendor implementations vary — must characterise the specific chip</a:t>
+              <a:t>No CSMA/CD backoff → bounded worst-case access latency</a:t>
             </a:r>
           </a:p>
         </p:txBody>
@@ -6185,7 +6726,7 @@
           <a:lstStyle/>
           <a:p>
             <a:r>
-              <a:t>LAN8651 — Device Overview</a:t>
+              <a:t>10BASE-T1S — PTP Implications</a:t>
             </a:r>
           </a:p>
         </p:txBody>
@@ -6208,63 +6749,63 @@
             <a:pPr/>
             <a:r>
               <a:rPr sz="1800"/>
-              <a:t>Microchip 10BASE-T1S MAC-PHY with SPI host interface</a:t>
+              <a:t>PTP works over 10BASE-T1S the same way as over ordinary Ethernet</a:t>
             </a:r>
           </a:p>
           <a:p>
             <a:pPr/>
             <a:r>
               <a:rPr sz="1800"/>
-              <a:t>Integrated MAC + PHY in a single package</a:t>
+              <a:t>Favourable properties:</a:t>
             </a:r>
           </a:p>
           <a:p>
             <a:pPr lvl="1"/>
             <a:r>
               <a:rPr sz="1600"/>
-              <a:t>MCU needs no on-chip Ethernet MAC</a:t>
+              <a:t>PLCA bounds media-access jitter — residence time is predictable</a:t>
             </a:r>
           </a:p>
           <a:p>
             <a:pPr lvl="1"/>
             <a:r>
               <a:rPr sz="1600"/>
-              <a:t>OPEN Alliance TC6 SPI protocol — data chunks over SPI</a:t>
+              <a:t>Physical medium is symmetric by construction (same pair, same direction)</a:t>
             </a:r>
           </a:p>
           <a:p>
             <a:pPr/>
             <a:r>
               <a:rPr sz="1800"/>
-              <a:t>Supports PLCA for multidrop topologies</a:t>
-            </a:r>
-          </a:p>
-          <a:p>
-            <a:pPr/>
-            <a:r>
-              <a:rPr sz="1800"/>
-              <a:t>Hardware timestamp engine latches TX-SFD and RX-SFD events</a:t>
+              <a:t>Challenges:</a:t>
             </a:r>
           </a:p>
           <a:p>
             <a:pPr lvl="1"/>
             <a:r>
               <a:rPr sz="1600"/>
-              <a:t>Raw material for PTP — accuracy depends on SFD latch point</a:t>
-            </a:r>
-          </a:p>
-          <a:p>
-            <a:pPr/>
-            <a:r>
-              <a:rPr sz="1800"/>
-              <a:t>Interrupt-driven host signalling via nIRQ</a:t>
-            </a:r>
-          </a:p>
-          <a:p>
-            <a:pPr/>
-            <a:r>
-              <a:rPr sz="1800"/>
-              <a:t>Pin-count and BOM optimised for automotive and industrial edge nodes</a:t>
+              <a:t>10 Mbit/s → one byte takes 800 ns, lower timestamp resolution than 1 GbE</a:t>
+            </a:r>
+          </a:p>
+          <a:p>
+            <a:pPr lvl="1"/>
+            <a:r>
+              <a:rPr sz="1600"/>
+              <a:t>PLCA slot wait adds variable queuing before TX</a:t>
+            </a:r>
+          </a:p>
+          <a:p>
+            <a:pPr lvl="2"/>
+            <a:r>
+              <a:rPr sz="1400"/>
+              <a:t>→ hardware SFD timestamping removes this from the PTP measurement</a:t>
+            </a:r>
+          </a:p>
+          <a:p>
+            <a:pPr lvl="1"/>
+            <a:r>
+              <a:rPr sz="1600"/>
+              <a:t>MAC-PHY vendor implementations vary — must characterise the specific chip</a:t>
             </a:r>
           </a:p>
         </p:txBody>
@@ -6303,589 +6844,86 @@
           <a:lstStyle/>
           <a:p>
             <a:r>
-              <a:t>LAN8651 — Timestamping Signal Path</a:t>
-            </a:r>
-          </a:p>
-        </p:txBody>
-      </p:sp>
-      <p:sp>
-        <p:nvSpPr>
-          <p:cNvPr id="3" name="Rounded Rectangle 2"/>
-          <p:cNvSpPr/>
-          <p:nvPr/>
-        </p:nvSpPr>
-        <p:spPr>
-          <a:xfrm>
-            <a:off x="320040" y="1920240"/>
-            <a:ext cx="1737360" cy="914400"/>
-          </a:xfrm>
-          <a:prstGeom prst="roundRect">
-            <a:avLst/>
-          </a:prstGeom>
-          <a:solidFill>
-            <a:srgbClr val="2CA02C"/>
-          </a:solidFill>
-          <a:ln>
-            <a:solidFill>
-              <a:srgbClr val="2CA02C"/>
-            </a:solidFill>
-          </a:ln>
-        </p:spPr>
-        <p:style>
-          <a:lnRef idx="1">
-            <a:schemeClr val="accent1"/>
-          </a:lnRef>
-          <a:fillRef idx="3">
-            <a:schemeClr val="accent1"/>
-          </a:fillRef>
-          <a:effectRef idx="2">
-            <a:schemeClr val="accent1"/>
-          </a:effectRef>
-          <a:fontRef idx="minor">
-            <a:schemeClr val="lt1"/>
-          </a:fontRef>
-        </p:style>
-        <p:txBody>
-          <a:bodyPr rtlCol="0" anchor="ctr" wrap="square"/>
-          <a:lstStyle/>
-          <a:p>
-            <a:pPr algn="l"/>
-            <a:r>
-              <a:rPr sz="1200" b="1" i="0">
-                <a:solidFill>
-                  <a:srgbClr val="FFFFFF"/>
-                </a:solidFill>
-              </a:rPr>
-              <a:t>T1S wire
-SFD bit</a:t>
-            </a:r>
-          </a:p>
-        </p:txBody>
-      </p:sp>
-      <p:sp>
-        <p:nvSpPr>
-          <p:cNvPr id="4" name="Rounded Rectangle 3"/>
-          <p:cNvSpPr/>
-          <p:nvPr/>
-        </p:nvSpPr>
-        <p:spPr>
-          <a:xfrm>
-            <a:off x="2286000" y="1920240"/>
-            <a:ext cx="1828800" cy="914400"/>
-          </a:xfrm>
-          <a:prstGeom prst="roundRect">
-            <a:avLst/>
-          </a:prstGeom>
-          <a:solidFill>
-            <a:srgbClr val="1F77B4"/>
-          </a:solidFill>
-          <a:ln>
-            <a:solidFill>
-              <a:srgbClr val="1F77B4"/>
-            </a:solidFill>
-          </a:ln>
-        </p:spPr>
-        <p:style>
-          <a:lnRef idx="1">
-            <a:schemeClr val="accent1"/>
-          </a:lnRef>
-          <a:fillRef idx="3">
-            <a:schemeClr val="accent1"/>
-          </a:fillRef>
-          <a:effectRef idx="2">
-            <a:schemeClr val="accent1"/>
-          </a:effectRef>
-          <a:fontRef idx="minor">
-            <a:schemeClr val="lt1"/>
-          </a:fontRef>
-        </p:style>
-        <p:txBody>
-          <a:bodyPr rtlCol="0" anchor="ctr" wrap="square"/>
-          <a:lstStyle/>
-          <a:p>
-            <a:pPr algn="l"/>
-            <a:r>
-              <a:rPr sz="1200" b="1" i="0">
-                <a:solidFill>
-                  <a:srgbClr val="FFFFFF"/>
-                </a:solidFill>
-              </a:rPr>
-              <a:t>LAN8651 PHY
-SFD detect</a:t>
-            </a:r>
-          </a:p>
-        </p:txBody>
-      </p:sp>
-      <p:sp>
-        <p:nvSpPr>
-          <p:cNvPr id="5" name="Rounded Rectangle 4"/>
-          <p:cNvSpPr/>
-          <p:nvPr/>
-        </p:nvSpPr>
-        <p:spPr>
-          <a:xfrm>
-            <a:off x="4343400" y="1920240"/>
-            <a:ext cx="1828800" cy="914400"/>
-          </a:xfrm>
-          <a:prstGeom prst="roundRect">
-            <a:avLst/>
-          </a:prstGeom>
-          <a:solidFill>
-            <a:srgbClr val="1F77B4"/>
-          </a:solidFill>
-          <a:ln>
-            <a:solidFill>
-              <a:srgbClr val="1F77B4"/>
-            </a:solidFill>
-          </a:ln>
-        </p:spPr>
-        <p:style>
-          <a:lnRef idx="1">
-            <a:schemeClr val="accent1"/>
-          </a:lnRef>
-          <a:fillRef idx="3">
-            <a:schemeClr val="accent1"/>
-          </a:fillRef>
-          <a:effectRef idx="2">
-            <a:schemeClr val="accent1"/>
-          </a:effectRef>
-          <a:fontRef idx="minor">
-            <a:schemeClr val="lt1"/>
-          </a:fontRef>
-        </p:style>
-        <p:txBody>
-          <a:bodyPr rtlCol="0" anchor="ctr" wrap="square"/>
-          <a:lstStyle/>
-          <a:p>
-            <a:pPr algn="l"/>
-            <a:r>
-              <a:rPr sz="1200" b="1" i="0">
-                <a:solidFill>
-                  <a:srgbClr val="FFFFFF"/>
-                </a:solidFill>
-              </a:rPr>
-              <a:t>LAN8651 MAC
-timestamp latch</a:t>
-            </a:r>
-          </a:p>
-        </p:txBody>
-      </p:sp>
-      <p:sp>
-        <p:nvSpPr>
-          <p:cNvPr id="6" name="Rounded Rectangle 5"/>
-          <p:cNvSpPr/>
-          <p:nvPr/>
-        </p:nvSpPr>
-        <p:spPr>
-          <a:xfrm>
-            <a:off x="6400800" y="1920240"/>
-            <a:ext cx="1737360" cy="914400"/>
-          </a:xfrm>
-          <a:prstGeom prst="roundRect">
-            <a:avLst/>
-          </a:prstGeom>
-          <a:solidFill>
-            <a:srgbClr val="D62728"/>
-          </a:solidFill>
-          <a:ln>
-            <a:solidFill>
-              <a:srgbClr val="D62728"/>
-            </a:solidFill>
-          </a:ln>
-        </p:spPr>
-        <p:style>
-          <a:lnRef idx="1">
-            <a:schemeClr val="accent1"/>
-          </a:lnRef>
-          <a:fillRef idx="3">
-            <a:schemeClr val="accent1"/>
-          </a:fillRef>
-          <a:effectRef idx="2">
-            <a:schemeClr val="accent1"/>
-          </a:effectRef>
-          <a:fontRef idx="minor">
-            <a:schemeClr val="lt1"/>
-          </a:fontRef>
-        </p:style>
-        <p:txBody>
-          <a:bodyPr rtlCol="0" anchor="ctr" wrap="square"/>
-          <a:lstStyle/>
-          <a:p>
-            <a:pPr algn="l"/>
-            <a:r>
-              <a:rPr sz="1200" b="1" i="0">
-                <a:solidFill>
-                  <a:srgbClr val="FFFFFF"/>
-                </a:solidFill>
-              </a:rPr>
-              <a:t>nIRQ
-to MCU</a:t>
-            </a:r>
-          </a:p>
-        </p:txBody>
-      </p:sp>
-      <p:sp>
-        <p:nvSpPr>
-          <p:cNvPr id="7" name="Rounded Rectangle 6"/>
-          <p:cNvSpPr/>
-          <p:nvPr/>
-        </p:nvSpPr>
-        <p:spPr>
-          <a:xfrm>
-            <a:off x="8366760" y="1920240"/>
-            <a:ext cx="2011680" cy="914400"/>
-          </a:xfrm>
-          <a:prstGeom prst="roundRect">
-            <a:avLst/>
-          </a:prstGeom>
-          <a:solidFill>
-            <a:srgbClr val="0B2E4F"/>
-          </a:solidFill>
-          <a:ln>
-            <a:solidFill>
-              <a:srgbClr val="0B2E4F"/>
-            </a:solidFill>
-          </a:ln>
-        </p:spPr>
-        <p:style>
-          <a:lnRef idx="1">
-            <a:schemeClr val="accent1"/>
-          </a:lnRef>
-          <a:fillRef idx="3">
-            <a:schemeClr val="accent1"/>
-          </a:fillRef>
-          <a:effectRef idx="2">
-            <a:schemeClr val="accent1"/>
-          </a:effectRef>
-          <a:fontRef idx="minor">
-            <a:schemeClr val="lt1"/>
-          </a:fontRef>
-        </p:style>
-        <p:txBody>
-          <a:bodyPr rtlCol="0" anchor="ctr" wrap="square"/>
-          <a:lstStyle/>
-          <a:p>
-            <a:pPr algn="l"/>
-            <a:r>
-              <a:rPr sz="1200" b="1" i="0">
-                <a:solidFill>
-                  <a:srgbClr val="FFFFFF"/>
-                </a:solidFill>
-              </a:rPr>
-              <a:t>ISR: SW-TS +
-signal TC6</a:t>
-            </a:r>
-          </a:p>
-        </p:txBody>
-      </p:sp>
-      <p:sp>
-        <p:nvSpPr>
-          <p:cNvPr id="8" name="Rounded Rectangle 7"/>
-          <p:cNvSpPr/>
-          <p:nvPr/>
-        </p:nvSpPr>
-        <p:spPr>
-          <a:xfrm>
-            <a:off x="10607040" y="1920240"/>
-            <a:ext cx="1280160" cy="914400"/>
-          </a:xfrm>
-          <a:prstGeom prst="roundRect">
-            <a:avLst/>
-          </a:prstGeom>
-          <a:solidFill>
-            <a:srgbClr val="0B2E4F"/>
-          </a:solidFill>
-          <a:ln>
-            <a:solidFill>
-              <a:srgbClr val="0B2E4F"/>
-            </a:solidFill>
-          </a:ln>
-        </p:spPr>
-        <p:style>
-          <a:lnRef idx="1">
-            <a:schemeClr val="accent1"/>
-          </a:lnRef>
-          <a:fillRef idx="3">
-            <a:schemeClr val="accent1"/>
-          </a:fillRef>
-          <a:effectRef idx="2">
-            <a:schemeClr val="accent1"/>
-          </a:effectRef>
-          <a:fontRef idx="minor">
-            <a:schemeClr val="lt1"/>
-          </a:fontRef>
-        </p:style>
-        <p:txBody>
-          <a:bodyPr rtlCol="0" anchor="ctr" wrap="square"/>
-          <a:lstStyle/>
-          <a:p>
-            <a:pPr algn="l"/>
-            <a:r>
-              <a:rPr sz="1200" b="1" i="0">
-                <a:solidFill>
-                  <a:srgbClr val="FFFFFF"/>
-                </a:solidFill>
-              </a:rPr>
-              <a:t>SPI
-readout</a:t>
-            </a:r>
-          </a:p>
-        </p:txBody>
-      </p:sp>
-      <p:cxnSp>
-        <p:nvCxnSpPr>
-          <p:cNvPr id="9" name="Connector 8"/>
-          <p:cNvCxnSpPr/>
-          <p:nvPr/>
-        </p:nvCxnSpPr>
-        <p:spPr>
-          <a:xfrm>
-            <a:off x="2057400" y="2377440"/>
-            <a:ext cx="228600" cy="0"/>
-          </a:xfrm>
-          <a:prstGeom prst="bentConnector3">
-            <a:avLst/>
-          </a:prstGeom>
-          <a:ln w="25400">
-            <a:solidFill>
-              <a:srgbClr val="555555"/>
-            </a:solidFill>
-          </a:ln>
-        </p:spPr>
-        <p:style>
-          <a:lnRef idx="2">
-            <a:schemeClr val="accent1"/>
-          </a:lnRef>
-          <a:fillRef idx="0">
-            <a:schemeClr val="accent1"/>
-          </a:fillRef>
-          <a:effectRef idx="1">
-            <a:schemeClr val="accent1"/>
-          </a:effectRef>
-          <a:fontRef idx="minor">
-            <a:schemeClr val="tx1"/>
-          </a:fontRef>
-        </p:style>
-      </p:cxnSp>
-      <p:cxnSp>
-        <p:nvCxnSpPr>
-          <p:cNvPr id="10" name="Connector 9"/>
-          <p:cNvCxnSpPr/>
-          <p:nvPr/>
-        </p:nvCxnSpPr>
-        <p:spPr>
-          <a:xfrm>
-            <a:off x="4114800" y="2377440"/>
-            <a:ext cx="228600" cy="0"/>
-          </a:xfrm>
-          <a:prstGeom prst="bentConnector3">
-            <a:avLst/>
-          </a:prstGeom>
-          <a:ln w="25400">
-            <a:solidFill>
-              <a:srgbClr val="555555"/>
-            </a:solidFill>
-          </a:ln>
-        </p:spPr>
-        <p:style>
-          <a:lnRef idx="2">
-            <a:schemeClr val="accent1"/>
-          </a:lnRef>
-          <a:fillRef idx="0">
-            <a:schemeClr val="accent1"/>
-          </a:fillRef>
-          <a:effectRef idx="1">
-            <a:schemeClr val="accent1"/>
-          </a:effectRef>
-          <a:fontRef idx="minor">
-            <a:schemeClr val="tx1"/>
-          </a:fontRef>
-        </p:style>
-      </p:cxnSp>
-      <p:cxnSp>
-        <p:nvCxnSpPr>
-          <p:cNvPr id="11" name="Connector 10"/>
-          <p:cNvCxnSpPr/>
-          <p:nvPr/>
-        </p:nvCxnSpPr>
-        <p:spPr>
-          <a:xfrm>
-            <a:off x="6172200" y="2377440"/>
-            <a:ext cx="228600" cy="0"/>
-          </a:xfrm>
-          <a:prstGeom prst="bentConnector3">
-            <a:avLst/>
-          </a:prstGeom>
-          <a:ln w="25400">
-            <a:solidFill>
-              <a:srgbClr val="555555"/>
-            </a:solidFill>
-          </a:ln>
-        </p:spPr>
-        <p:style>
-          <a:lnRef idx="2">
-            <a:schemeClr val="accent1"/>
-          </a:lnRef>
-          <a:fillRef idx="0">
-            <a:schemeClr val="accent1"/>
-          </a:fillRef>
-          <a:effectRef idx="1">
-            <a:schemeClr val="accent1"/>
-          </a:effectRef>
-          <a:fontRef idx="minor">
-            <a:schemeClr val="tx1"/>
-          </a:fontRef>
-        </p:style>
-      </p:cxnSp>
-      <p:cxnSp>
-        <p:nvCxnSpPr>
-          <p:cNvPr id="12" name="Connector 11"/>
-          <p:cNvCxnSpPr/>
-          <p:nvPr/>
-        </p:nvCxnSpPr>
-        <p:spPr>
-          <a:xfrm>
-            <a:off x="8138160" y="2377440"/>
-            <a:ext cx="228600" cy="0"/>
-          </a:xfrm>
-          <a:prstGeom prst="bentConnector3">
-            <a:avLst/>
-          </a:prstGeom>
-          <a:ln w="25400">
-            <a:solidFill>
-              <a:srgbClr val="555555"/>
-            </a:solidFill>
-          </a:ln>
-        </p:spPr>
-        <p:style>
-          <a:lnRef idx="2">
-            <a:schemeClr val="accent1"/>
-          </a:lnRef>
-          <a:fillRef idx="0">
-            <a:schemeClr val="accent1"/>
-          </a:fillRef>
-          <a:effectRef idx="1">
-            <a:schemeClr val="accent1"/>
-          </a:effectRef>
-          <a:fontRef idx="minor">
-            <a:schemeClr val="tx1"/>
-          </a:fontRef>
-        </p:style>
-      </p:cxnSp>
-      <p:cxnSp>
-        <p:nvCxnSpPr>
-          <p:cNvPr id="13" name="Connector 12"/>
-          <p:cNvCxnSpPr/>
-          <p:nvPr/>
-        </p:nvCxnSpPr>
-        <p:spPr>
-          <a:xfrm>
-            <a:off x="10378440" y="2377440"/>
-            <a:ext cx="228600" cy="0"/>
-          </a:xfrm>
-          <a:prstGeom prst="bentConnector3">
-            <a:avLst/>
-          </a:prstGeom>
-          <a:ln w="25400">
-            <a:solidFill>
-              <a:srgbClr val="555555"/>
-            </a:solidFill>
-          </a:ln>
-        </p:spPr>
-        <p:style>
-          <a:lnRef idx="2">
-            <a:schemeClr val="accent1"/>
-          </a:lnRef>
-          <a:fillRef idx="0">
-            <a:schemeClr val="accent1"/>
-          </a:fillRef>
-          <a:effectRef idx="1">
-            <a:schemeClr val="accent1"/>
-          </a:effectRef>
-          <a:fontRef idx="minor">
-            <a:schemeClr val="tx1"/>
-          </a:fontRef>
-        </p:style>
-      </p:cxnSp>
-      <p:sp>
-        <p:nvSpPr>
-          <p:cNvPr id="14" name="TextBox 13"/>
-          <p:cNvSpPr txBox="1"/>
-          <p:nvPr/>
-        </p:nvSpPr>
-        <p:spPr>
-          <a:xfrm>
-            <a:off x="457200" y="3108960"/>
-            <a:ext cx="11247120" cy="3200400"/>
-          </a:xfrm>
-          <a:prstGeom prst="rect">
-            <a:avLst/>
-          </a:prstGeom>
-          <a:noFill/>
-        </p:spPr>
-        <p:txBody>
-          <a:bodyPr wrap="square">
-            <a:spAutoFit/>
-          </a:bodyPr>
-          <a:lstStyle/>
-          <a:p>
-            <a:r>
-              <a:rPr sz="1400">
-                <a:solidFill>
-                  <a:srgbClr val="0B2E4F"/>
-                </a:solidFill>
-              </a:rPr>
-              <a:t>• MAC latches the hardware timestamp on the SFD bit — that is the 'ground truth' moment.</a:t>
-            </a:r>
-          </a:p>
-          <a:p>
-            <a:r>
-              <a:rPr sz="1400">
-                <a:solidFill>
-                  <a:srgbClr val="0B2E4F"/>
-                </a:solidFill>
-              </a:rPr>
-              <a:t>• LAN8651 then asserts nIRQ to the MCU.</a:t>
-            </a:r>
-          </a:p>
-          <a:p>
-            <a:r>
-              <a:rPr sz="1400">
-                <a:solidFill>
-                  <a:srgbClr val="0B2E4F"/>
-                </a:solidFill>
-              </a:rPr>
-              <a:t>• In the nIRQ ISR the driver captures the internal SW timestamp (SYS_TIME tick) — pairs SFD with MCU time, semi-deterministic.</a:t>
-            </a:r>
-          </a:p>
-          <a:p>
-            <a:r>
-              <a:rPr sz="1400">
-                <a:solidFill>
-                  <a:srgbClr val="0B2E4F"/>
-                </a:solidFill>
-              </a:rPr>
-              <a:t>• The ISR then signals the TC6 driver layer, which later performs the SPI transfer that carries the frame and the HW timestamp to the host.</a:t>
-            </a:r>
-          </a:p>
-          <a:p>
-            <a:r>
-              <a:rPr sz="1400">
-                <a:solidFill>
-                  <a:srgbClr val="0B2E4F"/>
-                </a:solidFill>
-              </a:rPr>
-              <a:t>• RX bias: ~10 ms from SFD-on-wire to the RX-nIRQ assertion on the LAN8651 — compensated outside PTP (PTP_FOL_ANCHOR_OFFSET_NS).</a:t>
-            </a:r>
-          </a:p>
-          <a:p>
-            <a:r>
-              <a:rPr sz="1400">
-                <a:solidFill>
-                  <a:srgbClr val="0B2E4F"/>
-                </a:solidFill>
-              </a:rPr>
-              <a:t>• TX bias: ~800 µs from SFD-on-wire to TX-timestamp nIRQ — compensated via PTP_GM_ANCHOR_OFFSET_NS.</a:t>
+              <a:t>LAN8651 — Device Overview</a:t>
+            </a:r>
+          </a:p>
+        </p:txBody>
+      </p:sp>
+      <p:sp>
+        <p:nvSpPr>
+          <p:cNvPr id="3" name="Content Placeholder 2"/>
+          <p:cNvSpPr>
+            <a:spLocks noGrp="1"/>
+          </p:cNvSpPr>
+          <p:nvPr>
+            <p:ph idx="13" sz="quarter"/>
+          </p:nvPr>
+        </p:nvSpPr>
+        <p:spPr/>
+        <p:txBody>
+          <a:bodyPr/>
+          <a:lstStyle/>
+          <a:p>
+            <a:pPr/>
+            <a:r>
+              <a:rPr sz="1800"/>
+              <a:t>Microchip 10BASE-T1S MAC-PHY with SPI host interface</a:t>
+            </a:r>
+          </a:p>
+          <a:p>
+            <a:pPr/>
+            <a:r>
+              <a:rPr sz="1800"/>
+              <a:t>Integrated MAC + PHY in a single package</a:t>
+            </a:r>
+          </a:p>
+          <a:p>
+            <a:pPr lvl="1"/>
+            <a:r>
+              <a:rPr sz="1600"/>
+              <a:t>MCU needs no on-chip Ethernet MAC</a:t>
+            </a:r>
+          </a:p>
+          <a:p>
+            <a:pPr lvl="1"/>
+            <a:r>
+              <a:rPr sz="1600"/>
+              <a:t>OPEN Alliance TC6 SPI protocol — data chunks over SPI</a:t>
+            </a:r>
+          </a:p>
+          <a:p>
+            <a:pPr/>
+            <a:r>
+              <a:rPr sz="1800"/>
+              <a:t>Supports PLCA for multidrop topologies</a:t>
+            </a:r>
+          </a:p>
+          <a:p>
+            <a:pPr/>
+            <a:r>
+              <a:rPr sz="1800"/>
+              <a:t>Hardware timestamp engine latches TX-SFD and RX-SFD events</a:t>
+            </a:r>
+          </a:p>
+          <a:p>
+            <a:pPr lvl="1"/>
+            <a:r>
+              <a:rPr sz="1600"/>
+              <a:t>Raw material for PTP — accuracy depends on SFD latch point</a:t>
+            </a:r>
+          </a:p>
+          <a:p>
+            <a:pPr/>
+            <a:r>
+              <a:rPr sz="1800"/>
+              <a:t>Interrupt-driven host signalling via nIRQ</a:t>
+            </a:r>
+          </a:p>
+          <a:p>
+            <a:pPr/>
+            <a:r>
+              <a:rPr sz="1800"/>
+              <a:t>Pin-count and BOM optimised for automotive and industrial edge nodes</a:t>
             </a:r>
           </a:p>
         </p:txBody>
@@ -6924,86 +6962,589 @@
           <a:lstStyle/>
           <a:p>
             <a:r>
-              <a:t>LAN8651 — Calibrating the Biases</a:t>
-            </a:r>
-          </a:p>
-        </p:txBody>
-      </p:sp>
-      <p:sp>
-        <p:nvSpPr>
-          <p:cNvPr id="3" name="Content Placeholder 2"/>
-          <p:cNvSpPr>
-            <a:spLocks noGrp="1"/>
-          </p:cNvSpPr>
-          <p:nvPr>
-            <p:ph idx="13" sz="quarter"/>
-          </p:nvPr>
-        </p:nvSpPr>
-        <p:spPr/>
-        <p:txBody>
-          <a:bodyPr/>
-          <a:lstStyle/>
-          <a:p>
-            <a:pPr/>
-            <a:r>
-              <a:rPr sz="1800"/>
-              <a:t>Project design: ISR-captured anchor pair  (wall-clock_ns, TC0_tick)</a:t>
-            </a:r>
-          </a:p>
-          <a:p>
-            <a:pPr/>
-            <a:r>
-              <a:rPr sz="1800"/>
-              <a:t>Anchor offsets shift the wall-clock timestamp forward to the ISR moment:</a:t>
-            </a:r>
-          </a:p>
-          <a:p>
-            <a:pPr lvl="1"/>
-            <a:r>
-              <a:rPr sz="1600"/>
-              <a:t>PTP_GM_ANCHOR_OFFSET_NS  = 800 000 ns     (TX pipeline)</a:t>
-            </a:r>
-          </a:p>
-          <a:p>
-            <a:pPr lvl="1"/>
-            <a:r>
-              <a:rPr sz="1600"/>
-              <a:t>PTP_FOL_ANCHOR_OFFSET_NS = 10 000 000 ns  (RX pipeline)</a:t>
-            </a:r>
-          </a:p>
-          <a:p>
-            <a:pPr/>
-            <a:r>
-              <a:rPr sz="1800"/>
-              <a:t>Calibration is empirical:</a:t>
-            </a:r>
-          </a:p>
-          <a:p>
-            <a:pPr lvl="1"/>
-            <a:r>
-              <a:rPr sz="1600"/>
-              <a:t>Measure cross-board edge delta D with cyclic_fire_hw_test.py</a:t>
-            </a:r>
-          </a:p>
-          <a:p>
-            <a:pPr lvl="1"/>
-            <a:r>
-              <a:rPr sz="1600"/>
-              <a:t>new_offset = old_offset + D    (positive D means FOL lags GM)</a:t>
-            </a:r>
-          </a:p>
-          <a:p>
-            <a:pPr/>
-            <a:r>
-              <a:rPr sz="1800"/>
-              <a:t>Effect of the 10 ms compensation (commit deb2773):</a:t>
-            </a:r>
-          </a:p>
-          <a:p>
-            <a:pPr lvl="1"/>
-            <a:r>
-              <a:rPr sz="1600"/>
-              <a:t>Cross-board median delta:  +10 005 µs  →  +10 µs</a:t>
+              <a:t>LAN8651 — Timestamping Signal Path</a:t>
+            </a:r>
+          </a:p>
+        </p:txBody>
+      </p:sp>
+      <p:sp>
+        <p:nvSpPr>
+          <p:cNvPr id="3" name="Rounded Rectangle 2"/>
+          <p:cNvSpPr/>
+          <p:nvPr/>
+        </p:nvSpPr>
+        <p:spPr>
+          <a:xfrm>
+            <a:off x="320040" y="1920240"/>
+            <a:ext cx="1737360" cy="914400"/>
+          </a:xfrm>
+          <a:prstGeom prst="roundRect">
+            <a:avLst/>
+          </a:prstGeom>
+          <a:solidFill>
+            <a:srgbClr val="2CA02C"/>
+          </a:solidFill>
+          <a:ln>
+            <a:solidFill>
+              <a:srgbClr val="2CA02C"/>
+            </a:solidFill>
+          </a:ln>
+        </p:spPr>
+        <p:style>
+          <a:lnRef idx="1">
+            <a:schemeClr val="accent1"/>
+          </a:lnRef>
+          <a:fillRef idx="3">
+            <a:schemeClr val="accent1"/>
+          </a:fillRef>
+          <a:effectRef idx="2">
+            <a:schemeClr val="accent1"/>
+          </a:effectRef>
+          <a:fontRef idx="minor">
+            <a:schemeClr val="lt1"/>
+          </a:fontRef>
+        </p:style>
+        <p:txBody>
+          <a:bodyPr rtlCol="0" anchor="ctr" wrap="square"/>
+          <a:lstStyle/>
+          <a:p>
+            <a:pPr algn="l"/>
+            <a:r>
+              <a:rPr sz="1200" b="1" i="0">
+                <a:solidFill>
+                  <a:srgbClr val="FFFFFF"/>
+                </a:solidFill>
+              </a:rPr>
+              <a:t>T1S wire
+SFD bit</a:t>
+            </a:r>
+          </a:p>
+        </p:txBody>
+      </p:sp>
+      <p:sp>
+        <p:nvSpPr>
+          <p:cNvPr id="4" name="Rounded Rectangle 3"/>
+          <p:cNvSpPr/>
+          <p:nvPr/>
+        </p:nvSpPr>
+        <p:spPr>
+          <a:xfrm>
+            <a:off x="2286000" y="1920240"/>
+            <a:ext cx="1828800" cy="914400"/>
+          </a:xfrm>
+          <a:prstGeom prst="roundRect">
+            <a:avLst/>
+          </a:prstGeom>
+          <a:solidFill>
+            <a:srgbClr val="1F77B4"/>
+          </a:solidFill>
+          <a:ln>
+            <a:solidFill>
+              <a:srgbClr val="1F77B4"/>
+            </a:solidFill>
+          </a:ln>
+        </p:spPr>
+        <p:style>
+          <a:lnRef idx="1">
+            <a:schemeClr val="accent1"/>
+          </a:lnRef>
+          <a:fillRef idx="3">
+            <a:schemeClr val="accent1"/>
+          </a:fillRef>
+          <a:effectRef idx="2">
+            <a:schemeClr val="accent1"/>
+          </a:effectRef>
+          <a:fontRef idx="minor">
+            <a:schemeClr val="lt1"/>
+          </a:fontRef>
+        </p:style>
+        <p:txBody>
+          <a:bodyPr rtlCol="0" anchor="ctr" wrap="square"/>
+          <a:lstStyle/>
+          <a:p>
+            <a:pPr algn="l"/>
+            <a:r>
+              <a:rPr sz="1200" b="1" i="0">
+                <a:solidFill>
+                  <a:srgbClr val="FFFFFF"/>
+                </a:solidFill>
+              </a:rPr>
+              <a:t>LAN8651 PHY
+SFD detect</a:t>
+            </a:r>
+          </a:p>
+        </p:txBody>
+      </p:sp>
+      <p:sp>
+        <p:nvSpPr>
+          <p:cNvPr id="5" name="Rounded Rectangle 4"/>
+          <p:cNvSpPr/>
+          <p:nvPr/>
+        </p:nvSpPr>
+        <p:spPr>
+          <a:xfrm>
+            <a:off x="4343400" y="1920240"/>
+            <a:ext cx="1828800" cy="914400"/>
+          </a:xfrm>
+          <a:prstGeom prst="roundRect">
+            <a:avLst/>
+          </a:prstGeom>
+          <a:solidFill>
+            <a:srgbClr val="1F77B4"/>
+          </a:solidFill>
+          <a:ln>
+            <a:solidFill>
+              <a:srgbClr val="1F77B4"/>
+            </a:solidFill>
+          </a:ln>
+        </p:spPr>
+        <p:style>
+          <a:lnRef idx="1">
+            <a:schemeClr val="accent1"/>
+          </a:lnRef>
+          <a:fillRef idx="3">
+            <a:schemeClr val="accent1"/>
+          </a:fillRef>
+          <a:effectRef idx="2">
+            <a:schemeClr val="accent1"/>
+          </a:effectRef>
+          <a:fontRef idx="minor">
+            <a:schemeClr val="lt1"/>
+          </a:fontRef>
+        </p:style>
+        <p:txBody>
+          <a:bodyPr rtlCol="0" anchor="ctr" wrap="square"/>
+          <a:lstStyle/>
+          <a:p>
+            <a:pPr algn="l"/>
+            <a:r>
+              <a:rPr sz="1200" b="1" i="0">
+                <a:solidFill>
+                  <a:srgbClr val="FFFFFF"/>
+                </a:solidFill>
+              </a:rPr>
+              <a:t>LAN8651 MAC
+timestamp latch</a:t>
+            </a:r>
+          </a:p>
+        </p:txBody>
+      </p:sp>
+      <p:sp>
+        <p:nvSpPr>
+          <p:cNvPr id="6" name="Rounded Rectangle 5"/>
+          <p:cNvSpPr/>
+          <p:nvPr/>
+        </p:nvSpPr>
+        <p:spPr>
+          <a:xfrm>
+            <a:off x="6400800" y="1920240"/>
+            <a:ext cx="1737360" cy="914400"/>
+          </a:xfrm>
+          <a:prstGeom prst="roundRect">
+            <a:avLst/>
+          </a:prstGeom>
+          <a:solidFill>
+            <a:srgbClr val="D62728"/>
+          </a:solidFill>
+          <a:ln>
+            <a:solidFill>
+              <a:srgbClr val="D62728"/>
+            </a:solidFill>
+          </a:ln>
+        </p:spPr>
+        <p:style>
+          <a:lnRef idx="1">
+            <a:schemeClr val="accent1"/>
+          </a:lnRef>
+          <a:fillRef idx="3">
+            <a:schemeClr val="accent1"/>
+          </a:fillRef>
+          <a:effectRef idx="2">
+            <a:schemeClr val="accent1"/>
+          </a:effectRef>
+          <a:fontRef idx="minor">
+            <a:schemeClr val="lt1"/>
+          </a:fontRef>
+        </p:style>
+        <p:txBody>
+          <a:bodyPr rtlCol="0" anchor="ctr" wrap="square"/>
+          <a:lstStyle/>
+          <a:p>
+            <a:pPr algn="l"/>
+            <a:r>
+              <a:rPr sz="1200" b="1" i="0">
+                <a:solidFill>
+                  <a:srgbClr val="FFFFFF"/>
+                </a:solidFill>
+              </a:rPr>
+              <a:t>nIRQ
+to MCU</a:t>
+            </a:r>
+          </a:p>
+        </p:txBody>
+      </p:sp>
+      <p:sp>
+        <p:nvSpPr>
+          <p:cNvPr id="7" name="Rounded Rectangle 6"/>
+          <p:cNvSpPr/>
+          <p:nvPr/>
+        </p:nvSpPr>
+        <p:spPr>
+          <a:xfrm>
+            <a:off x="8366760" y="1920240"/>
+            <a:ext cx="2011680" cy="914400"/>
+          </a:xfrm>
+          <a:prstGeom prst="roundRect">
+            <a:avLst/>
+          </a:prstGeom>
+          <a:solidFill>
+            <a:srgbClr val="0B2E4F"/>
+          </a:solidFill>
+          <a:ln>
+            <a:solidFill>
+              <a:srgbClr val="0B2E4F"/>
+            </a:solidFill>
+          </a:ln>
+        </p:spPr>
+        <p:style>
+          <a:lnRef idx="1">
+            <a:schemeClr val="accent1"/>
+          </a:lnRef>
+          <a:fillRef idx="3">
+            <a:schemeClr val="accent1"/>
+          </a:fillRef>
+          <a:effectRef idx="2">
+            <a:schemeClr val="accent1"/>
+          </a:effectRef>
+          <a:fontRef idx="minor">
+            <a:schemeClr val="lt1"/>
+          </a:fontRef>
+        </p:style>
+        <p:txBody>
+          <a:bodyPr rtlCol="0" anchor="ctr" wrap="square"/>
+          <a:lstStyle/>
+          <a:p>
+            <a:pPr algn="l"/>
+            <a:r>
+              <a:rPr sz="1200" b="1" i="0">
+                <a:solidFill>
+                  <a:srgbClr val="FFFFFF"/>
+                </a:solidFill>
+              </a:rPr>
+              <a:t>ISR: SW-TS +
+signal TC6</a:t>
+            </a:r>
+          </a:p>
+        </p:txBody>
+      </p:sp>
+      <p:sp>
+        <p:nvSpPr>
+          <p:cNvPr id="8" name="Rounded Rectangle 7"/>
+          <p:cNvSpPr/>
+          <p:nvPr/>
+        </p:nvSpPr>
+        <p:spPr>
+          <a:xfrm>
+            <a:off x="10607040" y="1920240"/>
+            <a:ext cx="1280160" cy="914400"/>
+          </a:xfrm>
+          <a:prstGeom prst="roundRect">
+            <a:avLst/>
+          </a:prstGeom>
+          <a:solidFill>
+            <a:srgbClr val="0B2E4F"/>
+          </a:solidFill>
+          <a:ln>
+            <a:solidFill>
+              <a:srgbClr val="0B2E4F"/>
+            </a:solidFill>
+          </a:ln>
+        </p:spPr>
+        <p:style>
+          <a:lnRef idx="1">
+            <a:schemeClr val="accent1"/>
+          </a:lnRef>
+          <a:fillRef idx="3">
+            <a:schemeClr val="accent1"/>
+          </a:fillRef>
+          <a:effectRef idx="2">
+            <a:schemeClr val="accent1"/>
+          </a:effectRef>
+          <a:fontRef idx="minor">
+            <a:schemeClr val="lt1"/>
+          </a:fontRef>
+        </p:style>
+        <p:txBody>
+          <a:bodyPr rtlCol="0" anchor="ctr" wrap="square"/>
+          <a:lstStyle/>
+          <a:p>
+            <a:pPr algn="l"/>
+            <a:r>
+              <a:rPr sz="1200" b="1" i="0">
+                <a:solidFill>
+                  <a:srgbClr val="FFFFFF"/>
+                </a:solidFill>
+              </a:rPr>
+              <a:t>SPI
+readout</a:t>
+            </a:r>
+          </a:p>
+        </p:txBody>
+      </p:sp>
+      <p:cxnSp>
+        <p:nvCxnSpPr>
+          <p:cNvPr id="9" name="Connector 8"/>
+          <p:cNvCxnSpPr/>
+          <p:nvPr/>
+        </p:nvCxnSpPr>
+        <p:spPr>
+          <a:xfrm>
+            <a:off x="2057400" y="2377440"/>
+            <a:ext cx="228600" cy="0"/>
+          </a:xfrm>
+          <a:prstGeom prst="bentConnector3">
+            <a:avLst/>
+          </a:prstGeom>
+          <a:ln w="25400">
+            <a:solidFill>
+              <a:srgbClr val="555555"/>
+            </a:solidFill>
+          </a:ln>
+        </p:spPr>
+        <p:style>
+          <a:lnRef idx="2">
+            <a:schemeClr val="accent1"/>
+          </a:lnRef>
+          <a:fillRef idx="0">
+            <a:schemeClr val="accent1"/>
+          </a:fillRef>
+          <a:effectRef idx="1">
+            <a:schemeClr val="accent1"/>
+          </a:effectRef>
+          <a:fontRef idx="minor">
+            <a:schemeClr val="tx1"/>
+          </a:fontRef>
+        </p:style>
+      </p:cxnSp>
+      <p:cxnSp>
+        <p:nvCxnSpPr>
+          <p:cNvPr id="10" name="Connector 9"/>
+          <p:cNvCxnSpPr/>
+          <p:nvPr/>
+        </p:nvCxnSpPr>
+        <p:spPr>
+          <a:xfrm>
+            <a:off x="4114800" y="2377440"/>
+            <a:ext cx="228600" cy="0"/>
+          </a:xfrm>
+          <a:prstGeom prst="bentConnector3">
+            <a:avLst/>
+          </a:prstGeom>
+          <a:ln w="25400">
+            <a:solidFill>
+              <a:srgbClr val="555555"/>
+            </a:solidFill>
+          </a:ln>
+        </p:spPr>
+        <p:style>
+          <a:lnRef idx="2">
+            <a:schemeClr val="accent1"/>
+          </a:lnRef>
+          <a:fillRef idx="0">
+            <a:schemeClr val="accent1"/>
+          </a:fillRef>
+          <a:effectRef idx="1">
+            <a:schemeClr val="accent1"/>
+          </a:effectRef>
+          <a:fontRef idx="minor">
+            <a:schemeClr val="tx1"/>
+          </a:fontRef>
+        </p:style>
+      </p:cxnSp>
+      <p:cxnSp>
+        <p:nvCxnSpPr>
+          <p:cNvPr id="11" name="Connector 10"/>
+          <p:cNvCxnSpPr/>
+          <p:nvPr/>
+        </p:nvCxnSpPr>
+        <p:spPr>
+          <a:xfrm>
+            <a:off x="6172200" y="2377440"/>
+            <a:ext cx="228600" cy="0"/>
+          </a:xfrm>
+          <a:prstGeom prst="bentConnector3">
+            <a:avLst/>
+          </a:prstGeom>
+          <a:ln w="25400">
+            <a:solidFill>
+              <a:srgbClr val="555555"/>
+            </a:solidFill>
+          </a:ln>
+        </p:spPr>
+        <p:style>
+          <a:lnRef idx="2">
+            <a:schemeClr val="accent1"/>
+          </a:lnRef>
+          <a:fillRef idx="0">
+            <a:schemeClr val="accent1"/>
+          </a:fillRef>
+          <a:effectRef idx="1">
+            <a:schemeClr val="accent1"/>
+          </a:effectRef>
+          <a:fontRef idx="minor">
+            <a:schemeClr val="tx1"/>
+          </a:fontRef>
+        </p:style>
+      </p:cxnSp>
+      <p:cxnSp>
+        <p:nvCxnSpPr>
+          <p:cNvPr id="12" name="Connector 11"/>
+          <p:cNvCxnSpPr/>
+          <p:nvPr/>
+        </p:nvCxnSpPr>
+        <p:spPr>
+          <a:xfrm>
+            <a:off x="8138160" y="2377440"/>
+            <a:ext cx="228600" cy="0"/>
+          </a:xfrm>
+          <a:prstGeom prst="bentConnector3">
+            <a:avLst/>
+          </a:prstGeom>
+          <a:ln w="25400">
+            <a:solidFill>
+              <a:srgbClr val="555555"/>
+            </a:solidFill>
+          </a:ln>
+        </p:spPr>
+        <p:style>
+          <a:lnRef idx="2">
+            <a:schemeClr val="accent1"/>
+          </a:lnRef>
+          <a:fillRef idx="0">
+            <a:schemeClr val="accent1"/>
+          </a:fillRef>
+          <a:effectRef idx="1">
+            <a:schemeClr val="accent1"/>
+          </a:effectRef>
+          <a:fontRef idx="minor">
+            <a:schemeClr val="tx1"/>
+          </a:fontRef>
+        </p:style>
+      </p:cxnSp>
+      <p:cxnSp>
+        <p:nvCxnSpPr>
+          <p:cNvPr id="13" name="Connector 12"/>
+          <p:cNvCxnSpPr/>
+          <p:nvPr/>
+        </p:nvCxnSpPr>
+        <p:spPr>
+          <a:xfrm>
+            <a:off x="10378440" y="2377440"/>
+            <a:ext cx="228600" cy="0"/>
+          </a:xfrm>
+          <a:prstGeom prst="bentConnector3">
+            <a:avLst/>
+          </a:prstGeom>
+          <a:ln w="25400">
+            <a:solidFill>
+              <a:srgbClr val="555555"/>
+            </a:solidFill>
+          </a:ln>
+        </p:spPr>
+        <p:style>
+          <a:lnRef idx="2">
+            <a:schemeClr val="accent1"/>
+          </a:lnRef>
+          <a:fillRef idx="0">
+            <a:schemeClr val="accent1"/>
+          </a:fillRef>
+          <a:effectRef idx="1">
+            <a:schemeClr val="accent1"/>
+          </a:effectRef>
+          <a:fontRef idx="minor">
+            <a:schemeClr val="tx1"/>
+          </a:fontRef>
+        </p:style>
+      </p:cxnSp>
+      <p:sp>
+        <p:nvSpPr>
+          <p:cNvPr id="14" name="TextBox 13"/>
+          <p:cNvSpPr txBox="1"/>
+          <p:nvPr/>
+        </p:nvSpPr>
+        <p:spPr>
+          <a:xfrm>
+            <a:off x="457200" y="3108960"/>
+            <a:ext cx="11247120" cy="3200400"/>
+          </a:xfrm>
+          <a:prstGeom prst="rect">
+            <a:avLst/>
+          </a:prstGeom>
+          <a:noFill/>
+        </p:spPr>
+        <p:txBody>
+          <a:bodyPr wrap="square">
+            <a:spAutoFit/>
+          </a:bodyPr>
+          <a:lstStyle/>
+          <a:p>
+            <a:r>
+              <a:rPr sz="1400">
+                <a:solidFill>
+                  <a:srgbClr val="0B2E4F"/>
+                </a:solidFill>
+              </a:rPr>
+              <a:t>• MAC latches the hardware timestamp on the SFD bit — that is the 'ground truth' moment.</a:t>
+            </a:r>
+          </a:p>
+          <a:p>
+            <a:r>
+              <a:rPr sz="1400">
+                <a:solidFill>
+                  <a:srgbClr val="0B2E4F"/>
+                </a:solidFill>
+              </a:rPr>
+              <a:t>• LAN8651 then asserts nIRQ to the MCU.</a:t>
+            </a:r>
+          </a:p>
+          <a:p>
+            <a:r>
+              <a:rPr sz="1400">
+                <a:solidFill>
+                  <a:srgbClr val="0B2E4F"/>
+                </a:solidFill>
+              </a:rPr>
+              <a:t>• In the nIRQ ISR the driver captures the internal SW timestamp (SYS_TIME tick) — pairs SFD with MCU time, semi-deterministic.</a:t>
+            </a:r>
+          </a:p>
+          <a:p>
+            <a:r>
+              <a:rPr sz="1400">
+                <a:solidFill>
+                  <a:srgbClr val="0B2E4F"/>
+                </a:solidFill>
+              </a:rPr>
+              <a:t>• The ISR then signals the TC6 driver layer, which later performs the SPI transfer that carries the frame and the HW timestamp to the host.</a:t>
+            </a:r>
+          </a:p>
+          <a:p>
+            <a:r>
+              <a:rPr sz="1400">
+                <a:solidFill>
+                  <a:srgbClr val="0B2E4F"/>
+                </a:solidFill>
+              </a:rPr>
+              <a:t>• RX bias: ~10 ms from SFD-on-wire to the RX-nIRQ assertion on the LAN8651 — compensated outside PTP (PTP_FOL_ANCHOR_OFFSET_NS).</a:t>
+            </a:r>
+          </a:p>
+          <a:p>
+            <a:r>
+              <a:rPr sz="1400">
+                <a:solidFill>
+                  <a:srgbClr val="0B2E4F"/>
+                </a:solidFill>
+              </a:rPr>
+              <a:t>• TX bias: ~800 µs from SFD-on-wire to TX-timestamp nIRQ — compensated via PTP_GM_ANCHOR_OFFSET_NS.</a:t>
             </a:r>
           </a:p>
         </p:txBody>
@@ -8398,361 +8939,86 @@
           <a:lstStyle/>
           <a:p>
             <a:r>
-              <a:t>Project Integration — Firmware Map</a:t>
-            </a:r>
-          </a:p>
-        </p:txBody>
-      </p:sp>
-      <p:sp>
-        <p:nvSpPr>
-          <p:cNvPr id="3" name="Rounded Rectangle 2"/>
-          <p:cNvSpPr/>
-          <p:nvPr/>
-        </p:nvSpPr>
-        <p:spPr>
-          <a:xfrm>
-            <a:off x="548640" y="1554480"/>
-            <a:ext cx="3474720" cy="1051560"/>
-          </a:xfrm>
-          <a:prstGeom prst="roundRect">
-            <a:avLst/>
-          </a:prstGeom>
-          <a:solidFill>
-            <a:srgbClr val="0B2E4F"/>
-          </a:solidFill>
-          <a:ln>
-            <a:solidFill>
-              <a:srgbClr val="0B2E4F"/>
-            </a:solidFill>
-          </a:ln>
-        </p:spPr>
-        <p:style>
-          <a:lnRef idx="1">
-            <a:schemeClr val="accent1"/>
-          </a:lnRef>
-          <a:fillRef idx="3">
-            <a:schemeClr val="accent1"/>
-          </a:fillRef>
-          <a:effectRef idx="2">
-            <a:schemeClr val="accent1"/>
-          </a:effectRef>
-          <a:fontRef idx="minor">
-            <a:schemeClr val="lt1"/>
-          </a:fontRef>
-        </p:style>
-        <p:txBody>
-          <a:bodyPr rtlCol="0" anchor="ctr" wrap="square"/>
-          <a:lstStyle/>
-          <a:p>
-            <a:pPr algn="l"/>
-            <a:r>
-              <a:rPr sz="1300" b="1" i="0">
-                <a:solidFill>
-                  <a:srgbClr val="FFFFFF"/>
-                </a:solidFill>
-              </a:rPr>
-              <a:t>ptp_gm_task.c
-Grandmaster state machine</a:t>
-            </a:r>
-          </a:p>
-        </p:txBody>
-      </p:sp>
-      <p:sp>
-        <p:nvSpPr>
-          <p:cNvPr id="4" name="Rounded Rectangle 3"/>
-          <p:cNvSpPr/>
-          <p:nvPr/>
-        </p:nvSpPr>
-        <p:spPr>
-          <a:xfrm>
-            <a:off x="4297680" y="1554480"/>
-            <a:ext cx="3474720" cy="1051560"/>
-          </a:xfrm>
-          <a:prstGeom prst="roundRect">
-            <a:avLst/>
-          </a:prstGeom>
-          <a:solidFill>
-            <a:srgbClr val="0B2E4F"/>
-          </a:solidFill>
-          <a:ln>
-            <a:solidFill>
-              <a:srgbClr val="0B2E4F"/>
-            </a:solidFill>
-          </a:ln>
-        </p:spPr>
-        <p:style>
-          <a:lnRef idx="1">
-            <a:schemeClr val="accent1"/>
-          </a:lnRef>
-          <a:fillRef idx="3">
-            <a:schemeClr val="accent1"/>
-          </a:fillRef>
-          <a:effectRef idx="2">
-            <a:schemeClr val="accent1"/>
-          </a:effectRef>
-          <a:fontRef idx="minor">
-            <a:schemeClr val="lt1"/>
-          </a:fontRef>
-        </p:style>
-        <p:txBody>
-          <a:bodyPr rtlCol="0" anchor="ctr" wrap="square"/>
-          <a:lstStyle/>
-          <a:p>
-            <a:pPr algn="l"/>
-            <a:r>
-              <a:rPr sz="1300" b="1" i="0">
-                <a:solidFill>
-                  <a:srgbClr val="FFFFFF"/>
-                </a:solidFill>
-              </a:rPr>
-              <a:t>ptp_fol_task.c
-Follower PI servo</a:t>
-            </a:r>
-          </a:p>
-        </p:txBody>
-      </p:sp>
-      <p:sp>
-        <p:nvSpPr>
-          <p:cNvPr id="5" name="Rounded Rectangle 4"/>
-          <p:cNvSpPr/>
-          <p:nvPr/>
-        </p:nvSpPr>
-        <p:spPr>
-          <a:xfrm>
-            <a:off x="7863840" y="1554480"/>
-            <a:ext cx="3474720" cy="1051560"/>
-          </a:xfrm>
-          <a:prstGeom prst="roundRect">
-            <a:avLst/>
-          </a:prstGeom>
-          <a:solidFill>
-            <a:srgbClr val="0B2E4F"/>
-          </a:solidFill>
-          <a:ln>
-            <a:solidFill>
-              <a:srgbClr val="0B2E4F"/>
-            </a:solidFill>
-          </a:ln>
-        </p:spPr>
-        <p:style>
-          <a:lnRef idx="1">
-            <a:schemeClr val="accent1"/>
-          </a:lnRef>
-          <a:fillRef idx="3">
-            <a:schemeClr val="accent1"/>
-          </a:fillRef>
-          <a:effectRef idx="2">
-            <a:schemeClr val="accent1"/>
-          </a:effectRef>
-          <a:fontRef idx="minor">
-            <a:schemeClr val="lt1"/>
-          </a:fontRef>
-        </p:style>
-        <p:txBody>
-          <a:bodyPr rtlCol="0" anchor="ctr" wrap="square"/>
-          <a:lstStyle/>
-          <a:p>
-            <a:pPr algn="l"/>
-            <a:r>
-              <a:rPr sz="1300" b="1" i="0">
-                <a:solidFill>
-                  <a:srgbClr val="FFFFFF"/>
-                </a:solidFill>
-              </a:rPr>
-              <a:t>ptp_clock.c
-Nanosecond software clock</a:t>
-            </a:r>
-          </a:p>
-        </p:txBody>
-      </p:sp>
-      <p:sp>
-        <p:nvSpPr>
-          <p:cNvPr id="6" name="Rounded Rectangle 5"/>
-          <p:cNvSpPr/>
-          <p:nvPr/>
-        </p:nvSpPr>
-        <p:spPr>
-          <a:xfrm>
-            <a:off x="548640" y="2743200"/>
-            <a:ext cx="10789920" cy="868680"/>
-          </a:xfrm>
-          <a:prstGeom prst="roundRect">
-            <a:avLst/>
-          </a:prstGeom>
-          <a:solidFill>
-            <a:srgbClr val="1F77B4"/>
-          </a:solidFill>
-          <a:ln>
-            <a:solidFill>
-              <a:srgbClr val="1F77B4"/>
-            </a:solidFill>
-          </a:ln>
-        </p:spPr>
-        <p:style>
-          <a:lnRef idx="1">
-            <a:schemeClr val="accent1"/>
-          </a:lnRef>
-          <a:fillRef idx="3">
-            <a:schemeClr val="accent1"/>
-          </a:fillRef>
-          <a:effectRef idx="2">
-            <a:schemeClr val="accent1"/>
-          </a:effectRef>
-          <a:fontRef idx="minor">
-            <a:schemeClr val="lt1"/>
-          </a:fontRef>
-        </p:style>
-        <p:txBody>
-          <a:bodyPr rtlCol="0" anchor="ctr" wrap="square"/>
-          <a:lstStyle/>
-          <a:p>
-            <a:pPr algn="l"/>
-            <a:r>
-              <a:rPr sz="1300" b="1" i="0">
-                <a:solidFill>
-                  <a:srgbClr val="FFFFFF"/>
-                </a:solidFill>
-              </a:rPr>
-              <a:t>drv_lan865x_api.c — SPI MAC-PHY driver + TX/RX timestamp capture</a:t>
-            </a:r>
-          </a:p>
-        </p:txBody>
-      </p:sp>
-      <p:sp>
-        <p:nvSpPr>
-          <p:cNvPr id="7" name="Rounded Rectangle 6"/>
-          <p:cNvSpPr/>
-          <p:nvPr/>
-        </p:nvSpPr>
-        <p:spPr>
-          <a:xfrm>
-            <a:off x="548640" y="3749039"/>
-            <a:ext cx="10789920" cy="822960"/>
-          </a:xfrm>
-          <a:prstGeom prst="roundRect">
-            <a:avLst/>
-          </a:prstGeom>
-          <a:solidFill>
-            <a:srgbClr val="555555"/>
-          </a:solidFill>
-          <a:ln>
-            <a:solidFill>
-              <a:srgbClr val="555555"/>
-            </a:solidFill>
-          </a:ln>
-        </p:spPr>
-        <p:style>
-          <a:lnRef idx="1">
-            <a:schemeClr val="accent1"/>
-          </a:lnRef>
-          <a:fillRef idx="3">
-            <a:schemeClr val="accent1"/>
-          </a:fillRef>
-          <a:effectRef idx="2">
-            <a:schemeClr val="accent1"/>
-          </a:effectRef>
-          <a:fontRef idx="minor">
-            <a:schemeClr val="lt1"/>
-          </a:fontRef>
-        </p:style>
-        <p:txBody>
-          <a:bodyPr rtlCol="0" anchor="ctr" wrap="square"/>
-          <a:lstStyle/>
-          <a:p>
-            <a:pPr algn="l"/>
-            <a:r>
-              <a:rPr sz="1200" b="1" i="0">
-                <a:solidFill>
-                  <a:srgbClr val="FFFFFF"/>
-                </a:solidFill>
-              </a:rPr>
-              <a:t>Harmony 3 TCP/IP stack  (net_10base_t1s v1.4.3)</a:t>
-            </a:r>
-          </a:p>
-        </p:txBody>
-      </p:sp>
-      <p:sp>
-        <p:nvSpPr>
-          <p:cNvPr id="8" name="Rounded Rectangle 7"/>
-          <p:cNvSpPr/>
-          <p:nvPr/>
-        </p:nvSpPr>
-        <p:spPr>
-          <a:xfrm>
-            <a:off x="548640" y="4663440"/>
-            <a:ext cx="10789920" cy="822960"/>
-          </a:xfrm>
-          <a:prstGeom prst="roundRect">
-            <a:avLst/>
-          </a:prstGeom>
-          <a:solidFill>
-            <a:srgbClr val="555555"/>
-          </a:solidFill>
-          <a:ln>
-            <a:solidFill>
-              <a:srgbClr val="555555"/>
-            </a:solidFill>
-          </a:ln>
-        </p:spPr>
-        <p:style>
-          <a:lnRef idx="1">
-            <a:schemeClr val="accent1"/>
-          </a:lnRef>
-          <a:fillRef idx="3">
-            <a:schemeClr val="accent1"/>
-          </a:fillRef>
-          <a:effectRef idx="2">
-            <a:schemeClr val="accent1"/>
-          </a:effectRef>
-          <a:fontRef idx="minor">
-            <a:schemeClr val="lt1"/>
-          </a:fontRef>
-        </p:style>
-        <p:txBody>
-          <a:bodyPr rtlCol="0" anchor="ctr" wrap="square"/>
-          <a:lstStyle/>
-          <a:p>
-            <a:pPr algn="l"/>
-            <a:r>
-              <a:rPr sz="1200" b="1" i="0">
-                <a:solidFill>
-                  <a:srgbClr val="FFFFFF"/>
-                </a:solidFill>
-              </a:rPr>
-              <a:t>ATSAME54P20A — TC0 @ 60 MHz timestamp counter, SPI master</a:t>
-            </a:r>
-          </a:p>
-        </p:txBody>
-      </p:sp>
-      <p:sp>
-        <p:nvSpPr>
-          <p:cNvPr id="9" name="TextBox 8"/>
-          <p:cNvSpPr txBox="1"/>
-          <p:nvPr/>
-        </p:nvSpPr>
-        <p:spPr>
-          <a:xfrm>
-            <a:off x="548640" y="5577840"/>
-            <a:ext cx="10972800" cy="274320"/>
-          </a:xfrm>
-          <a:prstGeom prst="rect">
-            <a:avLst/>
-          </a:prstGeom>
-          <a:noFill/>
-        </p:spPr>
-        <p:txBody>
-          <a:bodyPr wrap="none">
-            <a:spAutoFit/>
-          </a:bodyPr>
-          <a:lstStyle/>
-          <a:p>
-            <a:r>
-              <a:rPr sz="1400" b="0" i="1">
-                <a:solidFill>
-                  <a:srgbClr val="555555"/>
-                </a:solidFill>
-              </a:rPr>
-              <a:t>Grandmaster and Follower run identical firmware — role is configuration, not code.</a:t>
+              <a:t>LAN8651 — Calibrating the Biases</a:t>
+            </a:r>
+          </a:p>
+        </p:txBody>
+      </p:sp>
+      <p:sp>
+        <p:nvSpPr>
+          <p:cNvPr id="3" name="Content Placeholder 2"/>
+          <p:cNvSpPr>
+            <a:spLocks noGrp="1"/>
+          </p:cNvSpPr>
+          <p:nvPr>
+            <p:ph idx="13" sz="quarter"/>
+          </p:nvPr>
+        </p:nvSpPr>
+        <p:spPr/>
+        <p:txBody>
+          <a:bodyPr/>
+          <a:lstStyle/>
+          <a:p>
+            <a:pPr/>
+            <a:r>
+              <a:rPr sz="1800"/>
+              <a:t>Project design: ISR-captured anchor pair  (wall-clock_ns, TC0_tick)</a:t>
+            </a:r>
+          </a:p>
+          <a:p>
+            <a:pPr/>
+            <a:r>
+              <a:rPr sz="1800"/>
+              <a:t>Anchor offsets shift the wall-clock timestamp forward to the ISR moment:</a:t>
+            </a:r>
+          </a:p>
+          <a:p>
+            <a:pPr lvl="1"/>
+            <a:r>
+              <a:rPr sz="1600"/>
+              <a:t>PTP_GM_ANCHOR_OFFSET_NS  = 800 000 ns     (TX pipeline)</a:t>
+            </a:r>
+          </a:p>
+          <a:p>
+            <a:pPr lvl="1"/>
+            <a:r>
+              <a:rPr sz="1600"/>
+              <a:t>PTP_FOL_ANCHOR_OFFSET_NS = 10 000 000 ns  (RX pipeline)</a:t>
+            </a:r>
+          </a:p>
+          <a:p>
+            <a:pPr/>
+            <a:r>
+              <a:rPr sz="1800"/>
+              <a:t>Calibration is empirical:</a:t>
+            </a:r>
+          </a:p>
+          <a:p>
+            <a:pPr lvl="1"/>
+            <a:r>
+              <a:rPr sz="1600"/>
+              <a:t>Measure cross-board edge delta D with cyclic_fire_hw_test.py</a:t>
+            </a:r>
+          </a:p>
+          <a:p>
+            <a:pPr lvl="1"/>
+            <a:r>
+              <a:rPr sz="1600"/>
+              <a:t>new_offset = old_offset + D    (positive D means FOL lags GM)</a:t>
+            </a:r>
+          </a:p>
+          <a:p>
+            <a:pPr/>
+            <a:r>
+              <a:rPr sz="1800"/>
+              <a:t>Effect of the 10 ms compensation (commit deb2773):</a:t>
+            </a:r>
+          </a:p>
+          <a:p>
+            <a:pPr lvl="1"/>
+            <a:r>
+              <a:rPr sz="1600"/>
+              <a:t>Cross-board median delta:  +10 005 µs  →  +10 µs</a:t>
             </a:r>
           </a:p>
         </p:txBody>
@@ -8791,93 +9057,361 @@
           <a:lstStyle/>
           <a:p>
             <a:r>
-              <a:t>Cyclic Fire — What Is It?</a:t>
-            </a:r>
-          </a:p>
-        </p:txBody>
-      </p:sp>
-      <p:sp>
-        <p:nvSpPr>
-          <p:cNvPr id="3" name="Content Placeholder 2"/>
-          <p:cNvSpPr>
-            <a:spLocks noGrp="1"/>
-          </p:cNvSpPr>
-          <p:nvPr>
-            <p:ph idx="13" sz="quarter"/>
-          </p:nvPr>
-        </p:nvSpPr>
-        <p:spPr/>
-        <p:txBody>
-          <a:bodyPr/>
-          <a:lstStyle/>
-          <a:p>
-            <a:pPr/>
-            <a:r>
-              <a:rPr sz="1800"/>
-              <a:t>A firmware module that fires a periodic GPIO pulse train on PD10</a:t>
-            </a:r>
-          </a:p>
-          <a:p>
-            <a:pPr lvl="1"/>
-            <a:r>
-              <a:rPr sz="1600"/>
-              <a:t>Pin sits on the EXT1 Xplained-Pro header — directly scope-clippable</a:t>
-            </a:r>
-          </a:p>
-          <a:p>
-            <a:pPr/>
-            <a:r>
-              <a:rPr sz="1800"/>
-              <a:t>Each pulse edge is scheduled against the PTP software clock, not a local timer</a:t>
-            </a:r>
-          </a:p>
-          <a:p>
-            <a:pPr lvl="1"/>
-            <a:r>
-              <a:rPr sz="1600"/>
-              <a:t>Implemented with tfuture — single-shot timer re-armed from its own callback</a:t>
-            </a:r>
-          </a:p>
-          <a:p>
-            <a:pPr/>
-            <a:r>
-              <a:rPr sz="1800"/>
-              <a:t>The scheduling time is given in absolute PTP wall-clock nanoseconds</a:t>
-            </a:r>
-          </a:p>
-          <a:p>
-            <a:pPr lvl="1"/>
-            <a:r>
-              <a:rPr sz="1600"/>
-              <a:t>cyclic_fire_start(period_us, phase_anchor_ns)</a:t>
-            </a:r>
-          </a:p>
-          <a:p>
-            <a:pPr lvl="1"/>
-            <a:r>
-              <a:rPr sz="1600"/>
-              <a:t>phase_anchor_ns = the PTP moment at which the very first edge should fire</a:t>
-            </a:r>
-          </a:p>
-          <a:p>
-            <a:pPr/>
-            <a:r>
-              <a:rPr sz="1800"/>
-              <a:t>Identical firmware, identical API call on both boards</a:t>
-            </a:r>
-          </a:p>
-          <a:p>
-            <a:pPr lvl="1"/>
-            <a:r>
-              <a:rPr sz="1600"/>
-              <a:t>→ a shared anchor_ns produces wire-level coincident edges across boards</a:t>
-            </a:r>
-          </a:p>
-          <a:p>
-            <a:pPr/>
-            <a:r>
-              <a:rPr sz="1800"/>
-              <a:t>A CPU-cheap, direct-from-wire way to observe whether two PTP clocks really agree</a:t>
+              <a:t>Project Integration — Firmware Map</a:t>
+            </a:r>
+          </a:p>
+        </p:txBody>
+      </p:sp>
+      <p:sp>
+        <p:nvSpPr>
+          <p:cNvPr id="3" name="Rounded Rectangle 2"/>
+          <p:cNvSpPr/>
+          <p:nvPr/>
+        </p:nvSpPr>
+        <p:spPr>
+          <a:xfrm>
+            <a:off x="548640" y="1554480"/>
+            <a:ext cx="3474720" cy="1051560"/>
+          </a:xfrm>
+          <a:prstGeom prst="roundRect">
+            <a:avLst/>
+          </a:prstGeom>
+          <a:solidFill>
+            <a:srgbClr val="0B2E4F"/>
+          </a:solidFill>
+          <a:ln>
+            <a:solidFill>
+              <a:srgbClr val="0B2E4F"/>
+            </a:solidFill>
+          </a:ln>
+        </p:spPr>
+        <p:style>
+          <a:lnRef idx="1">
+            <a:schemeClr val="accent1"/>
+          </a:lnRef>
+          <a:fillRef idx="3">
+            <a:schemeClr val="accent1"/>
+          </a:fillRef>
+          <a:effectRef idx="2">
+            <a:schemeClr val="accent1"/>
+          </a:effectRef>
+          <a:fontRef idx="minor">
+            <a:schemeClr val="lt1"/>
+          </a:fontRef>
+        </p:style>
+        <p:txBody>
+          <a:bodyPr rtlCol="0" anchor="ctr" wrap="square"/>
+          <a:lstStyle/>
+          <a:p>
+            <a:pPr algn="l"/>
+            <a:r>
+              <a:rPr sz="1300" b="1" i="0">
+                <a:solidFill>
+                  <a:srgbClr val="FFFFFF"/>
+                </a:solidFill>
+              </a:rPr>
+              <a:t>ptp_gm_task.c
+Grandmaster state machine</a:t>
+            </a:r>
+          </a:p>
+        </p:txBody>
+      </p:sp>
+      <p:sp>
+        <p:nvSpPr>
+          <p:cNvPr id="4" name="Rounded Rectangle 3"/>
+          <p:cNvSpPr/>
+          <p:nvPr/>
+        </p:nvSpPr>
+        <p:spPr>
+          <a:xfrm>
+            <a:off x="4297680" y="1554480"/>
+            <a:ext cx="3474720" cy="1051560"/>
+          </a:xfrm>
+          <a:prstGeom prst="roundRect">
+            <a:avLst/>
+          </a:prstGeom>
+          <a:solidFill>
+            <a:srgbClr val="0B2E4F"/>
+          </a:solidFill>
+          <a:ln>
+            <a:solidFill>
+              <a:srgbClr val="0B2E4F"/>
+            </a:solidFill>
+          </a:ln>
+        </p:spPr>
+        <p:style>
+          <a:lnRef idx="1">
+            <a:schemeClr val="accent1"/>
+          </a:lnRef>
+          <a:fillRef idx="3">
+            <a:schemeClr val="accent1"/>
+          </a:fillRef>
+          <a:effectRef idx="2">
+            <a:schemeClr val="accent1"/>
+          </a:effectRef>
+          <a:fontRef idx="minor">
+            <a:schemeClr val="lt1"/>
+          </a:fontRef>
+        </p:style>
+        <p:txBody>
+          <a:bodyPr rtlCol="0" anchor="ctr" wrap="square"/>
+          <a:lstStyle/>
+          <a:p>
+            <a:pPr algn="l"/>
+            <a:r>
+              <a:rPr sz="1300" b="1" i="0">
+                <a:solidFill>
+                  <a:srgbClr val="FFFFFF"/>
+                </a:solidFill>
+              </a:rPr>
+              <a:t>ptp_fol_task.c
+Follower PI servo</a:t>
+            </a:r>
+          </a:p>
+        </p:txBody>
+      </p:sp>
+      <p:sp>
+        <p:nvSpPr>
+          <p:cNvPr id="5" name="Rounded Rectangle 4"/>
+          <p:cNvSpPr/>
+          <p:nvPr/>
+        </p:nvSpPr>
+        <p:spPr>
+          <a:xfrm>
+            <a:off x="7863840" y="1554480"/>
+            <a:ext cx="3474720" cy="1051560"/>
+          </a:xfrm>
+          <a:prstGeom prst="roundRect">
+            <a:avLst/>
+          </a:prstGeom>
+          <a:solidFill>
+            <a:srgbClr val="0B2E4F"/>
+          </a:solidFill>
+          <a:ln>
+            <a:solidFill>
+              <a:srgbClr val="0B2E4F"/>
+            </a:solidFill>
+          </a:ln>
+        </p:spPr>
+        <p:style>
+          <a:lnRef idx="1">
+            <a:schemeClr val="accent1"/>
+          </a:lnRef>
+          <a:fillRef idx="3">
+            <a:schemeClr val="accent1"/>
+          </a:fillRef>
+          <a:effectRef idx="2">
+            <a:schemeClr val="accent1"/>
+          </a:effectRef>
+          <a:fontRef idx="minor">
+            <a:schemeClr val="lt1"/>
+          </a:fontRef>
+        </p:style>
+        <p:txBody>
+          <a:bodyPr rtlCol="0" anchor="ctr" wrap="square"/>
+          <a:lstStyle/>
+          <a:p>
+            <a:pPr algn="l"/>
+            <a:r>
+              <a:rPr sz="1300" b="1" i="0">
+                <a:solidFill>
+                  <a:srgbClr val="FFFFFF"/>
+                </a:solidFill>
+              </a:rPr>
+              <a:t>ptp_clock.c
+Nanosecond software clock</a:t>
+            </a:r>
+          </a:p>
+        </p:txBody>
+      </p:sp>
+      <p:sp>
+        <p:nvSpPr>
+          <p:cNvPr id="6" name="Rounded Rectangle 5"/>
+          <p:cNvSpPr/>
+          <p:nvPr/>
+        </p:nvSpPr>
+        <p:spPr>
+          <a:xfrm>
+            <a:off x="548640" y="2743200"/>
+            <a:ext cx="10789920" cy="868680"/>
+          </a:xfrm>
+          <a:prstGeom prst="roundRect">
+            <a:avLst/>
+          </a:prstGeom>
+          <a:solidFill>
+            <a:srgbClr val="1F77B4"/>
+          </a:solidFill>
+          <a:ln>
+            <a:solidFill>
+              <a:srgbClr val="1F77B4"/>
+            </a:solidFill>
+          </a:ln>
+        </p:spPr>
+        <p:style>
+          <a:lnRef idx="1">
+            <a:schemeClr val="accent1"/>
+          </a:lnRef>
+          <a:fillRef idx="3">
+            <a:schemeClr val="accent1"/>
+          </a:fillRef>
+          <a:effectRef idx="2">
+            <a:schemeClr val="accent1"/>
+          </a:effectRef>
+          <a:fontRef idx="minor">
+            <a:schemeClr val="lt1"/>
+          </a:fontRef>
+        </p:style>
+        <p:txBody>
+          <a:bodyPr rtlCol="0" anchor="ctr" wrap="square"/>
+          <a:lstStyle/>
+          <a:p>
+            <a:pPr algn="l"/>
+            <a:r>
+              <a:rPr sz="1300" b="1" i="0">
+                <a:solidFill>
+                  <a:srgbClr val="FFFFFF"/>
+                </a:solidFill>
+              </a:rPr>
+              <a:t>drv_lan865x_api.c — SPI MAC-PHY driver + TX/RX timestamp capture</a:t>
+            </a:r>
+          </a:p>
+        </p:txBody>
+      </p:sp>
+      <p:sp>
+        <p:nvSpPr>
+          <p:cNvPr id="7" name="Rounded Rectangle 6"/>
+          <p:cNvSpPr/>
+          <p:nvPr/>
+        </p:nvSpPr>
+        <p:spPr>
+          <a:xfrm>
+            <a:off x="548640" y="3749039"/>
+            <a:ext cx="10789920" cy="822960"/>
+          </a:xfrm>
+          <a:prstGeom prst="roundRect">
+            <a:avLst/>
+          </a:prstGeom>
+          <a:solidFill>
+            <a:srgbClr val="555555"/>
+          </a:solidFill>
+          <a:ln>
+            <a:solidFill>
+              <a:srgbClr val="555555"/>
+            </a:solidFill>
+          </a:ln>
+        </p:spPr>
+        <p:style>
+          <a:lnRef idx="1">
+            <a:schemeClr val="accent1"/>
+          </a:lnRef>
+          <a:fillRef idx="3">
+            <a:schemeClr val="accent1"/>
+          </a:fillRef>
+          <a:effectRef idx="2">
+            <a:schemeClr val="accent1"/>
+          </a:effectRef>
+          <a:fontRef idx="minor">
+            <a:schemeClr val="lt1"/>
+          </a:fontRef>
+        </p:style>
+        <p:txBody>
+          <a:bodyPr rtlCol="0" anchor="ctr" wrap="square"/>
+          <a:lstStyle/>
+          <a:p>
+            <a:pPr algn="l"/>
+            <a:r>
+              <a:rPr sz="1200" b="1" i="0">
+                <a:solidFill>
+                  <a:srgbClr val="FFFFFF"/>
+                </a:solidFill>
+              </a:rPr>
+              <a:t>Harmony 3 TCP/IP stack  (net_10base_t1s v1.4.3)</a:t>
+            </a:r>
+          </a:p>
+        </p:txBody>
+      </p:sp>
+      <p:sp>
+        <p:nvSpPr>
+          <p:cNvPr id="8" name="Rounded Rectangle 7"/>
+          <p:cNvSpPr/>
+          <p:nvPr/>
+        </p:nvSpPr>
+        <p:spPr>
+          <a:xfrm>
+            <a:off x="548640" y="4663440"/>
+            <a:ext cx="10789920" cy="822960"/>
+          </a:xfrm>
+          <a:prstGeom prst="roundRect">
+            <a:avLst/>
+          </a:prstGeom>
+          <a:solidFill>
+            <a:srgbClr val="555555"/>
+          </a:solidFill>
+          <a:ln>
+            <a:solidFill>
+              <a:srgbClr val="555555"/>
+            </a:solidFill>
+          </a:ln>
+        </p:spPr>
+        <p:style>
+          <a:lnRef idx="1">
+            <a:schemeClr val="accent1"/>
+          </a:lnRef>
+          <a:fillRef idx="3">
+            <a:schemeClr val="accent1"/>
+          </a:fillRef>
+          <a:effectRef idx="2">
+            <a:schemeClr val="accent1"/>
+          </a:effectRef>
+          <a:fontRef idx="minor">
+            <a:schemeClr val="lt1"/>
+          </a:fontRef>
+        </p:style>
+        <p:txBody>
+          <a:bodyPr rtlCol="0" anchor="ctr" wrap="square"/>
+          <a:lstStyle/>
+          <a:p>
+            <a:pPr algn="l"/>
+            <a:r>
+              <a:rPr sz="1200" b="1" i="0">
+                <a:solidFill>
+                  <a:srgbClr val="FFFFFF"/>
+                </a:solidFill>
+              </a:rPr>
+              <a:t>ATSAME54P20A — TC0 @ 60 MHz timestamp counter, SPI master</a:t>
+            </a:r>
+          </a:p>
+        </p:txBody>
+      </p:sp>
+      <p:sp>
+        <p:nvSpPr>
+          <p:cNvPr id="9" name="TextBox 8"/>
+          <p:cNvSpPr txBox="1"/>
+          <p:nvPr/>
+        </p:nvSpPr>
+        <p:spPr>
+          <a:xfrm>
+            <a:off x="548640" y="5577840"/>
+            <a:ext cx="10972800" cy="274320"/>
+          </a:xfrm>
+          <a:prstGeom prst="rect">
+            <a:avLst/>
+          </a:prstGeom>
+          <a:noFill/>
+        </p:spPr>
+        <p:txBody>
+          <a:bodyPr wrap="none">
+            <a:spAutoFit/>
+          </a:bodyPr>
+          <a:lstStyle/>
+          <a:p>
+            <a:r>
+              <a:rPr sz="1400" b="0" i="1">
+                <a:solidFill>
+                  <a:srgbClr val="555555"/>
+                </a:solidFill>
+              </a:rPr>
+              <a:t>Grandmaster and Follower run identical firmware — role is configuration, not code.</a:t>
             </a:r>
           </a:p>
         </p:txBody>
@@ -8916,7 +9450,7 @@
           <a:lstStyle/>
           <a:p>
             <a:r>
-              <a:t>Cyclic Fire — What You Can Achieve</a:t>
+              <a:t>Cyclic Fire — What Is It?</a:t>
             </a:r>
           </a:p>
         </p:txBody>
@@ -8939,77 +9473,70 @@
             <a:pPr/>
             <a:r>
               <a:rPr sz="1800"/>
-              <a:t>Sync quality measurement: cross-board rising-edge delta quantifies PTP accuracy</a:t>
+              <a:t>A firmware module that fires a periodic GPIO pulse train on PD10</a:t>
             </a:r>
           </a:p>
           <a:p>
             <a:pPr lvl="1"/>
             <a:r>
               <a:rPr sz="1600"/>
-              <a:t>Median → static bias (calibration target)</a:t>
+              <a:t>Pin sits on the EXT1 Xplained-Pro header — directly scope-clippable</a:t>
+            </a:r>
+          </a:p>
+          <a:p>
+            <a:pPr/>
+            <a:r>
+              <a:rPr sz="1800"/>
+              <a:t>Each pulse edge is scheduled against the PTP software clock, not a local timer</a:t>
             </a:r>
           </a:p>
           <a:p>
             <a:pPr lvl="1"/>
             <a:r>
               <a:rPr sz="1600"/>
-              <a:t>MAD / extrema → short-term wander, filter behaviour</a:t>
+              <a:t>Implemented with tfuture — single-shot timer re-armed from its own callback</a:t>
             </a:r>
           </a:p>
           <a:p>
             <a:pPr/>
             <a:r>
               <a:rPr sz="1800"/>
-              <a:t>Calibration feedback loop: run test → read D → update anchor offset → rerun</a:t>
+              <a:t>The scheduling time is given in absolute PTP wall-clock nanoseconds</a:t>
+            </a:r>
+          </a:p>
+          <a:p>
+            <a:pPr lvl="1"/>
+            <a:r>
+              <a:rPr sz="1600"/>
+              <a:t>cyclic_fire_start(period_us, phase_anchor_ns)</a:t>
+            </a:r>
+          </a:p>
+          <a:p>
+            <a:pPr lvl="1"/>
+            <a:r>
+              <a:rPr sz="1600"/>
+              <a:t>phase_anchor_ns = the PTP moment at which the very first edge should fire</a:t>
             </a:r>
           </a:p>
           <a:p>
             <a:pPr/>
             <a:r>
               <a:rPr sz="1800"/>
-              <a:t>PTP regression test: a single gated CI metric (|median| + MAD ≤ 100 µs)</a:t>
+              <a:t>Identical firmware, identical API call on both boards</a:t>
+            </a:r>
+          </a:p>
+          <a:p>
+            <a:pPr lvl="1"/>
+            <a:r>
+              <a:rPr sz="1600"/>
+              <a:t>→ a shared anchor_ns produces wire-level coincident edges across boards</a:t>
             </a:r>
           </a:p>
           <a:p>
             <a:pPr/>
             <a:r>
               <a:rPr sz="1800"/>
-              <a:t>Sub-µs demonstration target: visible proof that two independent MCUs tick together</a:t>
-            </a:r>
-          </a:p>
-          <a:p>
-            <a:pPr/>
-            <a:r>
-              <a:rPr sz="1800"/>
-              <a:t>Distributed actuation reference: template for real coordinated outputs</a:t>
-            </a:r>
-          </a:p>
-          <a:p>
-            <a:pPr lvl="1"/>
-            <a:r>
-              <a:rPr sz="1600"/>
-              <a:t>Sensor sampling on N nodes at the same nanosecond</a:t>
-            </a:r>
-          </a:p>
-          <a:p>
-            <a:pPr lvl="1"/>
-            <a:r>
-              <a:rPr sz="1600"/>
-              <a:t>Time-slotted TX windows (TDMA over T1S)</a:t>
-            </a:r>
-          </a:p>
-          <a:p>
-            <a:pPr lvl="1"/>
-            <a:r>
-              <a:rPr sz="1600"/>
-              <a:t>Synchronised ADC trigger / actuator pulse</a:t>
-            </a:r>
-          </a:p>
-          <a:p>
-            <a:pPr/>
-            <a:r>
-              <a:rPr sz="1800"/>
-              <a:t>Failure detection: PLCA starvation, MAC wedge, clock drift all show up as edge drift</a:t>
+              <a:t>A CPU-cheap, direct-from-wire way to observe whether two PTP clocks really agree</a:t>
             </a:r>
           </a:p>
         </p:txBody>
@@ -9048,504 +9575,100 @@
           <a:lstStyle/>
           <a:p>
             <a:r>
-              <a:t>Cyclic Fire — API &amp; Output Patterns</a:t>
-            </a:r>
-          </a:p>
-        </p:txBody>
-      </p:sp>
-      <p:sp>
-        <p:nvSpPr>
-          <p:cNvPr id="3" name="Rounded Rectangle 2"/>
-          <p:cNvSpPr/>
-          <p:nvPr/>
-        </p:nvSpPr>
-        <p:spPr>
-          <a:xfrm>
-            <a:off x="457200" y="1417320"/>
-            <a:ext cx="11247120" cy="502920"/>
-          </a:xfrm>
-          <a:prstGeom prst="roundRect">
-            <a:avLst/>
-          </a:prstGeom>
-          <a:solidFill>
-            <a:srgbClr val="0B2E4F"/>
-          </a:solidFill>
-          <a:ln>
-            <a:solidFill>
-              <a:srgbClr val="0B2E4F"/>
-            </a:solidFill>
-          </a:ln>
-        </p:spPr>
-        <p:style>
-          <a:lnRef idx="1">
-            <a:schemeClr val="accent1"/>
-          </a:lnRef>
-          <a:fillRef idx="3">
-            <a:schemeClr val="accent1"/>
-          </a:fillRef>
-          <a:effectRef idx="2">
-            <a:schemeClr val="accent1"/>
-          </a:effectRef>
-          <a:fontRef idx="minor">
-            <a:schemeClr val="lt1"/>
-          </a:fontRef>
-        </p:style>
-        <p:txBody>
-          <a:bodyPr rtlCol="0" anchor="ctr" wrap="square"/>
-          <a:lstStyle/>
-          <a:p>
-            <a:pPr algn="l"/>
-            <a:r>
-              <a:rPr sz="1400" b="1" i="0">
-                <a:solidFill>
-                  <a:srgbClr val="FFFFFF"/>
-                </a:solidFill>
-              </a:rPr>
-              <a:t>bool cyclic_fire_start(uint32_t period_us, uint64_t phase_anchor_ns);</a:t>
-            </a:r>
-          </a:p>
-        </p:txBody>
-      </p:sp>
-      <p:sp>
-        <p:nvSpPr>
-          <p:cNvPr id="4" name="Rounded Rectangle 3"/>
-          <p:cNvSpPr/>
-          <p:nvPr/>
-        </p:nvSpPr>
-        <p:spPr>
-          <a:xfrm>
-            <a:off x="457200" y="1965960"/>
-            <a:ext cx="11247120" cy="502920"/>
-          </a:xfrm>
-          <a:prstGeom prst="roundRect">
-            <a:avLst/>
-          </a:prstGeom>
-          <a:solidFill>
-            <a:srgbClr val="0B2E4F"/>
-          </a:solidFill>
-          <a:ln>
-            <a:solidFill>
-              <a:srgbClr val="0B2E4F"/>
-            </a:solidFill>
-          </a:ln>
-        </p:spPr>
-        <p:style>
-          <a:lnRef idx="1">
-            <a:schemeClr val="accent1"/>
-          </a:lnRef>
-          <a:fillRef idx="3">
-            <a:schemeClr val="accent1"/>
-          </a:fillRef>
-          <a:effectRef idx="2">
-            <a:schemeClr val="accent1"/>
-          </a:effectRef>
-          <a:fontRef idx="minor">
-            <a:schemeClr val="lt1"/>
-          </a:fontRef>
-        </p:style>
-        <p:txBody>
-          <a:bodyPr rtlCol="0" anchor="ctr" wrap="square"/>
-          <a:lstStyle/>
-          <a:p>
-            <a:pPr algn="l"/>
-            <a:r>
-              <a:rPr sz="1300" b="1" i="0">
-                <a:solidFill>
-                  <a:srgbClr val="FFFFFF"/>
-                </a:solidFill>
-              </a:rPr>
-              <a:t>bool cyclic_fire_start_ex(uint32_t period_us, uint64_t phase_anchor_ns, cyclic_fire_pattern_t pattern);</a:t>
-            </a:r>
-          </a:p>
-        </p:txBody>
-      </p:sp>
-      <p:sp>
-        <p:nvSpPr>
-          <p:cNvPr id="5" name="Rounded Rectangle 4"/>
-          <p:cNvSpPr/>
-          <p:nvPr/>
-        </p:nvSpPr>
-        <p:spPr>
-          <a:xfrm>
-            <a:off x="457200" y="2514600"/>
-            <a:ext cx="5486400" cy="502920"/>
-          </a:xfrm>
-          <a:prstGeom prst="roundRect">
-            <a:avLst/>
-          </a:prstGeom>
-          <a:solidFill>
-            <a:srgbClr val="555555"/>
-          </a:solidFill>
-          <a:ln>
-            <a:solidFill>
-              <a:srgbClr val="555555"/>
-            </a:solidFill>
-          </a:ln>
-        </p:spPr>
-        <p:style>
-          <a:lnRef idx="1">
-            <a:schemeClr val="accent1"/>
-          </a:lnRef>
-          <a:fillRef idx="3">
-            <a:schemeClr val="accent1"/>
-          </a:fillRef>
-          <a:effectRef idx="2">
-            <a:schemeClr val="accent1"/>
-          </a:effectRef>
-          <a:fontRef idx="minor">
-            <a:schemeClr val="lt1"/>
-          </a:fontRef>
-        </p:style>
-        <p:txBody>
-          <a:bodyPr rtlCol="0" anchor="ctr" wrap="square"/>
-          <a:lstStyle/>
-          <a:p>
-            <a:pPr algn="l"/>
-            <a:r>
-              <a:rPr sz="1300" b="1" i="0">
-                <a:solidFill>
-                  <a:srgbClr val="FFFFFF"/>
-                </a:solidFill>
-              </a:rPr>
-              <a:t>void cyclic_fire_stop(void);</a:t>
-            </a:r>
-          </a:p>
-        </p:txBody>
-      </p:sp>
-      <p:sp>
-        <p:nvSpPr>
-          <p:cNvPr id="6" name="Rounded Rectangle 5"/>
-          <p:cNvSpPr/>
-          <p:nvPr/>
-        </p:nvSpPr>
-        <p:spPr>
-          <a:xfrm>
-            <a:off x="6217920" y="2514600"/>
-            <a:ext cx="5486400" cy="502920"/>
-          </a:xfrm>
-          <a:prstGeom prst="roundRect">
-            <a:avLst/>
-          </a:prstGeom>
-          <a:solidFill>
-            <a:srgbClr val="555555"/>
-          </a:solidFill>
-          <a:ln>
-            <a:solidFill>
-              <a:srgbClr val="555555"/>
-            </a:solidFill>
-          </a:ln>
-        </p:spPr>
-        <p:style>
-          <a:lnRef idx="1">
-            <a:schemeClr val="accent1"/>
-          </a:lnRef>
-          <a:fillRef idx="3">
-            <a:schemeClr val="accent1"/>
-          </a:fillRef>
-          <a:effectRef idx="2">
-            <a:schemeClr val="accent1"/>
-          </a:effectRef>
-          <a:fontRef idx="minor">
-            <a:schemeClr val="lt1"/>
-          </a:fontRef>
-        </p:style>
-        <p:txBody>
-          <a:bodyPr rtlCol="0" anchor="ctr" wrap="square"/>
-          <a:lstStyle/>
-          <a:p>
-            <a:pPr algn="l"/>
-            <a:r>
-              <a:rPr sz="1300" b="1" i="0">
-                <a:solidFill>
-                  <a:srgbClr val="FFFFFF"/>
-                </a:solidFill>
-              </a:rPr>
-              <a:t>bool cyclic_fire_is_running(void);</a:t>
-            </a:r>
-          </a:p>
-        </p:txBody>
-      </p:sp>
-      <p:sp>
-        <p:nvSpPr>
-          <p:cNvPr id="7" name="Rounded Rectangle 6"/>
-          <p:cNvSpPr/>
-          <p:nvPr/>
-        </p:nvSpPr>
-        <p:spPr>
-          <a:xfrm>
-            <a:off x="457200" y="3063240"/>
-            <a:ext cx="5486400" cy="502920"/>
-          </a:xfrm>
-          <a:prstGeom prst="roundRect">
-            <a:avLst/>
-          </a:prstGeom>
-          <a:solidFill>
-            <a:srgbClr val="555555"/>
-          </a:solidFill>
-          <a:ln>
-            <a:solidFill>
-              <a:srgbClr val="555555"/>
-            </a:solidFill>
-          </a:ln>
-        </p:spPr>
-        <p:style>
-          <a:lnRef idx="1">
-            <a:schemeClr val="accent1"/>
-          </a:lnRef>
-          <a:fillRef idx="3">
-            <a:schemeClr val="accent1"/>
-          </a:fillRef>
-          <a:effectRef idx="2">
-            <a:schemeClr val="accent1"/>
-          </a:effectRef>
-          <a:fontRef idx="minor">
-            <a:schemeClr val="lt1"/>
-          </a:fontRef>
-        </p:style>
-        <p:txBody>
-          <a:bodyPr rtlCol="0" anchor="ctr" wrap="square"/>
-          <a:lstStyle/>
-          <a:p>
-            <a:pPr algn="l"/>
-            <a:r>
-              <a:rPr sz="1300" b="1" i="0">
-                <a:solidFill>
-                  <a:srgbClr val="FFFFFF"/>
-                </a:solidFill>
-              </a:rPr>
-              <a:t>uint64_t cyclic_fire_get_cycle_count(void);</a:t>
-            </a:r>
-          </a:p>
-        </p:txBody>
-      </p:sp>
-      <p:sp>
-        <p:nvSpPr>
-          <p:cNvPr id="8" name="Rounded Rectangle 7"/>
-          <p:cNvSpPr/>
-          <p:nvPr/>
-        </p:nvSpPr>
-        <p:spPr>
-          <a:xfrm>
-            <a:off x="6217920" y="3063240"/>
-            <a:ext cx="5486400" cy="502920"/>
-          </a:xfrm>
-          <a:prstGeom prst="roundRect">
-            <a:avLst/>
-          </a:prstGeom>
-          <a:solidFill>
-            <a:srgbClr val="555555"/>
-          </a:solidFill>
-          <a:ln>
-            <a:solidFill>
-              <a:srgbClr val="555555"/>
-            </a:solidFill>
-          </a:ln>
-        </p:spPr>
-        <p:style>
-          <a:lnRef idx="1">
-            <a:schemeClr val="accent1"/>
-          </a:lnRef>
-          <a:fillRef idx="3">
-            <a:schemeClr val="accent1"/>
-          </a:fillRef>
-          <a:effectRef idx="2">
-            <a:schemeClr val="accent1"/>
-          </a:effectRef>
-          <a:fontRef idx="minor">
-            <a:schemeClr val="lt1"/>
-          </a:fontRef>
-        </p:style>
-        <p:txBody>
-          <a:bodyPr rtlCol="0" anchor="ctr" wrap="square"/>
-          <a:lstStyle/>
-          <a:p>
-            <a:pPr algn="l"/>
-            <a:r>
-              <a:rPr sz="1300" b="1" i="0">
-                <a:solidFill>
-                  <a:srgbClr val="FFFFFF"/>
-                </a:solidFill>
-              </a:rPr>
-              <a:t>uint64_t cyclic_fire_get_missed_count(void);</a:t>
-            </a:r>
-          </a:p>
-        </p:txBody>
-      </p:sp>
-      <p:sp>
-        <p:nvSpPr>
-          <p:cNvPr id="9" name="Rounded Rectangle 8"/>
-          <p:cNvSpPr/>
-          <p:nvPr/>
-        </p:nvSpPr>
-        <p:spPr>
-          <a:xfrm>
-            <a:off x="457200" y="3794760"/>
-            <a:ext cx="5486400" cy="411480"/>
-          </a:xfrm>
-          <a:prstGeom prst="roundRect">
-            <a:avLst/>
-          </a:prstGeom>
-          <a:solidFill>
-            <a:srgbClr val="1F77B4"/>
-          </a:solidFill>
-          <a:ln>
-            <a:solidFill>
-              <a:srgbClr val="1F77B4"/>
-            </a:solidFill>
-          </a:ln>
-        </p:spPr>
-        <p:style>
-          <a:lnRef idx="1">
-            <a:schemeClr val="accent1"/>
-          </a:lnRef>
-          <a:fillRef idx="3">
-            <a:schemeClr val="accent1"/>
-          </a:fillRef>
-          <a:effectRef idx="2">
-            <a:schemeClr val="accent1"/>
-          </a:effectRef>
-          <a:fontRef idx="minor">
-            <a:schemeClr val="lt1"/>
-          </a:fontRef>
-        </p:style>
-        <p:txBody>
-          <a:bodyPr rtlCol="0" anchor="ctr" wrap="square"/>
-          <a:lstStyle/>
-          <a:p>
-            <a:pPr algn="l"/>
-            <a:r>
-              <a:rPr sz="1300" b="1" i="0">
-                <a:solidFill>
-                  <a:srgbClr val="FFFFFF"/>
-                </a:solidFill>
-              </a:rPr>
-              <a:t>PATTERN_SQUARE  — 50/50 rectangle (default)</a:t>
-            </a:r>
-          </a:p>
-        </p:txBody>
-      </p:sp>
-      <p:sp>
-        <p:nvSpPr>
-          <p:cNvPr id="10" name="Rounded Rectangle 9"/>
-          <p:cNvSpPr/>
-          <p:nvPr/>
-        </p:nvSpPr>
-        <p:spPr>
-          <a:xfrm>
-            <a:off x="6217920" y="3794760"/>
-            <a:ext cx="5486400" cy="411480"/>
-          </a:xfrm>
-          <a:prstGeom prst="roundRect">
-            <a:avLst/>
-          </a:prstGeom>
-          <a:solidFill>
-            <a:srgbClr val="1F77B4"/>
-          </a:solidFill>
-          <a:ln>
-            <a:solidFill>
-              <a:srgbClr val="1F77B4"/>
-            </a:solidFill>
-          </a:ln>
-        </p:spPr>
-        <p:style>
-          <a:lnRef idx="1">
-            <a:schemeClr val="accent1"/>
-          </a:lnRef>
-          <a:fillRef idx="3">
-            <a:schemeClr val="accent1"/>
-          </a:fillRef>
-          <a:effectRef idx="2">
-            <a:schemeClr val="accent1"/>
-          </a:effectRef>
-          <a:fontRef idx="minor">
-            <a:schemeClr val="lt1"/>
-          </a:fontRef>
-        </p:style>
-        <p:txBody>
-          <a:bodyPr rtlCol="0" anchor="ctr" wrap="square"/>
-          <a:lstStyle/>
-          <a:p>
-            <a:pPr algn="l"/>
-            <a:r>
-              <a:rPr sz="1300" b="1" i="0">
-                <a:solidFill>
-                  <a:srgbClr val="FFFFFF"/>
-                </a:solidFill>
-              </a:rPr>
-              <a:t>PATTERN_MARKER  — 1-high + 4-low isolated pulse</a:t>
-            </a:r>
-          </a:p>
-        </p:txBody>
-      </p:sp>
-      <p:sp>
-        <p:nvSpPr>
-          <p:cNvPr id="11" name="TextBox 10"/>
-          <p:cNvSpPr txBox="1"/>
-          <p:nvPr/>
-        </p:nvSpPr>
-        <p:spPr>
-          <a:xfrm>
-            <a:off x="457200" y="4434840"/>
-            <a:ext cx="11247120" cy="2011680"/>
-          </a:xfrm>
-          <a:prstGeom prst="rect">
-            <a:avLst/>
-          </a:prstGeom>
-          <a:noFill/>
-        </p:spPr>
-        <p:txBody>
-          <a:bodyPr wrap="square">
-            <a:spAutoFit/>
-          </a:bodyPr>
-          <a:lstStyle/>
-          <a:p>
-            <a:r>
-              <a:rPr sz="1400">
-                <a:solidFill>
-                  <a:srgbClr val="0B2E4F"/>
-                </a:solidFill>
-              </a:rPr>
-              <a:t>• period_us is the FULL rectangle period — callback fires every period_us/2</a:t>
-            </a:r>
-          </a:p>
-          <a:p>
-            <a:r>
-              <a:rPr sz="1400">
-                <a:solidFill>
-                  <a:srgbClr val="0B2E4F"/>
-                </a:solidFill>
-              </a:rPr>
-              <a:t>• Default 1000 µs → 1 kHz square wave</a:t>
-            </a:r>
-          </a:p>
-          <a:p>
-            <a:r>
-              <a:rPr sz="1400">
-                <a:solidFill>
-                  <a:srgbClr val="0B2E4F"/>
-                </a:solidFill>
-              </a:rPr>
-              <a:t>• Periods below ~400 µs not recommended (half-period ≈ tfuture spin threshold)</a:t>
-            </a:r>
-          </a:p>
-          <a:p>
-            <a:r>
-              <a:rPr sz="1400">
-                <a:solidFill>
-                  <a:srgbClr val="0B2E4F"/>
-                </a:solidFill>
-              </a:rPr>
-              <a:t>• MARKER pattern isolates the rising edge — makes 'which board fires first?' unambiguous</a:t>
-            </a:r>
-          </a:p>
-          <a:p>
-            <a:r>
-              <a:rPr sz="1400">
-                <a:solidFill>
-                  <a:srgbClr val="0B2E4F"/>
-                </a:solidFill>
-              </a:rPr>
-              <a:t>• CLI wrappers: cyclic_start, cyclic_start_marker, cyclic_start_free, cyclic_stop, cyclic_status</a:t>
+              <a:t>Cyclic Fire — What You Can Achieve</a:t>
+            </a:r>
+          </a:p>
+        </p:txBody>
+      </p:sp>
+      <p:sp>
+        <p:nvSpPr>
+          <p:cNvPr id="3" name="Content Placeholder 2"/>
+          <p:cNvSpPr>
+            <a:spLocks noGrp="1"/>
+          </p:cNvSpPr>
+          <p:nvPr>
+            <p:ph idx="13" sz="quarter"/>
+          </p:nvPr>
+        </p:nvSpPr>
+        <p:spPr/>
+        <p:txBody>
+          <a:bodyPr/>
+          <a:lstStyle/>
+          <a:p>
+            <a:pPr/>
+            <a:r>
+              <a:rPr sz="1800"/>
+              <a:t>Sync quality measurement: cross-board rising-edge delta quantifies PTP accuracy</a:t>
+            </a:r>
+          </a:p>
+          <a:p>
+            <a:pPr lvl="1"/>
+            <a:r>
+              <a:rPr sz="1600"/>
+              <a:t>Median → static bias (calibration target)</a:t>
+            </a:r>
+          </a:p>
+          <a:p>
+            <a:pPr lvl="1"/>
+            <a:r>
+              <a:rPr sz="1600"/>
+              <a:t>MAD / extrema → short-term wander, filter behaviour</a:t>
+            </a:r>
+          </a:p>
+          <a:p>
+            <a:pPr/>
+            <a:r>
+              <a:rPr sz="1800"/>
+              <a:t>Calibration feedback loop: run test → read D → update anchor offset → rerun</a:t>
+            </a:r>
+          </a:p>
+          <a:p>
+            <a:pPr/>
+            <a:r>
+              <a:rPr sz="1800"/>
+              <a:t>PTP regression test: a single gated CI metric (|median| + MAD ≤ 100 µs)</a:t>
+            </a:r>
+          </a:p>
+          <a:p>
+            <a:pPr/>
+            <a:r>
+              <a:rPr sz="1800"/>
+              <a:t>Sub-µs demonstration target: visible proof that two independent MCUs tick together</a:t>
+            </a:r>
+          </a:p>
+          <a:p>
+            <a:pPr/>
+            <a:r>
+              <a:rPr sz="1800"/>
+              <a:t>Distributed actuation reference: template for real coordinated outputs</a:t>
+            </a:r>
+          </a:p>
+          <a:p>
+            <a:pPr lvl="1"/>
+            <a:r>
+              <a:rPr sz="1600"/>
+              <a:t>Sensor sampling on N nodes at the same nanosecond</a:t>
+            </a:r>
+          </a:p>
+          <a:p>
+            <a:pPr lvl="1"/>
+            <a:r>
+              <a:rPr sz="1600"/>
+              <a:t>Time-slotted TX windows (TDMA over T1S)</a:t>
+            </a:r>
+          </a:p>
+          <a:p>
+            <a:pPr lvl="1"/>
+            <a:r>
+              <a:rPr sz="1600"/>
+              <a:t>Synchronised ADC trigger / actuator pulse</a:t>
+            </a:r>
+          </a:p>
+          <a:p>
+            <a:pPr/>
+            <a:r>
+              <a:rPr sz="1800"/>
+              <a:t>Failure detection: PLCA starvation, MAC wedge, clock drift all show up as edge drift</a:t>
             </a:r>
           </a:p>
         </p:txBody>
@@ -9584,45 +9707,445 @@
           <a:lstStyle/>
           <a:p>
             <a:r>
-              <a:t>Cyclic Fire — Wire-Level View</a:t>
-            </a:r>
-          </a:p>
-        </p:txBody>
-      </p:sp>
-      <p:pic>
-        <p:nvPicPr>
-          <p:cNvPr id="3" name="Picture 2" descr="Picture2.png"/>
-          <p:cNvPicPr>
-            <a:picLocks noChangeAspect="1"/>
-          </p:cNvPicPr>
-          <p:nvPr/>
-        </p:nvPicPr>
-        <p:blipFill>
-          <a:blip r:embed="rId2"/>
-          <a:stretch>
-            <a:fillRect/>
-          </a:stretch>
-        </p:blipFill>
-        <p:spPr>
-          <a:xfrm>
-            <a:off x="3054096" y="1325880"/>
-            <a:ext cx="6060440" cy="3657600"/>
-          </a:xfrm>
-          <a:prstGeom prst="rect">
-            <a:avLst/>
-          </a:prstGeom>
-        </p:spPr>
-      </p:pic>
-      <p:sp>
-        <p:nvSpPr>
-          <p:cNvPr id="4" name="TextBox 3"/>
+              <a:t>Cyclic Fire — API &amp; Output Patterns</a:t>
+            </a:r>
+          </a:p>
+        </p:txBody>
+      </p:sp>
+      <p:sp>
+        <p:nvSpPr>
+          <p:cNvPr id="3" name="Rounded Rectangle 2"/>
+          <p:cNvSpPr/>
+          <p:nvPr/>
+        </p:nvSpPr>
+        <p:spPr>
+          <a:xfrm>
+            <a:off x="457200" y="1417320"/>
+            <a:ext cx="11247120" cy="502920"/>
+          </a:xfrm>
+          <a:prstGeom prst="roundRect">
+            <a:avLst/>
+          </a:prstGeom>
+          <a:solidFill>
+            <a:srgbClr val="0B2E4F"/>
+          </a:solidFill>
+          <a:ln>
+            <a:solidFill>
+              <a:srgbClr val="0B2E4F"/>
+            </a:solidFill>
+          </a:ln>
+        </p:spPr>
+        <p:style>
+          <a:lnRef idx="1">
+            <a:schemeClr val="accent1"/>
+          </a:lnRef>
+          <a:fillRef idx="3">
+            <a:schemeClr val="accent1"/>
+          </a:fillRef>
+          <a:effectRef idx="2">
+            <a:schemeClr val="accent1"/>
+          </a:effectRef>
+          <a:fontRef idx="minor">
+            <a:schemeClr val="lt1"/>
+          </a:fontRef>
+        </p:style>
+        <p:txBody>
+          <a:bodyPr rtlCol="0" anchor="ctr" wrap="square"/>
+          <a:lstStyle/>
+          <a:p>
+            <a:pPr algn="l"/>
+            <a:r>
+              <a:rPr sz="1400" b="1" i="0">
+                <a:solidFill>
+                  <a:srgbClr val="FFFFFF"/>
+                </a:solidFill>
+              </a:rPr>
+              <a:t>bool cyclic_fire_start(uint32_t period_us, uint64_t phase_anchor_ns);</a:t>
+            </a:r>
+          </a:p>
+        </p:txBody>
+      </p:sp>
+      <p:sp>
+        <p:nvSpPr>
+          <p:cNvPr id="4" name="Rounded Rectangle 3"/>
+          <p:cNvSpPr/>
+          <p:nvPr/>
+        </p:nvSpPr>
+        <p:spPr>
+          <a:xfrm>
+            <a:off x="457200" y="1965960"/>
+            <a:ext cx="11247120" cy="502920"/>
+          </a:xfrm>
+          <a:prstGeom prst="roundRect">
+            <a:avLst/>
+          </a:prstGeom>
+          <a:solidFill>
+            <a:srgbClr val="0B2E4F"/>
+          </a:solidFill>
+          <a:ln>
+            <a:solidFill>
+              <a:srgbClr val="0B2E4F"/>
+            </a:solidFill>
+          </a:ln>
+        </p:spPr>
+        <p:style>
+          <a:lnRef idx="1">
+            <a:schemeClr val="accent1"/>
+          </a:lnRef>
+          <a:fillRef idx="3">
+            <a:schemeClr val="accent1"/>
+          </a:fillRef>
+          <a:effectRef idx="2">
+            <a:schemeClr val="accent1"/>
+          </a:effectRef>
+          <a:fontRef idx="minor">
+            <a:schemeClr val="lt1"/>
+          </a:fontRef>
+        </p:style>
+        <p:txBody>
+          <a:bodyPr rtlCol="0" anchor="ctr" wrap="square"/>
+          <a:lstStyle/>
+          <a:p>
+            <a:pPr algn="l"/>
+            <a:r>
+              <a:rPr sz="1300" b="1" i="0">
+                <a:solidFill>
+                  <a:srgbClr val="FFFFFF"/>
+                </a:solidFill>
+              </a:rPr>
+              <a:t>bool cyclic_fire_start_ex(uint32_t period_us, uint64_t phase_anchor_ns, cyclic_fire_pattern_t pattern);</a:t>
+            </a:r>
+          </a:p>
+        </p:txBody>
+      </p:sp>
+      <p:sp>
+        <p:nvSpPr>
+          <p:cNvPr id="5" name="Rounded Rectangle 4"/>
+          <p:cNvSpPr/>
+          <p:nvPr/>
+        </p:nvSpPr>
+        <p:spPr>
+          <a:xfrm>
+            <a:off x="457200" y="2514600"/>
+            <a:ext cx="5486400" cy="502920"/>
+          </a:xfrm>
+          <a:prstGeom prst="roundRect">
+            <a:avLst/>
+          </a:prstGeom>
+          <a:solidFill>
+            <a:srgbClr val="555555"/>
+          </a:solidFill>
+          <a:ln>
+            <a:solidFill>
+              <a:srgbClr val="555555"/>
+            </a:solidFill>
+          </a:ln>
+        </p:spPr>
+        <p:style>
+          <a:lnRef idx="1">
+            <a:schemeClr val="accent1"/>
+          </a:lnRef>
+          <a:fillRef idx="3">
+            <a:schemeClr val="accent1"/>
+          </a:fillRef>
+          <a:effectRef idx="2">
+            <a:schemeClr val="accent1"/>
+          </a:effectRef>
+          <a:fontRef idx="minor">
+            <a:schemeClr val="lt1"/>
+          </a:fontRef>
+        </p:style>
+        <p:txBody>
+          <a:bodyPr rtlCol="0" anchor="ctr" wrap="square"/>
+          <a:lstStyle/>
+          <a:p>
+            <a:pPr algn="l"/>
+            <a:r>
+              <a:rPr sz="1300" b="1" i="0">
+                <a:solidFill>
+                  <a:srgbClr val="FFFFFF"/>
+                </a:solidFill>
+              </a:rPr>
+              <a:t>void cyclic_fire_stop(void);</a:t>
+            </a:r>
+          </a:p>
+        </p:txBody>
+      </p:sp>
+      <p:sp>
+        <p:nvSpPr>
+          <p:cNvPr id="6" name="Rounded Rectangle 5"/>
+          <p:cNvSpPr/>
+          <p:nvPr/>
+        </p:nvSpPr>
+        <p:spPr>
+          <a:xfrm>
+            <a:off x="6217920" y="2514600"/>
+            <a:ext cx="5486400" cy="502920"/>
+          </a:xfrm>
+          <a:prstGeom prst="roundRect">
+            <a:avLst/>
+          </a:prstGeom>
+          <a:solidFill>
+            <a:srgbClr val="555555"/>
+          </a:solidFill>
+          <a:ln>
+            <a:solidFill>
+              <a:srgbClr val="555555"/>
+            </a:solidFill>
+          </a:ln>
+        </p:spPr>
+        <p:style>
+          <a:lnRef idx="1">
+            <a:schemeClr val="accent1"/>
+          </a:lnRef>
+          <a:fillRef idx="3">
+            <a:schemeClr val="accent1"/>
+          </a:fillRef>
+          <a:effectRef idx="2">
+            <a:schemeClr val="accent1"/>
+          </a:effectRef>
+          <a:fontRef idx="minor">
+            <a:schemeClr val="lt1"/>
+          </a:fontRef>
+        </p:style>
+        <p:txBody>
+          <a:bodyPr rtlCol="0" anchor="ctr" wrap="square"/>
+          <a:lstStyle/>
+          <a:p>
+            <a:pPr algn="l"/>
+            <a:r>
+              <a:rPr sz="1300" b="1" i="0">
+                <a:solidFill>
+                  <a:srgbClr val="FFFFFF"/>
+                </a:solidFill>
+              </a:rPr>
+              <a:t>bool cyclic_fire_is_running(void);</a:t>
+            </a:r>
+          </a:p>
+        </p:txBody>
+      </p:sp>
+      <p:sp>
+        <p:nvSpPr>
+          <p:cNvPr id="7" name="Rounded Rectangle 6"/>
+          <p:cNvSpPr/>
+          <p:nvPr/>
+        </p:nvSpPr>
+        <p:spPr>
+          <a:xfrm>
+            <a:off x="457200" y="3063240"/>
+            <a:ext cx="5486400" cy="502920"/>
+          </a:xfrm>
+          <a:prstGeom prst="roundRect">
+            <a:avLst/>
+          </a:prstGeom>
+          <a:solidFill>
+            <a:srgbClr val="555555"/>
+          </a:solidFill>
+          <a:ln>
+            <a:solidFill>
+              <a:srgbClr val="555555"/>
+            </a:solidFill>
+          </a:ln>
+        </p:spPr>
+        <p:style>
+          <a:lnRef idx="1">
+            <a:schemeClr val="accent1"/>
+          </a:lnRef>
+          <a:fillRef idx="3">
+            <a:schemeClr val="accent1"/>
+          </a:fillRef>
+          <a:effectRef idx="2">
+            <a:schemeClr val="accent1"/>
+          </a:effectRef>
+          <a:fontRef idx="minor">
+            <a:schemeClr val="lt1"/>
+          </a:fontRef>
+        </p:style>
+        <p:txBody>
+          <a:bodyPr rtlCol="0" anchor="ctr" wrap="square"/>
+          <a:lstStyle/>
+          <a:p>
+            <a:pPr algn="l"/>
+            <a:r>
+              <a:rPr sz="1300" b="1" i="0">
+                <a:solidFill>
+                  <a:srgbClr val="FFFFFF"/>
+                </a:solidFill>
+              </a:rPr>
+              <a:t>uint64_t cyclic_fire_get_cycle_count(void);</a:t>
+            </a:r>
+          </a:p>
+        </p:txBody>
+      </p:sp>
+      <p:sp>
+        <p:nvSpPr>
+          <p:cNvPr id="8" name="Rounded Rectangle 7"/>
+          <p:cNvSpPr/>
+          <p:nvPr/>
+        </p:nvSpPr>
+        <p:spPr>
+          <a:xfrm>
+            <a:off x="6217920" y="3063240"/>
+            <a:ext cx="5486400" cy="502920"/>
+          </a:xfrm>
+          <a:prstGeom prst="roundRect">
+            <a:avLst/>
+          </a:prstGeom>
+          <a:solidFill>
+            <a:srgbClr val="555555"/>
+          </a:solidFill>
+          <a:ln>
+            <a:solidFill>
+              <a:srgbClr val="555555"/>
+            </a:solidFill>
+          </a:ln>
+        </p:spPr>
+        <p:style>
+          <a:lnRef idx="1">
+            <a:schemeClr val="accent1"/>
+          </a:lnRef>
+          <a:fillRef idx="3">
+            <a:schemeClr val="accent1"/>
+          </a:fillRef>
+          <a:effectRef idx="2">
+            <a:schemeClr val="accent1"/>
+          </a:effectRef>
+          <a:fontRef idx="minor">
+            <a:schemeClr val="lt1"/>
+          </a:fontRef>
+        </p:style>
+        <p:txBody>
+          <a:bodyPr rtlCol="0" anchor="ctr" wrap="square"/>
+          <a:lstStyle/>
+          <a:p>
+            <a:pPr algn="l"/>
+            <a:r>
+              <a:rPr sz="1300" b="1" i="0">
+                <a:solidFill>
+                  <a:srgbClr val="FFFFFF"/>
+                </a:solidFill>
+              </a:rPr>
+              <a:t>uint64_t cyclic_fire_get_missed_count(void);</a:t>
+            </a:r>
+          </a:p>
+        </p:txBody>
+      </p:sp>
+      <p:sp>
+        <p:nvSpPr>
+          <p:cNvPr id="9" name="Rounded Rectangle 8"/>
+          <p:cNvSpPr/>
+          <p:nvPr/>
+        </p:nvSpPr>
+        <p:spPr>
+          <a:xfrm>
+            <a:off x="457200" y="3794760"/>
+            <a:ext cx="5486400" cy="411480"/>
+          </a:xfrm>
+          <a:prstGeom prst="roundRect">
+            <a:avLst/>
+          </a:prstGeom>
+          <a:solidFill>
+            <a:srgbClr val="1F77B4"/>
+          </a:solidFill>
+          <a:ln>
+            <a:solidFill>
+              <a:srgbClr val="1F77B4"/>
+            </a:solidFill>
+          </a:ln>
+        </p:spPr>
+        <p:style>
+          <a:lnRef idx="1">
+            <a:schemeClr val="accent1"/>
+          </a:lnRef>
+          <a:fillRef idx="3">
+            <a:schemeClr val="accent1"/>
+          </a:fillRef>
+          <a:effectRef idx="2">
+            <a:schemeClr val="accent1"/>
+          </a:effectRef>
+          <a:fontRef idx="minor">
+            <a:schemeClr val="lt1"/>
+          </a:fontRef>
+        </p:style>
+        <p:txBody>
+          <a:bodyPr rtlCol="0" anchor="ctr" wrap="square"/>
+          <a:lstStyle/>
+          <a:p>
+            <a:pPr algn="l"/>
+            <a:r>
+              <a:rPr sz="1300" b="1" i="0">
+                <a:solidFill>
+                  <a:srgbClr val="FFFFFF"/>
+                </a:solidFill>
+              </a:rPr>
+              <a:t>PATTERN_SQUARE  — 50/50 rectangle (default)</a:t>
+            </a:r>
+          </a:p>
+        </p:txBody>
+      </p:sp>
+      <p:sp>
+        <p:nvSpPr>
+          <p:cNvPr id="10" name="Rounded Rectangle 9"/>
+          <p:cNvSpPr/>
+          <p:nvPr/>
+        </p:nvSpPr>
+        <p:spPr>
+          <a:xfrm>
+            <a:off x="6217920" y="3794760"/>
+            <a:ext cx="5486400" cy="411480"/>
+          </a:xfrm>
+          <a:prstGeom prst="roundRect">
+            <a:avLst/>
+          </a:prstGeom>
+          <a:solidFill>
+            <a:srgbClr val="1F77B4"/>
+          </a:solidFill>
+          <a:ln>
+            <a:solidFill>
+              <a:srgbClr val="1F77B4"/>
+            </a:solidFill>
+          </a:ln>
+        </p:spPr>
+        <p:style>
+          <a:lnRef idx="1">
+            <a:schemeClr val="accent1"/>
+          </a:lnRef>
+          <a:fillRef idx="3">
+            <a:schemeClr val="accent1"/>
+          </a:fillRef>
+          <a:effectRef idx="2">
+            <a:schemeClr val="accent1"/>
+          </a:effectRef>
+          <a:fontRef idx="minor">
+            <a:schemeClr val="lt1"/>
+          </a:fontRef>
+        </p:style>
+        <p:txBody>
+          <a:bodyPr rtlCol="0" anchor="ctr" wrap="square"/>
+          <a:lstStyle/>
+          <a:p>
+            <a:pPr algn="l"/>
+            <a:r>
+              <a:rPr sz="1300" b="1" i="0">
+                <a:solidFill>
+                  <a:srgbClr val="FFFFFF"/>
+                </a:solidFill>
+              </a:rPr>
+              <a:t>PATTERN_MARKER  — 1-high + 4-low isolated pulse</a:t>
+            </a:r>
+          </a:p>
+        </p:txBody>
+      </p:sp>
+      <p:sp>
+        <p:nvSpPr>
+          <p:cNvPr id="11" name="TextBox 10"/>
           <p:cNvSpPr txBox="1"/>
           <p:nvPr/>
         </p:nvSpPr>
         <p:spPr>
           <a:xfrm>
-            <a:off x="548640" y="5074920"/>
-            <a:ext cx="11064240" cy="1463040"/>
+            <a:off x="457200" y="4434840"/>
+            <a:ext cx="11247120" cy="2011680"/>
           </a:xfrm>
           <a:prstGeom prst="rect">
             <a:avLst/>
@@ -9636,32 +10159,52 @@
           <a:lstStyle/>
           <a:p>
             <a:r>
-              <a:rPr sz="1400" b="1">
+              <a:rPr sz="1400">
                 <a:solidFill>
                   <a:srgbClr val="0B2E4F"/>
                 </a:solidFill>
               </a:rPr>
-              <a:t>Saleae Logic 2 capture — Ch0 (top) = Grandmaster PD10,  Ch1 (bottom) = Follower PD10.</a:t>
-            </a:r>
-          </a:p>
-          <a:p>
-            <a:r>
-              <a:rPr sz="1400" b="0">
+              <a:t>• period_us is the FULL rectangle period — callback fires every period_us/2</a:t>
+            </a:r>
+          </a:p>
+          <a:p>
+            <a:r>
+              <a:rPr sz="1400">
                 <a:solidFill>
                   <a:srgbClr val="0B2E4F"/>
                 </a:solidFill>
               </a:rPr>
-              <a:t>MARKER pattern: 1 high half-period + 9 low half-periods → one isolated rising edge every 5 full periods.</a:t>
-            </a:r>
-          </a:p>
-          <a:p>
-            <a:r>
-              <a:rPr sz="1400" b="0">
+              <a:t>• Default 1000 µs → 1 kHz square wave</a:t>
+            </a:r>
+          </a:p>
+          <a:p>
+            <a:r>
+              <a:rPr sz="1400">
                 <a:solidFill>
                   <a:srgbClr val="0B2E4F"/>
                 </a:solidFill>
               </a:rPr>
-              <a:t>Both channels fire coincident edges over 0.3 s — visible evidence that the two boards share a single PTP time base.</a:t>
+              <a:t>• Periods below ~400 µs not recommended (half-period ≈ tfuture spin threshold)</a:t>
+            </a:r>
+          </a:p>
+          <a:p>
+            <a:r>
+              <a:rPr sz="1400">
+                <a:solidFill>
+                  <a:srgbClr val="0B2E4F"/>
+                </a:solidFill>
+              </a:rPr>
+              <a:t>• MARKER pattern isolates the rising edge — makes 'which board fires first?' unambiguous</a:t>
+            </a:r>
+          </a:p>
+          <a:p>
+            <a:r>
+              <a:rPr sz="1400">
+                <a:solidFill>
+                  <a:srgbClr val="0B2E4F"/>
+                </a:solidFill>
+              </a:rPr>
+              <a:t>• CLI wrappers: cyclic_start, cyclic_start_marker, cyclic_start_free, cyclic_stop, cyclic_status</a:t>
             </a:r>
           </a:p>
         </p:txBody>
@@ -9700,14 +10243,14 @@
           <a:lstStyle/>
           <a:p>
             <a:r>
-              <a:t>Cyclic Fire — Zoom-In: Cross-Board Edge Delta</a:t>
+              <a:t>Cyclic Fire — Wire-Level View</a:t>
             </a:r>
           </a:p>
         </p:txBody>
       </p:sp>
       <p:pic>
         <p:nvPicPr>
-          <p:cNvPr id="3" name="Picture 2" descr="Picture3.png"/>
+          <p:cNvPr id="3" name="Picture 2" descr="Picture2.png"/>
           <p:cNvPicPr>
             <a:picLocks noChangeAspect="1"/>
           </p:cNvPicPr>
@@ -9722,7 +10265,7 @@
         <p:spPr>
           <a:xfrm>
             <a:off x="3054096" y="1325880"/>
-            <a:ext cx="6080760" cy="3657600"/>
+            <a:ext cx="6060440" cy="3657600"/>
           </a:xfrm>
           <a:prstGeom prst="rect">
             <a:avLst/>
@@ -9757,7 +10300,7 @@
                   <a:srgbClr val="0B2E4F"/>
                 </a:solidFill>
               </a:rPr>
-              <a:t>Zoomed Logic 2 view of a single MARKER pulse pair  (period_us = 5000 → 20 % duty, 40 Hz).</a:t>
+              <a:t>Saleae Logic 2 capture — Ch0 (top) = Grandmaster PD10,  Ch1 (bottom) = Follower PD10.</a:t>
             </a:r>
           </a:p>
           <a:p>
@@ -9767,7 +10310,7 @@
                   <a:srgbClr val="0B2E4F"/>
                 </a:solidFill>
               </a:rPr>
-              <a:t>Cursor tool ΔT = 34.98 µs — time between the Grandmaster rising edge (Ch0) and the Follower rising edge (Ch1).</a:t>
+              <a:t>MARKER pattern: 1 high half-period + 9 low half-periods → one isolated rising edge every 5 full periods.</a:t>
             </a:r>
           </a:p>
           <a:p>
@@ -9777,7 +10320,7 @@
                   <a:srgbClr val="0B2E4F"/>
                 </a:solidFill>
               </a:rPr>
-              <a:t>Well inside the 100 µs product window — this single wire-level frame corroborates the automated 10 µs median statistic.</a:t>
+              <a:t>Both channels fire coincident edges over 0.3 s — visible evidence that the two boards share a single PTP time base.</a:t>
             </a:r>
           </a:p>
         </p:txBody>
@@ -9816,233 +10359,45 @@
           <a:lstStyle/>
           <a:p>
             <a:r>
-              <a:t>PTP_CLOCK — Application API for PTP Time</a:t>
-            </a:r>
-          </a:p>
-        </p:txBody>
-      </p:sp>
-      <p:sp>
-        <p:nvSpPr>
-          <p:cNvPr id="3" name="Rounded Rectangle 2"/>
-          <p:cNvSpPr/>
-          <p:nvPr/>
-        </p:nvSpPr>
-        <p:spPr>
-          <a:xfrm>
-            <a:off x="457200" y="1417320"/>
-            <a:ext cx="11247120" cy="502920"/>
-          </a:xfrm>
-          <a:prstGeom prst="roundRect">
-            <a:avLst/>
-          </a:prstGeom>
-          <a:solidFill>
-            <a:srgbClr val="0B2E4F"/>
-          </a:solidFill>
-          <a:ln>
-            <a:solidFill>
-              <a:srgbClr val="0B2E4F"/>
-            </a:solidFill>
-          </a:ln>
-        </p:spPr>
-        <p:style>
-          <a:lnRef idx="1">
-            <a:schemeClr val="accent1"/>
-          </a:lnRef>
-          <a:fillRef idx="3">
-            <a:schemeClr val="accent1"/>
-          </a:fillRef>
-          <a:effectRef idx="2">
-            <a:schemeClr val="accent1"/>
-          </a:effectRef>
-          <a:fontRef idx="minor">
-            <a:schemeClr val="lt1"/>
-          </a:fontRef>
-        </p:style>
-        <p:txBody>
-          <a:bodyPr rtlCol="0" anchor="ctr" wrap="square"/>
-          <a:lstStyle/>
-          <a:p>
-            <a:pPr algn="l"/>
-            <a:r>
-              <a:rPr sz="1300" b="1" i="0">
-                <a:solidFill>
-                  <a:srgbClr val="FFFFFF"/>
-                </a:solidFill>
-              </a:rPr>
-              <a:t>uint64_t PTP_CLOCK_GetTime_ns(void);         // current wall-clock, interpolated</a:t>
-            </a:r>
-          </a:p>
-        </p:txBody>
-      </p:sp>
-      <p:sp>
-        <p:nvSpPr>
-          <p:cNvPr id="4" name="Rounded Rectangle 3"/>
-          <p:cNvSpPr/>
-          <p:nvPr/>
-        </p:nvSpPr>
-        <p:spPr>
-          <a:xfrm>
-            <a:off x="457200" y="1965960"/>
-            <a:ext cx="11247120" cy="502920"/>
-          </a:xfrm>
-          <a:prstGeom prst="roundRect">
-            <a:avLst/>
-          </a:prstGeom>
-          <a:solidFill>
-            <a:srgbClr val="0B2E4F"/>
-          </a:solidFill>
-          <a:ln>
-            <a:solidFill>
-              <a:srgbClr val="0B2E4F"/>
-            </a:solidFill>
-          </a:ln>
-        </p:spPr>
-        <p:style>
-          <a:lnRef idx="1">
-            <a:schemeClr val="accent1"/>
-          </a:lnRef>
-          <a:fillRef idx="3">
-            <a:schemeClr val="accent1"/>
-          </a:fillRef>
-          <a:effectRef idx="2">
-            <a:schemeClr val="accent1"/>
-          </a:effectRef>
-          <a:fontRef idx="minor">
-            <a:schemeClr val="lt1"/>
-          </a:fontRef>
-        </p:style>
-        <p:txBody>
-          <a:bodyPr rtlCol="0" anchor="ctr" wrap="square"/>
-          <a:lstStyle/>
-          <a:p>
-            <a:pPr algn="l"/>
-            <a:r>
-              <a:rPr sz="1300" b="1" i="0">
-                <a:solidFill>
-                  <a:srgbClr val="FFFFFF"/>
-                </a:solidFill>
-              </a:rPr>
-              <a:t>bool     PTP_CLOCK_IsValid(void);            // true once first anchor was set</a:t>
-            </a:r>
-          </a:p>
-        </p:txBody>
-      </p:sp>
-      <p:sp>
-        <p:nvSpPr>
-          <p:cNvPr id="5" name="Rounded Rectangle 4"/>
-          <p:cNvSpPr/>
-          <p:nvPr/>
-        </p:nvSpPr>
-        <p:spPr>
-          <a:xfrm>
-            <a:off x="457200" y="2514600"/>
-            <a:ext cx="11247120" cy="502920"/>
-          </a:xfrm>
-          <a:prstGeom prst="roundRect">
-            <a:avLst/>
-          </a:prstGeom>
-          <a:solidFill>
-            <a:srgbClr val="555555"/>
-          </a:solidFill>
-          <a:ln>
-            <a:solidFill>
-              <a:srgbClr val="555555"/>
-            </a:solidFill>
-          </a:ln>
-        </p:spPr>
-        <p:style>
-          <a:lnRef idx="1">
-            <a:schemeClr val="accent1"/>
-          </a:lnRef>
-          <a:fillRef idx="3">
-            <a:schemeClr val="accent1"/>
-          </a:fillRef>
-          <a:effectRef idx="2">
-            <a:schemeClr val="accent1"/>
-          </a:effectRef>
-          <a:fontRef idx="minor">
-            <a:schemeClr val="lt1"/>
-          </a:fontRef>
-        </p:style>
-        <p:txBody>
-          <a:bodyPr rtlCol="0" anchor="ctr" wrap="square"/>
-          <a:lstStyle/>
-          <a:p>
-            <a:pPr algn="l"/>
-            <a:r>
-              <a:rPr sz="1300" b="1" i="0">
-                <a:solidFill>
-                  <a:srgbClr val="FFFFFF"/>
-                </a:solidFill>
-              </a:rPr>
-              <a:t>int32_t  PTP_CLOCK_GetDriftPPB(void);        // measured MCU vs PTP rate offset</a:t>
-            </a:r>
-          </a:p>
-        </p:txBody>
-      </p:sp>
-      <p:sp>
-        <p:nvSpPr>
-          <p:cNvPr id="6" name="Rounded Rectangle 5"/>
-          <p:cNvSpPr/>
-          <p:nvPr/>
-        </p:nvSpPr>
-        <p:spPr>
-          <a:xfrm>
-            <a:off x="457200" y="3063240"/>
-            <a:ext cx="11247120" cy="502920"/>
-          </a:xfrm>
-          <a:prstGeom prst="roundRect">
-            <a:avLst/>
-          </a:prstGeom>
-          <a:solidFill>
-            <a:srgbClr val="555555"/>
-          </a:solidFill>
-          <a:ln>
-            <a:solidFill>
-              <a:srgbClr val="555555"/>
-            </a:solidFill>
-          </a:ln>
-        </p:spPr>
-        <p:style>
-          <a:lnRef idx="1">
-            <a:schemeClr val="accent1"/>
-          </a:lnRef>
-          <a:fillRef idx="3">
-            <a:schemeClr val="accent1"/>
-          </a:fillRef>
-          <a:effectRef idx="2">
-            <a:schemeClr val="accent1"/>
-          </a:effectRef>
-          <a:fontRef idx="minor">
-            <a:schemeClr val="lt1"/>
-          </a:fontRef>
-        </p:style>
-        <p:txBody>
-          <a:bodyPr rtlCol="0" anchor="ctr" wrap="square"/>
-          <a:lstStyle/>
-          <a:p>
-            <a:pPr algn="l"/>
-            <a:r>
-              <a:rPr sz="1300" b="1" i="0">
-                <a:solidFill>
-                  <a:srgbClr val="FFFFFF"/>
-                </a:solidFill>
-              </a:rPr>
-              <a:t>void     PTP_CLOCK_ForceSet(uint64_t ns);    // standalone set (no PTP sync)</a:t>
-            </a:r>
-          </a:p>
-        </p:txBody>
-      </p:sp>
-      <p:sp>
-        <p:nvSpPr>
-          <p:cNvPr id="7" name="TextBox 6"/>
+              <a:t>Cyclic Fire — Zoom-In: Cross-Board Edge Delta</a:t>
+            </a:r>
+          </a:p>
+        </p:txBody>
+      </p:sp>
+      <p:pic>
+        <p:nvPicPr>
+          <p:cNvPr id="3" name="Picture 2" descr="Picture3.png"/>
+          <p:cNvPicPr>
+            <a:picLocks noChangeAspect="1"/>
+          </p:cNvPicPr>
+          <p:nvPr/>
+        </p:nvPicPr>
+        <p:blipFill>
+          <a:blip r:embed="rId2"/>
+          <a:stretch>
+            <a:fillRect/>
+          </a:stretch>
+        </p:blipFill>
+        <p:spPr>
+          <a:xfrm>
+            <a:off x="3054096" y="1325880"/>
+            <a:ext cx="6080760" cy="3657600"/>
+          </a:xfrm>
+          <a:prstGeom prst="rect">
+            <a:avLst/>
+          </a:prstGeom>
+        </p:spPr>
+      </p:pic>
+      <p:sp>
+        <p:nvSpPr>
+          <p:cNvPr id="4" name="TextBox 3"/>
           <p:cNvSpPr txBox="1"/>
           <p:nvPr/>
         </p:nvSpPr>
         <p:spPr>
           <a:xfrm>
-            <a:off x="457200" y="3794760"/>
-            <a:ext cx="11247120" cy="2560320"/>
+            <a:off x="548640" y="5074920"/>
+            <a:ext cx="11064240" cy="1463040"/>
           </a:xfrm>
           <a:prstGeom prst="rect">
             <a:avLst/>
@@ -10056,62 +10411,32 @@
           <a:lstStyle/>
           <a:p>
             <a:r>
-              <a:rPr sz="1400">
+              <a:rPr sz="1400" b="1">
                 <a:solidFill>
                   <a:srgbClr val="0B2E4F"/>
                 </a:solidFill>
               </a:rPr>
-              <a:t>• Any context — no SPI, no mutex, no blocking.  Safe from ISR and main loop.</a:t>
-            </a:r>
-          </a:p>
-          <a:p>
-            <a:r>
-              <a:rPr sz="1400">
+              <a:t>Zoomed Logic 2 view of a single MARKER pulse pair  (period_us = 5000 → 20 % duty, 40 Hz).</a:t>
+            </a:r>
+          </a:p>
+          <a:p>
+            <a:r>
+              <a:rPr sz="1400" b="0">
                 <a:solidFill>
                   <a:srgbClr val="0B2E4F"/>
                 </a:solidFill>
               </a:rPr>
-              <a:t>• Interpolates between anchors via TC0 (60 MHz) + drift IIR filter.</a:t>
-            </a:r>
-          </a:p>
-          <a:p>
-            <a:r>
-              <a:rPr sz="1400">
+              <a:t>Cursor tool ΔT = 34.98 µs — time between the Grandmaster rising edge (Ch0) and the Follower rising edge (Ch1).</a:t>
+            </a:r>
+          </a:p>
+          <a:p>
+            <a:r>
+              <a:rPr sz="1400" b="0">
                 <a:solidFill>
                   <a:srgbClr val="0B2E4F"/>
                 </a:solidFill>
               </a:rPr>
-              <a:t>• One anchor is refreshed on every PTP Sync (≈ 8 Hz).</a:t>
-            </a:r>
-          </a:p>
-          <a:p>
-            <a:r>
-              <a:rPr sz="1400">
-                <a:solidFill>
-                  <a:srgbClr val="0B2E4F"/>
-                </a:solidFill>
-              </a:rPr>
-              <a:t>• Returns 0 until the first anchor has been set — always check PTP_CLOCK_IsValid() first.</a:t>
-            </a:r>
-          </a:p>
-          <a:p>
-            <a:r>
-              <a:rPr sz="1400">
-                <a:solidFill>
-                  <a:srgbClr val="0B2E4F"/>
-                </a:solidFill>
-              </a:rPr>
-              <a:t>• GM and Follower expose the same API — application code is role-agnostic.</a:t>
-            </a:r>
-          </a:p>
-          <a:p>
-            <a:r>
-              <a:rPr sz="1400">
-                <a:solidFill>
-                  <a:srgbClr val="0B2E4F"/>
-                </a:solidFill>
-              </a:rPr>
-              <a:t>• Resolution ≈ 16.7 ns (TC0 tick); short-term jitter dominated by filter wander.</a:t>
+              <a:t>Well inside the 100 µs product window — this single wire-level frame corroborates the automated 10 µs median statistic.</a:t>
             </a:r>
           </a:p>
         </p:txBody>
@@ -10150,21 +10475,233 @@
           <a:lstStyle/>
           <a:p>
             <a:r>
-              <a:t>PTP_CLOCK — Logging Firmware Events</a:t>
-            </a:r>
-          </a:p>
-        </p:txBody>
-      </p:sp>
-      <p:sp>
-        <p:nvSpPr>
-          <p:cNvPr id="3" name="TextBox 2"/>
+              <a:t>PTP_CLOCK — Application API for PTP Time</a:t>
+            </a:r>
+          </a:p>
+        </p:txBody>
+      </p:sp>
+      <p:sp>
+        <p:nvSpPr>
+          <p:cNvPr id="3" name="Rounded Rectangle 2"/>
+          <p:cNvSpPr/>
+          <p:nvPr/>
+        </p:nvSpPr>
+        <p:spPr>
+          <a:xfrm>
+            <a:off x="457200" y="1417320"/>
+            <a:ext cx="11247120" cy="502920"/>
+          </a:xfrm>
+          <a:prstGeom prst="roundRect">
+            <a:avLst/>
+          </a:prstGeom>
+          <a:solidFill>
+            <a:srgbClr val="0B2E4F"/>
+          </a:solidFill>
+          <a:ln>
+            <a:solidFill>
+              <a:srgbClr val="0B2E4F"/>
+            </a:solidFill>
+          </a:ln>
+        </p:spPr>
+        <p:style>
+          <a:lnRef idx="1">
+            <a:schemeClr val="accent1"/>
+          </a:lnRef>
+          <a:fillRef idx="3">
+            <a:schemeClr val="accent1"/>
+          </a:fillRef>
+          <a:effectRef idx="2">
+            <a:schemeClr val="accent1"/>
+          </a:effectRef>
+          <a:fontRef idx="minor">
+            <a:schemeClr val="lt1"/>
+          </a:fontRef>
+        </p:style>
+        <p:txBody>
+          <a:bodyPr rtlCol="0" anchor="ctr" wrap="square"/>
+          <a:lstStyle/>
+          <a:p>
+            <a:pPr algn="l"/>
+            <a:r>
+              <a:rPr sz="1300" b="1" i="0">
+                <a:solidFill>
+                  <a:srgbClr val="FFFFFF"/>
+                </a:solidFill>
+              </a:rPr>
+              <a:t>uint64_t PTP_CLOCK_GetTime_ns(void);         // current wall-clock, interpolated</a:t>
+            </a:r>
+          </a:p>
+        </p:txBody>
+      </p:sp>
+      <p:sp>
+        <p:nvSpPr>
+          <p:cNvPr id="4" name="Rounded Rectangle 3"/>
+          <p:cNvSpPr/>
+          <p:nvPr/>
+        </p:nvSpPr>
+        <p:spPr>
+          <a:xfrm>
+            <a:off x="457200" y="1965960"/>
+            <a:ext cx="11247120" cy="502920"/>
+          </a:xfrm>
+          <a:prstGeom prst="roundRect">
+            <a:avLst/>
+          </a:prstGeom>
+          <a:solidFill>
+            <a:srgbClr val="0B2E4F"/>
+          </a:solidFill>
+          <a:ln>
+            <a:solidFill>
+              <a:srgbClr val="0B2E4F"/>
+            </a:solidFill>
+          </a:ln>
+        </p:spPr>
+        <p:style>
+          <a:lnRef idx="1">
+            <a:schemeClr val="accent1"/>
+          </a:lnRef>
+          <a:fillRef idx="3">
+            <a:schemeClr val="accent1"/>
+          </a:fillRef>
+          <a:effectRef idx="2">
+            <a:schemeClr val="accent1"/>
+          </a:effectRef>
+          <a:fontRef idx="minor">
+            <a:schemeClr val="lt1"/>
+          </a:fontRef>
+        </p:style>
+        <p:txBody>
+          <a:bodyPr rtlCol="0" anchor="ctr" wrap="square"/>
+          <a:lstStyle/>
+          <a:p>
+            <a:pPr algn="l"/>
+            <a:r>
+              <a:rPr sz="1300" b="1" i="0">
+                <a:solidFill>
+                  <a:srgbClr val="FFFFFF"/>
+                </a:solidFill>
+              </a:rPr>
+              <a:t>bool     PTP_CLOCK_IsValid(void);            // true once first anchor was set</a:t>
+            </a:r>
+          </a:p>
+        </p:txBody>
+      </p:sp>
+      <p:sp>
+        <p:nvSpPr>
+          <p:cNvPr id="5" name="Rounded Rectangle 4"/>
+          <p:cNvSpPr/>
+          <p:nvPr/>
+        </p:nvSpPr>
+        <p:spPr>
+          <a:xfrm>
+            <a:off x="457200" y="2514600"/>
+            <a:ext cx="11247120" cy="502920"/>
+          </a:xfrm>
+          <a:prstGeom prst="roundRect">
+            <a:avLst/>
+          </a:prstGeom>
+          <a:solidFill>
+            <a:srgbClr val="555555"/>
+          </a:solidFill>
+          <a:ln>
+            <a:solidFill>
+              <a:srgbClr val="555555"/>
+            </a:solidFill>
+          </a:ln>
+        </p:spPr>
+        <p:style>
+          <a:lnRef idx="1">
+            <a:schemeClr val="accent1"/>
+          </a:lnRef>
+          <a:fillRef idx="3">
+            <a:schemeClr val="accent1"/>
+          </a:fillRef>
+          <a:effectRef idx="2">
+            <a:schemeClr val="accent1"/>
+          </a:effectRef>
+          <a:fontRef idx="minor">
+            <a:schemeClr val="lt1"/>
+          </a:fontRef>
+        </p:style>
+        <p:txBody>
+          <a:bodyPr rtlCol="0" anchor="ctr" wrap="square"/>
+          <a:lstStyle/>
+          <a:p>
+            <a:pPr algn="l"/>
+            <a:r>
+              <a:rPr sz="1300" b="1" i="0">
+                <a:solidFill>
+                  <a:srgbClr val="FFFFFF"/>
+                </a:solidFill>
+              </a:rPr>
+              <a:t>int32_t  PTP_CLOCK_GetDriftPPB(void);        // measured MCU vs PTP rate offset</a:t>
+            </a:r>
+          </a:p>
+        </p:txBody>
+      </p:sp>
+      <p:sp>
+        <p:nvSpPr>
+          <p:cNvPr id="6" name="Rounded Rectangle 5"/>
+          <p:cNvSpPr/>
+          <p:nvPr/>
+        </p:nvSpPr>
+        <p:spPr>
+          <a:xfrm>
+            <a:off x="457200" y="3063240"/>
+            <a:ext cx="11247120" cy="502920"/>
+          </a:xfrm>
+          <a:prstGeom prst="roundRect">
+            <a:avLst/>
+          </a:prstGeom>
+          <a:solidFill>
+            <a:srgbClr val="555555"/>
+          </a:solidFill>
+          <a:ln>
+            <a:solidFill>
+              <a:srgbClr val="555555"/>
+            </a:solidFill>
+          </a:ln>
+        </p:spPr>
+        <p:style>
+          <a:lnRef idx="1">
+            <a:schemeClr val="accent1"/>
+          </a:lnRef>
+          <a:fillRef idx="3">
+            <a:schemeClr val="accent1"/>
+          </a:fillRef>
+          <a:effectRef idx="2">
+            <a:schemeClr val="accent1"/>
+          </a:effectRef>
+          <a:fontRef idx="minor">
+            <a:schemeClr val="lt1"/>
+          </a:fontRef>
+        </p:style>
+        <p:txBody>
+          <a:bodyPr rtlCol="0" anchor="ctr" wrap="square"/>
+          <a:lstStyle/>
+          <a:p>
+            <a:pPr algn="l"/>
+            <a:r>
+              <a:rPr sz="1300" b="1" i="0">
+                <a:solidFill>
+                  <a:srgbClr val="FFFFFF"/>
+                </a:solidFill>
+              </a:rPr>
+              <a:t>void     PTP_CLOCK_ForceSet(uint64_t ns);    // standalone set (no PTP sync)</a:t>
+            </a:r>
+          </a:p>
+        </p:txBody>
+      </p:sp>
+      <p:sp>
+        <p:nvSpPr>
+          <p:cNvPr id="7" name="TextBox 6"/>
           <p:cNvSpPr txBox="1"/>
           <p:nvPr/>
         </p:nvSpPr>
         <p:spPr>
           <a:xfrm>
-            <a:off x="457200" y="1371600"/>
-            <a:ext cx="11247120" cy="3474720"/>
+            <a:off x="457200" y="3794760"/>
+            <a:ext cx="11247120" cy="2560320"/>
           </a:xfrm>
           <a:prstGeom prst="rect">
             <a:avLst/>
@@ -10182,9 +10719,8 @@
                 <a:solidFill>
                   <a:srgbClr val="0B2E4F"/>
                 </a:solidFill>
-                <a:latin typeface="Consolas"/>
-              </a:rPr>
-              <a:t>#include "ptp_clock.h"</a:t>
+              </a:rPr>
+              <a:t>• Any context — no SPI, no mutex, no blocking.  Safe from ISR and main loop.</a:t>
             </a:r>
           </a:p>
           <a:p>
@@ -10193,9 +10729,8 @@
                 <a:solidFill>
                   <a:srgbClr val="0B2E4F"/>
                 </a:solidFill>
-                <a:latin typeface="Consolas"/>
-              </a:rPr>
-              <a:t> </a:t>
+              </a:rPr>
+              <a:t>• Interpolates between anchors via TC0 (60 MHz) + drift IIR filter.</a:t>
             </a:r>
           </a:p>
           <a:p>
@@ -10204,9 +10739,8 @@
                 <a:solidFill>
                   <a:srgbClr val="0B2E4F"/>
                 </a:solidFill>
-                <a:latin typeface="Consolas"/>
-              </a:rPr>
-              <a:t>static void on_frame_received(void) {</a:t>
+              </a:rPr>
+              <a:t>• One anchor is refreshed on every PTP Sync (≈ 8 Hz).</a:t>
             </a:r>
           </a:p>
           <a:p>
@@ -10215,9 +10749,8 @@
                 <a:solidFill>
                   <a:srgbClr val="0B2E4F"/>
                 </a:solidFill>
-                <a:latin typeface="Consolas"/>
-              </a:rPr>
-              <a:t>    uint64_t t_ns = PTP_CLOCK_GetTime_ns();     // synchronised wall-clock</a:t>
+              </a:rPr>
+              <a:t>• Returns 0 until the first anchor has been set — always check PTP_CLOCK_IsValid() first.</a:t>
             </a:r>
           </a:p>
           <a:p>
@@ -10226,9 +10759,8 @@
                 <a:solidFill>
                   <a:srgbClr val="0B2E4F"/>
                 </a:solidFill>
-                <a:latin typeface="Consolas"/>
-              </a:rPr>
-              <a:t>    SYS_CONSOLE_PRINT("RX %llu.%09llu  seq=%u\r\n",</a:t>
+              </a:rPr>
+              <a:t>• GM and Follower expose the same API — application code is role-agnostic.</a:t>
             </a:r>
           </a:p>
           <a:p>
@@ -10237,170 +10769,8 @@
                 <a:solidFill>
                   <a:srgbClr val="0B2E4F"/>
                 </a:solidFill>
-                <a:latin typeface="Consolas"/>
-              </a:rPr>
-              <a:t>                      t_ns / 1000000000ull,</a:t>
-            </a:r>
-          </a:p>
-          <a:p>
-            <a:r>
-              <a:rPr sz="1400">
-                <a:solidFill>
-                  <a:srgbClr val="0B2E4F"/>
-                </a:solidFill>
-                <a:latin typeface="Consolas"/>
-              </a:rPr>
-              <a:t>                      t_ns % 1000000000ull,</a:t>
-            </a:r>
-          </a:p>
-          <a:p>
-            <a:r>
-              <a:rPr sz="1400">
-                <a:solidFill>
-                  <a:srgbClr val="0B2E4F"/>
-                </a:solidFill>
-                <a:latin typeface="Consolas"/>
-              </a:rPr>
-              <a:t>                      rx_seq);</a:t>
-            </a:r>
-          </a:p>
-          <a:p>
-            <a:r>
-              <a:rPr sz="1400">
-                <a:solidFill>
-                  <a:srgbClr val="0B2E4F"/>
-                </a:solidFill>
-                <a:latin typeface="Consolas"/>
-              </a:rPr>
-              <a:t>}</a:t>
-            </a:r>
-          </a:p>
-          <a:p>
-            <a:r>
-              <a:rPr sz="1400">
-                <a:solidFill>
-                  <a:srgbClr val="0B2E4F"/>
-                </a:solidFill>
-                <a:latin typeface="Consolas"/>
-              </a:rPr>
-              <a:t> </a:t>
-            </a:r>
-          </a:p>
-          <a:p>
-            <a:r>
-              <a:rPr sz="1400">
-                <a:solidFill>
-                  <a:srgbClr val="0B2E4F"/>
-                </a:solidFill>
-                <a:latin typeface="Consolas"/>
-              </a:rPr>
-              <a:t>void actuator_fire(uint64_t at_ns) {</a:t>
-            </a:r>
-          </a:p>
-          <a:p>
-            <a:r>
-              <a:rPr sz="1400">
-                <a:solidFill>
-                  <a:srgbClr val="0B2E4F"/>
-                </a:solidFill>
-                <a:latin typeface="Consolas"/>
-              </a:rPr>
-              <a:t>    while (PTP_CLOCK_GetTime_ns() &lt; at_ns) { /* tight spin */ }</a:t>
-            </a:r>
-          </a:p>
-          <a:p>
-            <a:r>
-              <a:rPr sz="1400">
-                <a:solidFill>
-                  <a:srgbClr val="0B2E4F"/>
-                </a:solidFill>
-                <a:latin typeface="Consolas"/>
-              </a:rPr>
-              <a:t>    GPIO_PinSet(ACT_PIN);</a:t>
-            </a:r>
-          </a:p>
-          <a:p>
-            <a:r>
-              <a:rPr sz="1400">
-                <a:solidFill>
-                  <a:srgbClr val="0B2E4F"/>
-                </a:solidFill>
-                <a:latin typeface="Consolas"/>
-              </a:rPr>
-              <a:t>}</a:t>
-            </a:r>
-          </a:p>
-        </p:txBody>
-      </p:sp>
-      <p:sp>
-        <p:nvSpPr>
-          <p:cNvPr id="4" name="TextBox 3"/>
-          <p:cNvSpPr txBox="1"/>
-          <p:nvPr/>
-        </p:nvSpPr>
-        <p:spPr>
-          <a:xfrm>
-            <a:off x="457200" y="4846320"/>
-            <a:ext cx="11247120" cy="1645920"/>
-          </a:xfrm>
-          <a:prstGeom prst="rect">
-            <a:avLst/>
-          </a:prstGeom>
-          <a:noFill/>
-        </p:spPr>
-        <p:txBody>
-          <a:bodyPr wrap="square">
-            <a:spAutoFit/>
-          </a:bodyPr>
-          <a:lstStyle/>
-          <a:p>
-            <a:r>
-              <a:rPr sz="1300">
-                <a:solidFill>
-                  <a:srgbClr val="0B2E4F"/>
-                </a:solidFill>
-              </a:rPr>
-              <a:t>• Pattern: call PTP_CLOCK_GetTime_ns() at the moment of interest, store alongside the event.</a:t>
-            </a:r>
-          </a:p>
-          <a:p>
-            <a:r>
-              <a:rPr sz="1300">
-                <a:solidFill>
-                  <a:srgbClr val="0B2E4F"/>
-                </a:solidFill>
-              </a:rPr>
-              <a:t>• Log to console, ring buffer, or CLI — the timestamp is portable across boards.</a:t>
-            </a:r>
-          </a:p>
-          <a:p>
-            <a:r>
-              <a:rPr sz="1300">
-                <a:solidFill>
-                  <a:srgbClr val="0B2E4F"/>
-                </a:solidFill>
-              </a:rPr>
-              <a:t>• For event correlation across nodes: compare two logs directly; no relative-time conversion.</a:t>
-            </a:r>
-          </a:p>
-          <a:p>
-            <a:r>
-              <a:rPr sz="1300">
-                <a:solidFill>
-                  <a:srgbClr val="0B2E4F"/>
-                </a:solidFill>
-              </a:rPr>
-              <a:t>• For scheduled actions: give the target time to the action, spin or sleep until reached.</a:t>
-            </a:r>
-          </a:p>
-          <a:p>
-            <a:r>
-              <a:rPr sz="1300">
-                <a:solidFill>
-                  <a:srgbClr val="0B2E4F"/>
-                </a:solidFill>
-              </a:rPr>
-              <a:t>• Always guard with PTP_CLOCK_IsValid() during startup to avoid 0-timestamps.</a:t>
+              </a:rPr>
+              <a:t>• Resolution ≈ 16.7 ns (TC0 tick); short-term jitter dominated by filter wander.</a:t>
             </a:r>
           </a:p>
         </p:txBody>
@@ -10439,107 +10809,257 @@
           <a:lstStyle/>
           <a:p>
             <a:r>
-              <a:t>PTP_CLOCK — Cross-Board Correlation</a:t>
-            </a:r>
-          </a:p>
-        </p:txBody>
-      </p:sp>
-      <p:sp>
-        <p:nvSpPr>
-          <p:cNvPr id="3" name="Content Placeholder 2"/>
-          <p:cNvSpPr>
-            <a:spLocks noGrp="1"/>
-          </p:cNvSpPr>
-          <p:nvPr>
-            <p:ph idx="13" sz="quarter"/>
-          </p:nvPr>
-        </p:nvSpPr>
-        <p:spPr/>
-        <p:txBody>
-          <a:bodyPr/>
-          <a:lstStyle/>
-          <a:p>
-            <a:pPr/>
-            <a:r>
-              <a:rPr sz="1800"/>
-              <a:t>Every event stamped with PTP_CLOCK_GetTime_ns() lives on a common timeline</a:t>
-            </a:r>
-          </a:p>
-          <a:p>
-            <a:pPr/>
-            <a:r>
-              <a:rPr sz="1800"/>
-              <a:t>Typical workflows the API enables:</a:t>
-            </a:r>
-          </a:p>
-          <a:p>
-            <a:pPr lvl="1"/>
-            <a:r>
-              <a:rPr sz="1600"/>
-              <a:t>Distributed trace — collect logs from N nodes, sort by PTP timestamp</a:t>
-            </a:r>
-          </a:p>
-          <a:p>
-            <a:pPr lvl="1"/>
-            <a:r>
-              <a:rPr sz="1600"/>
-              <a:t>Race analysis — precise order of events on nodes A, B, C</a:t>
-            </a:r>
-          </a:p>
-          <a:p>
-            <a:pPr lvl="1"/>
-            <a:r>
-              <a:rPr sz="1600"/>
-              <a:t>Latency measurement — PTP_CLOCK_ns at TX on A vs RX on B</a:t>
-            </a:r>
-          </a:p>
-          <a:p>
-            <a:pPr lvl="1"/>
-            <a:r>
-              <a:rPr sz="1600"/>
-              <a:t>Scheduled output — compute target ns, hand to application, pin fires synchronously</a:t>
-            </a:r>
-          </a:p>
-          <a:p>
-            <a:pPr lvl="1"/>
-            <a:r>
-              <a:rPr sz="1600"/>
-              <a:t>Drift surveillance — log PTP_CLOCK_GetDriftPPB() over long runs</a:t>
-            </a:r>
-          </a:p>
-          <a:p>
-            <a:pPr/>
-            <a:r>
-              <a:rPr sz="1800"/>
-              <a:t>Accuracy envelope (current firmware):</a:t>
-            </a:r>
-          </a:p>
-          <a:p>
-            <a:pPr lvl="1"/>
-            <a:r>
-              <a:rPr sz="1600"/>
-              <a:t>Static bias between boards: ~10 µs after calibration</a:t>
-            </a:r>
-          </a:p>
-          <a:p>
-            <a:pPr lvl="1"/>
-            <a:r>
-              <a:rPr sz="1600"/>
-              <a:t>Short-term wander: ~40 µs RMS within a 0.7 s window</a:t>
-            </a:r>
-          </a:p>
-          <a:p>
-            <a:pPr lvl="1"/>
-            <a:r>
-              <a:rPr sz="1600"/>
-              <a:t>Long-term rate agreement: 1.2 ppm over 60 s</a:t>
-            </a:r>
-          </a:p>
-          <a:p>
-            <a:pPr/>
-            <a:r>
-              <a:rPr sz="1800"/>
-              <a:t>Cyclic Fire is the canonical consumer of this API — any feature using PTP time follows the same pattern</a:t>
+              <a:t>PTP_CLOCK — Logging Firmware Events</a:t>
+            </a:r>
+          </a:p>
+        </p:txBody>
+      </p:sp>
+      <p:sp>
+        <p:nvSpPr>
+          <p:cNvPr id="3" name="TextBox 2"/>
+          <p:cNvSpPr txBox="1"/>
+          <p:nvPr/>
+        </p:nvSpPr>
+        <p:spPr>
+          <a:xfrm>
+            <a:off x="457200" y="1371600"/>
+            <a:ext cx="11247120" cy="3474720"/>
+          </a:xfrm>
+          <a:prstGeom prst="rect">
+            <a:avLst/>
+          </a:prstGeom>
+          <a:noFill/>
+        </p:spPr>
+        <p:txBody>
+          <a:bodyPr wrap="square">
+            <a:spAutoFit/>
+          </a:bodyPr>
+          <a:lstStyle/>
+          <a:p>
+            <a:r>
+              <a:rPr sz="1400">
+                <a:solidFill>
+                  <a:srgbClr val="0B2E4F"/>
+                </a:solidFill>
+                <a:latin typeface="Consolas"/>
+              </a:rPr>
+              <a:t>#include "ptp_clock.h"</a:t>
+            </a:r>
+          </a:p>
+          <a:p>
+            <a:r>
+              <a:rPr sz="1400">
+                <a:solidFill>
+                  <a:srgbClr val="0B2E4F"/>
+                </a:solidFill>
+                <a:latin typeface="Consolas"/>
+              </a:rPr>
+              <a:t> </a:t>
+            </a:r>
+          </a:p>
+          <a:p>
+            <a:r>
+              <a:rPr sz="1400">
+                <a:solidFill>
+                  <a:srgbClr val="0B2E4F"/>
+                </a:solidFill>
+                <a:latin typeface="Consolas"/>
+              </a:rPr>
+              <a:t>static void on_frame_received(void) {</a:t>
+            </a:r>
+          </a:p>
+          <a:p>
+            <a:r>
+              <a:rPr sz="1400">
+                <a:solidFill>
+                  <a:srgbClr val="0B2E4F"/>
+                </a:solidFill>
+                <a:latin typeface="Consolas"/>
+              </a:rPr>
+              <a:t>    uint64_t t_ns = PTP_CLOCK_GetTime_ns();     // synchronised wall-clock</a:t>
+            </a:r>
+          </a:p>
+          <a:p>
+            <a:r>
+              <a:rPr sz="1400">
+                <a:solidFill>
+                  <a:srgbClr val="0B2E4F"/>
+                </a:solidFill>
+                <a:latin typeface="Consolas"/>
+              </a:rPr>
+              <a:t>    SYS_CONSOLE_PRINT("RX %llu.%09llu  seq=%u\r\n",</a:t>
+            </a:r>
+          </a:p>
+          <a:p>
+            <a:r>
+              <a:rPr sz="1400">
+                <a:solidFill>
+                  <a:srgbClr val="0B2E4F"/>
+                </a:solidFill>
+                <a:latin typeface="Consolas"/>
+              </a:rPr>
+              <a:t>                      t_ns / 1000000000ull,</a:t>
+            </a:r>
+          </a:p>
+          <a:p>
+            <a:r>
+              <a:rPr sz="1400">
+                <a:solidFill>
+                  <a:srgbClr val="0B2E4F"/>
+                </a:solidFill>
+                <a:latin typeface="Consolas"/>
+              </a:rPr>
+              <a:t>                      t_ns % 1000000000ull,</a:t>
+            </a:r>
+          </a:p>
+          <a:p>
+            <a:r>
+              <a:rPr sz="1400">
+                <a:solidFill>
+                  <a:srgbClr val="0B2E4F"/>
+                </a:solidFill>
+                <a:latin typeface="Consolas"/>
+              </a:rPr>
+              <a:t>                      rx_seq);</a:t>
+            </a:r>
+          </a:p>
+          <a:p>
+            <a:r>
+              <a:rPr sz="1400">
+                <a:solidFill>
+                  <a:srgbClr val="0B2E4F"/>
+                </a:solidFill>
+                <a:latin typeface="Consolas"/>
+              </a:rPr>
+              <a:t>}</a:t>
+            </a:r>
+          </a:p>
+          <a:p>
+            <a:r>
+              <a:rPr sz="1400">
+                <a:solidFill>
+                  <a:srgbClr val="0B2E4F"/>
+                </a:solidFill>
+                <a:latin typeface="Consolas"/>
+              </a:rPr>
+              <a:t> </a:t>
+            </a:r>
+          </a:p>
+          <a:p>
+            <a:r>
+              <a:rPr sz="1400">
+                <a:solidFill>
+                  <a:srgbClr val="0B2E4F"/>
+                </a:solidFill>
+                <a:latin typeface="Consolas"/>
+              </a:rPr>
+              <a:t>void actuator_fire(uint64_t at_ns) {</a:t>
+            </a:r>
+          </a:p>
+          <a:p>
+            <a:r>
+              <a:rPr sz="1400">
+                <a:solidFill>
+                  <a:srgbClr val="0B2E4F"/>
+                </a:solidFill>
+                <a:latin typeface="Consolas"/>
+              </a:rPr>
+              <a:t>    while (PTP_CLOCK_GetTime_ns() &lt; at_ns) { /* tight spin */ }</a:t>
+            </a:r>
+          </a:p>
+          <a:p>
+            <a:r>
+              <a:rPr sz="1400">
+                <a:solidFill>
+                  <a:srgbClr val="0B2E4F"/>
+                </a:solidFill>
+                <a:latin typeface="Consolas"/>
+              </a:rPr>
+              <a:t>    GPIO_PinSet(ACT_PIN);</a:t>
+            </a:r>
+          </a:p>
+          <a:p>
+            <a:r>
+              <a:rPr sz="1400">
+                <a:solidFill>
+                  <a:srgbClr val="0B2E4F"/>
+                </a:solidFill>
+                <a:latin typeface="Consolas"/>
+              </a:rPr>
+              <a:t>}</a:t>
+            </a:r>
+          </a:p>
+        </p:txBody>
+      </p:sp>
+      <p:sp>
+        <p:nvSpPr>
+          <p:cNvPr id="4" name="TextBox 3"/>
+          <p:cNvSpPr txBox="1"/>
+          <p:nvPr/>
+        </p:nvSpPr>
+        <p:spPr>
+          <a:xfrm>
+            <a:off x="457200" y="4846320"/>
+            <a:ext cx="11247120" cy="1645920"/>
+          </a:xfrm>
+          <a:prstGeom prst="rect">
+            <a:avLst/>
+          </a:prstGeom>
+          <a:noFill/>
+        </p:spPr>
+        <p:txBody>
+          <a:bodyPr wrap="square">
+            <a:spAutoFit/>
+          </a:bodyPr>
+          <a:lstStyle/>
+          <a:p>
+            <a:r>
+              <a:rPr sz="1300">
+                <a:solidFill>
+                  <a:srgbClr val="0B2E4F"/>
+                </a:solidFill>
+              </a:rPr>
+              <a:t>• Pattern: call PTP_CLOCK_GetTime_ns() at the moment of interest, store alongside the event.</a:t>
+            </a:r>
+          </a:p>
+          <a:p>
+            <a:r>
+              <a:rPr sz="1300">
+                <a:solidFill>
+                  <a:srgbClr val="0B2E4F"/>
+                </a:solidFill>
+              </a:rPr>
+              <a:t>• Log to console, ring buffer, or CLI — the timestamp is portable across boards.</a:t>
+            </a:r>
+          </a:p>
+          <a:p>
+            <a:r>
+              <a:rPr sz="1300">
+                <a:solidFill>
+                  <a:srgbClr val="0B2E4F"/>
+                </a:solidFill>
+              </a:rPr>
+              <a:t>• For event correlation across nodes: compare two logs directly; no relative-time conversion.</a:t>
+            </a:r>
+          </a:p>
+          <a:p>
+            <a:r>
+              <a:rPr sz="1300">
+                <a:solidFill>
+                  <a:srgbClr val="0B2E4F"/>
+                </a:solidFill>
+              </a:rPr>
+              <a:t>• For scheduled actions: give the target time to the action, spin or sleep until reached.</a:t>
+            </a:r>
+          </a:p>
+          <a:p>
+            <a:r>
+              <a:rPr sz="1300">
+                <a:solidFill>
+                  <a:srgbClr val="0B2E4F"/>
+                </a:solidFill>
+              </a:rPr>
+              <a:t>• Always guard with PTP_CLOCK_IsValid() during startup to avoid 0-timestamps.</a:t>
             </a:r>
           </a:p>
         </p:txBody>
@@ -10578,7 +11098,7 @@
           <a:lstStyle/>
           <a:p>
             <a:r>
-              <a:t>Results — Methodology</a:t>
+              <a:t>PTP_CLOCK — Cross-Board Correlation</a:t>
             </a:r>
           </a:p>
         </p:txBody>
@@ -10601,63 +11121,84 @@
             <a:pPr/>
             <a:r>
               <a:rPr sz="1800"/>
-              <a:t>Saleae Logic 8 — Ch0 = GM board PD10, Ch1 = Follower board PD10</a:t>
+              <a:t>Every event stamped with PTP_CLOCK_GetTime_ns() lives on a common timeline</a:t>
             </a:r>
           </a:p>
           <a:p>
             <a:pPr/>
             <a:r>
               <a:rPr sz="1800"/>
-              <a:t>cyclic_fire_hw_test.py orchestrates the full run:</a:t>
+              <a:t>Typical workflows the API enables:</a:t>
             </a:r>
           </a:p>
           <a:p>
             <a:pPr lvl="1"/>
             <a:r>
               <a:rPr sz="1600"/>
-              <a:t>Reset both boards → wait for FINE PTP state</a:t>
+              <a:t>Distributed trace — collect logs from N nodes, sort by PTP timestamp</a:t>
             </a:r>
           </a:p>
           <a:p>
             <a:pPr lvl="1"/>
             <a:r>
               <a:rPr sz="1600"/>
-              <a:t>Issue cyclic_start with a shared future anchor_ns</a:t>
+              <a:t>Race analysis — precise order of events on nodes A, B, C</a:t>
             </a:r>
           </a:p>
           <a:p>
             <a:pPr lvl="1"/>
             <a:r>
               <a:rPr sz="1600"/>
-              <a:t>Capture ~0.7 s via the Logic 2 scripting socket</a:t>
+              <a:t>Latency measurement — PTP_CLOCK_ns at TX on A vs RX on B</a:t>
             </a:r>
           </a:p>
           <a:p>
             <a:pPr lvl="1"/>
             <a:r>
               <a:rPr sz="1600"/>
-              <a:t>Extract rising edges, pair cross-board edges, compute delta distribution</a:t>
+              <a:t>Scheduled output — compute target ns, hand to application, pin fires synchronously</a:t>
+            </a:r>
+          </a:p>
+          <a:p>
+            <a:pPr lvl="1"/>
+            <a:r>
+              <a:rPr sz="1600"/>
+              <a:t>Drift surveillance — log PTP_CLOCK_GetDriftPPB() over long runs</a:t>
             </a:r>
           </a:p>
           <a:p>
             <a:pPr/>
             <a:r>
               <a:rPr sz="1800"/>
-              <a:t>Reported statistics: median, MAD, extrema, per-edge CSV dump</a:t>
+              <a:t>Accuracy envelope (current firmware):</a:t>
+            </a:r>
+          </a:p>
+          <a:p>
+            <a:pPr lvl="1"/>
+            <a:r>
+              <a:rPr sz="1600"/>
+              <a:t>Static bias between boards: ~10 µs after calibration</a:t>
+            </a:r>
+          </a:p>
+          <a:p>
+            <a:pPr lvl="1"/>
+            <a:r>
+              <a:rPr sz="1600"/>
+              <a:t>Short-term wander: ~40 µs RMS within a 0.7 s window</a:t>
+            </a:r>
+          </a:p>
+          <a:p>
+            <a:pPr lvl="1"/>
+            <a:r>
+              <a:rPr sz="1600"/>
+              <a:t>Long-term rate agreement: 1.2 ppm over 60 s</a:t>
             </a:r>
           </a:p>
           <a:p>
             <a:pPr/>
             <a:r>
               <a:rPr sz="1800"/>
-              <a:t>Pass gate:  |median| ≤ 50 µs  AND  MAD ≤ 50 µs    →    sum ≤ 100 µs window</a:t>
-            </a:r>
-          </a:p>
-          <a:p>
-            <a:pPr/>
-            <a:r>
-              <a:rPr sz="1800"/>
-              <a:t>Spot-check: Logic 2 cursor measurements cross-validated the script output</a:t>
+              <a:t>Cyclic Fire is the canonical consumer of this API — any feature using PTP time follows the same pattern</a:t>
             </a:r>
           </a:p>
         </p:txBody>
@@ -11241,242 +11782,86 @@
           <a:lstStyle/>
           <a:p>
             <a:r>
-              <a:t>Results — Measurement Summary</a:t>
-            </a:r>
-          </a:p>
-        </p:txBody>
-      </p:sp>
-      <p:sp>
-        <p:nvSpPr>
-          <p:cNvPr id="3" name="Rounded Rectangle 2"/>
-          <p:cNvSpPr/>
-          <p:nvPr/>
-        </p:nvSpPr>
-        <p:spPr>
-          <a:xfrm>
-            <a:off x="640080" y="1737360"/>
-            <a:ext cx="3383280" cy="1645920"/>
-          </a:xfrm>
-          <a:prstGeom prst="roundRect">
-            <a:avLst/>
-          </a:prstGeom>
-          <a:solidFill>
-            <a:srgbClr val="2CA02C"/>
-          </a:solidFill>
-          <a:ln>
-            <a:solidFill>
-              <a:srgbClr val="2CA02C"/>
-            </a:solidFill>
-          </a:ln>
-        </p:spPr>
-        <p:style>
-          <a:lnRef idx="1">
-            <a:schemeClr val="accent1"/>
-          </a:lnRef>
-          <a:fillRef idx="3">
-            <a:schemeClr val="accent1"/>
-          </a:fillRef>
-          <a:effectRef idx="2">
-            <a:schemeClr val="accent1"/>
-          </a:effectRef>
-          <a:fontRef idx="minor">
-            <a:schemeClr val="lt1"/>
-          </a:fontRef>
-        </p:style>
-        <p:txBody>
-          <a:bodyPr rtlCol="0" anchor="ctr" wrap="square"/>
-          <a:lstStyle/>
-          <a:p>
-            <a:pPr algn="l"/>
-            <a:r>
-              <a:rPr sz="2600" b="1" i="0">
-                <a:solidFill>
-                  <a:srgbClr val="FFFFFF"/>
-                </a:solidFill>
-              </a:rPr>
-              <a:t>Median
-+10 µs</a:t>
-            </a:r>
-          </a:p>
-        </p:txBody>
-      </p:sp>
-      <p:sp>
-        <p:nvSpPr>
-          <p:cNvPr id="4" name="Rounded Rectangle 3"/>
-          <p:cNvSpPr/>
-          <p:nvPr/>
-        </p:nvSpPr>
-        <p:spPr>
-          <a:xfrm>
-            <a:off x="4297680" y="1737360"/>
-            <a:ext cx="3383280" cy="1645920"/>
-          </a:xfrm>
-          <a:prstGeom prst="roundRect">
-            <a:avLst/>
-          </a:prstGeom>
-          <a:solidFill>
-            <a:srgbClr val="1F77B4"/>
-          </a:solidFill>
-          <a:ln>
-            <a:solidFill>
-              <a:srgbClr val="1F77B4"/>
-            </a:solidFill>
-          </a:ln>
-        </p:spPr>
-        <p:style>
-          <a:lnRef idx="1">
-            <a:schemeClr val="accent1"/>
-          </a:lnRef>
-          <a:fillRef idx="3">
-            <a:schemeClr val="accent1"/>
-          </a:fillRef>
-          <a:effectRef idx="2">
-            <a:schemeClr val="accent1"/>
-          </a:effectRef>
-          <a:fontRef idx="minor">
-            <a:schemeClr val="lt1"/>
-          </a:fontRef>
-        </p:style>
-        <p:txBody>
-          <a:bodyPr rtlCol="0" anchor="ctr" wrap="square"/>
-          <a:lstStyle/>
-          <a:p>
-            <a:pPr algn="l"/>
-            <a:r>
-              <a:rPr sz="2600" b="1" i="0">
-                <a:solidFill>
-                  <a:srgbClr val="FFFFFF"/>
-                </a:solidFill>
-              </a:rPr>
-              <a:t>MAD
-38 µs</a:t>
-            </a:r>
-          </a:p>
-        </p:txBody>
-      </p:sp>
-      <p:sp>
-        <p:nvSpPr>
-          <p:cNvPr id="5" name="Rounded Rectangle 4"/>
-          <p:cNvSpPr/>
-          <p:nvPr/>
-        </p:nvSpPr>
-        <p:spPr>
-          <a:xfrm>
-            <a:off x="7955279" y="1737360"/>
-            <a:ext cx="3383280" cy="1645920"/>
-          </a:xfrm>
-          <a:prstGeom prst="roundRect">
-            <a:avLst/>
-          </a:prstGeom>
-          <a:solidFill>
-            <a:srgbClr val="2CA02C"/>
-          </a:solidFill>
-          <a:ln>
-            <a:solidFill>
-              <a:srgbClr val="2CA02C"/>
-            </a:solidFill>
-          </a:ln>
-        </p:spPr>
-        <p:style>
-          <a:lnRef idx="1">
-            <a:schemeClr val="accent1"/>
-          </a:lnRef>
-          <a:fillRef idx="3">
-            <a:schemeClr val="accent1"/>
-          </a:fillRef>
-          <a:effectRef idx="2">
-            <a:schemeClr val="accent1"/>
-          </a:effectRef>
-          <a:fontRef idx="minor">
-            <a:schemeClr val="lt1"/>
-          </a:fontRef>
-        </p:style>
-        <p:txBody>
-          <a:bodyPr rtlCol="0" anchor="ctr" wrap="square"/>
-          <a:lstStyle/>
-          <a:p>
-            <a:pPr algn="l"/>
-            <a:r>
-              <a:rPr sz="2600" b="1" i="0">
-                <a:solidFill>
-                  <a:srgbClr val="FFFFFF"/>
-                </a:solidFill>
-              </a:rPr>
-              <a:t>Verdict
-PASS</a:t>
-            </a:r>
-          </a:p>
-        </p:txBody>
-      </p:sp>
-      <p:sp>
-        <p:nvSpPr>
-          <p:cNvPr id="6" name="TextBox 5"/>
-          <p:cNvSpPr txBox="1"/>
-          <p:nvPr/>
-        </p:nvSpPr>
-        <p:spPr>
-          <a:xfrm>
-            <a:off x="640080" y="3657600"/>
-            <a:ext cx="10972800" cy="2560320"/>
-          </a:xfrm>
-          <a:prstGeom prst="rect">
-            <a:avLst/>
-          </a:prstGeom>
-          <a:noFill/>
-        </p:spPr>
-        <p:txBody>
-          <a:bodyPr wrap="square">
-            <a:spAutoFit/>
-          </a:bodyPr>
-          <a:lstStyle/>
-          <a:p>
-            <a:r>
-              <a:rPr sz="1700">
-                <a:solidFill>
-                  <a:srgbClr val="0B2E4F"/>
-                </a:solidFill>
-              </a:rPr>
-              <a:t>• Before RX-IRQ compensation:  median +10 005 µs  →  FAIL</a:t>
-            </a:r>
-          </a:p>
-          <a:p>
-            <a:r>
-              <a:rPr sz="1700">
-                <a:solidFill>
-                  <a:srgbClr val="0B2E4F"/>
-                </a:solidFill>
-              </a:rPr>
-              <a:t>• After the fix:  median +10 µs  →  inside the 100 µs product window</a:t>
-            </a:r>
-          </a:p>
-          <a:p>
-            <a:r>
-              <a:rPr sz="1700">
-                <a:solidFill>
-                  <a:srgbClr val="0B2E4F"/>
-                </a:solidFill>
-              </a:rPr>
-              <a:t>• Long-term (60 s) cross-board rate residual:  1.2 ppm</a:t>
-            </a:r>
-          </a:p>
-          <a:p>
-            <a:r>
-              <a:rPr sz="1700">
-                <a:solidFill>
-                  <a:srgbClr val="0B2E4F"/>
-                </a:solidFill>
-              </a:rPr>
-              <a:t>• MAD dominated by short-term drift-filter wander, not stack asymmetry</a:t>
-            </a:r>
-          </a:p>
-          <a:p>
-            <a:r>
-              <a:rPr sz="1700">
-                <a:solidFill>
-                  <a:srgbClr val="0B2E4F"/>
-                </a:solidFill>
-              </a:rPr>
-              <a:t>• Drift IIR raised from N=32 to N=128 → halved filter stddev</a:t>
+              <a:t>Results — Methodology</a:t>
+            </a:r>
+          </a:p>
+        </p:txBody>
+      </p:sp>
+      <p:sp>
+        <p:nvSpPr>
+          <p:cNvPr id="3" name="Content Placeholder 2"/>
+          <p:cNvSpPr>
+            <a:spLocks noGrp="1"/>
+          </p:cNvSpPr>
+          <p:nvPr>
+            <p:ph idx="13" sz="quarter"/>
+          </p:nvPr>
+        </p:nvSpPr>
+        <p:spPr/>
+        <p:txBody>
+          <a:bodyPr/>
+          <a:lstStyle/>
+          <a:p>
+            <a:pPr/>
+            <a:r>
+              <a:rPr sz="1800"/>
+              <a:t>Saleae Logic 8 — Ch0 = GM board PD10, Ch1 = Follower board PD10</a:t>
+            </a:r>
+          </a:p>
+          <a:p>
+            <a:pPr/>
+            <a:r>
+              <a:rPr sz="1800"/>
+              <a:t>cyclic_fire_hw_test.py orchestrates the full run:</a:t>
+            </a:r>
+          </a:p>
+          <a:p>
+            <a:pPr lvl="1"/>
+            <a:r>
+              <a:rPr sz="1600"/>
+              <a:t>Reset both boards → wait for FINE PTP state</a:t>
+            </a:r>
+          </a:p>
+          <a:p>
+            <a:pPr lvl="1"/>
+            <a:r>
+              <a:rPr sz="1600"/>
+              <a:t>Issue cyclic_start with a shared future anchor_ns</a:t>
+            </a:r>
+          </a:p>
+          <a:p>
+            <a:pPr lvl="1"/>
+            <a:r>
+              <a:rPr sz="1600"/>
+              <a:t>Capture ~0.7 s via the Logic 2 scripting socket</a:t>
+            </a:r>
+          </a:p>
+          <a:p>
+            <a:pPr lvl="1"/>
+            <a:r>
+              <a:rPr sz="1600"/>
+              <a:t>Extract rising edges, pair cross-board edges, compute delta distribution</a:t>
+            </a:r>
+          </a:p>
+          <a:p>
+            <a:pPr/>
+            <a:r>
+              <a:rPr sz="1800"/>
+              <a:t>Reported statistics: median, MAD, extrema, per-edge CSV dump</a:t>
+            </a:r>
+          </a:p>
+          <a:p>
+            <a:pPr/>
+            <a:r>
+              <a:rPr sz="1800"/>
+              <a:t>Pass gate:  |median| ≤ 50 µs  AND  MAD ≤ 50 µs    →    sum ≤ 100 µs window</a:t>
+            </a:r>
+          </a:p>
+          <a:p>
+            <a:pPr/>
+            <a:r>
+              <a:rPr sz="1800"/>
+              <a:t>Spot-check: Logic 2 cursor measurements cross-validated the script output</a:t>
             </a:r>
           </a:p>
         </p:txBody>
@@ -11490,6 +11875,280 @@
 </file>
 
 <file path=ppt/slides/slide31.xml><?xml version="1.0" encoding="utf-8"?>
+<p:sld xmlns:a="http://schemas.openxmlformats.org/drawingml/2006/main" xmlns:p="http://schemas.openxmlformats.org/presentationml/2006/main" xmlns:r="http://schemas.openxmlformats.org/officeDocument/2006/relationships">
+  <p:cSld>
+    <p:spTree>
+      <p:nvGrpSpPr>
+        <p:cNvPr id="1" name=""/>
+        <p:cNvGrpSpPr/>
+        <p:nvPr/>
+      </p:nvGrpSpPr>
+      <p:grpSpPr/>
+      <p:sp>
+        <p:nvSpPr>
+          <p:cNvPr id="2" name="Title 1"/>
+          <p:cNvSpPr>
+            <a:spLocks noGrp="1"/>
+          </p:cNvSpPr>
+          <p:nvPr>
+            <p:ph type="title"/>
+          </p:nvPr>
+        </p:nvSpPr>
+        <p:spPr/>
+        <p:txBody>
+          <a:bodyPr/>
+          <a:lstStyle/>
+          <a:p>
+            <a:r>
+              <a:t>Results — Measurement Summary</a:t>
+            </a:r>
+          </a:p>
+        </p:txBody>
+      </p:sp>
+      <p:sp>
+        <p:nvSpPr>
+          <p:cNvPr id="3" name="Rounded Rectangle 2"/>
+          <p:cNvSpPr/>
+          <p:nvPr/>
+        </p:nvSpPr>
+        <p:spPr>
+          <a:xfrm>
+            <a:off x="640080" y="1737360"/>
+            <a:ext cx="3383280" cy="1645920"/>
+          </a:xfrm>
+          <a:prstGeom prst="roundRect">
+            <a:avLst/>
+          </a:prstGeom>
+          <a:solidFill>
+            <a:srgbClr val="2CA02C"/>
+          </a:solidFill>
+          <a:ln>
+            <a:solidFill>
+              <a:srgbClr val="2CA02C"/>
+            </a:solidFill>
+          </a:ln>
+        </p:spPr>
+        <p:style>
+          <a:lnRef idx="1">
+            <a:schemeClr val="accent1"/>
+          </a:lnRef>
+          <a:fillRef idx="3">
+            <a:schemeClr val="accent1"/>
+          </a:fillRef>
+          <a:effectRef idx="2">
+            <a:schemeClr val="accent1"/>
+          </a:effectRef>
+          <a:fontRef idx="minor">
+            <a:schemeClr val="lt1"/>
+          </a:fontRef>
+        </p:style>
+        <p:txBody>
+          <a:bodyPr rtlCol="0" anchor="ctr" wrap="square"/>
+          <a:lstStyle/>
+          <a:p>
+            <a:pPr algn="l"/>
+            <a:r>
+              <a:rPr sz="2600" b="1" i="0">
+                <a:solidFill>
+                  <a:srgbClr val="FFFFFF"/>
+                </a:solidFill>
+              </a:rPr>
+              <a:t>Median
++10 µs</a:t>
+            </a:r>
+          </a:p>
+        </p:txBody>
+      </p:sp>
+      <p:sp>
+        <p:nvSpPr>
+          <p:cNvPr id="4" name="Rounded Rectangle 3"/>
+          <p:cNvSpPr/>
+          <p:nvPr/>
+        </p:nvSpPr>
+        <p:spPr>
+          <a:xfrm>
+            <a:off x="4297680" y="1737360"/>
+            <a:ext cx="3383280" cy="1645920"/>
+          </a:xfrm>
+          <a:prstGeom prst="roundRect">
+            <a:avLst/>
+          </a:prstGeom>
+          <a:solidFill>
+            <a:srgbClr val="1F77B4"/>
+          </a:solidFill>
+          <a:ln>
+            <a:solidFill>
+              <a:srgbClr val="1F77B4"/>
+            </a:solidFill>
+          </a:ln>
+        </p:spPr>
+        <p:style>
+          <a:lnRef idx="1">
+            <a:schemeClr val="accent1"/>
+          </a:lnRef>
+          <a:fillRef idx="3">
+            <a:schemeClr val="accent1"/>
+          </a:fillRef>
+          <a:effectRef idx="2">
+            <a:schemeClr val="accent1"/>
+          </a:effectRef>
+          <a:fontRef idx="minor">
+            <a:schemeClr val="lt1"/>
+          </a:fontRef>
+        </p:style>
+        <p:txBody>
+          <a:bodyPr rtlCol="0" anchor="ctr" wrap="square"/>
+          <a:lstStyle/>
+          <a:p>
+            <a:pPr algn="l"/>
+            <a:r>
+              <a:rPr sz="2600" b="1" i="0">
+                <a:solidFill>
+                  <a:srgbClr val="FFFFFF"/>
+                </a:solidFill>
+              </a:rPr>
+              <a:t>MAD
+38 µs</a:t>
+            </a:r>
+          </a:p>
+        </p:txBody>
+      </p:sp>
+      <p:sp>
+        <p:nvSpPr>
+          <p:cNvPr id="5" name="Rounded Rectangle 4"/>
+          <p:cNvSpPr/>
+          <p:nvPr/>
+        </p:nvSpPr>
+        <p:spPr>
+          <a:xfrm>
+            <a:off x="7955279" y="1737360"/>
+            <a:ext cx="3383280" cy="1645920"/>
+          </a:xfrm>
+          <a:prstGeom prst="roundRect">
+            <a:avLst/>
+          </a:prstGeom>
+          <a:solidFill>
+            <a:srgbClr val="2CA02C"/>
+          </a:solidFill>
+          <a:ln>
+            <a:solidFill>
+              <a:srgbClr val="2CA02C"/>
+            </a:solidFill>
+          </a:ln>
+        </p:spPr>
+        <p:style>
+          <a:lnRef idx="1">
+            <a:schemeClr val="accent1"/>
+          </a:lnRef>
+          <a:fillRef idx="3">
+            <a:schemeClr val="accent1"/>
+          </a:fillRef>
+          <a:effectRef idx="2">
+            <a:schemeClr val="accent1"/>
+          </a:effectRef>
+          <a:fontRef idx="minor">
+            <a:schemeClr val="lt1"/>
+          </a:fontRef>
+        </p:style>
+        <p:txBody>
+          <a:bodyPr rtlCol="0" anchor="ctr" wrap="square"/>
+          <a:lstStyle/>
+          <a:p>
+            <a:pPr algn="l"/>
+            <a:r>
+              <a:rPr sz="2600" b="1" i="0">
+                <a:solidFill>
+                  <a:srgbClr val="FFFFFF"/>
+                </a:solidFill>
+              </a:rPr>
+              <a:t>Verdict
+PASS</a:t>
+            </a:r>
+          </a:p>
+        </p:txBody>
+      </p:sp>
+      <p:sp>
+        <p:nvSpPr>
+          <p:cNvPr id="6" name="TextBox 5"/>
+          <p:cNvSpPr txBox="1"/>
+          <p:nvPr/>
+        </p:nvSpPr>
+        <p:spPr>
+          <a:xfrm>
+            <a:off x="640080" y="3657600"/>
+            <a:ext cx="10972800" cy="2560320"/>
+          </a:xfrm>
+          <a:prstGeom prst="rect">
+            <a:avLst/>
+          </a:prstGeom>
+          <a:noFill/>
+        </p:spPr>
+        <p:txBody>
+          <a:bodyPr wrap="square">
+            <a:spAutoFit/>
+          </a:bodyPr>
+          <a:lstStyle/>
+          <a:p>
+            <a:r>
+              <a:rPr sz="1700">
+                <a:solidFill>
+                  <a:srgbClr val="0B2E4F"/>
+                </a:solidFill>
+              </a:rPr>
+              <a:t>• Before RX-IRQ compensation:  median +10 005 µs  →  FAIL</a:t>
+            </a:r>
+          </a:p>
+          <a:p>
+            <a:r>
+              <a:rPr sz="1700">
+                <a:solidFill>
+                  <a:srgbClr val="0B2E4F"/>
+                </a:solidFill>
+              </a:rPr>
+              <a:t>• After the fix:  median +10 µs  →  inside the 100 µs product window</a:t>
+            </a:r>
+          </a:p>
+          <a:p>
+            <a:r>
+              <a:rPr sz="1700">
+                <a:solidFill>
+                  <a:srgbClr val="0B2E4F"/>
+                </a:solidFill>
+              </a:rPr>
+              <a:t>• Long-term (60 s) cross-board rate residual:  1.2 ppm</a:t>
+            </a:r>
+          </a:p>
+          <a:p>
+            <a:r>
+              <a:rPr sz="1700">
+                <a:solidFill>
+                  <a:srgbClr val="0B2E4F"/>
+                </a:solidFill>
+              </a:rPr>
+              <a:t>• MAD dominated by short-term drift-filter wander, not stack asymmetry</a:t>
+            </a:r>
+          </a:p>
+          <a:p>
+            <a:r>
+              <a:rPr sz="1700">
+                <a:solidFill>
+                  <a:srgbClr val="0B2E4F"/>
+                </a:solidFill>
+              </a:rPr>
+              <a:t>• Drift IIR raised from N=32 to N=128 → halved filter stddev</a:t>
+            </a:r>
+          </a:p>
+        </p:txBody>
+      </p:sp>
+    </p:spTree>
+  </p:cSld>
+  <p:clrMapOvr>
+    <a:masterClrMapping/>
+  </p:clrMapOvr>
+</p:sld>
+</file>
+
+<file path=ppt/slides/slide32.xml><?xml version="1.0" encoding="utf-8"?>
 <p:sld xmlns:a="http://schemas.openxmlformats.org/drawingml/2006/main" xmlns:p="http://schemas.openxmlformats.org/presentationml/2006/main" xmlns:r="http://schemas.openxmlformats.org/officeDocument/2006/relationships">
   <p:cSld>
     <p:spTree>
